--- a/开题提交/答辩ppt.pptx
+++ b/开题提交/答辩ppt.pptx
@@ -4,6 +4,9 @@
   <p:sldMasterIdLst>
     <p:sldMasterId id="2147483648" r:id="rId1"/>
   </p:sldMasterIdLst>
+  <p:notesMasterIdLst>
+    <p:notesMasterId r:id="rId13"/>
+  </p:notesMasterIdLst>
   <p:sldIdLst>
     <p:sldId id="256" r:id="rId2"/>
     <p:sldId id="257" r:id="rId3"/>
@@ -114,7 +117,472 @@
       </a:defRPr>
     </a:lvl9pPr>
   </p:defaultTextStyle>
+  <p:extLst>
+    <p:ext uri="{EFAFB233-063F-42B5-8137-9DF3F51BA10A}">
+      <p15:sldGuideLst xmlns:p15="http://schemas.microsoft.com/office/powerpoint/2012/main">
+        <p15:guide id="1" orient="horz" pos="2160" userDrawn="1">
+          <p15:clr>
+            <a:srgbClr val="A4A3A4"/>
+          </p15:clr>
+        </p15:guide>
+        <p15:guide id="2" pos="3840" userDrawn="1">
+          <p15:clr>
+            <a:srgbClr val="A4A3A4"/>
+          </p15:clr>
+        </p15:guide>
+      </p15:sldGuideLst>
+    </p:ext>
+  </p:extLst>
 </p:presentation>
+</file>
+
+<file path=ppt/notesMasters/notesMaster1.xml><?xml version="1.0" encoding="utf-8"?>
+<p:notesMaster xmlns:a="http://schemas.openxmlformats.org/drawingml/2006/main" xmlns:r="http://schemas.openxmlformats.org/officeDocument/2006/relationships" xmlns:p="http://schemas.openxmlformats.org/presentationml/2006/main">
+  <p:cSld>
+    <p:bg>
+      <p:bgRef idx="1001">
+        <a:schemeClr val="bg1"/>
+      </p:bgRef>
+    </p:bg>
+    <p:spTree>
+      <p:nvGrpSpPr>
+        <p:cNvPr id="1" name=""/>
+        <p:cNvGrpSpPr/>
+        <p:nvPr/>
+      </p:nvGrpSpPr>
+      <p:grpSpPr>
+        <a:xfrm>
+          <a:off x="0" y="0"/>
+          <a:ext cx="0" cy="0"/>
+          <a:chOff x="0" y="0"/>
+          <a:chExt cx="0" cy="0"/>
+        </a:xfrm>
+      </p:grpSpPr>
+      <p:sp>
+        <p:nvSpPr>
+          <p:cNvPr id="2" name="页眉占位符 1"/>
+          <p:cNvSpPr>
+            <a:spLocks noGrp="1"/>
+          </p:cNvSpPr>
+          <p:nvPr>
+            <p:ph type="hdr" sz="quarter"/>
+          </p:nvPr>
+        </p:nvSpPr>
+        <p:spPr>
+          <a:xfrm>
+            <a:off x="0" y="0"/>
+            <a:ext cx="2971800" cy="458788"/>
+          </a:xfrm>
+          <a:prstGeom prst="rect">
+            <a:avLst/>
+          </a:prstGeom>
+        </p:spPr>
+        <p:txBody>
+          <a:bodyPr vert="horz" lIns="91440" tIns="45720" rIns="91440" bIns="45720" rtlCol="0"/>
+          <a:lstStyle>
+            <a:lvl1pPr algn="l">
+              <a:defRPr sz="1200"/>
+            </a:lvl1pPr>
+          </a:lstStyle>
+          <a:p>
+            <a:endParaRPr lang="zh-CN" altLang="en-US"/>
+          </a:p>
+        </p:txBody>
+      </p:sp>
+      <p:sp>
+        <p:nvSpPr>
+          <p:cNvPr id="3" name="日期占位符 2"/>
+          <p:cNvSpPr>
+            <a:spLocks noGrp="1"/>
+          </p:cNvSpPr>
+          <p:nvPr>
+            <p:ph type="dt" idx="1"/>
+          </p:nvPr>
+        </p:nvSpPr>
+        <p:spPr>
+          <a:xfrm>
+            <a:off x="3884613" y="0"/>
+            <a:ext cx="2971800" cy="458788"/>
+          </a:xfrm>
+          <a:prstGeom prst="rect">
+            <a:avLst/>
+          </a:prstGeom>
+        </p:spPr>
+        <p:txBody>
+          <a:bodyPr vert="horz" lIns="91440" tIns="45720" rIns="91440" bIns="45720" rtlCol="0"/>
+          <a:lstStyle>
+            <a:lvl1pPr algn="r">
+              <a:defRPr sz="1200"/>
+            </a:lvl1pPr>
+          </a:lstStyle>
+          <a:p>
+            <a:fld id="{E6965D32-5B74-4B1A-932F-5518DF156731}" type="datetimeFigureOut">
+              <a:rPr lang="zh-CN" altLang="en-US" smtClean="0"/>
+              <a:t>2025/3/26</a:t>
+            </a:fld>
+            <a:endParaRPr lang="zh-CN" altLang="en-US"/>
+          </a:p>
+        </p:txBody>
+      </p:sp>
+      <p:sp>
+        <p:nvSpPr>
+          <p:cNvPr id="4" name="幻灯片图像占位符 3"/>
+          <p:cNvSpPr>
+            <a:spLocks noGrp="1" noRot="1" noChangeAspect="1"/>
+          </p:cNvSpPr>
+          <p:nvPr>
+            <p:ph type="sldImg" idx="2"/>
+          </p:nvPr>
+        </p:nvSpPr>
+        <p:spPr>
+          <a:xfrm>
+            <a:off x="685800" y="1143000"/>
+            <a:ext cx="5486400" cy="3086100"/>
+          </a:xfrm>
+          <a:prstGeom prst="rect">
+            <a:avLst/>
+          </a:prstGeom>
+          <a:noFill/>
+          <a:ln w="12700">
+            <a:solidFill>
+              <a:prstClr val="black"/>
+            </a:solidFill>
+          </a:ln>
+        </p:spPr>
+        <p:txBody>
+          <a:bodyPr vert="horz" lIns="91440" tIns="45720" rIns="91440" bIns="45720" rtlCol="0" anchor="ctr"/>
+          <a:lstStyle/>
+          <a:p>
+            <a:endParaRPr lang="zh-CN" altLang="en-US"/>
+          </a:p>
+        </p:txBody>
+      </p:sp>
+      <p:sp>
+        <p:nvSpPr>
+          <p:cNvPr id="5" name="备注占位符 4"/>
+          <p:cNvSpPr>
+            <a:spLocks noGrp="1"/>
+          </p:cNvSpPr>
+          <p:nvPr>
+            <p:ph type="body" sz="quarter" idx="3"/>
+          </p:nvPr>
+        </p:nvSpPr>
+        <p:spPr>
+          <a:xfrm>
+            <a:off x="685800" y="4400550"/>
+            <a:ext cx="5486400" cy="3600450"/>
+          </a:xfrm>
+          <a:prstGeom prst="rect">
+            <a:avLst/>
+          </a:prstGeom>
+        </p:spPr>
+        <p:txBody>
+          <a:bodyPr vert="horz" lIns="91440" tIns="45720" rIns="91440" bIns="45720" rtlCol="0"/>
+          <a:lstStyle/>
+          <a:p>
+            <a:pPr lvl="0"/>
+            <a:r>
+              <a:rPr lang="zh-CN" altLang="en-US"/>
+              <a:t>单击此处编辑母版文本样式</a:t>
+            </a:r>
+          </a:p>
+          <a:p>
+            <a:pPr lvl="1"/>
+            <a:r>
+              <a:rPr lang="zh-CN" altLang="en-US"/>
+              <a:t>二级</a:t>
+            </a:r>
+          </a:p>
+          <a:p>
+            <a:pPr lvl="2"/>
+            <a:r>
+              <a:rPr lang="zh-CN" altLang="en-US"/>
+              <a:t>三级</a:t>
+            </a:r>
+          </a:p>
+          <a:p>
+            <a:pPr lvl="3"/>
+            <a:r>
+              <a:rPr lang="zh-CN" altLang="en-US"/>
+              <a:t>四级</a:t>
+            </a:r>
+          </a:p>
+          <a:p>
+            <a:pPr lvl="4"/>
+            <a:r>
+              <a:rPr lang="zh-CN" altLang="en-US"/>
+              <a:t>五级</a:t>
+            </a:r>
+          </a:p>
+        </p:txBody>
+      </p:sp>
+      <p:sp>
+        <p:nvSpPr>
+          <p:cNvPr id="6" name="页脚占位符 5"/>
+          <p:cNvSpPr>
+            <a:spLocks noGrp="1"/>
+          </p:cNvSpPr>
+          <p:nvPr>
+            <p:ph type="ftr" sz="quarter" idx="4"/>
+          </p:nvPr>
+        </p:nvSpPr>
+        <p:spPr>
+          <a:xfrm>
+            <a:off x="0" y="8685213"/>
+            <a:ext cx="2971800" cy="458787"/>
+          </a:xfrm>
+          <a:prstGeom prst="rect">
+            <a:avLst/>
+          </a:prstGeom>
+        </p:spPr>
+        <p:txBody>
+          <a:bodyPr vert="horz" lIns="91440" tIns="45720" rIns="91440" bIns="45720" rtlCol="0" anchor="b"/>
+          <a:lstStyle>
+            <a:lvl1pPr algn="l">
+              <a:defRPr sz="1200"/>
+            </a:lvl1pPr>
+          </a:lstStyle>
+          <a:p>
+            <a:endParaRPr lang="zh-CN" altLang="en-US"/>
+          </a:p>
+        </p:txBody>
+      </p:sp>
+      <p:sp>
+        <p:nvSpPr>
+          <p:cNvPr id="7" name="灯片编号占位符 6"/>
+          <p:cNvSpPr>
+            <a:spLocks noGrp="1"/>
+          </p:cNvSpPr>
+          <p:nvPr>
+            <p:ph type="sldNum" sz="quarter" idx="5"/>
+          </p:nvPr>
+        </p:nvSpPr>
+        <p:spPr>
+          <a:xfrm>
+            <a:off x="3884613" y="8685213"/>
+            <a:ext cx="2971800" cy="458787"/>
+          </a:xfrm>
+          <a:prstGeom prst="rect">
+            <a:avLst/>
+          </a:prstGeom>
+        </p:spPr>
+        <p:txBody>
+          <a:bodyPr vert="horz" lIns="91440" tIns="45720" rIns="91440" bIns="45720" rtlCol="0" anchor="b"/>
+          <a:lstStyle>
+            <a:lvl1pPr algn="r">
+              <a:defRPr sz="1200"/>
+            </a:lvl1pPr>
+          </a:lstStyle>
+          <a:p>
+            <a:fld id="{55ED98B2-4531-4090-B022-1A0C526112B3}" type="slidenum">
+              <a:rPr lang="zh-CN" altLang="en-US" smtClean="0"/>
+              <a:t>‹#›</a:t>
+            </a:fld>
+            <a:endParaRPr lang="zh-CN" altLang="en-US"/>
+          </a:p>
+        </p:txBody>
+      </p:sp>
+    </p:spTree>
+    <p:extLst>
+      <p:ext uri="{BB962C8B-B14F-4D97-AF65-F5344CB8AC3E}">
+        <p14:creationId xmlns:p14="http://schemas.microsoft.com/office/powerpoint/2010/main" val="3297062739"/>
+      </p:ext>
+    </p:extLst>
+  </p:cSld>
+  <p:clrMap bg1="lt1" tx1="dk1" bg2="lt2" tx2="dk2" accent1="accent1" accent2="accent2" accent3="accent3" accent4="accent4" accent5="accent5" accent6="accent6" hlink="hlink" folHlink="folHlink"/>
+  <p:notesStyle>
+    <a:lvl1pPr marL="0" algn="l" defTabSz="914400" rtl="0" eaLnBrk="1" latinLnBrk="0" hangingPunct="1">
+      <a:defRPr sz="1200" kern="1200">
+        <a:solidFill>
+          <a:schemeClr val="tx1"/>
+        </a:solidFill>
+        <a:latin typeface="+mn-lt"/>
+        <a:ea typeface="+mn-ea"/>
+        <a:cs typeface="+mn-cs"/>
+      </a:defRPr>
+    </a:lvl1pPr>
+    <a:lvl2pPr marL="457200" algn="l" defTabSz="914400" rtl="0" eaLnBrk="1" latinLnBrk="0" hangingPunct="1">
+      <a:defRPr sz="1200" kern="1200">
+        <a:solidFill>
+          <a:schemeClr val="tx1"/>
+        </a:solidFill>
+        <a:latin typeface="+mn-lt"/>
+        <a:ea typeface="+mn-ea"/>
+        <a:cs typeface="+mn-cs"/>
+      </a:defRPr>
+    </a:lvl2pPr>
+    <a:lvl3pPr marL="914400" algn="l" defTabSz="914400" rtl="0" eaLnBrk="1" latinLnBrk="0" hangingPunct="1">
+      <a:defRPr sz="1200" kern="1200">
+        <a:solidFill>
+          <a:schemeClr val="tx1"/>
+        </a:solidFill>
+        <a:latin typeface="+mn-lt"/>
+        <a:ea typeface="+mn-ea"/>
+        <a:cs typeface="+mn-cs"/>
+      </a:defRPr>
+    </a:lvl3pPr>
+    <a:lvl4pPr marL="1371600" algn="l" defTabSz="914400" rtl="0" eaLnBrk="1" latinLnBrk="0" hangingPunct="1">
+      <a:defRPr sz="1200" kern="1200">
+        <a:solidFill>
+          <a:schemeClr val="tx1"/>
+        </a:solidFill>
+        <a:latin typeface="+mn-lt"/>
+        <a:ea typeface="+mn-ea"/>
+        <a:cs typeface="+mn-cs"/>
+      </a:defRPr>
+    </a:lvl4pPr>
+    <a:lvl5pPr marL="1828800" algn="l" defTabSz="914400" rtl="0" eaLnBrk="1" latinLnBrk="0" hangingPunct="1">
+      <a:defRPr sz="1200" kern="1200">
+        <a:solidFill>
+          <a:schemeClr val="tx1"/>
+        </a:solidFill>
+        <a:latin typeface="+mn-lt"/>
+        <a:ea typeface="+mn-ea"/>
+        <a:cs typeface="+mn-cs"/>
+      </a:defRPr>
+    </a:lvl5pPr>
+    <a:lvl6pPr marL="2286000" algn="l" defTabSz="914400" rtl="0" eaLnBrk="1" latinLnBrk="0" hangingPunct="1">
+      <a:defRPr sz="1200" kern="1200">
+        <a:solidFill>
+          <a:schemeClr val="tx1"/>
+        </a:solidFill>
+        <a:latin typeface="+mn-lt"/>
+        <a:ea typeface="+mn-ea"/>
+        <a:cs typeface="+mn-cs"/>
+      </a:defRPr>
+    </a:lvl6pPr>
+    <a:lvl7pPr marL="2743200" algn="l" defTabSz="914400" rtl="0" eaLnBrk="1" latinLnBrk="0" hangingPunct="1">
+      <a:defRPr sz="1200" kern="1200">
+        <a:solidFill>
+          <a:schemeClr val="tx1"/>
+        </a:solidFill>
+        <a:latin typeface="+mn-lt"/>
+        <a:ea typeface="+mn-ea"/>
+        <a:cs typeface="+mn-cs"/>
+      </a:defRPr>
+    </a:lvl7pPr>
+    <a:lvl8pPr marL="3200400" algn="l" defTabSz="914400" rtl="0" eaLnBrk="1" latinLnBrk="0" hangingPunct="1">
+      <a:defRPr sz="1200" kern="1200">
+        <a:solidFill>
+          <a:schemeClr val="tx1"/>
+        </a:solidFill>
+        <a:latin typeface="+mn-lt"/>
+        <a:ea typeface="+mn-ea"/>
+        <a:cs typeface="+mn-cs"/>
+      </a:defRPr>
+    </a:lvl8pPr>
+    <a:lvl9pPr marL="3657600" algn="l" defTabSz="914400" rtl="0" eaLnBrk="1" latinLnBrk="0" hangingPunct="1">
+      <a:defRPr sz="1200" kern="1200">
+        <a:solidFill>
+          <a:schemeClr val="tx1"/>
+        </a:solidFill>
+        <a:latin typeface="+mn-lt"/>
+        <a:ea typeface="+mn-ea"/>
+        <a:cs typeface="+mn-cs"/>
+      </a:defRPr>
+    </a:lvl9pPr>
+  </p:notesStyle>
+</p:notesMaster>
+</file>
+
+<file path=ppt/notesSlides/notesSlide1.xml><?xml version="1.0" encoding="utf-8"?>
+<p:notes xmlns:a="http://schemas.openxmlformats.org/drawingml/2006/main" xmlns:r="http://schemas.openxmlformats.org/officeDocument/2006/relationships" xmlns:p="http://schemas.openxmlformats.org/presentationml/2006/main">
+  <p:cSld>
+    <p:spTree>
+      <p:nvGrpSpPr>
+        <p:cNvPr id="1" name=""/>
+        <p:cNvGrpSpPr/>
+        <p:nvPr/>
+      </p:nvGrpSpPr>
+      <p:grpSpPr>
+        <a:xfrm>
+          <a:off x="0" y="0"/>
+          <a:ext cx="0" cy="0"/>
+          <a:chOff x="0" y="0"/>
+          <a:chExt cx="0" cy="0"/>
+        </a:xfrm>
+      </p:grpSpPr>
+      <p:sp>
+        <p:nvSpPr>
+          <p:cNvPr id="2" name="幻灯片图像占位符 1"/>
+          <p:cNvSpPr>
+            <a:spLocks noGrp="1" noRot="1" noChangeAspect="1"/>
+          </p:cNvSpPr>
+          <p:nvPr>
+            <p:ph type="sldImg"/>
+          </p:nvPr>
+        </p:nvSpPr>
+        <p:spPr/>
+      </p:sp>
+      <p:sp>
+        <p:nvSpPr>
+          <p:cNvPr id="3" name="备注占位符 2"/>
+          <p:cNvSpPr>
+            <a:spLocks noGrp="1"/>
+          </p:cNvSpPr>
+          <p:nvPr>
+            <p:ph type="body" idx="1"/>
+          </p:nvPr>
+        </p:nvSpPr>
+        <p:spPr/>
+        <p:txBody>
+          <a:bodyPr/>
+          <a:lstStyle/>
+          <a:p>
+            <a:r>
+              <a:rPr lang="zh-CN" altLang="en-US" dirty="0"/>
+              <a:t>药物</a:t>
+            </a:r>
+            <a:r>
+              <a:rPr lang="en-US" altLang="zh-CN" dirty="0"/>
+              <a:t>-</a:t>
+            </a:r>
+            <a:r>
+              <a:rPr lang="zh-CN" altLang="en-US" dirty="0"/>
+              <a:t>蛋白质相互作用集合</a:t>
+            </a:r>
+            <a:r>
+              <a:rPr lang="en-US" altLang="zh-CN" dirty="0"/>
+              <a:t>K</a:t>
+            </a:r>
+            <a:endParaRPr lang="zh-CN" altLang="en-US" dirty="0"/>
+          </a:p>
+        </p:txBody>
+      </p:sp>
+      <p:sp>
+        <p:nvSpPr>
+          <p:cNvPr id="4" name="灯片编号占位符 3"/>
+          <p:cNvSpPr>
+            <a:spLocks noGrp="1"/>
+          </p:cNvSpPr>
+          <p:nvPr>
+            <p:ph type="sldNum" sz="quarter" idx="5"/>
+          </p:nvPr>
+        </p:nvSpPr>
+        <p:spPr/>
+        <p:txBody>
+          <a:bodyPr/>
+          <a:lstStyle/>
+          <a:p>
+            <a:fld id="{55ED98B2-4531-4090-B022-1A0C526112B3}" type="slidenum">
+              <a:rPr lang="zh-CN" altLang="en-US" smtClean="0"/>
+              <a:t>8</a:t>
+            </a:fld>
+            <a:endParaRPr lang="zh-CN" altLang="en-US"/>
+          </a:p>
+        </p:txBody>
+      </p:sp>
+    </p:spTree>
+    <p:extLst>
+      <p:ext uri="{BB962C8B-B14F-4D97-AF65-F5344CB8AC3E}">
+        <p14:creationId xmlns:p14="http://schemas.microsoft.com/office/powerpoint/2010/main" val="398109261"/>
+      </p:ext>
+    </p:extLst>
+  </p:cSld>
+  <p:clrMapOvr>
+    <a:masterClrMapping/>
+  </p:clrMapOvr>
+</p:notes>
 </file>
 
 <file path=ppt/slideLayouts/slideLayout1.xml><?xml version="1.0" encoding="utf-8"?>
@@ -264,7 +732,7 @@
           <a:p>
             <a:fld id="{F70356BD-5833-427C-A982-3EFD493748C6}" type="datetimeFigureOut">
               <a:rPr lang="zh-CN" altLang="en-US" smtClean="0"/>
-              <a:t>2025/3/25</a:t>
+              <a:t>2025/3/26</a:t>
             </a:fld>
             <a:endParaRPr lang="zh-CN" altLang="en-US"/>
           </a:p>
@@ -462,7 +930,7 @@
           <a:p>
             <a:fld id="{F70356BD-5833-427C-A982-3EFD493748C6}" type="datetimeFigureOut">
               <a:rPr lang="zh-CN" altLang="en-US" smtClean="0"/>
-              <a:t>2025/3/25</a:t>
+              <a:t>2025/3/26</a:t>
             </a:fld>
             <a:endParaRPr lang="zh-CN" altLang="en-US"/>
           </a:p>
@@ -670,7 +1138,7 @@
           <a:p>
             <a:fld id="{F70356BD-5833-427C-A982-3EFD493748C6}" type="datetimeFigureOut">
               <a:rPr lang="zh-CN" altLang="en-US" smtClean="0"/>
-              <a:t>2025/3/25</a:t>
+              <a:t>2025/3/26</a:t>
             </a:fld>
             <a:endParaRPr lang="zh-CN" altLang="en-US"/>
           </a:p>
@@ -868,7 +1336,7 @@
           <a:p>
             <a:fld id="{F70356BD-5833-427C-A982-3EFD493748C6}" type="datetimeFigureOut">
               <a:rPr lang="zh-CN" altLang="en-US" smtClean="0"/>
-              <a:t>2025/3/25</a:t>
+              <a:t>2025/3/26</a:t>
             </a:fld>
             <a:endParaRPr lang="zh-CN" altLang="en-US"/>
           </a:p>
@@ -1143,7 +1611,7 @@
           <a:p>
             <a:fld id="{F70356BD-5833-427C-A982-3EFD493748C6}" type="datetimeFigureOut">
               <a:rPr lang="zh-CN" altLang="en-US" smtClean="0"/>
-              <a:t>2025/3/25</a:t>
+              <a:t>2025/3/26</a:t>
             </a:fld>
             <a:endParaRPr lang="zh-CN" altLang="en-US"/>
           </a:p>
@@ -1408,7 +1876,7 @@
           <a:p>
             <a:fld id="{F70356BD-5833-427C-A982-3EFD493748C6}" type="datetimeFigureOut">
               <a:rPr lang="zh-CN" altLang="en-US" smtClean="0"/>
-              <a:t>2025/3/25</a:t>
+              <a:t>2025/3/26</a:t>
             </a:fld>
             <a:endParaRPr lang="zh-CN" altLang="en-US"/>
           </a:p>
@@ -1820,7 +2288,7 @@
           <a:p>
             <a:fld id="{F70356BD-5833-427C-A982-3EFD493748C6}" type="datetimeFigureOut">
               <a:rPr lang="zh-CN" altLang="en-US" smtClean="0"/>
-              <a:t>2025/3/25</a:t>
+              <a:t>2025/3/26</a:t>
             </a:fld>
             <a:endParaRPr lang="zh-CN" altLang="en-US"/>
           </a:p>
@@ -1961,7 +2429,7 @@
           <a:p>
             <a:fld id="{F70356BD-5833-427C-A982-3EFD493748C6}" type="datetimeFigureOut">
               <a:rPr lang="zh-CN" altLang="en-US" smtClean="0"/>
-              <a:t>2025/3/25</a:t>
+              <a:t>2025/3/26</a:t>
             </a:fld>
             <a:endParaRPr lang="zh-CN" altLang="en-US"/>
           </a:p>
@@ -2074,7 +2542,7 @@
           <a:p>
             <a:fld id="{F70356BD-5833-427C-A982-3EFD493748C6}" type="datetimeFigureOut">
               <a:rPr lang="zh-CN" altLang="en-US" smtClean="0"/>
-              <a:t>2025/3/25</a:t>
+              <a:t>2025/3/26</a:t>
             </a:fld>
             <a:endParaRPr lang="zh-CN" altLang="en-US"/>
           </a:p>
@@ -2385,7 +2853,7 @@
           <a:p>
             <a:fld id="{F70356BD-5833-427C-A982-3EFD493748C6}" type="datetimeFigureOut">
               <a:rPr lang="zh-CN" altLang="en-US" smtClean="0"/>
-              <a:t>2025/3/25</a:t>
+              <a:t>2025/3/26</a:t>
             </a:fld>
             <a:endParaRPr lang="zh-CN" altLang="en-US"/>
           </a:p>
@@ -2673,7 +3141,7 @@
           <a:p>
             <a:fld id="{F70356BD-5833-427C-A982-3EFD493748C6}" type="datetimeFigureOut">
               <a:rPr lang="zh-CN" altLang="en-US" smtClean="0"/>
-              <a:t>2025/3/25</a:t>
+              <a:t>2025/3/26</a:t>
             </a:fld>
             <a:endParaRPr lang="zh-CN" altLang="en-US"/>
           </a:p>
@@ -2914,7 +3382,7 @@
           <a:p>
             <a:fld id="{F70356BD-5833-427C-A982-3EFD493748C6}" type="datetimeFigureOut">
               <a:rPr lang="zh-CN" altLang="en-US" smtClean="0"/>
-              <a:t>2025/3/25</a:t>
+              <a:t>2025/3/26</a:t>
             </a:fld>
             <a:endParaRPr lang="zh-CN" altLang="en-US"/>
           </a:p>
@@ -4489,8 +4957,238 @@
               </a:spcBef>
             </a:pPr>
             <a:r>
-              <a:rPr lang="zh-CN" altLang="en-US" sz="2000"/>
+              <a:rPr lang="zh-CN" altLang="en-US" sz="2000" dirty="0"/>
               <a:t>样本数据处理</a:t>
+            </a:r>
+            <a:endParaRPr lang="en-US" altLang="zh-CN" sz="2000" dirty="0"/>
+          </a:p>
+          <a:p>
+            <a:pPr algn="l">
+              <a:lnSpc>
+                <a:spcPct val="100000"/>
+              </a:lnSpc>
+              <a:spcBef>
+                <a:spcPts val="0"/>
+              </a:spcBef>
+            </a:pPr>
+            <a:r>
+              <a:rPr lang="en-US" altLang="zh-CN" sz="2000" dirty="0"/>
+              <a:t>(1)</a:t>
+            </a:r>
+            <a:r>
+              <a:rPr lang="zh-CN" altLang="zh-CN" sz="1800" dirty="0">
+                <a:effectLst/>
+                <a:ea typeface="宋体" panose="02010600030101010101" pitchFamily="2" charset="-122"/>
+                <a:cs typeface="Times New Roman" panose="02020603050405020304" pitchFamily="18" charset="0"/>
+              </a:rPr>
+              <a:t>负样本的定义并不统一。当前一些方法将未知的药物</a:t>
+            </a:r>
+            <a:r>
+              <a:rPr lang="en-US" altLang="zh-CN" sz="1800" dirty="0">
+                <a:effectLst/>
+                <a:ea typeface="宋体" panose="02010600030101010101" pitchFamily="2" charset="-122"/>
+                <a:cs typeface="Times New Roman" panose="02020603050405020304" pitchFamily="18" charset="0"/>
+              </a:rPr>
+              <a:t>- </a:t>
+            </a:r>
+            <a:r>
+              <a:rPr lang="zh-CN" altLang="zh-CN" sz="1800" dirty="0">
+                <a:effectLst/>
+                <a:ea typeface="宋体" panose="02010600030101010101" pitchFamily="2" charset="-122"/>
+                <a:cs typeface="Times New Roman" panose="02020603050405020304" pitchFamily="18" charset="0"/>
+              </a:rPr>
+              <a:t>靶点相互作用直接训练为负样本，然而实际上，湿实验未排除的药物</a:t>
+            </a:r>
+            <a:r>
+              <a:rPr lang="en-US" altLang="zh-CN" sz="1800" dirty="0">
+                <a:effectLst/>
+                <a:ea typeface="宋体" panose="02010600030101010101" pitchFamily="2" charset="-122"/>
+                <a:cs typeface="Times New Roman" panose="02020603050405020304" pitchFamily="18" charset="0"/>
+              </a:rPr>
+              <a:t>- </a:t>
+            </a:r>
+            <a:r>
+              <a:rPr lang="zh-CN" altLang="zh-CN" sz="1800" dirty="0">
+                <a:effectLst/>
+                <a:ea typeface="宋体" panose="02010600030101010101" pitchFamily="2" charset="-122"/>
+                <a:cs typeface="Times New Roman" panose="02020603050405020304" pitchFamily="18" charset="0"/>
+              </a:rPr>
+              <a:t>靶点关系很可能仅仅由于存在隐藏的相互作用而未被检测到。</a:t>
+            </a:r>
+            <a:endParaRPr lang="en-US" altLang="zh-CN" sz="1800" dirty="0">
+              <a:effectLst/>
+              <a:ea typeface="宋体" panose="02010600030101010101" pitchFamily="2" charset="-122"/>
+              <a:cs typeface="Times New Roman" panose="02020603050405020304" pitchFamily="18" charset="0"/>
+            </a:endParaRPr>
+          </a:p>
+          <a:p>
+            <a:pPr algn="l">
+              <a:lnSpc>
+                <a:spcPct val="100000"/>
+              </a:lnSpc>
+              <a:spcBef>
+                <a:spcPts val="0"/>
+              </a:spcBef>
+            </a:pPr>
+            <a:r>
+              <a:rPr lang="zh-CN" altLang="zh-CN" sz="1800" dirty="0">
+                <a:effectLst/>
+                <a:ea typeface="宋体" panose="02010600030101010101" pitchFamily="2" charset="-122"/>
+                <a:cs typeface="Times New Roman" panose="02020603050405020304" pitchFamily="18" charset="0"/>
+              </a:rPr>
+              <a:t>在</a:t>
+            </a:r>
+            <a:r>
+              <a:rPr lang="en-US" altLang="zh-CN" sz="1800" dirty="0">
+                <a:effectLst/>
+                <a:ea typeface="宋体" panose="02010600030101010101" pitchFamily="2" charset="-122"/>
+                <a:cs typeface="Times New Roman" panose="02020603050405020304" pitchFamily="18" charset="0"/>
+              </a:rPr>
+              <a:t>DTI</a:t>
+            </a:r>
+            <a:r>
+              <a:rPr lang="zh-CN" altLang="zh-CN" sz="1800" dirty="0">
+                <a:effectLst/>
+                <a:ea typeface="宋体" panose="02010600030101010101" pitchFamily="2" charset="-122"/>
+                <a:cs typeface="Times New Roman" panose="02020603050405020304" pitchFamily="18" charset="0"/>
+              </a:rPr>
+              <a:t>预测中，</a:t>
+            </a:r>
+            <a:r>
+              <a:rPr lang="en-US" altLang="zh-CN" sz="1800" dirty="0">
+                <a:effectLst/>
+                <a:ea typeface="宋体" panose="02010600030101010101" pitchFamily="2" charset="-122"/>
+                <a:cs typeface="Times New Roman" panose="02020603050405020304" pitchFamily="18" charset="0"/>
+              </a:rPr>
+              <a:t>“</a:t>
+            </a:r>
+            <a:r>
+              <a:rPr lang="zh-CN" altLang="zh-CN" sz="1800" dirty="0">
+                <a:effectLst/>
+                <a:ea typeface="宋体" panose="02010600030101010101" pitchFamily="2" charset="-122"/>
+                <a:cs typeface="Times New Roman" panose="02020603050405020304" pitchFamily="18" charset="0"/>
+              </a:rPr>
+              <a:t>负样本</a:t>
+            </a:r>
+            <a:r>
+              <a:rPr lang="en-US" altLang="zh-CN" sz="1800" dirty="0">
+                <a:effectLst/>
+                <a:ea typeface="宋体" panose="02010600030101010101" pitchFamily="2" charset="-122"/>
+                <a:cs typeface="Times New Roman" panose="02020603050405020304" pitchFamily="18" charset="0"/>
+              </a:rPr>
+              <a:t>”</a:t>
+            </a:r>
+            <a:r>
+              <a:rPr lang="zh-CN" altLang="zh-CN" sz="1800" dirty="0">
+                <a:effectLst/>
+                <a:ea typeface="宋体" panose="02010600030101010101" pitchFamily="2" charset="-122"/>
+                <a:cs typeface="Times New Roman" panose="02020603050405020304" pitchFamily="18" charset="0"/>
+              </a:rPr>
+              <a:t>通常指无相互作用的药物</a:t>
+            </a:r>
+            <a:r>
+              <a:rPr lang="en-US" altLang="zh-CN" sz="1800" dirty="0">
+                <a:effectLst/>
+                <a:ea typeface="宋体" panose="02010600030101010101" pitchFamily="2" charset="-122"/>
+                <a:cs typeface="Times New Roman" panose="02020603050405020304" pitchFamily="18" charset="0"/>
+              </a:rPr>
+              <a:t>-</a:t>
+            </a:r>
+            <a:r>
+              <a:rPr lang="zh-CN" altLang="zh-CN" sz="1800" dirty="0">
+                <a:effectLst/>
+                <a:ea typeface="宋体" panose="02010600030101010101" pitchFamily="2" charset="-122"/>
+                <a:cs typeface="Times New Roman" panose="02020603050405020304" pitchFamily="18" charset="0"/>
+              </a:rPr>
+              <a:t>蛋白组合。然而现实中很难明确哪些药物</a:t>
+            </a:r>
+            <a:r>
+              <a:rPr lang="en-US" altLang="zh-CN" sz="1800" dirty="0">
+                <a:effectLst/>
+                <a:ea typeface="宋体" panose="02010600030101010101" pitchFamily="2" charset="-122"/>
+                <a:cs typeface="Times New Roman" panose="02020603050405020304" pitchFamily="18" charset="0"/>
+              </a:rPr>
+              <a:t>-</a:t>
+            </a:r>
+            <a:r>
+              <a:rPr lang="zh-CN" altLang="zh-CN" sz="1800" dirty="0">
+                <a:effectLst/>
+                <a:ea typeface="宋体" panose="02010600030101010101" pitchFamily="2" charset="-122"/>
+                <a:cs typeface="Times New Roman" panose="02020603050405020304" pitchFamily="18" charset="0"/>
+              </a:rPr>
+              <a:t>靶点确实不相互作用，导致负样本的定义缺乏统一标准。许多研究往往将未经验证的任意药物</a:t>
+            </a:r>
+            <a:r>
+              <a:rPr lang="en-US" altLang="zh-CN" sz="1800" dirty="0">
+                <a:effectLst/>
+                <a:ea typeface="宋体" panose="02010600030101010101" pitchFamily="2" charset="-122"/>
+                <a:cs typeface="Times New Roman" panose="02020603050405020304" pitchFamily="18" charset="0"/>
+              </a:rPr>
+              <a:t>-</a:t>
+            </a:r>
+            <a:r>
+              <a:rPr lang="zh-CN" altLang="zh-CN" sz="1800" dirty="0">
+                <a:effectLst/>
+                <a:ea typeface="宋体" panose="02010600030101010101" pitchFamily="2" charset="-122"/>
+                <a:cs typeface="Times New Roman" panose="02020603050405020304" pitchFamily="18" charset="0"/>
+              </a:rPr>
+              <a:t>靶点对当作负样本，这可能把尚未被发现的真实相互作用错标为负例。结果是训练数据中混入错误标签，模型学习受到干扰。此外，正负样本数量常极不平衡（真实相互作用很少，假定无作用的对非常多），负样本选择不当会加剧类别不平衡问题</a:t>
+            </a:r>
+            <a:r>
+              <a:rPr lang="en-US" altLang="zh-CN" sz="1800" dirty="0">
+                <a:effectLst/>
+                <a:latin typeface="Times New Roman" panose="02020603050405020304" pitchFamily="18" charset="0"/>
+                <a:ea typeface="宋体" panose="02010600030101010101" pitchFamily="2" charset="-122"/>
+              </a:rPr>
+              <a:t>​</a:t>
+            </a:r>
+            <a:r>
+              <a:rPr lang="en-US" altLang="zh-CN" sz="1800" dirty="0">
+                <a:effectLst/>
+                <a:latin typeface="Times New Roman" panose="02020603050405020304" pitchFamily="18" charset="0"/>
+                <a:ea typeface="等线" panose="02010600030101010101" pitchFamily="2" charset="-122"/>
+              </a:rPr>
+              <a:t>[86]</a:t>
+            </a:r>
+            <a:r>
+              <a:rPr lang="zh-CN" altLang="zh-CN" sz="1800" dirty="0">
+                <a:effectLst/>
+                <a:ea typeface="宋体" panose="02010600030101010101" pitchFamily="2" charset="-122"/>
+                <a:cs typeface="Times New Roman" panose="02020603050405020304" pitchFamily="18" charset="0"/>
+              </a:rPr>
+              <a:t>。这些因素会导致模型性能下降：要么错将潜在相互作用当负样本忽略掉，要么模型偏向预测</a:t>
+            </a:r>
+            <a:r>
+              <a:rPr lang="en-US" altLang="zh-CN" sz="1800" dirty="0">
+                <a:effectLst/>
+                <a:ea typeface="宋体" panose="02010600030101010101" pitchFamily="2" charset="-122"/>
+                <a:cs typeface="Times New Roman" panose="02020603050405020304" pitchFamily="18" charset="0"/>
+              </a:rPr>
+              <a:t>“</a:t>
+            </a:r>
+            <a:r>
+              <a:rPr lang="zh-CN" altLang="zh-CN" sz="1800" dirty="0">
+                <a:effectLst/>
+                <a:ea typeface="宋体" panose="02010600030101010101" pitchFamily="2" charset="-122"/>
+                <a:cs typeface="Times New Roman" panose="02020603050405020304" pitchFamily="18" charset="0"/>
+              </a:rPr>
+              <a:t>大多数</a:t>
+            </a:r>
+            <a:r>
+              <a:rPr lang="en-US" altLang="zh-CN" sz="1800" dirty="0">
+                <a:effectLst/>
+                <a:ea typeface="宋体" panose="02010600030101010101" pitchFamily="2" charset="-122"/>
+                <a:cs typeface="Times New Roman" panose="02020603050405020304" pitchFamily="18" charset="0"/>
+              </a:rPr>
+              <a:t>”</a:t>
+            </a:r>
+            <a:r>
+              <a:rPr lang="zh-CN" altLang="zh-CN" sz="1800">
+                <a:effectLst/>
+                <a:ea typeface="宋体" panose="02010600030101010101" pitchFamily="2" charset="-122"/>
+                <a:cs typeface="Times New Roman" panose="02020603050405020304" pitchFamily="18" charset="0"/>
+              </a:rPr>
+              <a:t>的负类，难以识别少数正类</a:t>
             </a:r>
             <a:endParaRPr lang="zh-CN" altLang="en-US" sz="2000" dirty="0"/>
           </a:p>
@@ -4550,7 +5248,7 @@
         </p:nvSpPr>
         <p:spPr>
           <a:xfrm>
-            <a:off x="145366" y="137625"/>
+            <a:off x="-143471" y="-53608"/>
             <a:ext cx="1641231" cy="425083"/>
           </a:xfrm>
         </p:spPr>
@@ -4591,21 +5289,5676 @@
         </p:nvSpPr>
         <p:spPr>
           <a:xfrm>
-            <a:off x="464234" y="815926"/>
-            <a:ext cx="11422966" cy="5767754"/>
+            <a:off x="0" y="371475"/>
+            <a:ext cx="11887200" cy="295009"/>
           </a:xfrm>
         </p:spPr>
         <p:txBody>
           <a:bodyPr>
-            <a:normAutofit/>
+            <a:normAutofit fontScale="85000" lnSpcReduction="20000"/>
           </a:bodyPr>
           <a:lstStyle/>
           <a:p>
             <a:pPr algn="just"/>
-            <a:endParaRPr lang="zh-CN" altLang="en-US" sz="2000" dirty="0"/>
-          </a:p>
-        </p:txBody>
-      </p:sp>
+            <a:r>
+              <a:rPr lang="zh-CN" altLang="en-US" sz="2000" dirty="0"/>
+              <a:t>负样本筛选</a:t>
+            </a:r>
+          </a:p>
+        </p:txBody>
+      </p:sp>
+      <p:sp>
+        <p:nvSpPr>
+          <p:cNvPr id="4" name="流程图: 磁盘 3">
+            <a:extLst>
+              <a:ext uri="{FF2B5EF4-FFF2-40B4-BE49-F238E27FC236}">
+                <a16:creationId xmlns:a16="http://schemas.microsoft.com/office/drawing/2014/main" id="{EB26F505-46F6-0C1B-1FBE-20915228A4A8}"/>
+              </a:ext>
+            </a:extLst>
+          </p:cNvPr>
+          <p:cNvSpPr/>
+          <p:nvPr/>
+        </p:nvSpPr>
+        <p:spPr>
+          <a:xfrm>
+            <a:off x="391877" y="1409160"/>
+            <a:ext cx="570539" cy="235671"/>
+          </a:xfrm>
+          <a:prstGeom prst="flowChartMagneticDisk">
+            <a:avLst/>
+          </a:prstGeom>
+        </p:spPr>
+        <p:style>
+          <a:lnRef idx="2">
+            <a:schemeClr val="accent1">
+              <a:shade val="15000"/>
+            </a:schemeClr>
+          </a:lnRef>
+          <a:fillRef idx="1">
+            <a:schemeClr val="accent1"/>
+          </a:fillRef>
+          <a:effectRef idx="0">
+            <a:schemeClr val="accent1"/>
+          </a:effectRef>
+          <a:fontRef idx="minor">
+            <a:schemeClr val="lt1"/>
+          </a:fontRef>
+        </p:style>
+        <p:txBody>
+          <a:bodyPr rtlCol="0" anchor="ctr"/>
+          <a:lstStyle/>
+          <a:p>
+            <a:pPr algn="ctr"/>
+            <a:endParaRPr lang="zh-CN" altLang="en-US"/>
+          </a:p>
+        </p:txBody>
+      </p:sp>
+      <p:sp>
+        <p:nvSpPr>
+          <p:cNvPr id="5" name="文本框 4">
+            <a:extLst>
+              <a:ext uri="{FF2B5EF4-FFF2-40B4-BE49-F238E27FC236}">
+                <a16:creationId xmlns:a16="http://schemas.microsoft.com/office/drawing/2014/main" id="{EB60FE71-5F3C-071F-A991-7DD4C538D3A9}"/>
+              </a:ext>
+            </a:extLst>
+          </p:cNvPr>
+          <p:cNvSpPr txBox="1"/>
+          <p:nvPr/>
+        </p:nvSpPr>
+        <p:spPr>
+          <a:xfrm>
+            <a:off x="377992" y="1704170"/>
+            <a:ext cx="542136" cy="261610"/>
+          </a:xfrm>
+          <a:prstGeom prst="rect">
+            <a:avLst/>
+          </a:prstGeom>
+          <a:noFill/>
+        </p:spPr>
+        <p:txBody>
+          <a:bodyPr wrap="none" rtlCol="0">
+            <a:spAutoFit/>
+          </a:bodyPr>
+          <a:lstStyle/>
+          <a:p>
+            <a:r>
+              <a:rPr lang="en-US" altLang="zh-CN" sz="1100" dirty="0"/>
+              <a:t>PFAM</a:t>
+            </a:r>
+          </a:p>
+        </p:txBody>
+      </p:sp>
+      <p:sp>
+        <p:nvSpPr>
+          <p:cNvPr id="6" name="流程图: 磁盘 5">
+            <a:extLst>
+              <a:ext uri="{FF2B5EF4-FFF2-40B4-BE49-F238E27FC236}">
+                <a16:creationId xmlns:a16="http://schemas.microsoft.com/office/drawing/2014/main" id="{7446C4BF-04E1-37BC-617C-A4CF0540F7F9}"/>
+              </a:ext>
+            </a:extLst>
+          </p:cNvPr>
+          <p:cNvSpPr/>
+          <p:nvPr/>
+        </p:nvSpPr>
+        <p:spPr>
+          <a:xfrm>
+            <a:off x="1181799" y="1409160"/>
+            <a:ext cx="570539" cy="235671"/>
+          </a:xfrm>
+          <a:prstGeom prst="flowChartMagneticDisk">
+            <a:avLst/>
+          </a:prstGeom>
+        </p:spPr>
+        <p:style>
+          <a:lnRef idx="2">
+            <a:schemeClr val="accent1">
+              <a:shade val="15000"/>
+            </a:schemeClr>
+          </a:lnRef>
+          <a:fillRef idx="1">
+            <a:schemeClr val="accent1"/>
+          </a:fillRef>
+          <a:effectRef idx="0">
+            <a:schemeClr val="accent1"/>
+          </a:effectRef>
+          <a:fontRef idx="minor">
+            <a:schemeClr val="lt1"/>
+          </a:fontRef>
+        </p:style>
+        <p:txBody>
+          <a:bodyPr rtlCol="0" anchor="ctr"/>
+          <a:lstStyle/>
+          <a:p>
+            <a:pPr algn="ctr"/>
+            <a:endParaRPr lang="zh-CN" altLang="en-US"/>
+          </a:p>
+        </p:txBody>
+      </p:sp>
+      <p:sp>
+        <p:nvSpPr>
+          <p:cNvPr id="7" name="文本框 6">
+            <a:extLst>
+              <a:ext uri="{FF2B5EF4-FFF2-40B4-BE49-F238E27FC236}">
+                <a16:creationId xmlns:a16="http://schemas.microsoft.com/office/drawing/2014/main" id="{17463301-926E-6264-9343-494DF5D84B51}"/>
+              </a:ext>
+            </a:extLst>
+          </p:cNvPr>
+          <p:cNvSpPr txBox="1"/>
+          <p:nvPr/>
+        </p:nvSpPr>
+        <p:spPr>
+          <a:xfrm>
+            <a:off x="990963" y="871383"/>
+            <a:ext cx="954107" cy="276999"/>
+          </a:xfrm>
+          <a:prstGeom prst="rect">
+            <a:avLst/>
+          </a:prstGeom>
+          <a:noFill/>
+        </p:spPr>
+        <p:txBody>
+          <a:bodyPr wrap="none" rtlCol="0">
+            <a:spAutoFit/>
+          </a:bodyPr>
+          <a:lstStyle/>
+          <a:p>
+            <a:r>
+              <a:rPr lang="zh-CN" altLang="en-US" sz="1200" dirty="0"/>
+              <a:t>蛋白质数据</a:t>
+            </a:r>
+            <a:endParaRPr lang="en-US" altLang="zh-CN" sz="1200" dirty="0"/>
+          </a:p>
+        </p:txBody>
+      </p:sp>
+      <p:sp>
+        <p:nvSpPr>
+          <p:cNvPr id="8" name="流程图: 磁盘 7">
+            <a:extLst>
+              <a:ext uri="{FF2B5EF4-FFF2-40B4-BE49-F238E27FC236}">
+                <a16:creationId xmlns:a16="http://schemas.microsoft.com/office/drawing/2014/main" id="{ADD3B483-8780-430A-EAC4-270DC2E8C59C}"/>
+              </a:ext>
+            </a:extLst>
+          </p:cNvPr>
+          <p:cNvSpPr/>
+          <p:nvPr/>
+        </p:nvSpPr>
+        <p:spPr>
+          <a:xfrm>
+            <a:off x="2022521" y="1409160"/>
+            <a:ext cx="570539" cy="235671"/>
+          </a:xfrm>
+          <a:prstGeom prst="flowChartMagneticDisk">
+            <a:avLst/>
+          </a:prstGeom>
+        </p:spPr>
+        <p:style>
+          <a:lnRef idx="2">
+            <a:schemeClr val="accent1">
+              <a:shade val="15000"/>
+            </a:schemeClr>
+          </a:lnRef>
+          <a:fillRef idx="1">
+            <a:schemeClr val="accent1"/>
+          </a:fillRef>
+          <a:effectRef idx="0">
+            <a:schemeClr val="accent1"/>
+          </a:effectRef>
+          <a:fontRef idx="minor">
+            <a:schemeClr val="lt1"/>
+          </a:fontRef>
+        </p:style>
+        <p:txBody>
+          <a:bodyPr rtlCol="0" anchor="ctr"/>
+          <a:lstStyle/>
+          <a:p>
+            <a:pPr algn="ctr"/>
+            <a:endParaRPr lang="zh-CN" altLang="en-US"/>
+          </a:p>
+        </p:txBody>
+      </p:sp>
+      <p:sp>
+        <p:nvSpPr>
+          <p:cNvPr id="9" name="文本框 8">
+            <a:extLst>
+              <a:ext uri="{FF2B5EF4-FFF2-40B4-BE49-F238E27FC236}">
+                <a16:creationId xmlns:a16="http://schemas.microsoft.com/office/drawing/2014/main" id="{D745C5D3-9B85-C5BB-B5FE-2813F29AC97A}"/>
+              </a:ext>
+            </a:extLst>
+          </p:cNvPr>
+          <p:cNvSpPr txBox="1"/>
+          <p:nvPr/>
+        </p:nvSpPr>
+        <p:spPr>
+          <a:xfrm>
+            <a:off x="2122940" y="1704170"/>
+            <a:ext cx="388248" cy="261610"/>
+          </a:xfrm>
+          <a:prstGeom prst="rect">
+            <a:avLst/>
+          </a:prstGeom>
+          <a:noFill/>
+        </p:spPr>
+        <p:txBody>
+          <a:bodyPr wrap="none" rtlCol="0">
+            <a:spAutoFit/>
+          </a:bodyPr>
+          <a:lstStyle/>
+          <a:p>
+            <a:r>
+              <a:rPr lang="en-US" altLang="zh-CN" sz="1100" dirty="0"/>
+              <a:t>GO</a:t>
+            </a:r>
+          </a:p>
+        </p:txBody>
+      </p:sp>
+      <p:sp>
+        <p:nvSpPr>
+          <p:cNvPr id="10" name="文本框 9">
+            <a:extLst>
+              <a:ext uri="{FF2B5EF4-FFF2-40B4-BE49-F238E27FC236}">
+                <a16:creationId xmlns:a16="http://schemas.microsoft.com/office/drawing/2014/main" id="{10F83C01-A8D7-362E-2270-560763BD94C8}"/>
+              </a:ext>
+            </a:extLst>
+          </p:cNvPr>
+          <p:cNvSpPr txBox="1"/>
+          <p:nvPr/>
+        </p:nvSpPr>
+        <p:spPr>
+          <a:xfrm>
+            <a:off x="1185855" y="1698808"/>
+            <a:ext cx="527709" cy="261610"/>
+          </a:xfrm>
+          <a:prstGeom prst="rect">
+            <a:avLst/>
+          </a:prstGeom>
+          <a:noFill/>
+        </p:spPr>
+        <p:txBody>
+          <a:bodyPr wrap="none" rtlCol="0">
+            <a:spAutoFit/>
+          </a:bodyPr>
+          <a:lstStyle/>
+          <a:p>
+            <a:r>
+              <a:rPr lang="en-US" altLang="zh-CN" sz="1100" dirty="0"/>
+              <a:t>UCSC</a:t>
+            </a:r>
+          </a:p>
+        </p:txBody>
+      </p:sp>
+      <p:sp>
+        <p:nvSpPr>
+          <p:cNvPr id="11" name="流程图: 磁盘 10">
+            <a:extLst>
+              <a:ext uri="{FF2B5EF4-FFF2-40B4-BE49-F238E27FC236}">
+                <a16:creationId xmlns:a16="http://schemas.microsoft.com/office/drawing/2014/main" id="{03BC2603-B3E6-70B9-42BC-CCEB9D991AF8}"/>
+              </a:ext>
+            </a:extLst>
+          </p:cNvPr>
+          <p:cNvSpPr/>
+          <p:nvPr/>
+        </p:nvSpPr>
+        <p:spPr>
+          <a:xfrm>
+            <a:off x="3263671" y="1403798"/>
+            <a:ext cx="570539" cy="235671"/>
+          </a:xfrm>
+          <a:prstGeom prst="flowChartMagneticDisk">
+            <a:avLst/>
+          </a:prstGeom>
+        </p:spPr>
+        <p:style>
+          <a:lnRef idx="2">
+            <a:schemeClr val="accent1">
+              <a:shade val="15000"/>
+            </a:schemeClr>
+          </a:lnRef>
+          <a:fillRef idx="1">
+            <a:schemeClr val="accent1"/>
+          </a:fillRef>
+          <a:effectRef idx="0">
+            <a:schemeClr val="accent1"/>
+          </a:effectRef>
+          <a:fontRef idx="minor">
+            <a:schemeClr val="lt1"/>
+          </a:fontRef>
+        </p:style>
+        <p:txBody>
+          <a:bodyPr rtlCol="0" anchor="ctr"/>
+          <a:lstStyle/>
+          <a:p>
+            <a:pPr algn="ctr"/>
+            <a:endParaRPr lang="zh-CN" altLang="en-US"/>
+          </a:p>
+        </p:txBody>
+      </p:sp>
+      <p:sp>
+        <p:nvSpPr>
+          <p:cNvPr id="12" name="文本框 11">
+            <a:extLst>
+              <a:ext uri="{FF2B5EF4-FFF2-40B4-BE49-F238E27FC236}">
+                <a16:creationId xmlns:a16="http://schemas.microsoft.com/office/drawing/2014/main" id="{08A06520-F478-ADEA-D8D1-D2F24E5A477B}"/>
+              </a:ext>
+            </a:extLst>
+          </p:cNvPr>
+          <p:cNvSpPr txBox="1"/>
+          <p:nvPr/>
+        </p:nvSpPr>
+        <p:spPr>
+          <a:xfrm>
+            <a:off x="3192634" y="1698808"/>
+            <a:ext cx="625492" cy="261610"/>
+          </a:xfrm>
+          <a:prstGeom prst="rect">
+            <a:avLst/>
+          </a:prstGeom>
+          <a:noFill/>
+        </p:spPr>
+        <p:txBody>
+          <a:bodyPr wrap="none" rtlCol="0">
+            <a:spAutoFit/>
+          </a:bodyPr>
+          <a:lstStyle/>
+          <a:p>
+            <a:r>
+              <a:rPr lang="en-US" altLang="zh-CN" sz="1100" dirty="0"/>
+              <a:t>STITCH</a:t>
+            </a:r>
+          </a:p>
+        </p:txBody>
+      </p:sp>
+      <p:sp>
+        <p:nvSpPr>
+          <p:cNvPr id="13" name="流程图: 磁盘 12">
+            <a:extLst>
+              <a:ext uri="{FF2B5EF4-FFF2-40B4-BE49-F238E27FC236}">
+                <a16:creationId xmlns:a16="http://schemas.microsoft.com/office/drawing/2014/main" id="{D59B15B1-D695-5DE3-3545-CC9E94DC37FC}"/>
+              </a:ext>
+            </a:extLst>
+          </p:cNvPr>
+          <p:cNvSpPr/>
+          <p:nvPr/>
+        </p:nvSpPr>
+        <p:spPr>
+          <a:xfrm>
+            <a:off x="4158368" y="1403798"/>
+            <a:ext cx="570539" cy="235671"/>
+          </a:xfrm>
+          <a:prstGeom prst="flowChartMagneticDisk">
+            <a:avLst/>
+          </a:prstGeom>
+        </p:spPr>
+        <p:style>
+          <a:lnRef idx="2">
+            <a:schemeClr val="accent1">
+              <a:shade val="15000"/>
+            </a:schemeClr>
+          </a:lnRef>
+          <a:fillRef idx="1">
+            <a:schemeClr val="accent1"/>
+          </a:fillRef>
+          <a:effectRef idx="0">
+            <a:schemeClr val="accent1"/>
+          </a:effectRef>
+          <a:fontRef idx="minor">
+            <a:schemeClr val="lt1"/>
+          </a:fontRef>
+        </p:style>
+        <p:txBody>
+          <a:bodyPr rtlCol="0" anchor="ctr"/>
+          <a:lstStyle/>
+          <a:p>
+            <a:pPr algn="ctr"/>
+            <a:endParaRPr lang="zh-CN" altLang="en-US"/>
+          </a:p>
+        </p:txBody>
+      </p:sp>
+      <p:sp>
+        <p:nvSpPr>
+          <p:cNvPr id="14" name="文本框 13">
+            <a:extLst>
+              <a:ext uri="{FF2B5EF4-FFF2-40B4-BE49-F238E27FC236}">
+                <a16:creationId xmlns:a16="http://schemas.microsoft.com/office/drawing/2014/main" id="{0EC43D40-8D99-AA41-8286-DB25D1A65B60}"/>
+              </a:ext>
+            </a:extLst>
+          </p:cNvPr>
+          <p:cNvSpPr txBox="1"/>
+          <p:nvPr/>
+        </p:nvSpPr>
+        <p:spPr>
+          <a:xfrm>
+            <a:off x="3746764" y="900285"/>
+            <a:ext cx="1107996" cy="276999"/>
+          </a:xfrm>
+          <a:prstGeom prst="rect">
+            <a:avLst/>
+          </a:prstGeom>
+          <a:noFill/>
+        </p:spPr>
+        <p:txBody>
+          <a:bodyPr wrap="none" rtlCol="0">
+            <a:spAutoFit/>
+          </a:bodyPr>
+          <a:lstStyle/>
+          <a:p>
+            <a:r>
+              <a:rPr lang="zh-CN" altLang="en-US" sz="1200" dirty="0"/>
+              <a:t>相互作用数据</a:t>
+            </a:r>
+            <a:endParaRPr lang="en-US" altLang="zh-CN" sz="1200" dirty="0"/>
+          </a:p>
+        </p:txBody>
+      </p:sp>
+      <p:sp>
+        <p:nvSpPr>
+          <p:cNvPr id="15" name="流程图: 磁盘 14">
+            <a:extLst>
+              <a:ext uri="{FF2B5EF4-FFF2-40B4-BE49-F238E27FC236}">
+                <a16:creationId xmlns:a16="http://schemas.microsoft.com/office/drawing/2014/main" id="{A4C9434A-CEB4-D17F-E0F6-1785EB4F4510}"/>
+              </a:ext>
+            </a:extLst>
+          </p:cNvPr>
+          <p:cNvSpPr/>
+          <p:nvPr/>
+        </p:nvSpPr>
+        <p:spPr>
+          <a:xfrm>
+            <a:off x="4976865" y="1394273"/>
+            <a:ext cx="570539" cy="235671"/>
+          </a:xfrm>
+          <a:prstGeom prst="flowChartMagneticDisk">
+            <a:avLst/>
+          </a:prstGeom>
+        </p:spPr>
+        <p:style>
+          <a:lnRef idx="2">
+            <a:schemeClr val="accent1">
+              <a:shade val="15000"/>
+            </a:schemeClr>
+          </a:lnRef>
+          <a:fillRef idx="1">
+            <a:schemeClr val="accent1"/>
+          </a:fillRef>
+          <a:effectRef idx="0">
+            <a:schemeClr val="accent1"/>
+          </a:effectRef>
+          <a:fontRef idx="minor">
+            <a:schemeClr val="lt1"/>
+          </a:fontRef>
+        </p:style>
+        <p:txBody>
+          <a:bodyPr rtlCol="0" anchor="ctr"/>
+          <a:lstStyle/>
+          <a:p>
+            <a:pPr algn="ctr"/>
+            <a:endParaRPr lang="zh-CN" altLang="en-US"/>
+          </a:p>
+        </p:txBody>
+      </p:sp>
+      <p:sp>
+        <p:nvSpPr>
+          <p:cNvPr id="16" name="文本框 15">
+            <a:extLst>
+              <a:ext uri="{FF2B5EF4-FFF2-40B4-BE49-F238E27FC236}">
+                <a16:creationId xmlns:a16="http://schemas.microsoft.com/office/drawing/2014/main" id="{80102C24-C993-D3BD-B9CE-D12A4B44CDDF}"/>
+              </a:ext>
+            </a:extLst>
+          </p:cNvPr>
+          <p:cNvSpPr txBox="1"/>
+          <p:nvPr/>
+        </p:nvSpPr>
+        <p:spPr>
+          <a:xfrm>
+            <a:off x="4862966" y="1698808"/>
+            <a:ext cx="780983" cy="261610"/>
+          </a:xfrm>
+          <a:prstGeom prst="rect">
+            <a:avLst/>
+          </a:prstGeom>
+          <a:noFill/>
+        </p:spPr>
+        <p:txBody>
+          <a:bodyPr wrap="none" rtlCol="0">
+            <a:spAutoFit/>
+          </a:bodyPr>
+          <a:lstStyle/>
+          <a:p>
+            <a:r>
+              <a:rPr lang="en-US" altLang="zh-CN" sz="1100" dirty="0" err="1"/>
+              <a:t>DrugBank</a:t>
+            </a:r>
+            <a:endParaRPr lang="en-US" altLang="zh-CN" sz="1100" dirty="0"/>
+          </a:p>
+        </p:txBody>
+      </p:sp>
+      <p:sp>
+        <p:nvSpPr>
+          <p:cNvPr id="17" name="文本框 16">
+            <a:extLst>
+              <a:ext uri="{FF2B5EF4-FFF2-40B4-BE49-F238E27FC236}">
+                <a16:creationId xmlns:a16="http://schemas.microsoft.com/office/drawing/2014/main" id="{5F2352B7-88FC-3BFF-5981-62D06B70CFA2}"/>
+              </a:ext>
+            </a:extLst>
+          </p:cNvPr>
+          <p:cNvSpPr txBox="1"/>
+          <p:nvPr/>
+        </p:nvSpPr>
+        <p:spPr>
+          <a:xfrm>
+            <a:off x="4076696" y="1693446"/>
+            <a:ext cx="702436" cy="261610"/>
+          </a:xfrm>
+          <a:prstGeom prst="rect">
+            <a:avLst/>
+          </a:prstGeom>
+          <a:noFill/>
+        </p:spPr>
+        <p:txBody>
+          <a:bodyPr wrap="none" rtlCol="0">
+            <a:spAutoFit/>
+          </a:bodyPr>
+          <a:lstStyle/>
+          <a:p>
+            <a:r>
+              <a:rPr lang="en-US" altLang="zh-CN" sz="1100" dirty="0"/>
+              <a:t>Matador</a:t>
+            </a:r>
+          </a:p>
+        </p:txBody>
+      </p:sp>
+      <p:sp>
+        <p:nvSpPr>
+          <p:cNvPr id="18" name="流程图: 可选过程 17">
+            <a:extLst>
+              <a:ext uri="{FF2B5EF4-FFF2-40B4-BE49-F238E27FC236}">
+                <a16:creationId xmlns:a16="http://schemas.microsoft.com/office/drawing/2014/main" id="{17AAD993-2252-B234-FDB9-179C117A9ACB}"/>
+              </a:ext>
+            </a:extLst>
+          </p:cNvPr>
+          <p:cNvSpPr/>
+          <p:nvPr/>
+        </p:nvSpPr>
+        <p:spPr>
+          <a:xfrm>
+            <a:off x="274399" y="2371725"/>
+            <a:ext cx="751822" cy="369332"/>
+          </a:xfrm>
+          <a:prstGeom prst="flowChartAlternateProcess">
+            <a:avLst/>
+          </a:prstGeom>
+        </p:spPr>
+        <p:style>
+          <a:lnRef idx="2">
+            <a:schemeClr val="accent1">
+              <a:shade val="15000"/>
+            </a:schemeClr>
+          </a:lnRef>
+          <a:fillRef idx="1">
+            <a:schemeClr val="accent1"/>
+          </a:fillRef>
+          <a:effectRef idx="0">
+            <a:schemeClr val="accent1"/>
+          </a:effectRef>
+          <a:fontRef idx="minor">
+            <a:schemeClr val="lt1"/>
+          </a:fontRef>
+        </p:style>
+        <p:txBody>
+          <a:bodyPr rtlCol="0" anchor="ctr"/>
+          <a:lstStyle/>
+          <a:p>
+            <a:pPr algn="ctr"/>
+            <a:r>
+              <a:rPr lang="zh-CN" altLang="en-US" sz="1200" dirty="0"/>
+              <a:t>领域相似性</a:t>
+            </a:r>
+          </a:p>
+        </p:txBody>
+      </p:sp>
+      <p:sp>
+        <p:nvSpPr>
+          <p:cNvPr id="19" name="流程图: 可选过程 18">
+            <a:extLst>
+              <a:ext uri="{FF2B5EF4-FFF2-40B4-BE49-F238E27FC236}">
+                <a16:creationId xmlns:a16="http://schemas.microsoft.com/office/drawing/2014/main" id="{F252B0F5-D757-8B9C-8574-6489FBA4118E}"/>
+              </a:ext>
+            </a:extLst>
+          </p:cNvPr>
+          <p:cNvSpPr/>
+          <p:nvPr/>
+        </p:nvSpPr>
+        <p:spPr>
+          <a:xfrm>
+            <a:off x="1066706" y="2384425"/>
+            <a:ext cx="751822" cy="369332"/>
+          </a:xfrm>
+          <a:prstGeom prst="flowChartAlternateProcess">
+            <a:avLst/>
+          </a:prstGeom>
+        </p:spPr>
+        <p:style>
+          <a:lnRef idx="2">
+            <a:schemeClr val="accent1">
+              <a:shade val="15000"/>
+            </a:schemeClr>
+          </a:lnRef>
+          <a:fillRef idx="1">
+            <a:schemeClr val="accent1"/>
+          </a:fillRef>
+          <a:effectRef idx="0">
+            <a:schemeClr val="accent1"/>
+          </a:effectRef>
+          <a:fontRef idx="minor">
+            <a:schemeClr val="lt1"/>
+          </a:fontRef>
+        </p:style>
+        <p:txBody>
+          <a:bodyPr rtlCol="0" anchor="ctr"/>
+          <a:lstStyle/>
+          <a:p>
+            <a:pPr algn="ctr"/>
+            <a:r>
+              <a:rPr lang="zh-CN" altLang="en-US" sz="1200" dirty="0"/>
+              <a:t>序列相似性</a:t>
+            </a:r>
+          </a:p>
+        </p:txBody>
+      </p:sp>
+      <p:sp>
+        <p:nvSpPr>
+          <p:cNvPr id="20" name="流程图: 可选过程 19">
+            <a:extLst>
+              <a:ext uri="{FF2B5EF4-FFF2-40B4-BE49-F238E27FC236}">
+                <a16:creationId xmlns:a16="http://schemas.microsoft.com/office/drawing/2014/main" id="{AD7BE6B9-0B12-9BB0-C619-CECFB80DEF3B}"/>
+              </a:ext>
+            </a:extLst>
+          </p:cNvPr>
+          <p:cNvSpPr/>
+          <p:nvPr/>
+        </p:nvSpPr>
+        <p:spPr>
+          <a:xfrm>
+            <a:off x="1935213" y="2369582"/>
+            <a:ext cx="751822" cy="369332"/>
+          </a:xfrm>
+          <a:prstGeom prst="flowChartAlternateProcess">
+            <a:avLst/>
+          </a:prstGeom>
+        </p:spPr>
+        <p:style>
+          <a:lnRef idx="2">
+            <a:schemeClr val="accent1">
+              <a:shade val="15000"/>
+            </a:schemeClr>
+          </a:lnRef>
+          <a:fillRef idx="1">
+            <a:schemeClr val="accent1"/>
+          </a:fillRef>
+          <a:effectRef idx="0">
+            <a:schemeClr val="accent1"/>
+          </a:effectRef>
+          <a:fontRef idx="minor">
+            <a:schemeClr val="lt1"/>
+          </a:fontRef>
+        </p:style>
+        <p:txBody>
+          <a:bodyPr rtlCol="0" anchor="ctr"/>
+          <a:lstStyle/>
+          <a:p>
+            <a:pPr algn="ctr"/>
+            <a:r>
+              <a:rPr lang="zh-CN" altLang="en-US" sz="1200" dirty="0"/>
+              <a:t>注释相似性</a:t>
+            </a:r>
+          </a:p>
+        </p:txBody>
+      </p:sp>
+      <p:sp>
+        <p:nvSpPr>
+          <p:cNvPr id="21" name="流程图: 过程 20">
+            <a:extLst>
+              <a:ext uri="{FF2B5EF4-FFF2-40B4-BE49-F238E27FC236}">
+                <a16:creationId xmlns:a16="http://schemas.microsoft.com/office/drawing/2014/main" id="{5AA5A8A1-540C-1F7D-51B4-66CD229C7CD7}"/>
+              </a:ext>
+            </a:extLst>
+          </p:cNvPr>
+          <p:cNvSpPr/>
+          <p:nvPr/>
+        </p:nvSpPr>
+        <p:spPr>
+          <a:xfrm>
+            <a:off x="928671" y="3094333"/>
+            <a:ext cx="1050554" cy="369332"/>
+          </a:xfrm>
+          <a:prstGeom prst="flowChartProcess">
+            <a:avLst/>
+          </a:prstGeom>
+        </p:spPr>
+        <p:style>
+          <a:lnRef idx="2">
+            <a:schemeClr val="accent1">
+              <a:shade val="15000"/>
+            </a:schemeClr>
+          </a:lnRef>
+          <a:fillRef idx="1">
+            <a:schemeClr val="accent1"/>
+          </a:fillRef>
+          <a:effectRef idx="0">
+            <a:schemeClr val="accent1"/>
+          </a:effectRef>
+          <a:fontRef idx="minor">
+            <a:schemeClr val="lt1"/>
+          </a:fontRef>
+        </p:style>
+        <p:txBody>
+          <a:bodyPr rtlCol="0" anchor="ctr"/>
+          <a:lstStyle/>
+          <a:p>
+            <a:pPr algn="ctr"/>
+            <a:r>
+              <a:rPr lang="zh-CN" altLang="en-US" sz="1100" dirty="0"/>
+              <a:t>蛋白质</a:t>
+            </a:r>
+            <a:r>
+              <a:rPr lang="en-US" altLang="zh-CN" sz="1100" dirty="0"/>
+              <a:t>-</a:t>
+            </a:r>
+            <a:r>
+              <a:rPr lang="zh-CN" altLang="en-US" sz="1100" dirty="0"/>
+              <a:t>蛋白质相似性</a:t>
+            </a:r>
+          </a:p>
+        </p:txBody>
+      </p:sp>
+      <p:sp>
+        <p:nvSpPr>
+          <p:cNvPr id="22" name="流程图: 过程 21">
+            <a:extLst>
+              <a:ext uri="{FF2B5EF4-FFF2-40B4-BE49-F238E27FC236}">
+                <a16:creationId xmlns:a16="http://schemas.microsoft.com/office/drawing/2014/main" id="{5B22877A-13DC-767C-5012-76381F3C203C}"/>
+              </a:ext>
+            </a:extLst>
+          </p:cNvPr>
+          <p:cNvSpPr/>
+          <p:nvPr/>
+        </p:nvSpPr>
+        <p:spPr>
+          <a:xfrm>
+            <a:off x="928671" y="3802653"/>
+            <a:ext cx="1050554" cy="369332"/>
+          </a:xfrm>
+          <a:prstGeom prst="flowChartProcess">
+            <a:avLst/>
+          </a:prstGeom>
+        </p:spPr>
+        <p:style>
+          <a:lnRef idx="2">
+            <a:schemeClr val="accent1">
+              <a:shade val="15000"/>
+            </a:schemeClr>
+          </a:lnRef>
+          <a:fillRef idx="1">
+            <a:schemeClr val="accent1"/>
+          </a:fillRef>
+          <a:effectRef idx="0">
+            <a:schemeClr val="accent1"/>
+          </a:effectRef>
+          <a:fontRef idx="minor">
+            <a:schemeClr val="lt1"/>
+          </a:fontRef>
+        </p:style>
+        <p:txBody>
+          <a:bodyPr rtlCol="0" anchor="ctr"/>
+          <a:lstStyle/>
+          <a:p>
+            <a:pPr algn="ctr"/>
+            <a:r>
+              <a:rPr lang="zh-CN" altLang="en-US" sz="1100" dirty="0"/>
+              <a:t>药物</a:t>
+            </a:r>
+            <a:r>
+              <a:rPr lang="en-US" altLang="zh-CN" sz="1100" dirty="0"/>
+              <a:t>-</a:t>
+            </a:r>
+            <a:r>
+              <a:rPr lang="zh-CN" altLang="en-US" sz="1100" dirty="0"/>
+              <a:t>药物相似性</a:t>
+            </a:r>
+          </a:p>
+        </p:txBody>
+      </p:sp>
+      <p:sp>
+        <p:nvSpPr>
+          <p:cNvPr id="23" name="流程图: 可选过程 22">
+            <a:extLst>
+              <a:ext uri="{FF2B5EF4-FFF2-40B4-BE49-F238E27FC236}">
+                <a16:creationId xmlns:a16="http://schemas.microsoft.com/office/drawing/2014/main" id="{C0FAAF1C-3272-C882-BAE4-E1EBDB71DDBE}"/>
+              </a:ext>
+            </a:extLst>
+          </p:cNvPr>
+          <p:cNvSpPr/>
+          <p:nvPr/>
+        </p:nvSpPr>
+        <p:spPr>
+          <a:xfrm>
+            <a:off x="431449" y="4543835"/>
+            <a:ext cx="751822" cy="369332"/>
+          </a:xfrm>
+          <a:prstGeom prst="flowChartAlternateProcess">
+            <a:avLst/>
+          </a:prstGeom>
+        </p:spPr>
+        <p:style>
+          <a:lnRef idx="2">
+            <a:schemeClr val="accent1">
+              <a:shade val="15000"/>
+            </a:schemeClr>
+          </a:lnRef>
+          <a:fillRef idx="1">
+            <a:schemeClr val="accent1"/>
+          </a:fillRef>
+          <a:effectRef idx="0">
+            <a:schemeClr val="accent1"/>
+          </a:effectRef>
+          <a:fontRef idx="minor">
+            <a:schemeClr val="lt1"/>
+          </a:fontRef>
+        </p:style>
+        <p:txBody>
+          <a:bodyPr rtlCol="0" anchor="ctr"/>
+          <a:lstStyle/>
+          <a:p>
+            <a:pPr algn="ctr"/>
+            <a:r>
+              <a:rPr lang="zh-CN" altLang="en-US" sz="1200" dirty="0"/>
+              <a:t>结构相似性</a:t>
+            </a:r>
+          </a:p>
+        </p:txBody>
+      </p:sp>
+      <p:sp>
+        <p:nvSpPr>
+          <p:cNvPr id="24" name="流程图: 可选过程 23">
+            <a:extLst>
+              <a:ext uri="{FF2B5EF4-FFF2-40B4-BE49-F238E27FC236}">
+                <a16:creationId xmlns:a16="http://schemas.microsoft.com/office/drawing/2014/main" id="{8D32C367-2A05-4537-B152-2D41D327DF4B}"/>
+              </a:ext>
+            </a:extLst>
+          </p:cNvPr>
+          <p:cNvSpPr/>
+          <p:nvPr/>
+        </p:nvSpPr>
+        <p:spPr>
+          <a:xfrm>
+            <a:off x="1603314" y="4543835"/>
+            <a:ext cx="751822" cy="369332"/>
+          </a:xfrm>
+          <a:prstGeom prst="flowChartAlternateProcess">
+            <a:avLst/>
+          </a:prstGeom>
+        </p:spPr>
+        <p:style>
+          <a:lnRef idx="2">
+            <a:schemeClr val="accent1">
+              <a:shade val="15000"/>
+            </a:schemeClr>
+          </a:lnRef>
+          <a:fillRef idx="1">
+            <a:schemeClr val="accent1"/>
+          </a:fillRef>
+          <a:effectRef idx="0">
+            <a:schemeClr val="accent1"/>
+          </a:effectRef>
+          <a:fontRef idx="minor">
+            <a:schemeClr val="lt1"/>
+          </a:fontRef>
+        </p:style>
+        <p:txBody>
+          <a:bodyPr rtlCol="0" anchor="ctr"/>
+          <a:lstStyle/>
+          <a:p>
+            <a:pPr algn="ctr"/>
+            <a:r>
+              <a:rPr lang="zh-CN" altLang="en-US" sz="1200" dirty="0"/>
+              <a:t>副作用相似性</a:t>
+            </a:r>
+          </a:p>
+        </p:txBody>
+      </p:sp>
+      <p:sp>
+        <p:nvSpPr>
+          <p:cNvPr id="25" name="流程图: 磁盘 24">
+            <a:extLst>
+              <a:ext uri="{FF2B5EF4-FFF2-40B4-BE49-F238E27FC236}">
+                <a16:creationId xmlns:a16="http://schemas.microsoft.com/office/drawing/2014/main" id="{8AC36749-899D-68E1-8CAB-06919DA37C38}"/>
+              </a:ext>
+            </a:extLst>
+          </p:cNvPr>
+          <p:cNvSpPr/>
+          <p:nvPr/>
+        </p:nvSpPr>
+        <p:spPr>
+          <a:xfrm>
+            <a:off x="511626" y="5562242"/>
+            <a:ext cx="570539" cy="235671"/>
+          </a:xfrm>
+          <a:prstGeom prst="flowChartMagneticDisk">
+            <a:avLst/>
+          </a:prstGeom>
+        </p:spPr>
+        <p:style>
+          <a:lnRef idx="2">
+            <a:schemeClr val="accent1">
+              <a:shade val="15000"/>
+            </a:schemeClr>
+          </a:lnRef>
+          <a:fillRef idx="1">
+            <a:schemeClr val="accent1"/>
+          </a:fillRef>
+          <a:effectRef idx="0">
+            <a:schemeClr val="accent1"/>
+          </a:effectRef>
+          <a:fontRef idx="minor">
+            <a:schemeClr val="lt1"/>
+          </a:fontRef>
+        </p:style>
+        <p:txBody>
+          <a:bodyPr rtlCol="0" anchor="ctr"/>
+          <a:lstStyle/>
+          <a:p>
+            <a:pPr algn="ctr"/>
+            <a:endParaRPr lang="zh-CN" altLang="en-US"/>
+          </a:p>
+        </p:txBody>
+      </p:sp>
+      <p:sp>
+        <p:nvSpPr>
+          <p:cNvPr id="26" name="文本框 25">
+            <a:extLst>
+              <a:ext uri="{FF2B5EF4-FFF2-40B4-BE49-F238E27FC236}">
+                <a16:creationId xmlns:a16="http://schemas.microsoft.com/office/drawing/2014/main" id="{3E8324E4-E277-7D58-82D4-20F18931D379}"/>
+              </a:ext>
+            </a:extLst>
+          </p:cNvPr>
+          <p:cNvSpPr txBox="1"/>
+          <p:nvPr/>
+        </p:nvSpPr>
+        <p:spPr>
+          <a:xfrm>
+            <a:off x="426301" y="5857252"/>
+            <a:ext cx="776175" cy="261610"/>
+          </a:xfrm>
+          <a:prstGeom prst="rect">
+            <a:avLst/>
+          </a:prstGeom>
+          <a:noFill/>
+        </p:spPr>
+        <p:txBody>
+          <a:bodyPr wrap="none" rtlCol="0">
+            <a:spAutoFit/>
+          </a:bodyPr>
+          <a:lstStyle/>
+          <a:p>
+            <a:r>
+              <a:rPr lang="en-US" altLang="zh-CN" sz="1100" dirty="0"/>
+              <a:t>PubChem</a:t>
+            </a:r>
+          </a:p>
+        </p:txBody>
+      </p:sp>
+      <p:sp>
+        <p:nvSpPr>
+          <p:cNvPr id="27" name="流程图: 磁盘 26">
+            <a:extLst>
+              <a:ext uri="{FF2B5EF4-FFF2-40B4-BE49-F238E27FC236}">
+                <a16:creationId xmlns:a16="http://schemas.microsoft.com/office/drawing/2014/main" id="{0F03E1E6-7A11-0676-C008-CD80A379C5E1}"/>
+              </a:ext>
+            </a:extLst>
+          </p:cNvPr>
+          <p:cNvSpPr/>
+          <p:nvPr/>
+        </p:nvSpPr>
+        <p:spPr>
+          <a:xfrm>
+            <a:off x="1695248" y="5562242"/>
+            <a:ext cx="570539" cy="235671"/>
+          </a:xfrm>
+          <a:prstGeom prst="flowChartMagneticDisk">
+            <a:avLst/>
+          </a:prstGeom>
+        </p:spPr>
+        <p:style>
+          <a:lnRef idx="2">
+            <a:schemeClr val="accent1">
+              <a:shade val="15000"/>
+            </a:schemeClr>
+          </a:lnRef>
+          <a:fillRef idx="1">
+            <a:schemeClr val="accent1"/>
+          </a:fillRef>
+          <a:effectRef idx="0">
+            <a:schemeClr val="accent1"/>
+          </a:effectRef>
+          <a:fontRef idx="minor">
+            <a:schemeClr val="lt1"/>
+          </a:fontRef>
+        </p:style>
+        <p:txBody>
+          <a:bodyPr rtlCol="0" anchor="ctr"/>
+          <a:lstStyle/>
+          <a:p>
+            <a:pPr algn="ctr"/>
+            <a:endParaRPr lang="zh-CN" altLang="en-US"/>
+          </a:p>
+        </p:txBody>
+      </p:sp>
+      <p:sp>
+        <p:nvSpPr>
+          <p:cNvPr id="28" name="文本框 27">
+            <a:extLst>
+              <a:ext uri="{FF2B5EF4-FFF2-40B4-BE49-F238E27FC236}">
+                <a16:creationId xmlns:a16="http://schemas.microsoft.com/office/drawing/2014/main" id="{E70A5D1E-77CC-4B7E-324C-BA7A95AB6B9C}"/>
+              </a:ext>
+            </a:extLst>
+          </p:cNvPr>
+          <p:cNvSpPr txBox="1"/>
+          <p:nvPr/>
+        </p:nvSpPr>
+        <p:spPr>
+          <a:xfrm>
+            <a:off x="926045" y="6190911"/>
+            <a:ext cx="800219" cy="276999"/>
+          </a:xfrm>
+          <a:prstGeom prst="rect">
+            <a:avLst/>
+          </a:prstGeom>
+          <a:noFill/>
+        </p:spPr>
+        <p:txBody>
+          <a:bodyPr wrap="none" rtlCol="0">
+            <a:spAutoFit/>
+          </a:bodyPr>
+          <a:lstStyle/>
+          <a:p>
+            <a:r>
+              <a:rPr lang="zh-CN" altLang="en-US" sz="1200" dirty="0"/>
+              <a:t>药物数据</a:t>
+            </a:r>
+            <a:endParaRPr lang="en-US" altLang="zh-CN" sz="1200" dirty="0"/>
+          </a:p>
+        </p:txBody>
+      </p:sp>
+      <p:sp>
+        <p:nvSpPr>
+          <p:cNvPr id="31" name="文本框 30">
+            <a:extLst>
+              <a:ext uri="{FF2B5EF4-FFF2-40B4-BE49-F238E27FC236}">
+                <a16:creationId xmlns:a16="http://schemas.microsoft.com/office/drawing/2014/main" id="{212A9E2B-782F-8968-3F9A-0EB39FBA02BF}"/>
+              </a:ext>
+            </a:extLst>
+          </p:cNvPr>
+          <p:cNvSpPr txBox="1"/>
+          <p:nvPr/>
+        </p:nvSpPr>
+        <p:spPr>
+          <a:xfrm>
+            <a:off x="1713592" y="5851890"/>
+            <a:ext cx="542136" cy="261610"/>
+          </a:xfrm>
+          <a:prstGeom prst="rect">
+            <a:avLst/>
+          </a:prstGeom>
+          <a:noFill/>
+        </p:spPr>
+        <p:txBody>
+          <a:bodyPr wrap="none" rtlCol="0">
+            <a:spAutoFit/>
+          </a:bodyPr>
+          <a:lstStyle/>
+          <a:p>
+            <a:r>
+              <a:rPr lang="en-US" altLang="zh-CN" sz="1100" dirty="0"/>
+              <a:t>SIDER</a:t>
+            </a:r>
+          </a:p>
+        </p:txBody>
+      </p:sp>
+      <mc:AlternateContent xmlns:mc="http://schemas.openxmlformats.org/markup-compatibility/2006">
+        <mc:Choice xmlns:a14="http://schemas.microsoft.com/office/drawing/2010/main" Requires="a14">
+          <p:sp>
+            <p:nvSpPr>
+              <p:cNvPr id="32" name="流程图: 过程 31">
+                <a:extLst>
+                  <a:ext uri="{FF2B5EF4-FFF2-40B4-BE49-F238E27FC236}">
+                    <a16:creationId xmlns:a16="http://schemas.microsoft.com/office/drawing/2014/main" id="{CF8021D4-9C96-A721-9ED2-21CC462576E5}"/>
+                  </a:ext>
+                </a:extLst>
+              </p:cNvPr>
+              <p:cNvSpPr/>
+              <p:nvPr/>
+            </p:nvSpPr>
+            <p:spPr>
+              <a:xfrm>
+                <a:off x="3192634" y="2440420"/>
+                <a:ext cx="2465215" cy="374694"/>
+              </a:xfrm>
+              <a:prstGeom prst="flowChartProcess">
+                <a:avLst/>
+              </a:prstGeom>
+            </p:spPr>
+            <p:style>
+              <a:lnRef idx="2">
+                <a:schemeClr val="accent1">
+                  <a:shade val="15000"/>
+                </a:schemeClr>
+              </a:lnRef>
+              <a:fillRef idx="1">
+                <a:schemeClr val="accent1"/>
+              </a:fillRef>
+              <a:effectRef idx="0">
+                <a:schemeClr val="accent1"/>
+              </a:effectRef>
+              <a:fontRef idx="minor">
+                <a:schemeClr val="lt1"/>
+              </a:fontRef>
+            </p:style>
+            <p:txBody>
+              <a:bodyPr rtlCol="0" anchor="ctr"/>
+              <a:lstStyle/>
+              <a:p>
+                <a:pPr algn="ctr"/>
+                <a:r>
+                  <a:rPr lang="zh-CN" altLang="en-US" sz="1100" dirty="0"/>
+                  <a:t>药物</a:t>
+                </a:r>
+                <a:r>
+                  <a:rPr lang="en-US" altLang="zh-CN" sz="1100" dirty="0"/>
+                  <a:t>-</a:t>
+                </a:r>
+                <a:r>
+                  <a:rPr lang="zh-CN" altLang="en-US" sz="1100" dirty="0"/>
+                  <a:t>蛋白质</a:t>
+                </a:r>
+                <a:r>
+                  <a:rPr lang="en-US" altLang="zh-CN" sz="1100" dirty="0"/>
+                  <a:t>pairs</a:t>
+                </a:r>
+                <a:r>
+                  <a:rPr lang="zh-CN" altLang="en-US" sz="1100" dirty="0"/>
+                  <a:t>，</a:t>
+                </a:r>
+                <a:br>
+                  <a:rPr lang="en-US" altLang="zh-CN" sz="1100" dirty="0"/>
+                </a:br>
+                <a14:m>
+                  <m:oMathPara xmlns:m="http://schemas.openxmlformats.org/officeDocument/2006/math">
+                    <m:oMathParaPr>
+                      <m:jc m:val="centerGroup"/>
+                    </m:oMathParaPr>
+                    <m:oMath xmlns:m="http://schemas.openxmlformats.org/officeDocument/2006/math">
+                      <m:d>
+                        <m:dPr>
+                          <m:ctrlPr>
+                            <a:rPr lang="en-US" altLang="zh-CN" sz="1100" b="0" i="0" smtClean="0">
+                              <a:latin typeface="Cambria Math" panose="02040503050406030204" pitchFamily="18" charset="0"/>
+                            </a:rPr>
+                          </m:ctrlPr>
+                        </m:dPr>
+                        <m:e>
+                          <m:sSub>
+                            <m:sSubPr>
+                              <m:ctrlPr>
+                                <a:rPr lang="en-US" altLang="zh-CN" sz="1100" b="0" i="1" smtClean="0">
+                                  <a:latin typeface="Cambria Math" panose="02040503050406030204" pitchFamily="18" charset="0"/>
+                                </a:rPr>
+                              </m:ctrlPr>
+                            </m:sSubPr>
+                            <m:e>
+                              <m:r>
+                                <a:rPr lang="en-US" altLang="zh-CN" sz="1100" b="0" i="1" smtClean="0">
+                                  <a:latin typeface="Cambria Math" panose="02040503050406030204" pitchFamily="18" charset="0"/>
+                                </a:rPr>
+                                <m:t>𝑐</m:t>
+                              </m:r>
+                            </m:e>
+                            <m:sub>
+                              <m:r>
+                                <a:rPr lang="en-US" altLang="zh-CN" sz="1100" b="0" i="1" smtClean="0">
+                                  <a:latin typeface="Cambria Math" panose="02040503050406030204" pitchFamily="18" charset="0"/>
+                                </a:rPr>
+                                <m:t>𝑖</m:t>
+                              </m:r>
+                            </m:sub>
+                          </m:sSub>
+                          <m:r>
+                            <a:rPr lang="en-US" altLang="zh-CN" sz="1100" b="0" i="1" smtClean="0">
+                              <a:latin typeface="Cambria Math" panose="02040503050406030204" pitchFamily="18" charset="0"/>
+                            </a:rPr>
+                            <m:t>,</m:t>
+                          </m:r>
+                          <m:sSub>
+                            <m:sSubPr>
+                              <m:ctrlPr>
+                                <a:rPr lang="en-US" altLang="zh-CN" sz="1100" b="0" i="1" smtClean="0">
+                                  <a:latin typeface="Cambria Math" panose="02040503050406030204" pitchFamily="18" charset="0"/>
+                                </a:rPr>
+                              </m:ctrlPr>
+                            </m:sSubPr>
+                            <m:e>
+                              <m:r>
+                                <a:rPr lang="en-US" altLang="zh-CN" sz="1100" b="0" i="1" smtClean="0">
+                                  <a:latin typeface="Cambria Math" panose="02040503050406030204" pitchFamily="18" charset="0"/>
+                                </a:rPr>
+                                <m:t>𝑝</m:t>
+                              </m:r>
+                            </m:e>
+                            <m:sub>
+                              <m:r>
+                                <a:rPr lang="en-US" altLang="zh-CN" sz="1100" b="0" i="1" smtClean="0">
+                                  <a:latin typeface="Cambria Math" panose="02040503050406030204" pitchFamily="18" charset="0"/>
+                                </a:rPr>
+                                <m:t>𝑗</m:t>
+                              </m:r>
+                            </m:sub>
+                          </m:sSub>
+                          <m:r>
+                            <a:rPr lang="en-US" altLang="zh-CN" sz="1100" b="0" i="1" smtClean="0">
+                              <a:latin typeface="Cambria Math" panose="02040503050406030204" pitchFamily="18" charset="0"/>
+                            </a:rPr>
+                            <m:t>,</m:t>
+                          </m:r>
+                          <m:sSub>
+                            <m:sSubPr>
+                              <m:ctrlPr>
+                                <a:rPr lang="en-US" altLang="zh-CN" sz="1100" b="0" i="1" smtClean="0">
+                                  <a:latin typeface="Cambria Math" panose="02040503050406030204" pitchFamily="18" charset="0"/>
+                                </a:rPr>
+                              </m:ctrlPr>
+                            </m:sSubPr>
+                            <m:e>
+                              <m:r>
+                                <a:rPr lang="en-US" altLang="zh-CN" sz="1100" b="0" i="1" smtClean="0">
+                                  <a:latin typeface="Cambria Math" panose="02040503050406030204" pitchFamily="18" charset="0"/>
+                                </a:rPr>
+                                <m:t>𝑤</m:t>
+                              </m:r>
+                            </m:e>
+                            <m:sub>
+                              <m:r>
+                                <a:rPr lang="en-US" altLang="zh-CN" sz="1100" b="0" i="1" smtClean="0">
+                                  <a:latin typeface="Cambria Math" panose="02040503050406030204" pitchFamily="18" charset="0"/>
+                                </a:rPr>
+                                <m:t>𝑖𝑗</m:t>
+                              </m:r>
+                            </m:sub>
+                          </m:sSub>
+                        </m:e>
+                      </m:d>
+                      <m:r>
+                        <a:rPr lang="en-US" altLang="zh-CN" sz="1100" b="0" i="1" smtClean="0">
+                          <a:latin typeface="Cambria Math" panose="02040503050406030204" pitchFamily="18" charset="0"/>
+                        </a:rPr>
+                        <m:t>,(</m:t>
+                      </m:r>
+                      <m:sSub>
+                        <m:sSubPr>
+                          <m:ctrlPr>
+                            <a:rPr lang="en-US" altLang="zh-CN" sz="1100" b="0" i="1" smtClean="0">
+                              <a:latin typeface="Cambria Math" panose="02040503050406030204" pitchFamily="18" charset="0"/>
+                            </a:rPr>
+                          </m:ctrlPr>
+                        </m:sSubPr>
+                        <m:e>
+                          <m:r>
+                            <a:rPr lang="en-US" altLang="zh-CN" sz="1100" b="0" i="1" smtClean="0">
+                              <a:latin typeface="Cambria Math" panose="02040503050406030204" pitchFamily="18" charset="0"/>
+                            </a:rPr>
+                            <m:t>𝑐</m:t>
+                          </m:r>
+                        </m:e>
+                        <m:sub>
+                          <m:r>
+                            <a:rPr lang="en-US" altLang="zh-CN" sz="1100" b="0" i="1" smtClean="0">
+                              <a:latin typeface="Cambria Math" panose="02040503050406030204" pitchFamily="18" charset="0"/>
+                            </a:rPr>
+                            <m:t>𝑘</m:t>
+                          </m:r>
+                        </m:sub>
+                      </m:sSub>
+                      <m:r>
+                        <a:rPr lang="en-US" altLang="zh-CN" sz="1100" b="0" i="1" smtClean="0">
+                          <a:latin typeface="Cambria Math" panose="02040503050406030204" pitchFamily="18" charset="0"/>
+                        </a:rPr>
+                        <m:t>,</m:t>
+                      </m:r>
+                      <m:sSub>
+                        <m:sSubPr>
+                          <m:ctrlPr>
+                            <a:rPr lang="en-US" altLang="zh-CN" sz="1100" b="0" i="1" smtClean="0">
+                              <a:latin typeface="Cambria Math" panose="02040503050406030204" pitchFamily="18" charset="0"/>
+                            </a:rPr>
+                          </m:ctrlPr>
+                        </m:sSubPr>
+                        <m:e>
+                          <m:r>
+                            <a:rPr lang="en-US" altLang="zh-CN" sz="1100" b="0" i="1" smtClean="0">
+                              <a:latin typeface="Cambria Math" panose="02040503050406030204" pitchFamily="18" charset="0"/>
+                            </a:rPr>
+                            <m:t>𝑝</m:t>
+                          </m:r>
+                        </m:e>
+                        <m:sub>
+                          <m:r>
+                            <a:rPr lang="en-US" altLang="zh-CN" sz="1100" b="0" i="1" smtClean="0">
+                              <a:latin typeface="Cambria Math" panose="02040503050406030204" pitchFamily="18" charset="0"/>
+                            </a:rPr>
+                            <m:t>𝑙</m:t>
+                          </m:r>
+                        </m:sub>
+                      </m:sSub>
+                      <m:r>
+                        <a:rPr lang="en-US" altLang="zh-CN" sz="1100" b="0" i="1" smtClean="0">
+                          <a:latin typeface="Cambria Math" panose="02040503050406030204" pitchFamily="18" charset="0"/>
+                        </a:rPr>
+                        <m:t>,</m:t>
+                      </m:r>
+                      <m:sSub>
+                        <m:sSubPr>
+                          <m:ctrlPr>
+                            <a:rPr lang="en-US" altLang="zh-CN" sz="1100" b="0" i="1" smtClean="0">
+                              <a:latin typeface="Cambria Math" panose="02040503050406030204" pitchFamily="18" charset="0"/>
+                            </a:rPr>
+                          </m:ctrlPr>
+                        </m:sSubPr>
+                        <m:e>
+                          <m:r>
+                            <a:rPr lang="en-US" altLang="zh-CN" sz="1100" b="0" i="1" smtClean="0">
+                              <a:latin typeface="Cambria Math" panose="02040503050406030204" pitchFamily="18" charset="0"/>
+                            </a:rPr>
+                            <m:t>𝑤</m:t>
+                          </m:r>
+                        </m:e>
+                        <m:sub>
+                          <m:r>
+                            <a:rPr lang="en-US" altLang="zh-CN" sz="1100" b="0" i="1" smtClean="0">
+                              <a:latin typeface="Cambria Math" panose="02040503050406030204" pitchFamily="18" charset="0"/>
+                            </a:rPr>
+                            <m:t>𝑘𝑙</m:t>
+                          </m:r>
+                        </m:sub>
+                      </m:sSub>
+                      <m:r>
+                        <a:rPr lang="en-US" altLang="zh-CN" sz="1100" b="0" i="1" smtClean="0">
+                          <a:latin typeface="Cambria Math" panose="02040503050406030204" pitchFamily="18" charset="0"/>
+                        </a:rPr>
+                        <m:t>)</m:t>
+                      </m:r>
+                      <m:r>
+                        <a:rPr lang="en-US" altLang="zh-CN" sz="1100" b="0" i="1" smtClean="0">
+                          <a:latin typeface="Cambria Math" panose="02040503050406030204" pitchFamily="18" charset="0"/>
+                          <a:ea typeface="Cambria Math" panose="02040503050406030204" pitchFamily="18" charset="0"/>
+                        </a:rPr>
+                        <m:t>∈</m:t>
+                      </m:r>
+                      <m:r>
+                        <a:rPr lang="en-US" altLang="zh-CN" sz="1100" b="0" i="1" smtClean="0">
+                          <a:latin typeface="Cambria Math" panose="02040503050406030204" pitchFamily="18" charset="0"/>
+                          <a:ea typeface="Cambria Math" panose="02040503050406030204" pitchFamily="18" charset="0"/>
+                        </a:rPr>
+                        <m:t>𝐾</m:t>
+                      </m:r>
+                    </m:oMath>
+                  </m:oMathPara>
+                </a14:m>
+                <a:endParaRPr lang="zh-CN" altLang="en-US" sz="1100" dirty="0"/>
+              </a:p>
+            </p:txBody>
+          </p:sp>
+        </mc:Choice>
+        <mc:Fallback>
+          <p:sp>
+            <p:nvSpPr>
+              <p:cNvPr id="32" name="流程图: 过程 31">
+                <a:extLst>
+                  <a:ext uri="{FF2B5EF4-FFF2-40B4-BE49-F238E27FC236}">
+                    <a16:creationId xmlns:a16="http://schemas.microsoft.com/office/drawing/2014/main" id="{CF8021D4-9C96-A721-9ED2-21CC462576E5}"/>
+                  </a:ext>
+                </a:extLst>
+              </p:cNvPr>
+              <p:cNvSpPr>
+                <a:spLocks noRot="1" noChangeAspect="1" noMove="1" noResize="1" noEditPoints="1" noAdjustHandles="1" noChangeArrowheads="1" noChangeShapeType="1" noTextEdit="1"/>
+              </p:cNvSpPr>
+              <p:nvPr/>
+            </p:nvSpPr>
+            <p:spPr>
+              <a:xfrm>
+                <a:off x="3192634" y="2440420"/>
+                <a:ext cx="2465215" cy="374694"/>
+              </a:xfrm>
+              <a:prstGeom prst="flowChartProcess">
+                <a:avLst/>
+              </a:prstGeom>
+              <a:blipFill>
+                <a:blip r:embed="rId3"/>
+                <a:stretch>
+                  <a:fillRect t="-9231" b="-6154"/>
+                </a:stretch>
+              </a:blipFill>
+            </p:spPr>
+            <p:txBody>
+              <a:bodyPr/>
+              <a:lstStyle/>
+              <a:p>
+                <a:r>
+                  <a:rPr lang="zh-CN" altLang="en-US">
+                    <a:noFill/>
+                  </a:rPr>
+                  <a:t> </a:t>
+                </a:r>
+              </a:p>
+            </p:txBody>
+          </p:sp>
+        </mc:Fallback>
+      </mc:AlternateContent>
+      <p:sp>
+        <p:nvSpPr>
+          <p:cNvPr id="33" name="流程图: 过程 32">
+            <a:extLst>
+              <a:ext uri="{FF2B5EF4-FFF2-40B4-BE49-F238E27FC236}">
+                <a16:creationId xmlns:a16="http://schemas.microsoft.com/office/drawing/2014/main" id="{4F7CD3F4-1A94-7A41-4095-ACDE45640BA5}"/>
+              </a:ext>
+            </a:extLst>
+          </p:cNvPr>
+          <p:cNvSpPr/>
+          <p:nvPr/>
+        </p:nvSpPr>
+        <p:spPr>
+          <a:xfrm>
+            <a:off x="6688591" y="2443244"/>
+            <a:ext cx="1050554" cy="369332"/>
+          </a:xfrm>
+          <a:prstGeom prst="flowChartProcess">
+            <a:avLst/>
+          </a:prstGeom>
+        </p:spPr>
+        <p:style>
+          <a:lnRef idx="2">
+            <a:schemeClr val="accent1">
+              <a:shade val="15000"/>
+            </a:schemeClr>
+          </a:lnRef>
+          <a:fillRef idx="1">
+            <a:schemeClr val="accent1"/>
+          </a:fillRef>
+          <a:effectRef idx="0">
+            <a:schemeClr val="accent1"/>
+          </a:effectRef>
+          <a:fontRef idx="minor">
+            <a:schemeClr val="lt1"/>
+          </a:fontRef>
+        </p:style>
+        <p:txBody>
+          <a:bodyPr rtlCol="0" anchor="ctr"/>
+          <a:lstStyle/>
+          <a:p>
+            <a:pPr algn="ctr"/>
+            <a:r>
+              <a:rPr lang="zh-CN" altLang="en-US" sz="900" dirty="0"/>
+              <a:t>提取正相互作用</a:t>
+            </a:r>
+          </a:p>
+        </p:txBody>
+      </p:sp>
+      <mc:AlternateContent xmlns:mc="http://schemas.openxmlformats.org/markup-compatibility/2006">
+        <mc:Choice xmlns:a14="http://schemas.microsoft.com/office/drawing/2010/main" Requires="a14">
+          <p:sp>
+            <p:nvSpPr>
+              <p:cNvPr id="34" name="流程图: 过程 33">
+                <a:extLst>
+                  <a:ext uri="{FF2B5EF4-FFF2-40B4-BE49-F238E27FC236}">
+                    <a16:creationId xmlns:a16="http://schemas.microsoft.com/office/drawing/2014/main" id="{4B15E0B8-E5D0-A100-F1D9-692138D48482}"/>
+                  </a:ext>
+                </a:extLst>
+              </p:cNvPr>
+              <p:cNvSpPr/>
+              <p:nvPr/>
+            </p:nvSpPr>
+            <p:spPr>
+              <a:xfrm>
+                <a:off x="3192634" y="3577320"/>
+                <a:ext cx="2465215" cy="518430"/>
+              </a:xfrm>
+              <a:prstGeom prst="flowChartProcess">
+                <a:avLst/>
+              </a:prstGeom>
+            </p:spPr>
+            <p:style>
+              <a:lnRef idx="2">
+                <a:schemeClr val="accent1">
+                  <a:shade val="15000"/>
+                </a:schemeClr>
+              </a:lnRef>
+              <a:fillRef idx="1">
+                <a:schemeClr val="accent1"/>
+              </a:fillRef>
+              <a:effectRef idx="0">
+                <a:schemeClr val="accent1"/>
+              </a:effectRef>
+              <a:fontRef idx="minor">
+                <a:schemeClr val="lt1"/>
+              </a:fontRef>
+            </p:style>
+            <p:txBody>
+              <a:bodyPr rtlCol="0" anchor="ctr"/>
+              <a:lstStyle/>
+              <a:p>
+                <a:pPr algn="ctr"/>
+                <a:r>
+                  <a:rPr lang="zh-CN" altLang="en-US" sz="1100" dirty="0"/>
+                  <a:t>通过</a:t>
+                </a:r>
+                <a14:m>
+                  <m:oMath xmlns:m="http://schemas.openxmlformats.org/officeDocument/2006/math">
+                    <m:d>
+                      <m:dPr>
+                        <m:ctrlPr>
+                          <a:rPr lang="en-US" altLang="zh-CN" sz="1100" b="0" i="0" smtClean="0">
+                            <a:latin typeface="Cambria Math" panose="02040503050406030204" pitchFamily="18" charset="0"/>
+                          </a:rPr>
+                        </m:ctrlPr>
+                      </m:dPr>
+                      <m:e>
+                        <m:sSub>
+                          <m:sSubPr>
+                            <m:ctrlPr>
+                              <a:rPr lang="en-US" altLang="zh-CN" sz="1100" b="0" i="1" smtClean="0">
+                                <a:latin typeface="Cambria Math" panose="02040503050406030204" pitchFamily="18" charset="0"/>
+                              </a:rPr>
+                            </m:ctrlPr>
+                          </m:sSubPr>
+                          <m:e>
+                            <m:r>
+                              <a:rPr lang="en-US" altLang="zh-CN" sz="1100" b="0" i="1" smtClean="0">
+                                <a:latin typeface="Cambria Math" panose="02040503050406030204" pitchFamily="18" charset="0"/>
+                              </a:rPr>
+                              <m:t>𝑐</m:t>
+                            </m:r>
+                          </m:e>
+                          <m:sub>
+                            <m:r>
+                              <a:rPr lang="en-US" altLang="zh-CN" sz="1100" b="0" i="1" smtClean="0">
+                                <a:latin typeface="Cambria Math" panose="02040503050406030204" pitchFamily="18" charset="0"/>
+                              </a:rPr>
+                              <m:t>𝑘</m:t>
+                            </m:r>
+                          </m:sub>
+                        </m:sSub>
+                        <m:r>
+                          <a:rPr lang="en-US" altLang="zh-CN" sz="1100" b="0" i="1" smtClean="0">
+                            <a:latin typeface="Cambria Math" panose="02040503050406030204" pitchFamily="18" charset="0"/>
+                          </a:rPr>
+                          <m:t>,</m:t>
+                        </m:r>
+                        <m:sSub>
+                          <m:sSubPr>
+                            <m:ctrlPr>
+                              <a:rPr lang="en-US" altLang="zh-CN" sz="1100" b="0" i="1" smtClean="0">
+                                <a:latin typeface="Cambria Math" panose="02040503050406030204" pitchFamily="18" charset="0"/>
+                              </a:rPr>
+                            </m:ctrlPr>
+                          </m:sSubPr>
+                          <m:e>
+                            <m:r>
+                              <a:rPr lang="en-US" altLang="zh-CN" sz="1100" b="0" i="1" smtClean="0">
+                                <a:latin typeface="Cambria Math" panose="02040503050406030204" pitchFamily="18" charset="0"/>
+                              </a:rPr>
+                              <m:t>𝑝</m:t>
+                            </m:r>
+                          </m:e>
+                          <m:sub>
+                            <m:r>
+                              <a:rPr lang="en-US" altLang="zh-CN" sz="1100" b="0" i="1" smtClean="0">
+                                <a:latin typeface="Cambria Math" panose="02040503050406030204" pitchFamily="18" charset="0"/>
+                              </a:rPr>
+                              <m:t>𝑙</m:t>
+                            </m:r>
+                          </m:sub>
+                        </m:sSub>
+                        <m:r>
+                          <a:rPr lang="en-US" altLang="zh-CN" sz="1100" b="0" i="1" smtClean="0">
+                            <a:latin typeface="Cambria Math" panose="02040503050406030204" pitchFamily="18" charset="0"/>
+                          </a:rPr>
+                          <m:t>,</m:t>
+                        </m:r>
+                        <m:sSub>
+                          <m:sSubPr>
+                            <m:ctrlPr>
+                              <a:rPr lang="en-US" altLang="zh-CN" sz="1100" b="0" i="1" smtClean="0">
+                                <a:latin typeface="Cambria Math" panose="02040503050406030204" pitchFamily="18" charset="0"/>
+                              </a:rPr>
+                            </m:ctrlPr>
+                          </m:sSubPr>
+                          <m:e>
+                            <m:r>
+                              <a:rPr lang="en-US" altLang="zh-CN" sz="1100" b="0" i="1" smtClean="0">
+                                <a:latin typeface="Cambria Math" panose="02040503050406030204" pitchFamily="18" charset="0"/>
+                              </a:rPr>
+                              <m:t>𝑤</m:t>
+                            </m:r>
+                          </m:e>
+                          <m:sub>
+                            <m:r>
+                              <a:rPr lang="en-US" altLang="zh-CN" sz="1100" b="0" i="1" smtClean="0">
+                                <a:latin typeface="Cambria Math" panose="02040503050406030204" pitchFamily="18" charset="0"/>
+                              </a:rPr>
+                              <m:t>𝑘𝑙</m:t>
+                            </m:r>
+                          </m:sub>
+                        </m:sSub>
+                      </m:e>
+                    </m:d>
+                    <m:r>
+                      <a:rPr lang="en-US" altLang="zh-CN" sz="1100" b="0" i="1" smtClean="0">
+                        <a:latin typeface="Cambria Math" panose="02040503050406030204" pitchFamily="18" charset="0"/>
+                      </a:rPr>
+                      <m:t>,(</m:t>
+                    </m:r>
+                    <m:sSub>
+                      <m:sSubPr>
+                        <m:ctrlPr>
+                          <a:rPr lang="en-US" altLang="zh-CN" sz="1100" b="0" i="1" smtClean="0">
+                            <a:latin typeface="Cambria Math" panose="02040503050406030204" pitchFamily="18" charset="0"/>
+                          </a:rPr>
+                        </m:ctrlPr>
+                      </m:sSubPr>
+                      <m:e>
+                        <m:r>
+                          <a:rPr lang="en-US" altLang="zh-CN" sz="1100" b="0" i="1" smtClean="0">
+                            <a:latin typeface="Cambria Math" panose="02040503050406030204" pitchFamily="18" charset="0"/>
+                          </a:rPr>
+                          <m:t>𝑠𝑝𝑐</m:t>
+                        </m:r>
+                      </m:e>
+                      <m:sub>
+                        <m:r>
+                          <a:rPr lang="en-US" altLang="zh-CN" sz="1100" b="0" i="1" smtClean="0">
+                            <a:latin typeface="Cambria Math" panose="02040503050406030204" pitchFamily="18" charset="0"/>
+                          </a:rPr>
+                          <m:t>𝑗𝑘𝑙</m:t>
+                        </m:r>
+                      </m:sub>
+                    </m:sSub>
+                    <m:r>
+                      <a:rPr lang="en-US" altLang="zh-CN" sz="1100" b="0" i="1" smtClean="0">
+                        <a:latin typeface="Cambria Math" panose="02040503050406030204" pitchFamily="18" charset="0"/>
+                      </a:rPr>
+                      <m:t>=</m:t>
+                    </m:r>
+                    <m:sSub>
+                      <m:sSubPr>
+                        <m:ctrlPr>
+                          <a:rPr lang="en-US" altLang="zh-CN" sz="1100" b="0" i="1" smtClean="0">
+                            <a:latin typeface="Cambria Math" panose="02040503050406030204" pitchFamily="18" charset="0"/>
+                          </a:rPr>
+                        </m:ctrlPr>
+                      </m:sSubPr>
+                      <m:e>
+                        <m:r>
+                          <a:rPr lang="en-US" altLang="zh-CN" sz="1100" b="0" i="1" smtClean="0">
+                            <a:latin typeface="Cambria Math" panose="02040503050406030204" pitchFamily="18" charset="0"/>
+                          </a:rPr>
+                          <m:t>𝑤</m:t>
+                        </m:r>
+                      </m:e>
+                      <m:sub>
+                        <m:r>
+                          <a:rPr lang="en-US" altLang="zh-CN" sz="1100" b="0" i="1" smtClean="0">
+                            <a:latin typeface="Cambria Math" panose="02040503050406030204" pitchFamily="18" charset="0"/>
+                          </a:rPr>
+                          <m:t>𝑘𝑙</m:t>
+                        </m:r>
+                      </m:sub>
+                    </m:sSub>
+                    <m:r>
+                      <a:rPr lang="en-US" altLang="zh-CN" sz="1100" b="0" i="1" smtClean="0">
+                        <a:latin typeface="Cambria Math" panose="02040503050406030204" pitchFamily="18" charset="0"/>
+                      </a:rPr>
+                      <m:t>∗</m:t>
+                    </m:r>
+                    <m:sSub>
+                      <m:sSubPr>
+                        <m:ctrlPr>
+                          <a:rPr lang="en-US" altLang="zh-CN" sz="1100" b="0" i="1" smtClean="0">
+                            <a:latin typeface="Cambria Math" panose="02040503050406030204" pitchFamily="18" charset="0"/>
+                          </a:rPr>
+                        </m:ctrlPr>
+                      </m:sSubPr>
+                      <m:e>
+                        <m:r>
+                          <a:rPr lang="en-US" altLang="zh-CN" sz="1100" b="0" i="1" smtClean="0">
+                            <a:latin typeface="Cambria Math" panose="02040503050406030204" pitchFamily="18" charset="0"/>
+                          </a:rPr>
+                          <m:t>𝑃𝑆</m:t>
+                        </m:r>
+                      </m:e>
+                      <m:sub>
+                        <m:r>
+                          <a:rPr lang="en-US" altLang="zh-CN" sz="1100" b="0" i="1" smtClean="0">
+                            <a:latin typeface="Cambria Math" panose="02040503050406030204" pitchFamily="18" charset="0"/>
+                          </a:rPr>
+                          <m:t>𝑗𝑙</m:t>
+                        </m:r>
+                      </m:sub>
+                    </m:sSub>
+                    <m:r>
+                      <a:rPr lang="en-US" altLang="zh-CN" sz="1100" b="0" i="1" smtClean="0">
+                        <a:latin typeface="Cambria Math" panose="02040503050406030204" pitchFamily="18" charset="0"/>
+                      </a:rPr>
+                      <m:t>)</m:t>
+                    </m:r>
+                  </m:oMath>
+                </a14:m>
+                <a:r>
+                  <a:rPr lang="zh-CN" altLang="en-US" sz="1100" dirty="0"/>
+                  <a:t>计算</a:t>
+                </a:r>
+                <a14:m>
+                  <m:oMath xmlns:m="http://schemas.openxmlformats.org/officeDocument/2006/math">
+                    <m:sSub>
+                      <m:sSubPr>
+                        <m:ctrlPr>
+                          <a:rPr lang="en-US" altLang="zh-CN" sz="1100" i="1">
+                            <a:latin typeface="Cambria Math" panose="02040503050406030204" pitchFamily="18" charset="0"/>
+                          </a:rPr>
+                        </m:ctrlPr>
+                      </m:sSubPr>
+                      <m:e>
+                        <m:r>
+                          <a:rPr lang="en-US" altLang="zh-CN" sz="1100" i="1">
+                            <a:latin typeface="Cambria Math" panose="02040503050406030204" pitchFamily="18" charset="0"/>
+                          </a:rPr>
+                          <m:t>𝑐</m:t>
+                        </m:r>
+                      </m:e>
+                      <m:sub>
+                        <m:r>
+                          <a:rPr lang="en-US" altLang="zh-CN" sz="1100" i="1">
+                            <a:latin typeface="Cambria Math" panose="02040503050406030204" pitchFamily="18" charset="0"/>
+                          </a:rPr>
+                          <m:t>𝑘</m:t>
+                        </m:r>
+                      </m:sub>
+                    </m:sSub>
+                  </m:oMath>
+                </a14:m>
+                <a:r>
+                  <a:rPr lang="zh-CN" altLang="en-US" sz="1100" dirty="0"/>
+                  <a:t>和</a:t>
+                </a:r>
+                <a14:m>
+                  <m:oMath xmlns:m="http://schemas.openxmlformats.org/officeDocument/2006/math">
+                    <m:sSub>
+                      <m:sSubPr>
+                        <m:ctrlPr>
+                          <a:rPr lang="en-US" altLang="zh-CN" sz="1100" i="1">
+                            <a:latin typeface="Cambria Math" panose="02040503050406030204" pitchFamily="18" charset="0"/>
+                          </a:rPr>
+                        </m:ctrlPr>
+                      </m:sSubPr>
+                      <m:e>
+                        <m:r>
+                          <a:rPr lang="en-US" altLang="zh-CN" sz="1100" i="1">
+                            <a:latin typeface="Cambria Math" panose="02040503050406030204" pitchFamily="18" charset="0"/>
+                          </a:rPr>
+                          <m:t>𝑝</m:t>
+                        </m:r>
+                      </m:e>
+                      <m:sub>
+                        <m:r>
+                          <a:rPr lang="en-US" altLang="zh-CN" sz="1100" i="1">
+                            <a:latin typeface="Cambria Math" panose="02040503050406030204" pitchFamily="18" charset="0"/>
+                          </a:rPr>
+                          <m:t>𝑙</m:t>
+                        </m:r>
+                      </m:sub>
+                    </m:sSub>
+                  </m:oMath>
+                </a14:m>
+                <a:r>
+                  <a:rPr lang="zh-CN" altLang="en-US" sz="1100" dirty="0"/>
+                  <a:t>之间的加权得分</a:t>
+                </a:r>
+              </a:p>
+            </p:txBody>
+          </p:sp>
+        </mc:Choice>
+        <mc:Fallback>
+          <p:sp>
+            <p:nvSpPr>
+              <p:cNvPr id="34" name="流程图: 过程 33">
+                <a:extLst>
+                  <a:ext uri="{FF2B5EF4-FFF2-40B4-BE49-F238E27FC236}">
+                    <a16:creationId xmlns:a16="http://schemas.microsoft.com/office/drawing/2014/main" id="{4B15E0B8-E5D0-A100-F1D9-692138D48482}"/>
+                  </a:ext>
+                </a:extLst>
+              </p:cNvPr>
+              <p:cNvSpPr>
+                <a:spLocks noRot="1" noChangeAspect="1" noMove="1" noResize="1" noEditPoints="1" noAdjustHandles="1" noChangeArrowheads="1" noChangeShapeType="1" noTextEdit="1"/>
+              </p:cNvSpPr>
+              <p:nvPr/>
+            </p:nvSpPr>
+            <p:spPr>
+              <a:xfrm>
+                <a:off x="3192634" y="3577320"/>
+                <a:ext cx="2465215" cy="518430"/>
+              </a:xfrm>
+              <a:prstGeom prst="flowChartProcess">
+                <a:avLst/>
+              </a:prstGeom>
+              <a:blipFill>
+                <a:blip r:embed="rId4"/>
+                <a:stretch>
+                  <a:fillRect/>
+                </a:stretch>
+              </a:blipFill>
+            </p:spPr>
+            <p:txBody>
+              <a:bodyPr/>
+              <a:lstStyle/>
+              <a:p>
+                <a:r>
+                  <a:rPr lang="zh-CN" altLang="en-US">
+                    <a:noFill/>
+                  </a:rPr>
+                  <a:t> </a:t>
+                </a:r>
+              </a:p>
+            </p:txBody>
+          </p:sp>
+        </mc:Fallback>
+      </mc:AlternateContent>
+      <mc:AlternateContent xmlns:mc="http://schemas.openxmlformats.org/markup-compatibility/2006">
+        <mc:Choice xmlns:a14="http://schemas.microsoft.com/office/drawing/2010/main" Requires="a14">
+          <p:sp>
+            <p:nvSpPr>
+              <p:cNvPr id="35" name="流程图: 过程 34">
+                <a:extLst>
+                  <a:ext uri="{FF2B5EF4-FFF2-40B4-BE49-F238E27FC236}">
+                    <a16:creationId xmlns:a16="http://schemas.microsoft.com/office/drawing/2014/main" id="{BD8DEB31-0F0B-E0F0-78A9-EB6079E0F9FD}"/>
+                  </a:ext>
+                </a:extLst>
+              </p:cNvPr>
+              <p:cNvSpPr/>
+              <p:nvPr/>
+            </p:nvSpPr>
+            <p:spPr>
+              <a:xfrm>
+                <a:off x="3192634" y="4627316"/>
+                <a:ext cx="2465215" cy="518430"/>
+              </a:xfrm>
+              <a:prstGeom prst="flowChartProcess">
+                <a:avLst/>
+              </a:prstGeom>
+            </p:spPr>
+            <p:style>
+              <a:lnRef idx="2">
+                <a:schemeClr val="accent1">
+                  <a:shade val="15000"/>
+                </a:schemeClr>
+              </a:lnRef>
+              <a:fillRef idx="1">
+                <a:schemeClr val="accent1"/>
+              </a:fillRef>
+              <a:effectRef idx="0">
+                <a:schemeClr val="accent1"/>
+              </a:effectRef>
+              <a:fontRef idx="minor">
+                <a:schemeClr val="lt1"/>
+              </a:fontRef>
+            </p:style>
+            <p:txBody>
+              <a:bodyPr rtlCol="0" anchor="ctr"/>
+              <a:lstStyle/>
+              <a:p>
+                <a:pPr algn="ctr"/>
+                <a:r>
+                  <a:rPr lang="zh-CN" altLang="en-US" sz="1100" dirty="0"/>
+                  <a:t>通过</a:t>
+                </a:r>
+                <a14:m>
+                  <m:oMath xmlns:m="http://schemas.openxmlformats.org/officeDocument/2006/math">
+                    <m:d>
+                      <m:dPr>
+                        <m:ctrlPr>
+                          <a:rPr lang="en-US" altLang="zh-CN" sz="1100" b="0" i="0" smtClean="0">
+                            <a:latin typeface="Cambria Math" panose="02040503050406030204" pitchFamily="18" charset="0"/>
+                          </a:rPr>
+                        </m:ctrlPr>
+                      </m:dPr>
+                      <m:e>
+                        <m:sSub>
+                          <m:sSubPr>
+                            <m:ctrlPr>
+                              <a:rPr lang="en-US" altLang="zh-CN" sz="1100" b="0" i="1" smtClean="0">
+                                <a:latin typeface="Cambria Math" panose="02040503050406030204" pitchFamily="18" charset="0"/>
+                              </a:rPr>
+                            </m:ctrlPr>
+                          </m:sSubPr>
+                          <m:e>
+                            <m:r>
+                              <a:rPr lang="en-US" altLang="zh-CN" sz="1100" b="0" i="1" smtClean="0">
+                                <a:latin typeface="Cambria Math" panose="02040503050406030204" pitchFamily="18" charset="0"/>
+                              </a:rPr>
+                              <m:t>𝑐</m:t>
+                            </m:r>
+                          </m:e>
+                          <m:sub>
+                            <m:r>
+                              <a:rPr lang="en-US" altLang="zh-CN" sz="1100" b="0" i="1" smtClean="0">
+                                <a:latin typeface="Cambria Math" panose="02040503050406030204" pitchFamily="18" charset="0"/>
+                              </a:rPr>
+                              <m:t>𝑖</m:t>
+                            </m:r>
+                          </m:sub>
+                        </m:sSub>
+                        <m:r>
+                          <a:rPr lang="en-US" altLang="zh-CN" sz="1100" b="0" i="1" smtClean="0">
+                            <a:latin typeface="Cambria Math" panose="02040503050406030204" pitchFamily="18" charset="0"/>
+                          </a:rPr>
+                          <m:t>,</m:t>
+                        </m:r>
+                        <m:sSub>
+                          <m:sSubPr>
+                            <m:ctrlPr>
+                              <a:rPr lang="en-US" altLang="zh-CN" sz="1100" b="0" i="1" smtClean="0">
+                                <a:latin typeface="Cambria Math" panose="02040503050406030204" pitchFamily="18" charset="0"/>
+                              </a:rPr>
+                            </m:ctrlPr>
+                          </m:sSubPr>
+                          <m:e>
+                            <m:r>
+                              <a:rPr lang="en-US" altLang="zh-CN" sz="1100" b="0" i="1" smtClean="0">
+                                <a:latin typeface="Cambria Math" panose="02040503050406030204" pitchFamily="18" charset="0"/>
+                              </a:rPr>
+                              <m:t>𝑝</m:t>
+                            </m:r>
+                          </m:e>
+                          <m:sub>
+                            <m:r>
+                              <a:rPr lang="en-US" altLang="zh-CN" sz="1100" b="0" i="1" smtClean="0">
+                                <a:latin typeface="Cambria Math" panose="02040503050406030204" pitchFamily="18" charset="0"/>
+                              </a:rPr>
+                              <m:t>𝑗</m:t>
+                            </m:r>
+                          </m:sub>
+                        </m:sSub>
+                        <m:r>
+                          <a:rPr lang="en-US" altLang="zh-CN" sz="1100" b="0" i="1" smtClean="0">
+                            <a:latin typeface="Cambria Math" panose="02040503050406030204" pitchFamily="18" charset="0"/>
+                          </a:rPr>
+                          <m:t>,</m:t>
+                        </m:r>
+                        <m:sSub>
+                          <m:sSubPr>
+                            <m:ctrlPr>
+                              <a:rPr lang="en-US" altLang="zh-CN" sz="1100" b="0" i="1" smtClean="0">
+                                <a:latin typeface="Cambria Math" panose="02040503050406030204" pitchFamily="18" charset="0"/>
+                              </a:rPr>
+                            </m:ctrlPr>
+                          </m:sSubPr>
+                          <m:e>
+                            <m:r>
+                              <a:rPr lang="en-US" altLang="zh-CN" sz="1100" b="0" i="1" smtClean="0">
+                                <a:latin typeface="Cambria Math" panose="02040503050406030204" pitchFamily="18" charset="0"/>
+                              </a:rPr>
+                              <m:t>𝑤</m:t>
+                            </m:r>
+                          </m:e>
+                          <m:sub>
+                            <m:r>
+                              <a:rPr lang="en-US" altLang="zh-CN" sz="1100" b="0" i="1" smtClean="0">
+                                <a:latin typeface="Cambria Math" panose="02040503050406030204" pitchFamily="18" charset="0"/>
+                              </a:rPr>
+                              <m:t>𝑖𝑗</m:t>
+                            </m:r>
+                          </m:sub>
+                        </m:sSub>
+                      </m:e>
+                    </m:d>
+                    <m:r>
+                      <a:rPr lang="en-US" altLang="zh-CN" sz="1100" b="0" i="1" smtClean="0">
+                        <a:latin typeface="Cambria Math" panose="02040503050406030204" pitchFamily="18" charset="0"/>
+                      </a:rPr>
+                      <m:t>,(</m:t>
+                    </m:r>
+                    <m:sSub>
+                      <m:sSubPr>
+                        <m:ctrlPr>
+                          <a:rPr lang="en-US" altLang="zh-CN" sz="1100" b="0" i="1" smtClean="0">
+                            <a:latin typeface="Cambria Math" panose="02040503050406030204" pitchFamily="18" charset="0"/>
+                          </a:rPr>
+                        </m:ctrlPr>
+                      </m:sSubPr>
+                      <m:e>
+                        <m:r>
+                          <a:rPr lang="en-US" altLang="zh-CN" sz="1100" b="0" i="1" smtClean="0">
+                            <a:latin typeface="Cambria Math" panose="02040503050406030204" pitchFamily="18" charset="0"/>
+                          </a:rPr>
+                          <m:t>𝑠𝑝𝑐</m:t>
+                        </m:r>
+                      </m:e>
+                      <m:sub>
+                        <m:r>
+                          <a:rPr lang="en-US" altLang="zh-CN" sz="1100" b="0" i="1" smtClean="0">
+                            <a:latin typeface="Cambria Math" panose="02040503050406030204" pitchFamily="18" charset="0"/>
+                          </a:rPr>
+                          <m:t>𝑘𝑗𝑖</m:t>
+                        </m:r>
+                      </m:sub>
+                    </m:sSub>
+                    <m:r>
+                      <a:rPr lang="en-US" altLang="zh-CN" sz="1100" b="0" i="1" smtClean="0">
+                        <a:latin typeface="Cambria Math" panose="02040503050406030204" pitchFamily="18" charset="0"/>
+                      </a:rPr>
+                      <m:t>=</m:t>
+                    </m:r>
+                    <m:sSub>
+                      <m:sSubPr>
+                        <m:ctrlPr>
+                          <a:rPr lang="en-US" altLang="zh-CN" sz="1100" b="0" i="1" smtClean="0">
+                            <a:latin typeface="Cambria Math" panose="02040503050406030204" pitchFamily="18" charset="0"/>
+                          </a:rPr>
+                        </m:ctrlPr>
+                      </m:sSubPr>
+                      <m:e>
+                        <m:r>
+                          <a:rPr lang="en-US" altLang="zh-CN" sz="1100" b="0" i="1" smtClean="0">
+                            <a:latin typeface="Cambria Math" panose="02040503050406030204" pitchFamily="18" charset="0"/>
+                          </a:rPr>
+                          <m:t>𝑤</m:t>
+                        </m:r>
+                      </m:e>
+                      <m:sub>
+                        <m:r>
+                          <a:rPr lang="en-US" altLang="zh-CN" sz="1100" b="0" i="1" smtClean="0">
+                            <a:latin typeface="Cambria Math" panose="02040503050406030204" pitchFamily="18" charset="0"/>
+                          </a:rPr>
+                          <m:t>𝑖𝑗</m:t>
+                        </m:r>
+                      </m:sub>
+                    </m:sSub>
+                    <m:r>
+                      <a:rPr lang="en-US" altLang="zh-CN" sz="1100" b="0" i="1" smtClean="0">
+                        <a:latin typeface="Cambria Math" panose="02040503050406030204" pitchFamily="18" charset="0"/>
+                      </a:rPr>
+                      <m:t>∗</m:t>
+                    </m:r>
+                    <m:sSub>
+                      <m:sSubPr>
+                        <m:ctrlPr>
+                          <a:rPr lang="en-US" altLang="zh-CN" sz="1100" b="0" i="1" smtClean="0">
+                            <a:latin typeface="Cambria Math" panose="02040503050406030204" pitchFamily="18" charset="0"/>
+                          </a:rPr>
+                        </m:ctrlPr>
+                      </m:sSubPr>
+                      <m:e>
+                        <m:r>
+                          <a:rPr lang="en-US" altLang="zh-CN" sz="1100" b="0" i="1" smtClean="0">
+                            <a:latin typeface="Cambria Math" panose="02040503050406030204" pitchFamily="18" charset="0"/>
+                          </a:rPr>
+                          <m:t>𝐶𝑆</m:t>
+                        </m:r>
+                      </m:e>
+                      <m:sub>
+                        <m:r>
+                          <a:rPr lang="en-US" altLang="zh-CN" sz="1100" b="0" i="1" smtClean="0">
+                            <a:latin typeface="Cambria Math" panose="02040503050406030204" pitchFamily="18" charset="0"/>
+                          </a:rPr>
+                          <m:t>𝑘𝑖</m:t>
+                        </m:r>
+                      </m:sub>
+                    </m:sSub>
+                    <m:r>
+                      <a:rPr lang="en-US" altLang="zh-CN" sz="1100" b="0" i="1" smtClean="0">
+                        <a:latin typeface="Cambria Math" panose="02040503050406030204" pitchFamily="18" charset="0"/>
+                      </a:rPr>
+                      <m:t>)</m:t>
+                    </m:r>
+                  </m:oMath>
+                </a14:m>
+                <a:r>
+                  <a:rPr lang="zh-CN" altLang="en-US" sz="1100" dirty="0"/>
+                  <a:t>计算</a:t>
+                </a:r>
+                <a14:m>
+                  <m:oMath xmlns:m="http://schemas.openxmlformats.org/officeDocument/2006/math">
+                    <m:sSub>
+                      <m:sSubPr>
+                        <m:ctrlPr>
+                          <a:rPr lang="en-US" altLang="zh-CN" sz="1100" i="1" dirty="0" smtClean="0">
+                            <a:latin typeface="Cambria Math" panose="02040503050406030204" pitchFamily="18" charset="0"/>
+                          </a:rPr>
+                        </m:ctrlPr>
+                      </m:sSubPr>
+                      <m:e>
+                        <m:r>
+                          <a:rPr lang="en-US" altLang="zh-CN" sz="1100" b="0" i="1" dirty="0" smtClean="0">
+                            <a:latin typeface="Cambria Math" panose="02040503050406030204" pitchFamily="18" charset="0"/>
+                          </a:rPr>
+                          <m:t>𝑐</m:t>
+                        </m:r>
+                      </m:e>
+                      <m:sub>
+                        <m:r>
+                          <a:rPr lang="en-US" altLang="zh-CN" sz="1100" b="0" i="1" dirty="0" smtClean="0">
+                            <a:latin typeface="Cambria Math" panose="02040503050406030204" pitchFamily="18" charset="0"/>
+                          </a:rPr>
+                          <m:t>𝑖</m:t>
+                        </m:r>
+                      </m:sub>
+                    </m:sSub>
+                  </m:oMath>
+                </a14:m>
+                <a:r>
+                  <a:rPr lang="zh-CN" altLang="en-US" sz="1100" dirty="0"/>
+                  <a:t>和</a:t>
+                </a:r>
+                <a14:m>
+                  <m:oMath xmlns:m="http://schemas.openxmlformats.org/officeDocument/2006/math">
+                    <m:sSub>
+                      <m:sSubPr>
+                        <m:ctrlPr>
+                          <a:rPr lang="en-US" altLang="zh-CN" sz="1100" i="1">
+                            <a:latin typeface="Cambria Math" panose="02040503050406030204" pitchFamily="18" charset="0"/>
+                          </a:rPr>
+                        </m:ctrlPr>
+                      </m:sSubPr>
+                      <m:e>
+                        <m:r>
+                          <a:rPr lang="en-US" altLang="zh-CN" sz="1100" b="0" i="1" smtClean="0">
+                            <a:latin typeface="Cambria Math" panose="02040503050406030204" pitchFamily="18" charset="0"/>
+                          </a:rPr>
+                          <m:t>𝑝</m:t>
+                        </m:r>
+                      </m:e>
+                      <m:sub>
+                        <m:r>
+                          <a:rPr lang="en-US" altLang="zh-CN" sz="1100" b="0" i="1" smtClean="0">
+                            <a:latin typeface="Cambria Math" panose="02040503050406030204" pitchFamily="18" charset="0"/>
+                          </a:rPr>
+                          <m:t>𝑗</m:t>
+                        </m:r>
+                      </m:sub>
+                    </m:sSub>
+                  </m:oMath>
+                </a14:m>
+                <a:r>
+                  <a:rPr lang="zh-CN" altLang="en-US" sz="1100" dirty="0"/>
+                  <a:t>之间的加权得分</a:t>
+                </a:r>
+              </a:p>
+            </p:txBody>
+          </p:sp>
+        </mc:Choice>
+        <mc:Fallback>
+          <p:sp>
+            <p:nvSpPr>
+              <p:cNvPr id="35" name="流程图: 过程 34">
+                <a:extLst>
+                  <a:ext uri="{FF2B5EF4-FFF2-40B4-BE49-F238E27FC236}">
+                    <a16:creationId xmlns:a16="http://schemas.microsoft.com/office/drawing/2014/main" id="{BD8DEB31-0F0B-E0F0-78A9-EB6079E0F9FD}"/>
+                  </a:ext>
+                </a:extLst>
+              </p:cNvPr>
+              <p:cNvSpPr>
+                <a:spLocks noRot="1" noChangeAspect="1" noMove="1" noResize="1" noEditPoints="1" noAdjustHandles="1" noChangeArrowheads="1" noChangeShapeType="1" noTextEdit="1"/>
+              </p:cNvSpPr>
+              <p:nvPr/>
+            </p:nvSpPr>
+            <p:spPr>
+              <a:xfrm>
+                <a:off x="3192634" y="4627316"/>
+                <a:ext cx="2465215" cy="518430"/>
+              </a:xfrm>
+              <a:prstGeom prst="flowChartProcess">
+                <a:avLst/>
+              </a:prstGeom>
+              <a:blipFill>
+                <a:blip r:embed="rId5"/>
+                <a:stretch>
+                  <a:fillRect/>
+                </a:stretch>
+              </a:blipFill>
+            </p:spPr>
+            <p:txBody>
+              <a:bodyPr/>
+              <a:lstStyle/>
+              <a:p>
+                <a:r>
+                  <a:rPr lang="zh-CN" altLang="en-US">
+                    <a:noFill/>
+                  </a:rPr>
+                  <a:t> </a:t>
+                </a:r>
+              </a:p>
+            </p:txBody>
+          </p:sp>
+        </mc:Fallback>
+      </mc:AlternateContent>
+      <p:sp>
+        <p:nvSpPr>
+          <p:cNvPr id="36" name="流程图: 过程 35">
+            <a:extLst>
+              <a:ext uri="{FF2B5EF4-FFF2-40B4-BE49-F238E27FC236}">
+                <a16:creationId xmlns:a16="http://schemas.microsoft.com/office/drawing/2014/main" id="{13A935D5-F23B-B70C-EF3F-AD1CA07ED239}"/>
+              </a:ext>
+            </a:extLst>
+          </p:cNvPr>
+          <p:cNvSpPr/>
+          <p:nvPr/>
+        </p:nvSpPr>
+        <p:spPr>
+          <a:xfrm>
+            <a:off x="3386657" y="6058090"/>
+            <a:ext cx="2077167" cy="295009"/>
+          </a:xfrm>
+          <a:prstGeom prst="flowChartProcess">
+            <a:avLst/>
+          </a:prstGeom>
+        </p:spPr>
+        <p:style>
+          <a:lnRef idx="2">
+            <a:schemeClr val="accent1">
+              <a:shade val="15000"/>
+            </a:schemeClr>
+          </a:lnRef>
+          <a:fillRef idx="1">
+            <a:schemeClr val="accent1"/>
+          </a:fillRef>
+          <a:effectRef idx="0">
+            <a:schemeClr val="accent1"/>
+          </a:effectRef>
+          <a:fontRef idx="minor">
+            <a:schemeClr val="lt1"/>
+          </a:fontRef>
+        </p:style>
+        <p:txBody>
+          <a:bodyPr rtlCol="0" anchor="ctr"/>
+          <a:lstStyle/>
+          <a:p>
+            <a:pPr algn="ctr"/>
+            <a:r>
+              <a:rPr lang="zh-CN" altLang="en-US" sz="1100" dirty="0"/>
+              <a:t>预测新的药物</a:t>
+            </a:r>
+            <a:r>
+              <a:rPr lang="en-US" altLang="zh-CN" sz="1100" dirty="0"/>
+              <a:t>-</a:t>
+            </a:r>
+            <a:r>
+              <a:rPr lang="zh-CN" altLang="en-US" sz="1100" dirty="0"/>
+              <a:t>蛋白质相互作用</a:t>
+            </a:r>
+          </a:p>
+        </p:txBody>
+      </p:sp>
+      <p:sp>
+        <p:nvSpPr>
+          <p:cNvPr id="37" name="流程图: 过程 36">
+            <a:extLst>
+              <a:ext uri="{FF2B5EF4-FFF2-40B4-BE49-F238E27FC236}">
+                <a16:creationId xmlns:a16="http://schemas.microsoft.com/office/drawing/2014/main" id="{D0C57802-E470-5BC4-A869-B283B5B79B2D}"/>
+              </a:ext>
+            </a:extLst>
+          </p:cNvPr>
+          <p:cNvSpPr/>
+          <p:nvPr/>
+        </p:nvSpPr>
+        <p:spPr>
+          <a:xfrm>
+            <a:off x="6171933" y="6050452"/>
+            <a:ext cx="2152648" cy="295009"/>
+          </a:xfrm>
+          <a:prstGeom prst="flowChartProcess">
+            <a:avLst/>
+          </a:prstGeom>
+        </p:spPr>
+        <p:style>
+          <a:lnRef idx="2">
+            <a:schemeClr val="accent1">
+              <a:shade val="15000"/>
+            </a:schemeClr>
+          </a:lnRef>
+          <a:fillRef idx="1">
+            <a:schemeClr val="accent1"/>
+          </a:fillRef>
+          <a:effectRef idx="0">
+            <a:schemeClr val="accent1"/>
+          </a:effectRef>
+          <a:fontRef idx="minor">
+            <a:schemeClr val="lt1"/>
+          </a:fontRef>
+        </p:style>
+        <p:txBody>
+          <a:bodyPr rtlCol="0" anchor="ctr"/>
+          <a:lstStyle/>
+          <a:p>
+            <a:pPr algn="ctr"/>
+            <a:r>
+              <a:rPr lang="zh-CN" altLang="en-US" sz="1100" dirty="0"/>
+              <a:t>训练一个分类器并进行交叉验证</a:t>
+            </a:r>
+          </a:p>
+        </p:txBody>
+      </p:sp>
+      <mc:AlternateContent xmlns:mc="http://schemas.openxmlformats.org/markup-compatibility/2006">
+        <mc:Choice xmlns:a14="http://schemas.microsoft.com/office/drawing/2010/main" Requires="a14">
+          <p:sp>
+            <p:nvSpPr>
+              <p:cNvPr id="38" name="流程图: 过程 37">
+                <a:extLst>
+                  <a:ext uri="{FF2B5EF4-FFF2-40B4-BE49-F238E27FC236}">
+                    <a16:creationId xmlns:a16="http://schemas.microsoft.com/office/drawing/2014/main" id="{26288E8A-8506-BB64-5E82-1545C2107EDD}"/>
+                  </a:ext>
+                </a:extLst>
+              </p:cNvPr>
+              <p:cNvSpPr/>
+              <p:nvPr/>
+            </p:nvSpPr>
+            <p:spPr>
+              <a:xfrm>
+                <a:off x="5943599" y="3567795"/>
+                <a:ext cx="2465215" cy="518430"/>
+              </a:xfrm>
+              <a:prstGeom prst="flowChartProcess">
+                <a:avLst/>
+              </a:prstGeom>
+            </p:spPr>
+            <p:style>
+              <a:lnRef idx="2">
+                <a:schemeClr val="accent1">
+                  <a:shade val="15000"/>
+                </a:schemeClr>
+              </a:lnRef>
+              <a:fillRef idx="1">
+                <a:schemeClr val="accent1"/>
+              </a:fillRef>
+              <a:effectRef idx="0">
+                <a:schemeClr val="accent1"/>
+              </a:effectRef>
+              <a:fontRef idx="minor">
+                <a:schemeClr val="lt1"/>
+              </a:fontRef>
+            </p:style>
+            <p:txBody>
+              <a:bodyPr rtlCol="0" anchor="ctr"/>
+              <a:lstStyle/>
+              <a:p>
+                <a:pPr algn="ctr"/>
+                <a:r>
+                  <a:rPr lang="zh-CN" altLang="en-US" sz="1100" dirty="0"/>
+                  <a:t>针对</a:t>
+                </a:r>
+                <a14:m>
+                  <m:oMath xmlns:m="http://schemas.openxmlformats.org/officeDocument/2006/math">
+                    <m:sSub>
+                      <m:sSubPr>
+                        <m:ctrlPr>
+                          <a:rPr lang="en-US" altLang="zh-CN" sz="1100" i="1" smtClean="0">
+                            <a:latin typeface="Cambria Math" panose="02040503050406030204" pitchFamily="18" charset="0"/>
+                          </a:rPr>
+                        </m:ctrlPr>
+                      </m:sSubPr>
+                      <m:e>
+                        <m:r>
+                          <a:rPr lang="en-US" altLang="zh-CN" sz="1100" b="0" i="1" smtClean="0">
+                            <a:latin typeface="Cambria Math" panose="02040503050406030204" pitchFamily="18" charset="0"/>
+                          </a:rPr>
+                          <m:t>𝑐</m:t>
+                        </m:r>
+                      </m:e>
+                      <m:sub>
+                        <m:r>
+                          <a:rPr lang="en-US" altLang="zh-CN" sz="1100" b="0" i="1" smtClean="0">
+                            <a:latin typeface="Cambria Math" panose="02040503050406030204" pitchFamily="18" charset="0"/>
+                          </a:rPr>
+                          <m:t>𝑘</m:t>
+                        </m:r>
+                      </m:sub>
+                    </m:sSub>
+                    <m:r>
+                      <a:rPr lang="en-US" altLang="zh-CN" sz="1100" b="0" i="1" smtClean="0">
+                        <a:latin typeface="Cambria Math" panose="02040503050406030204" pitchFamily="18" charset="0"/>
+                      </a:rPr>
+                      <m:t>(</m:t>
+                    </m:r>
+                    <m:sSub>
+                      <m:sSubPr>
+                        <m:ctrlPr>
+                          <a:rPr lang="en-US" altLang="zh-CN" sz="1100" b="0" i="1" smtClean="0">
+                            <a:latin typeface="Cambria Math" panose="02040503050406030204" pitchFamily="18" charset="0"/>
+                          </a:rPr>
+                        </m:ctrlPr>
+                      </m:sSubPr>
+                      <m:e>
+                        <m:r>
+                          <a:rPr lang="en-US" altLang="zh-CN" sz="1100" b="0" i="1" smtClean="0">
+                            <a:latin typeface="Cambria Math" panose="02040503050406030204" pitchFamily="18" charset="0"/>
+                          </a:rPr>
+                          <m:t>𝑆𝑃𝐶</m:t>
+                        </m:r>
+                      </m:e>
+                      <m:sub>
+                        <m:r>
+                          <a:rPr lang="en-US" altLang="zh-CN" sz="1100" b="0" i="1" smtClean="0">
+                            <a:latin typeface="Cambria Math" panose="02040503050406030204" pitchFamily="18" charset="0"/>
+                          </a:rPr>
+                          <m:t>𝑗𝑘</m:t>
+                        </m:r>
+                      </m:sub>
+                    </m:sSub>
+                    <m:r>
+                      <a:rPr lang="en-US" altLang="zh-CN" sz="1100" b="0" i="1" smtClean="0">
+                        <a:latin typeface="Cambria Math" panose="02040503050406030204" pitchFamily="18" charset="0"/>
+                      </a:rPr>
+                      <m:t>=</m:t>
+                    </m:r>
+                    <m:nary>
+                      <m:naryPr>
+                        <m:chr m:val="∑"/>
+                        <m:limLoc m:val="subSup"/>
+                        <m:supHide m:val="on"/>
+                        <m:ctrlPr>
+                          <a:rPr lang="en-US" altLang="zh-CN" sz="1100" b="0" i="1" smtClean="0">
+                            <a:latin typeface="Cambria Math" panose="02040503050406030204" pitchFamily="18" charset="0"/>
+                          </a:rPr>
+                        </m:ctrlPr>
+                      </m:naryPr>
+                      <m:sub>
+                        <m:r>
+                          <m:rPr>
+                            <m:brk m:alnAt="9"/>
+                          </m:rPr>
+                          <a:rPr lang="en-US" altLang="zh-CN" sz="1100" b="0" i="1" smtClean="0">
+                            <a:latin typeface="Cambria Math" panose="02040503050406030204" pitchFamily="18" charset="0"/>
+                          </a:rPr>
+                          <m:t>𝑙</m:t>
+                        </m:r>
+                      </m:sub>
+                      <m:sup/>
+                      <m:e>
+                        <m:sSub>
+                          <m:sSubPr>
+                            <m:ctrlPr>
+                              <a:rPr lang="en-US" altLang="zh-CN" sz="1100" b="0" i="1" smtClean="0">
+                                <a:latin typeface="Cambria Math" panose="02040503050406030204" pitchFamily="18" charset="0"/>
+                              </a:rPr>
+                            </m:ctrlPr>
+                          </m:sSubPr>
+                          <m:e>
+                            <m:r>
+                              <a:rPr lang="en-US" altLang="zh-CN" sz="1100" b="0" i="1" smtClean="0">
+                                <a:latin typeface="Cambria Math" panose="02040503050406030204" pitchFamily="18" charset="0"/>
+                              </a:rPr>
+                              <m:t>𝑠𝑝𝑐</m:t>
+                            </m:r>
+                          </m:e>
+                          <m:sub>
+                            <m:r>
+                              <a:rPr lang="en-US" altLang="zh-CN" sz="1100" b="0" i="1" smtClean="0">
+                                <a:latin typeface="Cambria Math" panose="02040503050406030204" pitchFamily="18" charset="0"/>
+                              </a:rPr>
+                              <m:t>𝑗𝑘𝑙</m:t>
+                            </m:r>
+                          </m:sub>
+                        </m:sSub>
+                      </m:e>
+                    </m:nary>
+                    <m:r>
+                      <a:rPr lang="en-US" altLang="zh-CN" sz="1100" b="0" i="1" smtClean="0">
+                        <a:latin typeface="Cambria Math" panose="02040503050406030204" pitchFamily="18" charset="0"/>
+                      </a:rPr>
+                      <m:t>)</m:t>
+                    </m:r>
+                  </m:oMath>
+                </a14:m>
+                <a:r>
+                  <a:rPr lang="zh-CN" altLang="en-US" sz="1100" dirty="0"/>
+                  <a:t>所靶向的蛋白质，汇总</a:t>
+                </a:r>
+                <a14:m>
+                  <m:oMath xmlns:m="http://schemas.openxmlformats.org/officeDocument/2006/math">
+                    <m:sSub>
+                      <m:sSubPr>
+                        <m:ctrlPr>
+                          <a:rPr lang="en-US" altLang="zh-CN" sz="1100" i="1">
+                            <a:latin typeface="Cambria Math" panose="02040503050406030204" pitchFamily="18" charset="0"/>
+                          </a:rPr>
+                        </m:ctrlPr>
+                      </m:sSubPr>
+                      <m:e>
+                        <m:r>
+                          <a:rPr lang="en-US" altLang="zh-CN" sz="1100" i="1">
+                            <a:latin typeface="Cambria Math" panose="02040503050406030204" pitchFamily="18" charset="0"/>
+                          </a:rPr>
+                          <m:t>𝑠𝑝𝑐</m:t>
+                        </m:r>
+                      </m:e>
+                      <m:sub>
+                        <m:r>
+                          <a:rPr lang="en-US" altLang="zh-CN" sz="1100" i="1">
+                            <a:latin typeface="Cambria Math" panose="02040503050406030204" pitchFamily="18" charset="0"/>
+                          </a:rPr>
+                          <m:t>𝑗𝑘𝑙</m:t>
+                        </m:r>
+                      </m:sub>
+                    </m:sSub>
+                  </m:oMath>
+                </a14:m>
+                <a:r>
+                  <a:rPr lang="zh-CN" altLang="en-US" sz="1100" dirty="0"/>
+                  <a:t>得分</a:t>
+                </a:r>
+              </a:p>
+            </p:txBody>
+          </p:sp>
+        </mc:Choice>
+        <mc:Fallback>
+          <p:sp>
+            <p:nvSpPr>
+              <p:cNvPr id="38" name="流程图: 过程 37">
+                <a:extLst>
+                  <a:ext uri="{FF2B5EF4-FFF2-40B4-BE49-F238E27FC236}">
+                    <a16:creationId xmlns:a16="http://schemas.microsoft.com/office/drawing/2014/main" id="{26288E8A-8506-BB64-5E82-1545C2107EDD}"/>
+                  </a:ext>
+                </a:extLst>
+              </p:cNvPr>
+              <p:cNvSpPr>
+                <a:spLocks noRot="1" noChangeAspect="1" noMove="1" noResize="1" noEditPoints="1" noAdjustHandles="1" noChangeArrowheads="1" noChangeShapeType="1" noTextEdit="1"/>
+              </p:cNvSpPr>
+              <p:nvPr/>
+            </p:nvSpPr>
+            <p:spPr>
+              <a:xfrm>
+                <a:off x="5943599" y="3567795"/>
+                <a:ext cx="2465215" cy="518430"/>
+              </a:xfrm>
+              <a:prstGeom prst="flowChartProcess">
+                <a:avLst/>
+              </a:prstGeom>
+              <a:blipFill>
+                <a:blip r:embed="rId6"/>
+                <a:stretch>
+                  <a:fillRect t="-37500" b="-30682"/>
+                </a:stretch>
+              </a:blipFill>
+            </p:spPr>
+            <p:txBody>
+              <a:bodyPr/>
+              <a:lstStyle/>
+              <a:p>
+                <a:r>
+                  <a:rPr lang="zh-CN" altLang="en-US">
+                    <a:noFill/>
+                  </a:rPr>
+                  <a:t> </a:t>
+                </a:r>
+              </a:p>
+            </p:txBody>
+          </p:sp>
+        </mc:Fallback>
+      </mc:AlternateContent>
+      <mc:AlternateContent xmlns:mc="http://schemas.openxmlformats.org/markup-compatibility/2006">
+        <mc:Choice xmlns:a14="http://schemas.microsoft.com/office/drawing/2010/main" Requires="a14">
+          <p:sp>
+            <p:nvSpPr>
+              <p:cNvPr id="39" name="流程图: 过程 38">
+                <a:extLst>
+                  <a:ext uri="{FF2B5EF4-FFF2-40B4-BE49-F238E27FC236}">
+                    <a16:creationId xmlns:a16="http://schemas.microsoft.com/office/drawing/2014/main" id="{4622EF61-C730-C078-F8D0-C4E014C945BE}"/>
+                  </a:ext>
+                </a:extLst>
+              </p:cNvPr>
+              <p:cNvSpPr/>
+              <p:nvPr/>
+            </p:nvSpPr>
+            <p:spPr>
+              <a:xfrm>
+                <a:off x="5943598" y="4627316"/>
+                <a:ext cx="2465215" cy="518430"/>
+              </a:xfrm>
+              <a:prstGeom prst="flowChartProcess">
+                <a:avLst/>
+              </a:prstGeom>
+            </p:spPr>
+            <p:style>
+              <a:lnRef idx="2">
+                <a:schemeClr val="accent1">
+                  <a:shade val="15000"/>
+                </a:schemeClr>
+              </a:lnRef>
+              <a:fillRef idx="1">
+                <a:schemeClr val="accent1"/>
+              </a:fillRef>
+              <a:effectRef idx="0">
+                <a:schemeClr val="accent1"/>
+              </a:effectRef>
+              <a:fontRef idx="minor">
+                <a:schemeClr val="lt1"/>
+              </a:fontRef>
+            </p:style>
+            <p:txBody>
+              <a:bodyPr rtlCol="0" anchor="ctr"/>
+              <a:lstStyle/>
+              <a:p>
+                <a:pPr algn="ctr"/>
+                <a:r>
+                  <a:rPr lang="zh-CN" altLang="en-US" sz="1100" dirty="0"/>
+                  <a:t>针对作用于</a:t>
+                </a:r>
+                <a14:m>
+                  <m:oMath xmlns:m="http://schemas.openxmlformats.org/officeDocument/2006/math">
+                    <m:sSub>
+                      <m:sSubPr>
+                        <m:ctrlPr>
+                          <a:rPr lang="en-US" altLang="zh-CN" sz="1100" i="1" smtClean="0">
+                            <a:latin typeface="Cambria Math" panose="02040503050406030204" pitchFamily="18" charset="0"/>
+                          </a:rPr>
+                        </m:ctrlPr>
+                      </m:sSubPr>
+                      <m:e>
+                        <m:r>
+                          <a:rPr lang="en-US" altLang="zh-CN" sz="1100" b="0" i="1" smtClean="0">
+                            <a:latin typeface="Cambria Math" panose="02040503050406030204" pitchFamily="18" charset="0"/>
+                          </a:rPr>
+                          <m:t>𝑝</m:t>
+                        </m:r>
+                      </m:e>
+                      <m:sub>
+                        <m:r>
+                          <a:rPr lang="en-US" altLang="zh-CN" sz="1100" b="0" i="1" smtClean="0">
+                            <a:latin typeface="Cambria Math" panose="02040503050406030204" pitchFamily="18" charset="0"/>
+                          </a:rPr>
+                          <m:t>𝑗</m:t>
+                        </m:r>
+                      </m:sub>
+                    </m:sSub>
+                    <m:d>
+                      <m:dPr>
+                        <m:ctrlPr>
+                          <a:rPr lang="en-US" altLang="zh-CN" sz="1100" b="0" i="1" smtClean="0">
+                            <a:latin typeface="Cambria Math" panose="02040503050406030204" pitchFamily="18" charset="0"/>
+                          </a:rPr>
+                        </m:ctrlPr>
+                      </m:dPr>
+                      <m:e>
+                        <m:sSub>
+                          <m:sSubPr>
+                            <m:ctrlPr>
+                              <a:rPr lang="en-US" altLang="zh-CN" sz="1100" b="0" i="1" smtClean="0">
+                                <a:latin typeface="Cambria Math" panose="02040503050406030204" pitchFamily="18" charset="0"/>
+                              </a:rPr>
+                            </m:ctrlPr>
+                          </m:sSubPr>
+                          <m:e>
+                            <m:r>
+                              <a:rPr lang="en-US" altLang="zh-CN" sz="1100" b="0" i="1" smtClean="0">
+                                <a:latin typeface="Cambria Math" panose="02040503050406030204" pitchFamily="18" charset="0"/>
+                              </a:rPr>
+                              <m:t>𝑆𝐶𝑃</m:t>
+                            </m:r>
+                          </m:e>
+                          <m:sub>
+                            <m:r>
+                              <a:rPr lang="en-US" altLang="zh-CN" sz="1100" b="0" i="1" smtClean="0">
+                                <a:latin typeface="Cambria Math" panose="02040503050406030204" pitchFamily="18" charset="0"/>
+                              </a:rPr>
+                              <m:t>𝑘𝑗</m:t>
+                            </m:r>
+                          </m:sub>
+                        </m:sSub>
+                        <m:r>
+                          <a:rPr lang="en-US" altLang="zh-CN" sz="1100" b="0" i="1" smtClean="0">
+                            <a:latin typeface="Cambria Math" panose="02040503050406030204" pitchFamily="18" charset="0"/>
+                          </a:rPr>
+                          <m:t>=</m:t>
+                        </m:r>
+                        <m:nary>
+                          <m:naryPr>
+                            <m:chr m:val="∑"/>
+                            <m:limLoc m:val="subSup"/>
+                            <m:supHide m:val="on"/>
+                            <m:ctrlPr>
+                              <a:rPr lang="en-US" altLang="zh-CN" sz="1100" b="0" i="1" smtClean="0">
+                                <a:latin typeface="Cambria Math" panose="02040503050406030204" pitchFamily="18" charset="0"/>
+                              </a:rPr>
+                            </m:ctrlPr>
+                          </m:naryPr>
+                          <m:sub>
+                            <m:r>
+                              <m:rPr>
+                                <m:brk m:alnAt="9"/>
+                              </m:rPr>
+                              <a:rPr lang="en-US" altLang="zh-CN" sz="1100" b="0" i="1" smtClean="0">
+                                <a:latin typeface="Cambria Math" panose="02040503050406030204" pitchFamily="18" charset="0"/>
+                              </a:rPr>
+                              <m:t>𝑖</m:t>
+                            </m:r>
+                          </m:sub>
+                          <m:sup/>
+                          <m:e>
+                            <m:sSub>
+                              <m:sSubPr>
+                                <m:ctrlPr>
+                                  <a:rPr lang="en-US" altLang="zh-CN" sz="1100" b="0" i="1" smtClean="0">
+                                    <a:latin typeface="Cambria Math" panose="02040503050406030204" pitchFamily="18" charset="0"/>
+                                  </a:rPr>
+                                </m:ctrlPr>
+                              </m:sSubPr>
+                              <m:e>
+                                <m:r>
+                                  <a:rPr lang="en-US" altLang="zh-CN" sz="1100" b="0" i="1" smtClean="0">
+                                    <a:latin typeface="Cambria Math" panose="02040503050406030204" pitchFamily="18" charset="0"/>
+                                  </a:rPr>
+                                  <m:t>𝑠𝑐𝑝</m:t>
+                                </m:r>
+                              </m:e>
+                              <m:sub>
+                                <m:r>
+                                  <a:rPr lang="en-US" altLang="zh-CN" sz="1100" b="0" i="1" smtClean="0">
+                                    <a:latin typeface="Cambria Math" panose="02040503050406030204" pitchFamily="18" charset="0"/>
+                                  </a:rPr>
+                                  <m:t>𝑘𝑗𝑖</m:t>
+                                </m:r>
+                              </m:sub>
+                            </m:sSub>
+                          </m:e>
+                        </m:nary>
+                      </m:e>
+                    </m:d>
+                  </m:oMath>
+                </a14:m>
+                <a:r>
+                  <a:rPr lang="zh-CN" altLang="en-US" sz="1100" dirty="0"/>
+                  <a:t>的药物，汇总</a:t>
+                </a:r>
+                <a14:m>
+                  <m:oMath xmlns:m="http://schemas.openxmlformats.org/officeDocument/2006/math">
+                    <m:sSub>
+                      <m:sSubPr>
+                        <m:ctrlPr>
+                          <a:rPr lang="en-US" altLang="zh-CN" sz="1100" i="1">
+                            <a:latin typeface="Cambria Math" panose="02040503050406030204" pitchFamily="18" charset="0"/>
+                          </a:rPr>
+                        </m:ctrlPr>
+                      </m:sSubPr>
+                      <m:e>
+                        <m:r>
+                          <a:rPr lang="en-US" altLang="zh-CN" sz="1100" i="1">
+                            <a:latin typeface="Cambria Math" panose="02040503050406030204" pitchFamily="18" charset="0"/>
+                          </a:rPr>
+                          <m:t>𝑠𝑐𝑝</m:t>
+                        </m:r>
+                      </m:e>
+                      <m:sub>
+                        <m:r>
+                          <a:rPr lang="en-US" altLang="zh-CN" sz="1100" i="1">
+                            <a:latin typeface="Cambria Math" panose="02040503050406030204" pitchFamily="18" charset="0"/>
+                          </a:rPr>
+                          <m:t>𝑘𝑗𝑖</m:t>
+                        </m:r>
+                      </m:sub>
+                    </m:sSub>
+                  </m:oMath>
+                </a14:m>
+                <a:r>
+                  <a:rPr lang="zh-CN" altLang="en-US" sz="1100" dirty="0"/>
+                  <a:t>得分</a:t>
+                </a:r>
+              </a:p>
+            </p:txBody>
+          </p:sp>
+        </mc:Choice>
+        <mc:Fallback>
+          <p:sp>
+            <p:nvSpPr>
+              <p:cNvPr id="39" name="流程图: 过程 38">
+                <a:extLst>
+                  <a:ext uri="{FF2B5EF4-FFF2-40B4-BE49-F238E27FC236}">
+                    <a16:creationId xmlns:a16="http://schemas.microsoft.com/office/drawing/2014/main" id="{4622EF61-C730-C078-F8D0-C4E014C945BE}"/>
+                  </a:ext>
+                </a:extLst>
+              </p:cNvPr>
+              <p:cNvSpPr>
+                <a:spLocks noRot="1" noChangeAspect="1" noMove="1" noResize="1" noEditPoints="1" noAdjustHandles="1" noChangeArrowheads="1" noChangeShapeType="1" noTextEdit="1"/>
+              </p:cNvSpPr>
+              <p:nvPr/>
+            </p:nvSpPr>
+            <p:spPr>
+              <a:xfrm>
+                <a:off x="5943598" y="4627316"/>
+                <a:ext cx="2465215" cy="518430"/>
+              </a:xfrm>
+              <a:prstGeom prst="flowChartProcess">
+                <a:avLst/>
+              </a:prstGeom>
+              <a:blipFill>
+                <a:blip r:embed="rId7"/>
+                <a:stretch>
+                  <a:fillRect t="-37500" b="-30682"/>
+                </a:stretch>
+              </a:blipFill>
+            </p:spPr>
+            <p:txBody>
+              <a:bodyPr/>
+              <a:lstStyle/>
+              <a:p>
+                <a:r>
+                  <a:rPr lang="zh-CN" altLang="en-US">
+                    <a:noFill/>
+                  </a:rPr>
+                  <a:t> </a:t>
+                </a:r>
+              </a:p>
+            </p:txBody>
+          </p:sp>
+        </mc:Fallback>
+      </mc:AlternateContent>
+      <mc:AlternateContent xmlns:mc="http://schemas.openxmlformats.org/markup-compatibility/2006">
+        <mc:Choice xmlns:a14="http://schemas.microsoft.com/office/drawing/2010/main" Requires="a14">
+          <p:sp>
+            <p:nvSpPr>
+              <p:cNvPr id="40" name="流程图: 过程 39">
+                <a:extLst>
+                  <a:ext uri="{FF2B5EF4-FFF2-40B4-BE49-F238E27FC236}">
+                    <a16:creationId xmlns:a16="http://schemas.microsoft.com/office/drawing/2014/main" id="{B49A57D0-6548-2A34-3F64-94AFFE48E30A}"/>
+                  </a:ext>
+                </a:extLst>
+              </p:cNvPr>
+              <p:cNvSpPr/>
+              <p:nvPr/>
+            </p:nvSpPr>
+            <p:spPr>
+              <a:xfrm>
+                <a:off x="9024179" y="2795246"/>
+                <a:ext cx="2465215" cy="518430"/>
+              </a:xfrm>
+              <a:prstGeom prst="flowChartProcess">
+                <a:avLst/>
+              </a:prstGeom>
+            </p:spPr>
+            <p:style>
+              <a:lnRef idx="2">
+                <a:schemeClr val="accent1">
+                  <a:shade val="15000"/>
+                </a:schemeClr>
+              </a:lnRef>
+              <a:fillRef idx="1">
+                <a:schemeClr val="accent1"/>
+              </a:fillRef>
+              <a:effectRef idx="0">
+                <a:schemeClr val="accent1"/>
+              </a:effectRef>
+              <a:fontRef idx="minor">
+                <a:schemeClr val="lt1"/>
+              </a:fontRef>
+            </p:style>
+            <p:txBody>
+              <a:bodyPr rtlCol="0" anchor="ctr"/>
+              <a:lstStyle/>
+              <a:p>
+                <a:pPr algn="ctr"/>
+                <a:r>
+                  <a:rPr lang="zh-CN" altLang="en-US" sz="1100" dirty="0"/>
+                  <a:t>计算</a:t>
+                </a:r>
+                <a14:m>
+                  <m:oMath xmlns:m="http://schemas.openxmlformats.org/officeDocument/2006/math">
+                    <m:sSub>
+                      <m:sSubPr>
+                        <m:ctrlPr>
+                          <a:rPr lang="en-US" altLang="zh-CN" sz="1100" i="1">
+                            <a:latin typeface="Cambria Math" panose="02040503050406030204" pitchFamily="18" charset="0"/>
+                          </a:rPr>
+                        </m:ctrlPr>
+                      </m:sSubPr>
+                      <m:e>
+                        <m:r>
+                          <a:rPr lang="en-US" altLang="zh-CN" sz="1100" i="1">
+                            <a:latin typeface="Cambria Math" panose="02040503050406030204" pitchFamily="18" charset="0"/>
+                          </a:rPr>
+                          <m:t>𝑐</m:t>
+                        </m:r>
+                      </m:e>
+                      <m:sub>
+                        <m:r>
+                          <a:rPr lang="en-US" altLang="zh-CN" sz="1100" i="1">
+                            <a:latin typeface="Cambria Math" panose="02040503050406030204" pitchFamily="18" charset="0"/>
+                          </a:rPr>
+                          <m:t>𝑘</m:t>
+                        </m:r>
+                      </m:sub>
+                    </m:sSub>
+                  </m:oMath>
+                </a14:m>
+                <a:r>
+                  <a:rPr lang="zh-CN" altLang="en-US" sz="1100" dirty="0"/>
+                  <a:t>与</a:t>
+                </a:r>
+                <a14:m>
+                  <m:oMath xmlns:m="http://schemas.openxmlformats.org/officeDocument/2006/math">
+                    <m:sSub>
+                      <m:sSubPr>
+                        <m:ctrlPr>
+                          <a:rPr lang="en-US" altLang="zh-CN" sz="1100" i="1">
+                            <a:latin typeface="Cambria Math" panose="02040503050406030204" pitchFamily="18" charset="0"/>
+                          </a:rPr>
+                        </m:ctrlPr>
+                      </m:sSubPr>
+                      <m:e>
+                        <m:r>
+                          <a:rPr lang="en-US" altLang="zh-CN" sz="1100" i="1">
+                            <a:latin typeface="Cambria Math" panose="02040503050406030204" pitchFamily="18" charset="0"/>
+                          </a:rPr>
+                          <m:t>𝑝</m:t>
+                        </m:r>
+                      </m:e>
+                      <m:sub>
+                        <m:r>
+                          <a:rPr lang="en-US" altLang="zh-CN" sz="1100" i="1">
+                            <a:latin typeface="Cambria Math" panose="02040503050406030204" pitchFamily="18" charset="0"/>
+                          </a:rPr>
+                          <m:t>𝑗</m:t>
+                        </m:r>
+                      </m:sub>
+                    </m:sSub>
+                  </m:oMath>
+                </a14:m>
+                <a:r>
+                  <a:rPr lang="zh-CN" altLang="en-US" sz="1100" dirty="0"/>
+                  <a:t>之间的距离</a:t>
+                </a:r>
+                <a:br>
+                  <a:rPr lang="en-US" altLang="zh-CN" sz="1100" dirty="0"/>
+                </a:br>
+                <a14:m>
+                  <m:oMathPara xmlns:m="http://schemas.openxmlformats.org/officeDocument/2006/math">
+                    <m:oMathParaPr>
+                      <m:jc m:val="centerGroup"/>
+                    </m:oMathParaPr>
+                    <m:oMath xmlns:m="http://schemas.openxmlformats.org/officeDocument/2006/math">
+                      <m:sSub>
+                        <m:sSubPr>
+                          <m:ctrlPr>
+                            <a:rPr lang="en-US" altLang="zh-CN" sz="1100" b="0" i="1" smtClean="0">
+                              <a:latin typeface="Cambria Math" panose="02040503050406030204" pitchFamily="18" charset="0"/>
+                            </a:rPr>
+                          </m:ctrlPr>
+                        </m:sSubPr>
+                        <m:e>
+                          <m:r>
+                            <a:rPr lang="en-US" altLang="zh-CN" sz="1100" b="0" i="1" smtClean="0">
+                              <a:latin typeface="Cambria Math" panose="02040503050406030204" pitchFamily="18" charset="0"/>
+                            </a:rPr>
+                            <m:t>𝑑</m:t>
+                          </m:r>
+                        </m:e>
+                        <m:sub>
+                          <m:r>
+                            <a:rPr lang="en-US" altLang="zh-CN" sz="1100" b="0" i="1" smtClean="0">
+                              <a:latin typeface="Cambria Math" panose="02040503050406030204" pitchFamily="18" charset="0"/>
+                            </a:rPr>
+                            <m:t>𝑘𝑗</m:t>
+                          </m:r>
+                        </m:sub>
+                      </m:sSub>
+                      <m:r>
+                        <a:rPr lang="en-US" altLang="zh-CN" sz="1100" b="0" i="1" smtClean="0">
+                          <a:latin typeface="Cambria Math" panose="02040503050406030204" pitchFamily="18" charset="0"/>
+                        </a:rPr>
+                        <m:t>=</m:t>
+                      </m:r>
+                      <m:r>
+                        <m:rPr>
+                          <m:sty m:val="p"/>
+                        </m:rPr>
+                        <a:rPr lang="en-US" altLang="zh-CN" sz="1100" b="0" i="0" smtClean="0">
+                          <a:latin typeface="Cambria Math" panose="02040503050406030204" pitchFamily="18" charset="0"/>
+                        </a:rPr>
+                        <m:t>exp</m:t>
+                      </m:r>
+                      <m:r>
+                        <a:rPr lang="en-US" altLang="zh-CN" sz="1100" b="0" i="1" smtClean="0">
+                          <a:latin typeface="Cambria Math" panose="02040503050406030204" pitchFamily="18" charset="0"/>
+                        </a:rPr>
+                        <m:t>⁡(−</m:t>
+                      </m:r>
+                      <m:sSub>
+                        <m:sSubPr>
+                          <m:ctrlPr>
+                            <a:rPr lang="en-US" altLang="zh-CN" sz="1100" b="0" i="1" smtClean="0">
+                              <a:latin typeface="Cambria Math" panose="02040503050406030204" pitchFamily="18" charset="0"/>
+                            </a:rPr>
+                          </m:ctrlPr>
+                        </m:sSubPr>
+                        <m:e>
+                          <m:r>
+                            <a:rPr lang="en-US" altLang="zh-CN" sz="1100" b="0" i="1" smtClean="0">
+                              <a:latin typeface="Cambria Math" panose="02040503050406030204" pitchFamily="18" charset="0"/>
+                            </a:rPr>
+                            <m:t>𝑆𝑃𝐶</m:t>
+                          </m:r>
+                        </m:e>
+                        <m:sub>
+                          <m:r>
+                            <a:rPr lang="en-US" altLang="zh-CN" sz="1100" b="0" i="1" smtClean="0">
+                              <a:latin typeface="Cambria Math" panose="02040503050406030204" pitchFamily="18" charset="0"/>
+                            </a:rPr>
+                            <m:t>𝑗𝑘</m:t>
+                          </m:r>
+                        </m:sub>
+                      </m:sSub>
+                      <m:r>
+                        <a:rPr lang="en-US" altLang="zh-CN" sz="1100" b="0" i="1" smtClean="0">
+                          <a:latin typeface="Cambria Math" panose="02040503050406030204" pitchFamily="18" charset="0"/>
+                        </a:rPr>
+                        <m:t>+</m:t>
+                      </m:r>
+                      <m:sSub>
+                        <m:sSubPr>
+                          <m:ctrlPr>
+                            <a:rPr lang="en-US" altLang="zh-CN" sz="1100" b="0" i="1" smtClean="0">
+                              <a:latin typeface="Cambria Math" panose="02040503050406030204" pitchFamily="18" charset="0"/>
+                            </a:rPr>
+                          </m:ctrlPr>
+                        </m:sSubPr>
+                        <m:e>
+                          <m:r>
+                            <a:rPr lang="en-US" altLang="zh-CN" sz="1100" b="0" i="1" smtClean="0">
+                              <a:latin typeface="Cambria Math" panose="02040503050406030204" pitchFamily="18" charset="0"/>
+                            </a:rPr>
+                            <m:t>𝑆𝐶𝑃</m:t>
+                          </m:r>
+                        </m:e>
+                        <m:sub>
+                          <m:r>
+                            <a:rPr lang="en-US" altLang="zh-CN" sz="1100" b="0" i="1" smtClean="0">
+                              <a:latin typeface="Cambria Math" panose="02040503050406030204" pitchFamily="18" charset="0"/>
+                            </a:rPr>
+                            <m:t>𝑘𝑗</m:t>
+                          </m:r>
+                        </m:sub>
+                      </m:sSub>
+                      <m:r>
+                        <a:rPr lang="en-US" altLang="zh-CN" sz="1100" b="0" i="1" smtClean="0">
+                          <a:latin typeface="Cambria Math" panose="02040503050406030204" pitchFamily="18" charset="0"/>
+                        </a:rPr>
+                        <m:t>)</m:t>
+                      </m:r>
+                    </m:oMath>
+                  </m:oMathPara>
+                </a14:m>
+                <a:endParaRPr lang="zh-CN" altLang="en-US" sz="1100" dirty="0"/>
+              </a:p>
+            </p:txBody>
+          </p:sp>
+        </mc:Choice>
+        <mc:Fallback>
+          <p:sp>
+            <p:nvSpPr>
+              <p:cNvPr id="40" name="流程图: 过程 39">
+                <a:extLst>
+                  <a:ext uri="{FF2B5EF4-FFF2-40B4-BE49-F238E27FC236}">
+                    <a16:creationId xmlns:a16="http://schemas.microsoft.com/office/drawing/2014/main" id="{B49A57D0-6548-2A34-3F64-94AFFE48E30A}"/>
+                  </a:ext>
+                </a:extLst>
+              </p:cNvPr>
+              <p:cNvSpPr>
+                <a:spLocks noRot="1" noChangeAspect="1" noMove="1" noResize="1" noEditPoints="1" noAdjustHandles="1" noChangeArrowheads="1" noChangeShapeType="1" noTextEdit="1"/>
+              </p:cNvSpPr>
+              <p:nvPr/>
+            </p:nvSpPr>
+            <p:spPr>
+              <a:xfrm>
+                <a:off x="9024179" y="2795246"/>
+                <a:ext cx="2465215" cy="518430"/>
+              </a:xfrm>
+              <a:prstGeom prst="flowChartProcess">
+                <a:avLst/>
+              </a:prstGeom>
+              <a:blipFill>
+                <a:blip r:embed="rId8"/>
+                <a:stretch>
+                  <a:fillRect/>
+                </a:stretch>
+              </a:blipFill>
+            </p:spPr>
+            <p:txBody>
+              <a:bodyPr/>
+              <a:lstStyle/>
+              <a:p>
+                <a:r>
+                  <a:rPr lang="zh-CN" altLang="en-US">
+                    <a:noFill/>
+                  </a:rPr>
+                  <a:t> </a:t>
+                </a:r>
+              </a:p>
+            </p:txBody>
+          </p:sp>
+        </mc:Fallback>
+      </mc:AlternateContent>
+      <mc:AlternateContent xmlns:mc="http://schemas.openxmlformats.org/markup-compatibility/2006">
+        <mc:Choice xmlns:a14="http://schemas.microsoft.com/office/drawing/2010/main" Requires="a14">
+          <p:sp>
+            <p:nvSpPr>
+              <p:cNvPr id="41" name="流程图: 过程 40">
+                <a:extLst>
+                  <a:ext uri="{FF2B5EF4-FFF2-40B4-BE49-F238E27FC236}">
+                    <a16:creationId xmlns:a16="http://schemas.microsoft.com/office/drawing/2014/main" id="{0909D5E8-45AB-DB28-D5C6-C929BB6BF549}"/>
+                  </a:ext>
+                </a:extLst>
+              </p:cNvPr>
+              <p:cNvSpPr/>
+              <p:nvPr/>
+            </p:nvSpPr>
+            <p:spPr>
+              <a:xfrm>
+                <a:off x="9024178" y="3706621"/>
+                <a:ext cx="2465215" cy="518430"/>
+              </a:xfrm>
+              <a:prstGeom prst="flowChartProcess">
+                <a:avLst/>
+              </a:prstGeom>
+            </p:spPr>
+            <p:style>
+              <a:lnRef idx="2">
+                <a:schemeClr val="accent1">
+                  <a:shade val="15000"/>
+                </a:schemeClr>
+              </a:lnRef>
+              <a:fillRef idx="1">
+                <a:schemeClr val="accent1"/>
+              </a:fillRef>
+              <a:effectRef idx="0">
+                <a:schemeClr val="accent1"/>
+              </a:effectRef>
+              <a:fontRef idx="minor">
+                <a:schemeClr val="lt1"/>
+              </a:fontRef>
+            </p:style>
+            <p:txBody>
+              <a:bodyPr rtlCol="0" anchor="ctr"/>
+              <a:lstStyle/>
+              <a:p>
+                <a:pPr algn="ctr"/>
+                <a:r>
+                  <a:rPr lang="zh-CN" altLang="en-US" sz="1100" dirty="0"/>
+                  <a:t>针对</a:t>
+                </a:r>
+                <a14:m>
+                  <m:oMath xmlns:m="http://schemas.openxmlformats.org/officeDocument/2006/math">
+                    <m:sSub>
+                      <m:sSubPr>
+                        <m:ctrlPr>
+                          <a:rPr lang="en-US" altLang="zh-CN" sz="1100" i="1">
+                            <a:latin typeface="Cambria Math" panose="02040503050406030204" pitchFamily="18" charset="0"/>
+                          </a:rPr>
+                        </m:ctrlPr>
+                      </m:sSubPr>
+                      <m:e>
+                        <m:r>
+                          <a:rPr lang="en-US" altLang="zh-CN" sz="1100" i="1">
+                            <a:latin typeface="Cambria Math" panose="02040503050406030204" pitchFamily="18" charset="0"/>
+                          </a:rPr>
+                          <m:t>𝑑</m:t>
+                        </m:r>
+                      </m:e>
+                      <m:sub>
+                        <m:r>
+                          <a:rPr lang="en-US" altLang="zh-CN" sz="1100" i="1">
+                            <a:latin typeface="Cambria Math" panose="02040503050406030204" pitchFamily="18" charset="0"/>
+                          </a:rPr>
+                          <m:t>𝑘𝑗</m:t>
+                        </m:r>
+                      </m:sub>
+                    </m:sSub>
+                  </m:oMath>
+                </a14:m>
+                <a:r>
+                  <a:rPr lang="zh-CN" altLang="en-US" sz="1100" dirty="0"/>
+                  <a:t>对相互作用排序，并选出负样本候选</a:t>
+                </a:r>
+              </a:p>
+            </p:txBody>
+          </p:sp>
+        </mc:Choice>
+        <mc:Fallback>
+          <p:sp>
+            <p:nvSpPr>
+              <p:cNvPr id="41" name="流程图: 过程 40">
+                <a:extLst>
+                  <a:ext uri="{FF2B5EF4-FFF2-40B4-BE49-F238E27FC236}">
+                    <a16:creationId xmlns:a16="http://schemas.microsoft.com/office/drawing/2014/main" id="{0909D5E8-45AB-DB28-D5C6-C929BB6BF549}"/>
+                  </a:ext>
+                </a:extLst>
+              </p:cNvPr>
+              <p:cNvSpPr>
+                <a:spLocks noRot="1" noChangeAspect="1" noMove="1" noResize="1" noEditPoints="1" noAdjustHandles="1" noChangeArrowheads="1" noChangeShapeType="1" noTextEdit="1"/>
+              </p:cNvSpPr>
+              <p:nvPr/>
+            </p:nvSpPr>
+            <p:spPr>
+              <a:xfrm>
+                <a:off x="9024178" y="3706621"/>
+                <a:ext cx="2465215" cy="518430"/>
+              </a:xfrm>
+              <a:prstGeom prst="flowChartProcess">
+                <a:avLst/>
+              </a:prstGeom>
+              <a:blipFill>
+                <a:blip r:embed="rId9"/>
+                <a:stretch>
+                  <a:fillRect/>
+                </a:stretch>
+              </a:blipFill>
+            </p:spPr>
+            <p:txBody>
+              <a:bodyPr/>
+              <a:lstStyle/>
+              <a:p>
+                <a:r>
+                  <a:rPr lang="zh-CN" altLang="en-US">
+                    <a:noFill/>
+                  </a:rPr>
+                  <a:t> </a:t>
+                </a:r>
+              </a:p>
+            </p:txBody>
+          </p:sp>
+        </mc:Fallback>
+      </mc:AlternateContent>
+      <p:sp>
+        <p:nvSpPr>
+          <p:cNvPr id="42" name="流程图: 过程 41">
+            <a:extLst>
+              <a:ext uri="{FF2B5EF4-FFF2-40B4-BE49-F238E27FC236}">
+                <a16:creationId xmlns:a16="http://schemas.microsoft.com/office/drawing/2014/main" id="{E86DD232-2625-8BF5-B151-46007C83BC97}"/>
+              </a:ext>
+            </a:extLst>
+          </p:cNvPr>
+          <p:cNvSpPr/>
+          <p:nvPr/>
+        </p:nvSpPr>
+        <p:spPr>
+          <a:xfrm>
+            <a:off x="9024178" y="4796688"/>
+            <a:ext cx="2465215" cy="518430"/>
+          </a:xfrm>
+          <a:prstGeom prst="flowChartProcess">
+            <a:avLst/>
+          </a:prstGeom>
+        </p:spPr>
+        <p:style>
+          <a:lnRef idx="2">
+            <a:schemeClr val="accent1">
+              <a:shade val="15000"/>
+            </a:schemeClr>
+          </a:lnRef>
+          <a:fillRef idx="1">
+            <a:schemeClr val="accent1"/>
+          </a:fillRef>
+          <a:effectRef idx="0">
+            <a:schemeClr val="accent1"/>
+          </a:effectRef>
+          <a:fontRef idx="minor">
+            <a:schemeClr val="lt1"/>
+          </a:fontRef>
+        </p:style>
+        <p:txBody>
+          <a:bodyPr rtlCol="0" anchor="ctr"/>
+          <a:lstStyle/>
+          <a:p>
+            <a:pPr algn="ctr"/>
+            <a:r>
+              <a:rPr lang="zh-CN" altLang="en-US" sz="1100" dirty="0"/>
+              <a:t>根据正样本数量和特征差异性筛选候选样本</a:t>
+            </a:r>
+          </a:p>
+        </p:txBody>
+      </p:sp>
+      <p:sp>
+        <p:nvSpPr>
+          <p:cNvPr id="43" name="流程图: 过程 42">
+            <a:extLst>
+              <a:ext uri="{FF2B5EF4-FFF2-40B4-BE49-F238E27FC236}">
+                <a16:creationId xmlns:a16="http://schemas.microsoft.com/office/drawing/2014/main" id="{DE29786C-A65E-5E03-ED1D-75ACEE713D0C}"/>
+              </a:ext>
+            </a:extLst>
+          </p:cNvPr>
+          <p:cNvSpPr/>
+          <p:nvPr/>
+        </p:nvSpPr>
+        <p:spPr>
+          <a:xfrm>
+            <a:off x="9023763" y="5936079"/>
+            <a:ext cx="2465215" cy="518430"/>
+          </a:xfrm>
+          <a:prstGeom prst="flowChartProcess">
+            <a:avLst/>
+          </a:prstGeom>
+        </p:spPr>
+        <p:style>
+          <a:lnRef idx="2">
+            <a:schemeClr val="accent1">
+              <a:shade val="15000"/>
+            </a:schemeClr>
+          </a:lnRef>
+          <a:fillRef idx="1">
+            <a:schemeClr val="accent1"/>
+          </a:fillRef>
+          <a:effectRef idx="0">
+            <a:schemeClr val="accent1"/>
+          </a:effectRef>
+          <a:fontRef idx="minor">
+            <a:schemeClr val="lt1"/>
+          </a:fontRef>
+        </p:style>
+        <p:txBody>
+          <a:bodyPr rtlCol="0" anchor="ctr"/>
+          <a:lstStyle/>
+          <a:p>
+            <a:pPr algn="ctr"/>
+            <a:r>
+              <a:rPr lang="zh-CN" altLang="en-US" sz="1100" dirty="0"/>
+              <a:t>构建训练集并提取化学基因组特征</a:t>
+            </a:r>
+          </a:p>
+        </p:txBody>
+      </p:sp>
+      <p:sp>
+        <p:nvSpPr>
+          <p:cNvPr id="44" name="流程图: 过程 43">
+            <a:extLst>
+              <a:ext uri="{FF2B5EF4-FFF2-40B4-BE49-F238E27FC236}">
+                <a16:creationId xmlns:a16="http://schemas.microsoft.com/office/drawing/2014/main" id="{86DA6929-0B86-C6E3-ED70-847900D34AE6}"/>
+              </a:ext>
+            </a:extLst>
+          </p:cNvPr>
+          <p:cNvSpPr/>
+          <p:nvPr/>
+        </p:nvSpPr>
+        <p:spPr>
+          <a:xfrm>
+            <a:off x="248998" y="781050"/>
+            <a:ext cx="2577229" cy="1293523"/>
+          </a:xfrm>
+          <a:prstGeom prst="flowChartProcess">
+            <a:avLst/>
+          </a:prstGeom>
+          <a:noFill/>
+          <a:ln>
+            <a:solidFill>
+              <a:schemeClr val="accent6">
+                <a:lumMod val="75000"/>
+              </a:schemeClr>
+            </a:solidFill>
+            <a:prstDash val="dashDot"/>
+          </a:ln>
+        </p:spPr>
+        <p:style>
+          <a:lnRef idx="2">
+            <a:schemeClr val="accent1">
+              <a:shade val="15000"/>
+            </a:schemeClr>
+          </a:lnRef>
+          <a:fillRef idx="1">
+            <a:schemeClr val="accent1"/>
+          </a:fillRef>
+          <a:effectRef idx="0">
+            <a:schemeClr val="accent1"/>
+          </a:effectRef>
+          <a:fontRef idx="minor">
+            <a:schemeClr val="lt1"/>
+          </a:fontRef>
+        </p:style>
+        <p:txBody>
+          <a:bodyPr rtlCol="0" anchor="ctr"/>
+          <a:lstStyle/>
+          <a:p>
+            <a:pPr algn="ctr"/>
+            <a:endParaRPr lang="zh-CN" altLang="en-US"/>
+          </a:p>
+        </p:txBody>
+      </p:sp>
+      <p:sp>
+        <p:nvSpPr>
+          <p:cNvPr id="45" name="流程图: 过程 44">
+            <a:extLst>
+              <a:ext uri="{FF2B5EF4-FFF2-40B4-BE49-F238E27FC236}">
+                <a16:creationId xmlns:a16="http://schemas.microsoft.com/office/drawing/2014/main" id="{F312380A-3D28-8A08-DB4B-7EB49116C3A3}"/>
+              </a:ext>
+            </a:extLst>
+          </p:cNvPr>
+          <p:cNvSpPr/>
+          <p:nvPr/>
+        </p:nvSpPr>
+        <p:spPr>
+          <a:xfrm>
+            <a:off x="3007510" y="793685"/>
+            <a:ext cx="2747209" cy="1293523"/>
+          </a:xfrm>
+          <a:prstGeom prst="flowChartProcess">
+            <a:avLst/>
+          </a:prstGeom>
+          <a:noFill/>
+          <a:ln>
+            <a:solidFill>
+              <a:schemeClr val="accent6">
+                <a:lumMod val="75000"/>
+              </a:schemeClr>
+            </a:solidFill>
+            <a:prstDash val="dashDot"/>
+          </a:ln>
+        </p:spPr>
+        <p:style>
+          <a:lnRef idx="2">
+            <a:schemeClr val="accent1">
+              <a:shade val="15000"/>
+            </a:schemeClr>
+          </a:lnRef>
+          <a:fillRef idx="1">
+            <a:schemeClr val="accent1"/>
+          </a:fillRef>
+          <a:effectRef idx="0">
+            <a:schemeClr val="accent1"/>
+          </a:effectRef>
+          <a:fontRef idx="minor">
+            <a:schemeClr val="lt1"/>
+          </a:fontRef>
+        </p:style>
+        <p:txBody>
+          <a:bodyPr rtlCol="0" anchor="ctr"/>
+          <a:lstStyle/>
+          <a:p>
+            <a:pPr algn="ctr"/>
+            <a:endParaRPr lang="zh-CN" altLang="en-US"/>
+          </a:p>
+        </p:txBody>
+      </p:sp>
+      <p:sp>
+        <p:nvSpPr>
+          <p:cNvPr id="46" name="流程图: 过程 45">
+            <a:extLst>
+              <a:ext uri="{FF2B5EF4-FFF2-40B4-BE49-F238E27FC236}">
+                <a16:creationId xmlns:a16="http://schemas.microsoft.com/office/drawing/2014/main" id="{2A624C13-20EA-9D91-D3D2-C65FAD0761AF}"/>
+              </a:ext>
+            </a:extLst>
+          </p:cNvPr>
+          <p:cNvSpPr/>
+          <p:nvPr/>
+        </p:nvSpPr>
+        <p:spPr>
+          <a:xfrm>
+            <a:off x="173958" y="5328001"/>
+            <a:ext cx="2438036" cy="1293523"/>
+          </a:xfrm>
+          <a:prstGeom prst="flowChartProcess">
+            <a:avLst/>
+          </a:prstGeom>
+          <a:noFill/>
+          <a:ln>
+            <a:solidFill>
+              <a:schemeClr val="accent6">
+                <a:lumMod val="75000"/>
+              </a:schemeClr>
+            </a:solidFill>
+            <a:prstDash val="dashDot"/>
+          </a:ln>
+        </p:spPr>
+        <p:style>
+          <a:lnRef idx="2">
+            <a:schemeClr val="accent1">
+              <a:shade val="15000"/>
+            </a:schemeClr>
+          </a:lnRef>
+          <a:fillRef idx="1">
+            <a:schemeClr val="accent1"/>
+          </a:fillRef>
+          <a:effectRef idx="0">
+            <a:schemeClr val="accent1"/>
+          </a:effectRef>
+          <a:fontRef idx="minor">
+            <a:schemeClr val="lt1"/>
+          </a:fontRef>
+        </p:style>
+        <p:txBody>
+          <a:bodyPr rtlCol="0" anchor="ctr"/>
+          <a:lstStyle/>
+          <a:p>
+            <a:pPr algn="ctr"/>
+            <a:endParaRPr lang="zh-CN" altLang="en-US"/>
+          </a:p>
+        </p:txBody>
+      </p:sp>
+      <p:cxnSp>
+        <p:nvCxnSpPr>
+          <p:cNvPr id="48" name="直接连接符 47">
+            <a:extLst>
+              <a:ext uri="{FF2B5EF4-FFF2-40B4-BE49-F238E27FC236}">
+                <a16:creationId xmlns:a16="http://schemas.microsoft.com/office/drawing/2014/main" id="{3319F6FF-9CC3-458D-337E-38B2BCBE8478}"/>
+              </a:ext>
+            </a:extLst>
+          </p:cNvPr>
+          <p:cNvCxnSpPr>
+            <a:cxnSpLocks/>
+          </p:cNvCxnSpPr>
+          <p:nvPr/>
+        </p:nvCxnSpPr>
+        <p:spPr>
+          <a:xfrm>
+            <a:off x="250764" y="2233149"/>
+            <a:ext cx="5492811" cy="13333"/>
+          </a:xfrm>
+          <a:prstGeom prst="line">
+            <a:avLst/>
+          </a:prstGeom>
+          <a:ln>
+            <a:solidFill>
+              <a:srgbClr val="FF0000"/>
+            </a:solidFill>
+            <a:prstDash val="dash"/>
+          </a:ln>
+        </p:spPr>
+        <p:style>
+          <a:lnRef idx="2">
+            <a:schemeClr val="accent1"/>
+          </a:lnRef>
+          <a:fillRef idx="0">
+            <a:schemeClr val="accent1"/>
+          </a:fillRef>
+          <a:effectRef idx="1">
+            <a:schemeClr val="accent1"/>
+          </a:effectRef>
+          <a:fontRef idx="minor">
+            <a:schemeClr val="tx1"/>
+          </a:fontRef>
+        </p:style>
+      </p:cxnSp>
+      <p:cxnSp>
+        <p:nvCxnSpPr>
+          <p:cNvPr id="51" name="直接连接符 50">
+            <a:extLst>
+              <a:ext uri="{FF2B5EF4-FFF2-40B4-BE49-F238E27FC236}">
+                <a16:creationId xmlns:a16="http://schemas.microsoft.com/office/drawing/2014/main" id="{5FDA3363-1FDD-9CB4-A458-4D1390AD72F5}"/>
+              </a:ext>
+            </a:extLst>
+          </p:cNvPr>
+          <p:cNvCxnSpPr>
+            <a:cxnSpLocks/>
+          </p:cNvCxnSpPr>
+          <p:nvPr/>
+        </p:nvCxnSpPr>
+        <p:spPr>
+          <a:xfrm>
+            <a:off x="198199" y="5131222"/>
+            <a:ext cx="2413795" cy="13333"/>
+          </a:xfrm>
+          <a:prstGeom prst="line">
+            <a:avLst/>
+          </a:prstGeom>
+          <a:ln>
+            <a:solidFill>
+              <a:srgbClr val="FF0000"/>
+            </a:solidFill>
+            <a:prstDash val="dash"/>
+          </a:ln>
+        </p:spPr>
+        <p:style>
+          <a:lnRef idx="2">
+            <a:schemeClr val="accent1"/>
+          </a:lnRef>
+          <a:fillRef idx="0">
+            <a:schemeClr val="accent1"/>
+          </a:fillRef>
+          <a:effectRef idx="1">
+            <a:schemeClr val="accent1"/>
+          </a:effectRef>
+          <a:fontRef idx="minor">
+            <a:schemeClr val="tx1"/>
+          </a:fontRef>
+        </p:style>
+      </p:cxnSp>
+      <p:cxnSp>
+        <p:nvCxnSpPr>
+          <p:cNvPr id="53" name="直接连接符 52">
+            <a:extLst>
+              <a:ext uri="{FF2B5EF4-FFF2-40B4-BE49-F238E27FC236}">
+                <a16:creationId xmlns:a16="http://schemas.microsoft.com/office/drawing/2014/main" id="{215EE299-BB21-D1BC-5F1D-BC9CA9BA7AFC}"/>
+              </a:ext>
+            </a:extLst>
+          </p:cNvPr>
+          <p:cNvCxnSpPr>
+            <a:cxnSpLocks/>
+          </p:cNvCxnSpPr>
+          <p:nvPr/>
+        </p:nvCxnSpPr>
+        <p:spPr>
+          <a:xfrm flipV="1">
+            <a:off x="198199" y="2224815"/>
+            <a:ext cx="0" cy="2906407"/>
+          </a:xfrm>
+          <a:prstGeom prst="line">
+            <a:avLst/>
+          </a:prstGeom>
+          <a:ln>
+            <a:solidFill>
+              <a:srgbClr val="FF0000"/>
+            </a:solidFill>
+            <a:prstDash val="dash"/>
+          </a:ln>
+        </p:spPr>
+        <p:style>
+          <a:lnRef idx="2">
+            <a:schemeClr val="accent1"/>
+          </a:lnRef>
+          <a:fillRef idx="0">
+            <a:schemeClr val="accent1"/>
+          </a:fillRef>
+          <a:effectRef idx="1">
+            <a:schemeClr val="accent1"/>
+          </a:effectRef>
+          <a:fontRef idx="minor">
+            <a:schemeClr val="tx1"/>
+          </a:fontRef>
+        </p:style>
+      </p:cxnSp>
+      <p:cxnSp>
+        <p:nvCxnSpPr>
+          <p:cNvPr id="56" name="直接连接符 55">
+            <a:extLst>
+              <a:ext uri="{FF2B5EF4-FFF2-40B4-BE49-F238E27FC236}">
+                <a16:creationId xmlns:a16="http://schemas.microsoft.com/office/drawing/2014/main" id="{D5E41ACF-1D6B-33C6-BBBB-85FEF021CA05}"/>
+              </a:ext>
+            </a:extLst>
+          </p:cNvPr>
+          <p:cNvCxnSpPr>
+            <a:cxnSpLocks/>
+          </p:cNvCxnSpPr>
+          <p:nvPr/>
+        </p:nvCxnSpPr>
+        <p:spPr>
+          <a:xfrm flipV="1">
+            <a:off x="2627312" y="3094333"/>
+            <a:ext cx="0" cy="2064859"/>
+          </a:xfrm>
+          <a:prstGeom prst="line">
+            <a:avLst/>
+          </a:prstGeom>
+          <a:ln>
+            <a:solidFill>
+              <a:srgbClr val="FF0000"/>
+            </a:solidFill>
+            <a:prstDash val="dash"/>
+          </a:ln>
+        </p:spPr>
+        <p:style>
+          <a:lnRef idx="2">
+            <a:schemeClr val="accent1"/>
+          </a:lnRef>
+          <a:fillRef idx="0">
+            <a:schemeClr val="accent1"/>
+          </a:fillRef>
+          <a:effectRef idx="1">
+            <a:schemeClr val="accent1"/>
+          </a:effectRef>
+          <a:fontRef idx="minor">
+            <a:schemeClr val="tx1"/>
+          </a:fontRef>
+        </p:style>
+      </p:cxnSp>
+      <p:cxnSp>
+        <p:nvCxnSpPr>
+          <p:cNvPr id="58" name="直接连接符 57">
+            <a:extLst>
+              <a:ext uri="{FF2B5EF4-FFF2-40B4-BE49-F238E27FC236}">
+                <a16:creationId xmlns:a16="http://schemas.microsoft.com/office/drawing/2014/main" id="{FC84E850-92BC-0D43-062B-9E021F661C26}"/>
+              </a:ext>
+            </a:extLst>
+          </p:cNvPr>
+          <p:cNvCxnSpPr>
+            <a:cxnSpLocks/>
+          </p:cNvCxnSpPr>
+          <p:nvPr/>
+        </p:nvCxnSpPr>
+        <p:spPr>
+          <a:xfrm>
+            <a:off x="2687035" y="3094333"/>
+            <a:ext cx="3056540" cy="0"/>
+          </a:xfrm>
+          <a:prstGeom prst="line">
+            <a:avLst/>
+          </a:prstGeom>
+          <a:ln>
+            <a:solidFill>
+              <a:srgbClr val="FF0000"/>
+            </a:solidFill>
+            <a:prstDash val="dash"/>
+          </a:ln>
+        </p:spPr>
+        <p:style>
+          <a:lnRef idx="2">
+            <a:schemeClr val="accent1"/>
+          </a:lnRef>
+          <a:fillRef idx="0">
+            <a:schemeClr val="accent1"/>
+          </a:fillRef>
+          <a:effectRef idx="1">
+            <a:schemeClr val="accent1"/>
+          </a:effectRef>
+          <a:fontRef idx="minor">
+            <a:schemeClr val="tx1"/>
+          </a:fontRef>
+        </p:style>
+      </p:cxnSp>
+      <p:cxnSp>
+        <p:nvCxnSpPr>
+          <p:cNvPr id="61" name="直接连接符 60">
+            <a:extLst>
+              <a:ext uri="{FF2B5EF4-FFF2-40B4-BE49-F238E27FC236}">
+                <a16:creationId xmlns:a16="http://schemas.microsoft.com/office/drawing/2014/main" id="{3302F168-5514-F90D-FE0C-CAEC53882E5F}"/>
+              </a:ext>
+            </a:extLst>
+          </p:cNvPr>
+          <p:cNvCxnSpPr>
+            <a:cxnSpLocks/>
+          </p:cNvCxnSpPr>
+          <p:nvPr/>
+        </p:nvCxnSpPr>
+        <p:spPr>
+          <a:xfrm flipV="1">
+            <a:off x="5754723" y="2239815"/>
+            <a:ext cx="0" cy="847851"/>
+          </a:xfrm>
+          <a:prstGeom prst="line">
+            <a:avLst/>
+          </a:prstGeom>
+          <a:ln>
+            <a:solidFill>
+              <a:srgbClr val="FF0000"/>
+            </a:solidFill>
+            <a:prstDash val="dash"/>
+          </a:ln>
+        </p:spPr>
+        <p:style>
+          <a:lnRef idx="2">
+            <a:schemeClr val="accent1"/>
+          </a:lnRef>
+          <a:fillRef idx="0">
+            <a:schemeClr val="accent1"/>
+          </a:fillRef>
+          <a:effectRef idx="1">
+            <a:schemeClr val="accent1"/>
+          </a:effectRef>
+          <a:fontRef idx="minor">
+            <a:schemeClr val="tx1"/>
+          </a:fontRef>
+        </p:style>
+      </p:cxnSp>
+      <p:sp>
+        <p:nvSpPr>
+          <p:cNvPr id="63" name="文本框 62">
+            <a:extLst>
+              <a:ext uri="{FF2B5EF4-FFF2-40B4-BE49-F238E27FC236}">
+                <a16:creationId xmlns:a16="http://schemas.microsoft.com/office/drawing/2014/main" id="{60611208-CB73-5940-2783-655EE4139E55}"/>
+              </a:ext>
+            </a:extLst>
+          </p:cNvPr>
+          <p:cNvSpPr txBox="1"/>
+          <p:nvPr/>
+        </p:nvSpPr>
+        <p:spPr>
+          <a:xfrm>
+            <a:off x="398845" y="2995958"/>
+            <a:ext cx="372218" cy="276999"/>
+          </a:xfrm>
+          <a:prstGeom prst="rect">
+            <a:avLst/>
+          </a:prstGeom>
+          <a:noFill/>
+        </p:spPr>
+        <p:txBody>
+          <a:bodyPr wrap="none" rtlCol="0">
+            <a:spAutoFit/>
+          </a:bodyPr>
+          <a:lstStyle/>
+          <a:p>
+            <a:r>
+              <a:rPr lang="en-US" altLang="zh-CN" sz="1200" b="1" dirty="0"/>
+              <a:t>(1)</a:t>
+            </a:r>
+            <a:endParaRPr lang="zh-CN" altLang="en-US" sz="1200" b="1" dirty="0"/>
+          </a:p>
+        </p:txBody>
+      </p:sp>
+      <p:sp>
+        <p:nvSpPr>
+          <p:cNvPr id="64" name="文本框 63">
+            <a:extLst>
+              <a:ext uri="{FF2B5EF4-FFF2-40B4-BE49-F238E27FC236}">
+                <a16:creationId xmlns:a16="http://schemas.microsoft.com/office/drawing/2014/main" id="{9DEF6939-E4EC-A809-DEB3-4AB523B91AE9}"/>
+              </a:ext>
+            </a:extLst>
+          </p:cNvPr>
+          <p:cNvSpPr txBox="1"/>
+          <p:nvPr/>
+        </p:nvSpPr>
+        <p:spPr>
+          <a:xfrm>
+            <a:off x="2972690" y="3283238"/>
+            <a:ext cx="489236" cy="276999"/>
+          </a:xfrm>
+          <a:prstGeom prst="rect">
+            <a:avLst/>
+          </a:prstGeom>
+          <a:noFill/>
+        </p:spPr>
+        <p:txBody>
+          <a:bodyPr wrap="none" rtlCol="0">
+            <a:spAutoFit/>
+          </a:bodyPr>
+          <a:lstStyle/>
+          <a:p>
+            <a:r>
+              <a:rPr lang="en-US" altLang="zh-CN" sz="1200" b="1" dirty="0"/>
+              <a:t>(2.a)</a:t>
+            </a:r>
+            <a:endParaRPr lang="zh-CN" altLang="en-US" sz="1200" b="1" dirty="0"/>
+          </a:p>
+        </p:txBody>
+      </p:sp>
+      <p:sp>
+        <p:nvSpPr>
+          <p:cNvPr id="65" name="文本框 64">
+            <a:extLst>
+              <a:ext uri="{FF2B5EF4-FFF2-40B4-BE49-F238E27FC236}">
+                <a16:creationId xmlns:a16="http://schemas.microsoft.com/office/drawing/2014/main" id="{44730E24-5E7F-66F3-DF48-7EC1D44F7DCD}"/>
+              </a:ext>
+            </a:extLst>
+          </p:cNvPr>
+          <p:cNvSpPr txBox="1"/>
+          <p:nvPr/>
+        </p:nvSpPr>
+        <p:spPr>
+          <a:xfrm>
+            <a:off x="2928988" y="4316502"/>
+            <a:ext cx="502061" cy="276999"/>
+          </a:xfrm>
+          <a:prstGeom prst="rect">
+            <a:avLst/>
+          </a:prstGeom>
+          <a:noFill/>
+        </p:spPr>
+        <p:txBody>
+          <a:bodyPr wrap="none" rtlCol="0">
+            <a:spAutoFit/>
+          </a:bodyPr>
+          <a:lstStyle/>
+          <a:p>
+            <a:r>
+              <a:rPr lang="en-US" altLang="zh-CN" sz="1200" b="1" dirty="0"/>
+              <a:t>(2.b)</a:t>
+            </a:r>
+            <a:endParaRPr lang="zh-CN" altLang="en-US" sz="1200" b="1" dirty="0"/>
+          </a:p>
+        </p:txBody>
+      </p:sp>
+      <p:sp>
+        <p:nvSpPr>
+          <p:cNvPr id="66" name="文本框 65">
+            <a:extLst>
+              <a:ext uri="{FF2B5EF4-FFF2-40B4-BE49-F238E27FC236}">
+                <a16:creationId xmlns:a16="http://schemas.microsoft.com/office/drawing/2014/main" id="{CAB57107-78DB-7A2F-7A42-429BD9C08643}"/>
+              </a:ext>
+            </a:extLst>
+          </p:cNvPr>
+          <p:cNvSpPr txBox="1"/>
+          <p:nvPr/>
+        </p:nvSpPr>
+        <p:spPr>
+          <a:xfrm>
+            <a:off x="3058831" y="5851890"/>
+            <a:ext cx="372218" cy="276999"/>
+          </a:xfrm>
+          <a:prstGeom prst="rect">
+            <a:avLst/>
+          </a:prstGeom>
+          <a:noFill/>
+        </p:spPr>
+        <p:txBody>
+          <a:bodyPr wrap="none" rtlCol="0">
+            <a:spAutoFit/>
+          </a:bodyPr>
+          <a:lstStyle/>
+          <a:p>
+            <a:r>
+              <a:rPr lang="en-US" altLang="zh-CN" sz="1200" b="1" dirty="0"/>
+              <a:t>(7)</a:t>
+            </a:r>
+            <a:endParaRPr lang="zh-CN" altLang="en-US" sz="1200" b="1" dirty="0"/>
+          </a:p>
+        </p:txBody>
+      </p:sp>
+      <p:sp>
+        <p:nvSpPr>
+          <p:cNvPr id="67" name="文本框 66">
+            <a:extLst>
+              <a:ext uri="{FF2B5EF4-FFF2-40B4-BE49-F238E27FC236}">
+                <a16:creationId xmlns:a16="http://schemas.microsoft.com/office/drawing/2014/main" id="{EFC12167-4F0C-C2AA-9B95-893041DE254C}"/>
+              </a:ext>
+            </a:extLst>
+          </p:cNvPr>
+          <p:cNvSpPr txBox="1"/>
+          <p:nvPr/>
+        </p:nvSpPr>
+        <p:spPr>
+          <a:xfrm>
+            <a:off x="6312726" y="2364220"/>
+            <a:ext cx="372218" cy="276999"/>
+          </a:xfrm>
+          <a:prstGeom prst="rect">
+            <a:avLst/>
+          </a:prstGeom>
+          <a:noFill/>
+        </p:spPr>
+        <p:txBody>
+          <a:bodyPr wrap="none" rtlCol="0">
+            <a:spAutoFit/>
+          </a:bodyPr>
+          <a:lstStyle/>
+          <a:p>
+            <a:r>
+              <a:rPr lang="en-US" altLang="zh-CN" sz="1200" b="1" dirty="0"/>
+              <a:t>(3)</a:t>
+            </a:r>
+            <a:endParaRPr lang="zh-CN" altLang="en-US" sz="1200" b="1" dirty="0"/>
+          </a:p>
+        </p:txBody>
+      </p:sp>
+      <p:sp>
+        <p:nvSpPr>
+          <p:cNvPr id="68" name="文本框 67">
+            <a:extLst>
+              <a:ext uri="{FF2B5EF4-FFF2-40B4-BE49-F238E27FC236}">
+                <a16:creationId xmlns:a16="http://schemas.microsoft.com/office/drawing/2014/main" id="{FCEC1323-208A-08AF-1C82-BF34BB8DFCD1}"/>
+              </a:ext>
+            </a:extLst>
+          </p:cNvPr>
+          <p:cNvSpPr txBox="1"/>
+          <p:nvPr/>
+        </p:nvSpPr>
+        <p:spPr>
+          <a:xfrm>
+            <a:off x="8629865" y="2685610"/>
+            <a:ext cx="481222" cy="276999"/>
+          </a:xfrm>
+          <a:prstGeom prst="rect">
+            <a:avLst/>
+          </a:prstGeom>
+          <a:noFill/>
+        </p:spPr>
+        <p:txBody>
+          <a:bodyPr wrap="none" rtlCol="0">
+            <a:spAutoFit/>
+          </a:bodyPr>
+          <a:lstStyle/>
+          <a:p>
+            <a:r>
+              <a:rPr lang="en-US" altLang="zh-CN" sz="1200" b="1" dirty="0"/>
+              <a:t>(2.c)</a:t>
+            </a:r>
+            <a:endParaRPr lang="zh-CN" altLang="en-US" sz="1200" b="1" dirty="0"/>
+          </a:p>
+        </p:txBody>
+      </p:sp>
+      <p:sp>
+        <p:nvSpPr>
+          <p:cNvPr id="69" name="文本框 68">
+            <a:extLst>
+              <a:ext uri="{FF2B5EF4-FFF2-40B4-BE49-F238E27FC236}">
+                <a16:creationId xmlns:a16="http://schemas.microsoft.com/office/drawing/2014/main" id="{8F419A8E-C9C5-8B10-F891-4F2EBB52EEAB}"/>
+              </a:ext>
+            </a:extLst>
+          </p:cNvPr>
+          <p:cNvSpPr txBox="1"/>
+          <p:nvPr/>
+        </p:nvSpPr>
+        <p:spPr>
+          <a:xfrm>
+            <a:off x="8938981" y="4509415"/>
+            <a:ext cx="372218" cy="276999"/>
+          </a:xfrm>
+          <a:prstGeom prst="rect">
+            <a:avLst/>
+          </a:prstGeom>
+          <a:noFill/>
+        </p:spPr>
+        <p:txBody>
+          <a:bodyPr wrap="none" rtlCol="0">
+            <a:spAutoFit/>
+          </a:bodyPr>
+          <a:lstStyle/>
+          <a:p>
+            <a:r>
+              <a:rPr lang="en-US" altLang="zh-CN" sz="1200" b="1" dirty="0"/>
+              <a:t>(5)</a:t>
+            </a:r>
+            <a:endParaRPr lang="zh-CN" altLang="en-US" sz="1200" b="1" dirty="0"/>
+          </a:p>
+        </p:txBody>
+      </p:sp>
+      <p:sp>
+        <p:nvSpPr>
+          <p:cNvPr id="70" name="文本框 69">
+            <a:extLst>
+              <a:ext uri="{FF2B5EF4-FFF2-40B4-BE49-F238E27FC236}">
+                <a16:creationId xmlns:a16="http://schemas.microsoft.com/office/drawing/2014/main" id="{FF358AE5-0EBB-08A4-D9F1-1C5AC357459D}"/>
+              </a:ext>
+            </a:extLst>
+          </p:cNvPr>
+          <p:cNvSpPr txBox="1"/>
+          <p:nvPr/>
+        </p:nvSpPr>
+        <p:spPr>
+          <a:xfrm>
+            <a:off x="8938981" y="3445071"/>
+            <a:ext cx="372218" cy="276999"/>
+          </a:xfrm>
+          <a:prstGeom prst="rect">
+            <a:avLst/>
+          </a:prstGeom>
+          <a:noFill/>
+        </p:spPr>
+        <p:txBody>
+          <a:bodyPr wrap="none" rtlCol="0">
+            <a:spAutoFit/>
+          </a:bodyPr>
+          <a:lstStyle/>
+          <a:p>
+            <a:r>
+              <a:rPr lang="en-US" altLang="zh-CN" sz="1200" b="1" dirty="0"/>
+              <a:t>(4)</a:t>
+            </a:r>
+            <a:endParaRPr lang="zh-CN" altLang="en-US" sz="1200" b="1" dirty="0"/>
+          </a:p>
+        </p:txBody>
+      </p:sp>
+      <p:sp>
+        <p:nvSpPr>
+          <p:cNvPr id="71" name="文本框 70">
+            <a:extLst>
+              <a:ext uri="{FF2B5EF4-FFF2-40B4-BE49-F238E27FC236}">
+                <a16:creationId xmlns:a16="http://schemas.microsoft.com/office/drawing/2014/main" id="{3EC992CB-341B-DAC0-18CD-D7F0825AF42C}"/>
+              </a:ext>
+            </a:extLst>
+          </p:cNvPr>
+          <p:cNvSpPr txBox="1"/>
+          <p:nvPr/>
+        </p:nvSpPr>
+        <p:spPr>
+          <a:xfrm>
+            <a:off x="8938981" y="5680487"/>
+            <a:ext cx="372218" cy="276999"/>
+          </a:xfrm>
+          <a:prstGeom prst="rect">
+            <a:avLst/>
+          </a:prstGeom>
+          <a:noFill/>
+        </p:spPr>
+        <p:txBody>
+          <a:bodyPr wrap="none" rtlCol="0">
+            <a:spAutoFit/>
+          </a:bodyPr>
+          <a:lstStyle/>
+          <a:p>
+            <a:r>
+              <a:rPr lang="en-US" altLang="zh-CN" sz="1200" b="1" dirty="0"/>
+              <a:t>(6)</a:t>
+            </a:r>
+            <a:endParaRPr lang="zh-CN" altLang="en-US" sz="1200" b="1" dirty="0"/>
+          </a:p>
+        </p:txBody>
+      </p:sp>
+      <p:cxnSp>
+        <p:nvCxnSpPr>
+          <p:cNvPr id="73" name="直接箭头连接符 72">
+            <a:extLst>
+              <a:ext uri="{FF2B5EF4-FFF2-40B4-BE49-F238E27FC236}">
+                <a16:creationId xmlns:a16="http://schemas.microsoft.com/office/drawing/2014/main" id="{CBCFC069-E3AF-6F33-FC0A-2A664067CBFE}"/>
+              </a:ext>
+            </a:extLst>
+          </p:cNvPr>
+          <p:cNvCxnSpPr>
+            <a:stCxn id="5" idx="2"/>
+            <a:endCxn id="18" idx="0"/>
+          </p:cNvCxnSpPr>
+          <p:nvPr/>
+        </p:nvCxnSpPr>
+        <p:spPr>
+          <a:xfrm>
+            <a:off x="649060" y="1965780"/>
+            <a:ext cx="1250" cy="405945"/>
+          </a:xfrm>
+          <a:prstGeom prst="straightConnector1">
+            <a:avLst/>
+          </a:prstGeom>
+          <a:ln>
+            <a:solidFill>
+              <a:schemeClr val="tx1"/>
+            </a:solidFill>
+            <a:tailEnd type="triangle"/>
+          </a:ln>
+        </p:spPr>
+        <p:style>
+          <a:lnRef idx="2">
+            <a:schemeClr val="accent1"/>
+          </a:lnRef>
+          <a:fillRef idx="0">
+            <a:schemeClr val="accent1"/>
+          </a:fillRef>
+          <a:effectRef idx="1">
+            <a:schemeClr val="accent1"/>
+          </a:effectRef>
+          <a:fontRef idx="minor">
+            <a:schemeClr val="tx1"/>
+          </a:fontRef>
+        </p:style>
+      </p:cxnSp>
+      <p:cxnSp>
+        <p:nvCxnSpPr>
+          <p:cNvPr id="74" name="直接箭头连接符 73">
+            <a:extLst>
+              <a:ext uri="{FF2B5EF4-FFF2-40B4-BE49-F238E27FC236}">
+                <a16:creationId xmlns:a16="http://schemas.microsoft.com/office/drawing/2014/main" id="{BCA6E70D-95C7-AAE8-61D2-7CD379BCF5F7}"/>
+              </a:ext>
+            </a:extLst>
+          </p:cNvPr>
+          <p:cNvCxnSpPr>
+            <a:cxnSpLocks/>
+            <a:stCxn id="10" idx="2"/>
+            <a:endCxn id="19" idx="0"/>
+          </p:cNvCxnSpPr>
+          <p:nvPr/>
+        </p:nvCxnSpPr>
+        <p:spPr>
+          <a:xfrm flipH="1">
+            <a:off x="1442617" y="1960418"/>
+            <a:ext cx="7093" cy="424007"/>
+          </a:xfrm>
+          <a:prstGeom prst="straightConnector1">
+            <a:avLst/>
+          </a:prstGeom>
+          <a:ln>
+            <a:solidFill>
+              <a:schemeClr val="tx1"/>
+            </a:solidFill>
+            <a:tailEnd type="triangle"/>
+          </a:ln>
+        </p:spPr>
+        <p:style>
+          <a:lnRef idx="2">
+            <a:schemeClr val="accent1"/>
+          </a:lnRef>
+          <a:fillRef idx="0">
+            <a:schemeClr val="accent1"/>
+          </a:fillRef>
+          <a:effectRef idx="1">
+            <a:schemeClr val="accent1"/>
+          </a:effectRef>
+          <a:fontRef idx="minor">
+            <a:schemeClr val="tx1"/>
+          </a:fontRef>
+        </p:style>
+      </p:cxnSp>
+      <p:cxnSp>
+        <p:nvCxnSpPr>
+          <p:cNvPr id="78" name="直接箭头连接符 77">
+            <a:extLst>
+              <a:ext uri="{FF2B5EF4-FFF2-40B4-BE49-F238E27FC236}">
+                <a16:creationId xmlns:a16="http://schemas.microsoft.com/office/drawing/2014/main" id="{22ED55B6-1A1D-0107-F017-66E41CBA62D6}"/>
+              </a:ext>
+            </a:extLst>
+          </p:cNvPr>
+          <p:cNvCxnSpPr>
+            <a:cxnSpLocks/>
+            <a:stCxn id="9" idx="2"/>
+            <a:endCxn id="20" idx="0"/>
+          </p:cNvCxnSpPr>
+          <p:nvPr/>
+        </p:nvCxnSpPr>
+        <p:spPr>
+          <a:xfrm flipH="1">
+            <a:off x="2311124" y="1965780"/>
+            <a:ext cx="5940" cy="403802"/>
+          </a:xfrm>
+          <a:prstGeom prst="straightConnector1">
+            <a:avLst/>
+          </a:prstGeom>
+          <a:ln>
+            <a:solidFill>
+              <a:schemeClr val="tx1"/>
+            </a:solidFill>
+            <a:tailEnd type="triangle"/>
+          </a:ln>
+        </p:spPr>
+        <p:style>
+          <a:lnRef idx="2">
+            <a:schemeClr val="accent1"/>
+          </a:lnRef>
+          <a:fillRef idx="0">
+            <a:schemeClr val="accent1"/>
+          </a:fillRef>
+          <a:effectRef idx="1">
+            <a:schemeClr val="accent1"/>
+          </a:effectRef>
+          <a:fontRef idx="minor">
+            <a:schemeClr val="tx1"/>
+          </a:fontRef>
+        </p:style>
+      </p:cxnSp>
+      <mc:AlternateContent xmlns:mc="http://schemas.openxmlformats.org/markup-compatibility/2006">
+        <mc:Choice xmlns:a14="http://schemas.microsoft.com/office/drawing/2010/main" Requires="a14">
+          <p:sp>
+            <p:nvSpPr>
+              <p:cNvPr id="84" name="文本框 83">
+                <a:extLst>
+                  <a:ext uri="{FF2B5EF4-FFF2-40B4-BE49-F238E27FC236}">
+                    <a16:creationId xmlns:a16="http://schemas.microsoft.com/office/drawing/2014/main" id="{4F3B17F2-A2BB-EC47-A35E-83174DDC9775}"/>
+                  </a:ext>
+                </a:extLst>
+              </p:cNvPr>
+              <p:cNvSpPr txBox="1"/>
+              <p:nvPr/>
+            </p:nvSpPr>
+            <p:spPr>
+              <a:xfrm>
+                <a:off x="2125560" y="2986447"/>
+                <a:ext cx="489236" cy="325089"/>
+              </a:xfrm>
+              <a:prstGeom prst="rect">
+                <a:avLst/>
+              </a:prstGeom>
+              <a:noFill/>
+            </p:spPr>
+            <p:txBody>
+              <a:bodyPr wrap="square">
+                <a:spAutoFit/>
+              </a:bodyPr>
+              <a:lstStyle/>
+              <a:p>
+                <a:pPr/>
+                <a14:m>
+                  <m:oMathPara xmlns:m="http://schemas.openxmlformats.org/officeDocument/2006/math">
+                    <m:oMathParaPr>
+                      <m:jc m:val="centerGroup"/>
+                    </m:oMathParaPr>
+                    <m:oMath xmlns:m="http://schemas.openxmlformats.org/officeDocument/2006/math">
+                      <m:sSub>
+                        <m:sSubPr>
+                          <m:ctrlPr>
+                            <a:rPr lang="en-US" altLang="zh-CN" sz="1400" b="0" i="1" smtClean="0">
+                              <a:latin typeface="Cambria Math" panose="02040503050406030204" pitchFamily="18" charset="0"/>
+                            </a:rPr>
+                          </m:ctrlPr>
+                        </m:sSubPr>
+                        <m:e>
+                          <m:r>
+                            <a:rPr lang="en-US" altLang="zh-CN" sz="1400" b="0" i="1" smtClean="0">
+                              <a:latin typeface="Cambria Math" panose="02040503050406030204" pitchFamily="18" charset="0"/>
+                            </a:rPr>
+                            <m:t>𝑃𝑆</m:t>
+                          </m:r>
+                        </m:e>
+                        <m:sub>
+                          <m:r>
+                            <a:rPr lang="en-US" altLang="zh-CN" sz="1400" b="0" i="1" smtClean="0">
+                              <a:latin typeface="Cambria Math" panose="02040503050406030204" pitchFamily="18" charset="0"/>
+                            </a:rPr>
+                            <m:t>𝑗𝑙</m:t>
+                          </m:r>
+                        </m:sub>
+                      </m:sSub>
+                    </m:oMath>
+                  </m:oMathPara>
+                </a14:m>
+                <a:endParaRPr lang="zh-CN" altLang="en-US" dirty="0"/>
+              </a:p>
+            </p:txBody>
+          </p:sp>
+        </mc:Choice>
+        <mc:Fallback>
+          <p:sp>
+            <p:nvSpPr>
+              <p:cNvPr id="84" name="文本框 83">
+                <a:extLst>
+                  <a:ext uri="{FF2B5EF4-FFF2-40B4-BE49-F238E27FC236}">
+                    <a16:creationId xmlns:a16="http://schemas.microsoft.com/office/drawing/2014/main" id="{4F3B17F2-A2BB-EC47-A35E-83174DDC9775}"/>
+                  </a:ext>
+                </a:extLst>
+              </p:cNvPr>
+              <p:cNvSpPr txBox="1">
+                <a:spLocks noRot="1" noChangeAspect="1" noMove="1" noResize="1" noEditPoints="1" noAdjustHandles="1" noChangeArrowheads="1" noChangeShapeType="1" noTextEdit="1"/>
+              </p:cNvSpPr>
+              <p:nvPr/>
+            </p:nvSpPr>
+            <p:spPr>
+              <a:xfrm>
+                <a:off x="2125560" y="2986447"/>
+                <a:ext cx="489236" cy="325089"/>
+              </a:xfrm>
+              <a:prstGeom prst="rect">
+                <a:avLst/>
+              </a:prstGeom>
+              <a:blipFill>
+                <a:blip r:embed="rId10"/>
+                <a:stretch>
+                  <a:fillRect b="-3774"/>
+                </a:stretch>
+              </a:blipFill>
+            </p:spPr>
+            <p:txBody>
+              <a:bodyPr/>
+              <a:lstStyle/>
+              <a:p>
+                <a:r>
+                  <a:rPr lang="zh-CN" altLang="en-US">
+                    <a:noFill/>
+                  </a:rPr>
+                  <a:t> </a:t>
+                </a:r>
+              </a:p>
+            </p:txBody>
+          </p:sp>
+        </mc:Fallback>
+      </mc:AlternateContent>
+      <p:cxnSp>
+        <p:nvCxnSpPr>
+          <p:cNvPr id="86" name="连接符: 肘形 85">
+            <a:extLst>
+              <a:ext uri="{FF2B5EF4-FFF2-40B4-BE49-F238E27FC236}">
+                <a16:creationId xmlns:a16="http://schemas.microsoft.com/office/drawing/2014/main" id="{88C04242-DF01-2FFC-C366-E826DBEAA781}"/>
+              </a:ext>
+            </a:extLst>
+          </p:cNvPr>
+          <p:cNvCxnSpPr>
+            <a:stCxn id="18" idx="2"/>
+            <a:endCxn id="21" idx="0"/>
+          </p:cNvCxnSpPr>
+          <p:nvPr/>
+        </p:nvCxnSpPr>
+        <p:spPr>
+          <a:xfrm rot="16200000" flipH="1">
+            <a:off x="875491" y="2515876"/>
+            <a:ext cx="353276" cy="803638"/>
+          </a:xfrm>
+          <a:prstGeom prst="bentConnector3">
+            <a:avLst/>
+          </a:prstGeom>
+          <a:ln>
+            <a:solidFill>
+              <a:schemeClr val="tx1"/>
+            </a:solidFill>
+            <a:tailEnd type="triangle"/>
+          </a:ln>
+        </p:spPr>
+        <p:style>
+          <a:lnRef idx="2">
+            <a:schemeClr val="accent1"/>
+          </a:lnRef>
+          <a:fillRef idx="0">
+            <a:schemeClr val="accent1"/>
+          </a:fillRef>
+          <a:effectRef idx="1">
+            <a:schemeClr val="accent1"/>
+          </a:effectRef>
+          <a:fontRef idx="minor">
+            <a:schemeClr val="tx1"/>
+          </a:fontRef>
+        </p:style>
+      </p:cxnSp>
+      <p:cxnSp>
+        <p:nvCxnSpPr>
+          <p:cNvPr id="87" name="连接符: 肘形 86">
+            <a:extLst>
+              <a:ext uri="{FF2B5EF4-FFF2-40B4-BE49-F238E27FC236}">
+                <a16:creationId xmlns:a16="http://schemas.microsoft.com/office/drawing/2014/main" id="{A88C5FB4-9820-FFA7-B19D-1DDA33310730}"/>
+              </a:ext>
+            </a:extLst>
+          </p:cNvPr>
+          <p:cNvCxnSpPr>
+            <a:cxnSpLocks/>
+            <a:endCxn id="21" idx="0"/>
+          </p:cNvCxnSpPr>
+          <p:nvPr/>
+        </p:nvCxnSpPr>
+        <p:spPr>
+          <a:xfrm rot="16200000" flipH="1">
+            <a:off x="1275137" y="2915522"/>
+            <a:ext cx="353382" cy="4240"/>
+          </a:xfrm>
+          <a:prstGeom prst="bentConnector3">
+            <a:avLst/>
+          </a:prstGeom>
+          <a:ln>
+            <a:solidFill>
+              <a:schemeClr val="tx1"/>
+            </a:solidFill>
+            <a:tailEnd type="triangle"/>
+          </a:ln>
+        </p:spPr>
+        <p:style>
+          <a:lnRef idx="2">
+            <a:schemeClr val="accent1"/>
+          </a:lnRef>
+          <a:fillRef idx="0">
+            <a:schemeClr val="accent1"/>
+          </a:fillRef>
+          <a:effectRef idx="1">
+            <a:schemeClr val="accent1"/>
+          </a:effectRef>
+          <a:fontRef idx="minor">
+            <a:schemeClr val="tx1"/>
+          </a:fontRef>
+        </p:style>
+      </p:cxnSp>
+      <p:cxnSp>
+        <p:nvCxnSpPr>
+          <p:cNvPr id="90" name="连接符: 肘形 89">
+            <a:extLst>
+              <a:ext uri="{FF2B5EF4-FFF2-40B4-BE49-F238E27FC236}">
+                <a16:creationId xmlns:a16="http://schemas.microsoft.com/office/drawing/2014/main" id="{5C560F92-EF60-B9AE-818F-B8B957B82EF0}"/>
+              </a:ext>
+            </a:extLst>
+          </p:cNvPr>
+          <p:cNvCxnSpPr>
+            <a:cxnSpLocks/>
+            <a:stCxn id="20" idx="2"/>
+            <a:endCxn id="21" idx="0"/>
+          </p:cNvCxnSpPr>
+          <p:nvPr/>
+        </p:nvCxnSpPr>
+        <p:spPr>
+          <a:xfrm rot="5400000">
+            <a:off x="1704827" y="2488035"/>
+            <a:ext cx="355419" cy="857176"/>
+          </a:xfrm>
+          <a:prstGeom prst="bentConnector3">
+            <a:avLst>
+              <a:gd name="adj1" fmla="val 50000"/>
+            </a:avLst>
+          </a:prstGeom>
+          <a:ln>
+            <a:solidFill>
+              <a:schemeClr val="tx1"/>
+            </a:solidFill>
+            <a:tailEnd type="triangle"/>
+          </a:ln>
+        </p:spPr>
+        <p:style>
+          <a:lnRef idx="2">
+            <a:schemeClr val="accent1"/>
+          </a:lnRef>
+          <a:fillRef idx="0">
+            <a:schemeClr val="accent1"/>
+          </a:fillRef>
+          <a:effectRef idx="1">
+            <a:schemeClr val="accent1"/>
+          </a:effectRef>
+          <a:fontRef idx="minor">
+            <a:schemeClr val="tx1"/>
+          </a:fontRef>
+        </p:style>
+      </p:cxnSp>
+      <p:cxnSp>
+        <p:nvCxnSpPr>
+          <p:cNvPr id="94" name="连接符: 肘形 93">
+            <a:extLst>
+              <a:ext uri="{FF2B5EF4-FFF2-40B4-BE49-F238E27FC236}">
+                <a16:creationId xmlns:a16="http://schemas.microsoft.com/office/drawing/2014/main" id="{3A9E00F1-3831-284B-190C-326C282BB4F9}"/>
+              </a:ext>
+            </a:extLst>
+          </p:cNvPr>
+          <p:cNvCxnSpPr>
+            <a:cxnSpLocks/>
+            <a:stCxn id="24" idx="0"/>
+            <a:endCxn id="22" idx="2"/>
+          </p:cNvCxnSpPr>
+          <p:nvPr/>
+        </p:nvCxnSpPr>
+        <p:spPr>
+          <a:xfrm rot="16200000" flipV="1">
+            <a:off x="1530662" y="4095271"/>
+            <a:ext cx="371850" cy="525277"/>
+          </a:xfrm>
+          <a:prstGeom prst="bentConnector3">
+            <a:avLst>
+              <a:gd name="adj1" fmla="val 50000"/>
+            </a:avLst>
+          </a:prstGeom>
+          <a:ln>
+            <a:solidFill>
+              <a:schemeClr val="tx1"/>
+            </a:solidFill>
+            <a:tailEnd type="triangle"/>
+          </a:ln>
+        </p:spPr>
+        <p:style>
+          <a:lnRef idx="2">
+            <a:schemeClr val="accent1"/>
+          </a:lnRef>
+          <a:fillRef idx="0">
+            <a:schemeClr val="accent1"/>
+          </a:fillRef>
+          <a:effectRef idx="1">
+            <a:schemeClr val="accent1"/>
+          </a:effectRef>
+          <a:fontRef idx="minor">
+            <a:schemeClr val="tx1"/>
+          </a:fontRef>
+        </p:style>
+      </p:cxnSp>
+      <p:cxnSp>
+        <p:nvCxnSpPr>
+          <p:cNvPr id="97" name="连接符: 肘形 96">
+            <a:extLst>
+              <a:ext uri="{FF2B5EF4-FFF2-40B4-BE49-F238E27FC236}">
+                <a16:creationId xmlns:a16="http://schemas.microsoft.com/office/drawing/2014/main" id="{E1048FCC-A29E-86BF-8024-EE8063D430E6}"/>
+              </a:ext>
+            </a:extLst>
+          </p:cNvPr>
+          <p:cNvCxnSpPr>
+            <a:cxnSpLocks/>
+            <a:stCxn id="23" idx="0"/>
+            <a:endCxn id="22" idx="2"/>
+          </p:cNvCxnSpPr>
+          <p:nvPr/>
+        </p:nvCxnSpPr>
+        <p:spPr>
+          <a:xfrm rot="5400000" flipH="1" flipV="1">
+            <a:off x="944729" y="4034616"/>
+            <a:ext cx="371850" cy="646588"/>
+          </a:xfrm>
+          <a:prstGeom prst="bentConnector3">
+            <a:avLst>
+              <a:gd name="adj1" fmla="val 50000"/>
+            </a:avLst>
+          </a:prstGeom>
+          <a:ln>
+            <a:solidFill>
+              <a:schemeClr val="tx1"/>
+            </a:solidFill>
+            <a:tailEnd type="triangle"/>
+          </a:ln>
+        </p:spPr>
+        <p:style>
+          <a:lnRef idx="2">
+            <a:schemeClr val="accent1"/>
+          </a:lnRef>
+          <a:fillRef idx="0">
+            <a:schemeClr val="accent1"/>
+          </a:fillRef>
+          <a:effectRef idx="1">
+            <a:schemeClr val="accent1"/>
+          </a:effectRef>
+          <a:fontRef idx="minor">
+            <a:schemeClr val="tx1"/>
+          </a:fontRef>
+        </p:style>
+      </p:cxnSp>
+      <p:cxnSp>
+        <p:nvCxnSpPr>
+          <p:cNvPr id="100" name="直接箭头连接符 99">
+            <a:extLst>
+              <a:ext uri="{FF2B5EF4-FFF2-40B4-BE49-F238E27FC236}">
+                <a16:creationId xmlns:a16="http://schemas.microsoft.com/office/drawing/2014/main" id="{C15DD3F8-CB62-5E22-95A9-DB954704A296}"/>
+              </a:ext>
+            </a:extLst>
+          </p:cNvPr>
+          <p:cNvCxnSpPr>
+            <a:cxnSpLocks/>
+            <a:stCxn id="27" idx="1"/>
+            <a:endCxn id="24" idx="2"/>
+          </p:cNvCxnSpPr>
+          <p:nvPr/>
+        </p:nvCxnSpPr>
+        <p:spPr>
+          <a:xfrm flipH="1" flipV="1">
+            <a:off x="1979225" y="4913167"/>
+            <a:ext cx="1293" cy="649075"/>
+          </a:xfrm>
+          <a:prstGeom prst="straightConnector1">
+            <a:avLst/>
+          </a:prstGeom>
+          <a:ln>
+            <a:solidFill>
+              <a:schemeClr val="tx1"/>
+            </a:solidFill>
+            <a:tailEnd type="triangle"/>
+          </a:ln>
+        </p:spPr>
+        <p:style>
+          <a:lnRef idx="2">
+            <a:schemeClr val="accent1"/>
+          </a:lnRef>
+          <a:fillRef idx="0">
+            <a:schemeClr val="accent1"/>
+          </a:fillRef>
+          <a:effectRef idx="1">
+            <a:schemeClr val="accent1"/>
+          </a:effectRef>
+          <a:fontRef idx="minor">
+            <a:schemeClr val="tx1"/>
+          </a:fontRef>
+        </p:style>
+      </p:cxnSp>
+      <p:cxnSp>
+        <p:nvCxnSpPr>
+          <p:cNvPr id="103" name="直接箭头连接符 102">
+            <a:extLst>
+              <a:ext uri="{FF2B5EF4-FFF2-40B4-BE49-F238E27FC236}">
+                <a16:creationId xmlns:a16="http://schemas.microsoft.com/office/drawing/2014/main" id="{CB8B6480-F11D-62D7-9994-63E540E263D6}"/>
+              </a:ext>
+            </a:extLst>
+          </p:cNvPr>
+          <p:cNvCxnSpPr>
+            <a:cxnSpLocks/>
+            <a:stCxn id="25" idx="1"/>
+            <a:endCxn id="23" idx="2"/>
+          </p:cNvCxnSpPr>
+          <p:nvPr/>
+        </p:nvCxnSpPr>
+        <p:spPr>
+          <a:xfrm flipV="1">
+            <a:off x="796896" y="4913167"/>
+            <a:ext cx="10464" cy="649075"/>
+          </a:xfrm>
+          <a:prstGeom prst="straightConnector1">
+            <a:avLst/>
+          </a:prstGeom>
+          <a:ln>
+            <a:solidFill>
+              <a:schemeClr val="tx1"/>
+            </a:solidFill>
+            <a:tailEnd type="triangle"/>
+          </a:ln>
+        </p:spPr>
+        <p:style>
+          <a:lnRef idx="2">
+            <a:schemeClr val="accent1"/>
+          </a:lnRef>
+          <a:fillRef idx="0">
+            <a:schemeClr val="accent1"/>
+          </a:fillRef>
+          <a:effectRef idx="1">
+            <a:schemeClr val="accent1"/>
+          </a:effectRef>
+          <a:fontRef idx="minor">
+            <a:schemeClr val="tx1"/>
+          </a:fontRef>
+        </p:style>
+      </p:cxnSp>
+      <p:cxnSp>
+        <p:nvCxnSpPr>
+          <p:cNvPr id="107" name="连接符: 肘形 106">
+            <a:extLst>
+              <a:ext uri="{FF2B5EF4-FFF2-40B4-BE49-F238E27FC236}">
+                <a16:creationId xmlns:a16="http://schemas.microsoft.com/office/drawing/2014/main" id="{B4EE750F-10CE-E6D9-2C15-6A6471021918}"/>
+              </a:ext>
+            </a:extLst>
+          </p:cNvPr>
+          <p:cNvCxnSpPr>
+            <a:cxnSpLocks/>
+            <a:stCxn id="21" idx="3"/>
+            <a:endCxn id="34" idx="1"/>
+          </p:cNvCxnSpPr>
+          <p:nvPr/>
+        </p:nvCxnSpPr>
+        <p:spPr>
+          <a:xfrm>
+            <a:off x="1979225" y="3278999"/>
+            <a:ext cx="1213409" cy="557536"/>
+          </a:xfrm>
+          <a:prstGeom prst="bentConnector3">
+            <a:avLst/>
+          </a:prstGeom>
+          <a:ln>
+            <a:solidFill>
+              <a:schemeClr val="tx1"/>
+            </a:solidFill>
+            <a:tailEnd type="triangle"/>
+          </a:ln>
+        </p:spPr>
+        <p:style>
+          <a:lnRef idx="2">
+            <a:schemeClr val="accent1"/>
+          </a:lnRef>
+          <a:fillRef idx="0">
+            <a:schemeClr val="accent1"/>
+          </a:fillRef>
+          <a:effectRef idx="1">
+            <a:schemeClr val="accent1"/>
+          </a:effectRef>
+          <a:fontRef idx="minor">
+            <a:schemeClr val="tx1"/>
+          </a:fontRef>
+        </p:style>
+      </p:cxnSp>
+      <p:cxnSp>
+        <p:nvCxnSpPr>
+          <p:cNvPr id="110" name="连接符: 肘形 109">
+            <a:extLst>
+              <a:ext uri="{FF2B5EF4-FFF2-40B4-BE49-F238E27FC236}">
+                <a16:creationId xmlns:a16="http://schemas.microsoft.com/office/drawing/2014/main" id="{1B259189-144F-7BAC-E27B-5AB564D9DAFC}"/>
+              </a:ext>
+            </a:extLst>
+          </p:cNvPr>
+          <p:cNvCxnSpPr>
+            <a:cxnSpLocks/>
+            <a:stCxn id="22" idx="3"/>
+            <a:endCxn id="35" idx="1"/>
+          </p:cNvCxnSpPr>
+          <p:nvPr/>
+        </p:nvCxnSpPr>
+        <p:spPr>
+          <a:xfrm>
+            <a:off x="1979225" y="3987319"/>
+            <a:ext cx="1213409" cy="899212"/>
+          </a:xfrm>
+          <a:prstGeom prst="bentConnector3">
+            <a:avLst/>
+          </a:prstGeom>
+          <a:ln>
+            <a:solidFill>
+              <a:schemeClr val="tx1"/>
+            </a:solidFill>
+            <a:tailEnd type="triangle"/>
+          </a:ln>
+        </p:spPr>
+        <p:style>
+          <a:lnRef idx="2">
+            <a:schemeClr val="accent1"/>
+          </a:lnRef>
+          <a:fillRef idx="0">
+            <a:schemeClr val="accent1"/>
+          </a:fillRef>
+          <a:effectRef idx="1">
+            <a:schemeClr val="accent1"/>
+          </a:effectRef>
+          <a:fontRef idx="minor">
+            <a:schemeClr val="tx1"/>
+          </a:fontRef>
+        </p:style>
+      </p:cxnSp>
+      <mc:AlternateContent xmlns:mc="http://schemas.openxmlformats.org/markup-compatibility/2006">
+        <mc:Choice xmlns:a14="http://schemas.microsoft.com/office/drawing/2010/main" Requires="a14">
+          <p:sp>
+            <p:nvSpPr>
+              <p:cNvPr id="114" name="文本框 113">
+                <a:extLst>
+                  <a:ext uri="{FF2B5EF4-FFF2-40B4-BE49-F238E27FC236}">
+                    <a16:creationId xmlns:a16="http://schemas.microsoft.com/office/drawing/2014/main" id="{38A2434D-779D-59D7-94E6-C105DF9387AC}"/>
+                  </a:ext>
+                </a:extLst>
+              </p:cNvPr>
+              <p:cNvSpPr txBox="1"/>
+              <p:nvPr/>
+            </p:nvSpPr>
+            <p:spPr>
+              <a:xfrm>
+                <a:off x="2082018" y="3706621"/>
+                <a:ext cx="481223" cy="307777"/>
+              </a:xfrm>
+              <a:prstGeom prst="rect">
+                <a:avLst/>
+              </a:prstGeom>
+              <a:noFill/>
+            </p:spPr>
+            <p:txBody>
+              <a:bodyPr wrap="square">
+                <a:spAutoFit/>
+              </a:bodyPr>
+              <a:lstStyle/>
+              <a:p>
+                <a:pPr/>
+                <a14:m>
+                  <m:oMathPara xmlns:m="http://schemas.openxmlformats.org/officeDocument/2006/math">
+                    <m:oMathParaPr>
+                      <m:jc m:val="centerGroup"/>
+                    </m:oMathParaPr>
+                    <m:oMath xmlns:m="http://schemas.openxmlformats.org/officeDocument/2006/math">
+                      <m:sSub>
+                        <m:sSubPr>
+                          <m:ctrlPr>
+                            <a:rPr lang="en-US" altLang="zh-CN" sz="1400" b="0" i="1" smtClean="0">
+                              <a:latin typeface="Cambria Math" panose="02040503050406030204" pitchFamily="18" charset="0"/>
+                            </a:rPr>
+                          </m:ctrlPr>
+                        </m:sSubPr>
+                        <m:e>
+                          <m:r>
+                            <a:rPr lang="en-US" altLang="zh-CN" sz="1400" b="0" i="1" smtClean="0">
+                              <a:latin typeface="Cambria Math" panose="02040503050406030204" pitchFamily="18" charset="0"/>
+                            </a:rPr>
+                            <m:t>𝐶𝑆</m:t>
+                          </m:r>
+                        </m:e>
+                        <m:sub>
+                          <m:r>
+                            <a:rPr lang="en-US" altLang="zh-CN" sz="1400" b="0" i="1" smtClean="0">
+                              <a:latin typeface="Cambria Math" panose="02040503050406030204" pitchFamily="18" charset="0"/>
+                            </a:rPr>
+                            <m:t>𝑖𝑘</m:t>
+                          </m:r>
+                        </m:sub>
+                      </m:sSub>
+                    </m:oMath>
+                  </m:oMathPara>
+                </a14:m>
+                <a:endParaRPr lang="zh-CN" altLang="en-US" dirty="0"/>
+              </a:p>
+            </p:txBody>
+          </p:sp>
+        </mc:Choice>
+        <mc:Fallback>
+          <p:sp>
+            <p:nvSpPr>
+              <p:cNvPr id="114" name="文本框 113">
+                <a:extLst>
+                  <a:ext uri="{FF2B5EF4-FFF2-40B4-BE49-F238E27FC236}">
+                    <a16:creationId xmlns:a16="http://schemas.microsoft.com/office/drawing/2014/main" id="{38A2434D-779D-59D7-94E6-C105DF9387AC}"/>
+                  </a:ext>
+                </a:extLst>
+              </p:cNvPr>
+              <p:cNvSpPr txBox="1">
+                <a:spLocks noRot="1" noChangeAspect="1" noMove="1" noResize="1" noEditPoints="1" noAdjustHandles="1" noChangeArrowheads="1" noChangeShapeType="1" noTextEdit="1"/>
+              </p:cNvSpPr>
+              <p:nvPr/>
+            </p:nvSpPr>
+            <p:spPr>
+              <a:xfrm>
+                <a:off x="2082018" y="3706621"/>
+                <a:ext cx="481223" cy="307777"/>
+              </a:xfrm>
+              <a:prstGeom prst="rect">
+                <a:avLst/>
+              </a:prstGeom>
+              <a:blipFill>
+                <a:blip r:embed="rId11"/>
+                <a:stretch>
+                  <a:fillRect/>
+                </a:stretch>
+              </a:blipFill>
+            </p:spPr>
+            <p:txBody>
+              <a:bodyPr/>
+              <a:lstStyle/>
+              <a:p>
+                <a:r>
+                  <a:rPr lang="zh-CN" altLang="en-US">
+                    <a:noFill/>
+                  </a:rPr>
+                  <a:t> </a:t>
+                </a:r>
+              </a:p>
+            </p:txBody>
+          </p:sp>
+        </mc:Fallback>
+      </mc:AlternateContent>
+      <p:cxnSp>
+        <p:nvCxnSpPr>
+          <p:cNvPr id="115" name="连接符: 肘形 114">
+            <a:extLst>
+              <a:ext uri="{FF2B5EF4-FFF2-40B4-BE49-F238E27FC236}">
+                <a16:creationId xmlns:a16="http://schemas.microsoft.com/office/drawing/2014/main" id="{6447D38F-7BAB-61EB-650C-885520481CEE}"/>
+              </a:ext>
+            </a:extLst>
+          </p:cNvPr>
+          <p:cNvCxnSpPr>
+            <a:cxnSpLocks/>
+            <a:stCxn id="12" idx="2"/>
+            <a:endCxn id="32" idx="0"/>
+          </p:cNvCxnSpPr>
+          <p:nvPr/>
+        </p:nvCxnSpPr>
+        <p:spPr>
+          <a:xfrm rot="16200000" flipH="1">
+            <a:off x="3725310" y="1740488"/>
+            <a:ext cx="480002" cy="919862"/>
+          </a:xfrm>
+          <a:prstGeom prst="bentConnector3">
+            <a:avLst>
+              <a:gd name="adj1" fmla="val 50000"/>
+            </a:avLst>
+          </a:prstGeom>
+          <a:ln>
+            <a:solidFill>
+              <a:schemeClr val="tx1"/>
+            </a:solidFill>
+            <a:tailEnd type="triangle"/>
+          </a:ln>
+        </p:spPr>
+        <p:style>
+          <a:lnRef idx="2">
+            <a:schemeClr val="accent1"/>
+          </a:lnRef>
+          <a:fillRef idx="0">
+            <a:schemeClr val="accent1"/>
+          </a:fillRef>
+          <a:effectRef idx="1">
+            <a:schemeClr val="accent1"/>
+          </a:effectRef>
+          <a:fontRef idx="minor">
+            <a:schemeClr val="tx1"/>
+          </a:fontRef>
+        </p:style>
+      </p:cxnSp>
+      <p:cxnSp>
+        <p:nvCxnSpPr>
+          <p:cNvPr id="118" name="连接符: 肘形 117">
+            <a:extLst>
+              <a:ext uri="{FF2B5EF4-FFF2-40B4-BE49-F238E27FC236}">
+                <a16:creationId xmlns:a16="http://schemas.microsoft.com/office/drawing/2014/main" id="{322432E0-7EE2-0B6A-09AB-80D1B36F3ECC}"/>
+              </a:ext>
+            </a:extLst>
+          </p:cNvPr>
+          <p:cNvCxnSpPr>
+            <a:cxnSpLocks/>
+            <a:stCxn id="16" idx="2"/>
+            <a:endCxn id="32" idx="0"/>
+          </p:cNvCxnSpPr>
+          <p:nvPr/>
+        </p:nvCxnSpPr>
+        <p:spPr>
+          <a:xfrm rot="5400000">
+            <a:off x="4599349" y="1786311"/>
+            <a:ext cx="480002" cy="828216"/>
+          </a:xfrm>
+          <a:prstGeom prst="bentConnector3">
+            <a:avLst>
+              <a:gd name="adj1" fmla="val 50000"/>
+            </a:avLst>
+          </a:prstGeom>
+          <a:ln>
+            <a:solidFill>
+              <a:schemeClr val="tx1"/>
+            </a:solidFill>
+            <a:tailEnd type="triangle"/>
+          </a:ln>
+        </p:spPr>
+        <p:style>
+          <a:lnRef idx="2">
+            <a:schemeClr val="accent1"/>
+          </a:lnRef>
+          <a:fillRef idx="0">
+            <a:schemeClr val="accent1"/>
+          </a:fillRef>
+          <a:effectRef idx="1">
+            <a:schemeClr val="accent1"/>
+          </a:effectRef>
+          <a:fontRef idx="minor">
+            <a:schemeClr val="tx1"/>
+          </a:fontRef>
+        </p:style>
+      </p:cxnSp>
+      <p:cxnSp>
+        <p:nvCxnSpPr>
+          <p:cNvPr id="122" name="连接符: 肘形 121">
+            <a:extLst>
+              <a:ext uri="{FF2B5EF4-FFF2-40B4-BE49-F238E27FC236}">
+                <a16:creationId xmlns:a16="http://schemas.microsoft.com/office/drawing/2014/main" id="{F26935C0-6E14-61FE-95F8-9290DF1615C0}"/>
+              </a:ext>
+            </a:extLst>
+          </p:cNvPr>
+          <p:cNvCxnSpPr>
+            <a:cxnSpLocks/>
+            <a:stCxn id="17" idx="2"/>
+            <a:endCxn id="32" idx="0"/>
+          </p:cNvCxnSpPr>
+          <p:nvPr/>
+        </p:nvCxnSpPr>
+        <p:spPr>
+          <a:xfrm rot="5400000">
+            <a:off x="4183896" y="2196402"/>
+            <a:ext cx="485364" cy="2672"/>
+          </a:xfrm>
+          <a:prstGeom prst="bentConnector3">
+            <a:avLst>
+              <a:gd name="adj1" fmla="val 50000"/>
+            </a:avLst>
+          </a:prstGeom>
+          <a:ln>
+            <a:solidFill>
+              <a:schemeClr val="tx1"/>
+            </a:solidFill>
+            <a:tailEnd type="triangle"/>
+          </a:ln>
+        </p:spPr>
+        <p:style>
+          <a:lnRef idx="2">
+            <a:schemeClr val="accent1"/>
+          </a:lnRef>
+          <a:fillRef idx="0">
+            <a:schemeClr val="accent1"/>
+          </a:fillRef>
+          <a:effectRef idx="1">
+            <a:schemeClr val="accent1"/>
+          </a:effectRef>
+          <a:fontRef idx="minor">
+            <a:schemeClr val="tx1"/>
+          </a:fontRef>
+        </p:style>
+      </p:cxnSp>
+      <p:cxnSp>
+        <p:nvCxnSpPr>
+          <p:cNvPr id="125" name="连接符: 肘形 124">
+            <a:extLst>
+              <a:ext uri="{FF2B5EF4-FFF2-40B4-BE49-F238E27FC236}">
+                <a16:creationId xmlns:a16="http://schemas.microsoft.com/office/drawing/2014/main" id="{2840C643-E02E-5BE8-9B2E-FA4DC45AE2A7}"/>
+              </a:ext>
+            </a:extLst>
+          </p:cNvPr>
+          <p:cNvCxnSpPr>
+            <a:cxnSpLocks/>
+          </p:cNvCxnSpPr>
+          <p:nvPr/>
+        </p:nvCxnSpPr>
+        <p:spPr>
+          <a:xfrm rot="10800000" flipH="1" flipV="1">
+            <a:off x="3192633" y="2789692"/>
+            <a:ext cx="9523" cy="1170666"/>
+          </a:xfrm>
+          <a:prstGeom prst="bentConnector4">
+            <a:avLst>
+              <a:gd name="adj1" fmla="val -2800588"/>
+              <a:gd name="adj2" fmla="val 100311"/>
+            </a:avLst>
+          </a:prstGeom>
+          <a:ln>
+            <a:solidFill>
+              <a:schemeClr val="tx1"/>
+            </a:solidFill>
+            <a:tailEnd type="triangle"/>
+          </a:ln>
+        </p:spPr>
+        <p:style>
+          <a:lnRef idx="2">
+            <a:schemeClr val="accent1"/>
+          </a:lnRef>
+          <a:fillRef idx="0">
+            <a:schemeClr val="accent1"/>
+          </a:fillRef>
+          <a:effectRef idx="1">
+            <a:schemeClr val="accent1"/>
+          </a:effectRef>
+          <a:fontRef idx="minor">
+            <a:schemeClr val="tx1"/>
+          </a:fontRef>
+        </p:style>
+      </p:cxnSp>
+      <p:cxnSp>
+        <p:nvCxnSpPr>
+          <p:cNvPr id="129" name="连接符: 肘形 128">
+            <a:extLst>
+              <a:ext uri="{FF2B5EF4-FFF2-40B4-BE49-F238E27FC236}">
+                <a16:creationId xmlns:a16="http://schemas.microsoft.com/office/drawing/2014/main" id="{1D9DB6AB-B666-A72E-DC8A-63F44C2800F3}"/>
+              </a:ext>
+            </a:extLst>
+          </p:cNvPr>
+          <p:cNvCxnSpPr>
+            <a:cxnSpLocks/>
+          </p:cNvCxnSpPr>
+          <p:nvPr/>
+        </p:nvCxnSpPr>
+        <p:spPr>
+          <a:xfrm rot="10800000" flipV="1">
+            <a:off x="3173584" y="2475367"/>
+            <a:ext cx="12700" cy="2220664"/>
+          </a:xfrm>
+          <a:prstGeom prst="bentConnector4">
+            <a:avLst>
+              <a:gd name="adj1" fmla="val 3150000"/>
+              <a:gd name="adj2" fmla="val 100113"/>
+            </a:avLst>
+          </a:prstGeom>
+          <a:ln>
+            <a:solidFill>
+              <a:schemeClr val="tx1"/>
+            </a:solidFill>
+            <a:tailEnd type="triangle"/>
+          </a:ln>
+        </p:spPr>
+        <p:style>
+          <a:lnRef idx="2">
+            <a:schemeClr val="accent1"/>
+          </a:lnRef>
+          <a:fillRef idx="0">
+            <a:schemeClr val="accent1"/>
+          </a:fillRef>
+          <a:effectRef idx="1">
+            <a:schemeClr val="accent1"/>
+          </a:effectRef>
+          <a:fontRef idx="minor">
+            <a:schemeClr val="tx1"/>
+          </a:fontRef>
+        </p:style>
+      </p:cxnSp>
+      <p:cxnSp>
+        <p:nvCxnSpPr>
+          <p:cNvPr id="179" name="直接箭头连接符 178">
+            <a:extLst>
+              <a:ext uri="{FF2B5EF4-FFF2-40B4-BE49-F238E27FC236}">
+                <a16:creationId xmlns:a16="http://schemas.microsoft.com/office/drawing/2014/main" id="{B8C9782F-032B-4E2D-7F42-B047CC33107E}"/>
+              </a:ext>
+            </a:extLst>
+          </p:cNvPr>
+          <p:cNvCxnSpPr>
+            <a:cxnSpLocks/>
+            <a:endCxn id="38" idx="1"/>
+          </p:cNvCxnSpPr>
+          <p:nvPr/>
+        </p:nvCxnSpPr>
+        <p:spPr>
+          <a:xfrm>
+            <a:off x="5660048" y="3822765"/>
+            <a:ext cx="283551" cy="4245"/>
+          </a:xfrm>
+          <a:prstGeom prst="straightConnector1">
+            <a:avLst/>
+          </a:prstGeom>
+          <a:ln>
+            <a:solidFill>
+              <a:schemeClr val="tx1"/>
+            </a:solidFill>
+            <a:tailEnd type="triangle"/>
+          </a:ln>
+        </p:spPr>
+        <p:style>
+          <a:lnRef idx="2">
+            <a:schemeClr val="accent1"/>
+          </a:lnRef>
+          <a:fillRef idx="0">
+            <a:schemeClr val="accent1"/>
+          </a:fillRef>
+          <a:effectRef idx="1">
+            <a:schemeClr val="accent1"/>
+          </a:effectRef>
+          <a:fontRef idx="minor">
+            <a:schemeClr val="tx1"/>
+          </a:fontRef>
+        </p:style>
+      </p:cxnSp>
+      <p:cxnSp>
+        <p:nvCxnSpPr>
+          <p:cNvPr id="181" name="直接箭头连接符 180">
+            <a:extLst>
+              <a:ext uri="{FF2B5EF4-FFF2-40B4-BE49-F238E27FC236}">
+                <a16:creationId xmlns:a16="http://schemas.microsoft.com/office/drawing/2014/main" id="{7F5CC5CB-2C2E-9E29-6EF6-63F7A1894AD6}"/>
+              </a:ext>
+            </a:extLst>
+          </p:cNvPr>
+          <p:cNvCxnSpPr>
+            <a:cxnSpLocks/>
+            <a:stCxn id="35" idx="3"/>
+            <a:endCxn id="39" idx="1"/>
+          </p:cNvCxnSpPr>
+          <p:nvPr/>
+        </p:nvCxnSpPr>
+        <p:spPr>
+          <a:xfrm>
+            <a:off x="5657849" y="4886531"/>
+            <a:ext cx="285749" cy="0"/>
+          </a:xfrm>
+          <a:prstGeom prst="straightConnector1">
+            <a:avLst/>
+          </a:prstGeom>
+          <a:ln>
+            <a:solidFill>
+              <a:schemeClr val="tx1"/>
+            </a:solidFill>
+            <a:tailEnd type="triangle"/>
+          </a:ln>
+        </p:spPr>
+        <p:style>
+          <a:lnRef idx="2">
+            <a:schemeClr val="accent1"/>
+          </a:lnRef>
+          <a:fillRef idx="0">
+            <a:schemeClr val="accent1"/>
+          </a:fillRef>
+          <a:effectRef idx="1">
+            <a:schemeClr val="accent1"/>
+          </a:effectRef>
+          <a:fontRef idx="minor">
+            <a:schemeClr val="tx1"/>
+          </a:fontRef>
+        </p:style>
+      </p:cxnSp>
+      <p:cxnSp>
+        <p:nvCxnSpPr>
+          <p:cNvPr id="182" name="连接符: 肘形 181">
+            <a:extLst>
+              <a:ext uri="{FF2B5EF4-FFF2-40B4-BE49-F238E27FC236}">
+                <a16:creationId xmlns:a16="http://schemas.microsoft.com/office/drawing/2014/main" id="{8F04A014-D0E5-FAFC-3194-552F211F17D6}"/>
+              </a:ext>
+            </a:extLst>
+          </p:cNvPr>
+          <p:cNvCxnSpPr>
+            <a:cxnSpLocks/>
+            <a:endCxn id="40" idx="1"/>
+          </p:cNvCxnSpPr>
+          <p:nvPr/>
+        </p:nvCxnSpPr>
+        <p:spPr>
+          <a:xfrm flipV="1">
+            <a:off x="8408814" y="3054461"/>
+            <a:ext cx="615365" cy="921139"/>
+          </a:xfrm>
+          <a:prstGeom prst="bentConnector3">
+            <a:avLst>
+              <a:gd name="adj1" fmla="val 36998"/>
+            </a:avLst>
+          </a:prstGeom>
+          <a:ln>
+            <a:solidFill>
+              <a:schemeClr val="tx1"/>
+            </a:solidFill>
+            <a:tailEnd type="triangle"/>
+          </a:ln>
+        </p:spPr>
+        <p:style>
+          <a:lnRef idx="2">
+            <a:schemeClr val="accent1"/>
+          </a:lnRef>
+          <a:fillRef idx="0">
+            <a:schemeClr val="accent1"/>
+          </a:fillRef>
+          <a:effectRef idx="1">
+            <a:schemeClr val="accent1"/>
+          </a:effectRef>
+          <a:fontRef idx="minor">
+            <a:schemeClr val="tx1"/>
+          </a:fontRef>
+        </p:style>
+      </p:cxnSp>
+      <p:cxnSp>
+        <p:nvCxnSpPr>
+          <p:cNvPr id="189" name="连接符: 肘形 188">
+            <a:extLst>
+              <a:ext uri="{FF2B5EF4-FFF2-40B4-BE49-F238E27FC236}">
+                <a16:creationId xmlns:a16="http://schemas.microsoft.com/office/drawing/2014/main" id="{E23C26E6-6C89-3C86-DE75-D0DFFAA54C29}"/>
+              </a:ext>
+            </a:extLst>
+          </p:cNvPr>
+          <p:cNvCxnSpPr>
+            <a:cxnSpLocks/>
+          </p:cNvCxnSpPr>
+          <p:nvPr/>
+        </p:nvCxnSpPr>
+        <p:spPr>
+          <a:xfrm flipV="1">
+            <a:off x="8420243" y="3180191"/>
+            <a:ext cx="615366" cy="1832070"/>
+          </a:xfrm>
+          <a:prstGeom prst="bentConnector3">
+            <a:avLst>
+              <a:gd name="adj1" fmla="val 55572"/>
+            </a:avLst>
+          </a:prstGeom>
+          <a:ln>
+            <a:solidFill>
+              <a:schemeClr val="tx1"/>
+            </a:solidFill>
+            <a:tailEnd type="triangle"/>
+          </a:ln>
+        </p:spPr>
+        <p:style>
+          <a:lnRef idx="2">
+            <a:schemeClr val="accent1"/>
+          </a:lnRef>
+          <a:fillRef idx="0">
+            <a:schemeClr val="accent1"/>
+          </a:fillRef>
+          <a:effectRef idx="1">
+            <a:schemeClr val="accent1"/>
+          </a:effectRef>
+          <a:fontRef idx="minor">
+            <a:schemeClr val="tx1"/>
+          </a:fontRef>
+        </p:style>
+      </p:cxnSp>
+      <p:cxnSp>
+        <p:nvCxnSpPr>
+          <p:cNvPr id="193" name="直接箭头连接符 192">
+            <a:extLst>
+              <a:ext uri="{FF2B5EF4-FFF2-40B4-BE49-F238E27FC236}">
+                <a16:creationId xmlns:a16="http://schemas.microsoft.com/office/drawing/2014/main" id="{6F7258D2-E3DE-8B0F-D599-BADB33030ADF}"/>
+              </a:ext>
+            </a:extLst>
+          </p:cNvPr>
+          <p:cNvCxnSpPr>
+            <a:cxnSpLocks/>
+            <a:stCxn id="32" idx="3"/>
+            <a:endCxn id="33" idx="1"/>
+          </p:cNvCxnSpPr>
+          <p:nvPr/>
+        </p:nvCxnSpPr>
+        <p:spPr>
+          <a:xfrm>
+            <a:off x="5657849" y="2627767"/>
+            <a:ext cx="1030742" cy="143"/>
+          </a:xfrm>
+          <a:prstGeom prst="straightConnector1">
+            <a:avLst/>
+          </a:prstGeom>
+          <a:ln>
+            <a:solidFill>
+              <a:schemeClr val="tx1"/>
+            </a:solidFill>
+            <a:tailEnd type="triangle"/>
+          </a:ln>
+        </p:spPr>
+        <p:style>
+          <a:lnRef idx="2">
+            <a:schemeClr val="accent1"/>
+          </a:lnRef>
+          <a:fillRef idx="0">
+            <a:schemeClr val="accent1"/>
+          </a:fillRef>
+          <a:effectRef idx="1">
+            <a:schemeClr val="accent1"/>
+          </a:effectRef>
+          <a:fontRef idx="minor">
+            <a:schemeClr val="tx1"/>
+          </a:fontRef>
+        </p:style>
+      </p:cxnSp>
+      <p:cxnSp>
+        <p:nvCxnSpPr>
+          <p:cNvPr id="202" name="连接符: 肘形 201">
+            <a:extLst>
+              <a:ext uri="{FF2B5EF4-FFF2-40B4-BE49-F238E27FC236}">
+                <a16:creationId xmlns:a16="http://schemas.microsoft.com/office/drawing/2014/main" id="{A9CB7E7F-BC72-CF7F-E0C0-069D8B84BE9A}"/>
+              </a:ext>
+            </a:extLst>
+          </p:cNvPr>
+          <p:cNvCxnSpPr>
+            <a:cxnSpLocks/>
+            <a:stCxn id="33" idx="3"/>
+            <a:endCxn id="43" idx="3"/>
+          </p:cNvCxnSpPr>
+          <p:nvPr/>
+        </p:nvCxnSpPr>
+        <p:spPr>
+          <a:xfrm>
+            <a:off x="7739145" y="2627910"/>
+            <a:ext cx="3749833" cy="3567384"/>
+          </a:xfrm>
+          <a:prstGeom prst="bentConnector3">
+            <a:avLst>
+              <a:gd name="adj1" fmla="val 106096"/>
+            </a:avLst>
+          </a:prstGeom>
+          <a:ln>
+            <a:solidFill>
+              <a:schemeClr val="tx1"/>
+            </a:solidFill>
+            <a:tailEnd type="triangle"/>
+          </a:ln>
+        </p:spPr>
+        <p:style>
+          <a:lnRef idx="2">
+            <a:schemeClr val="accent1"/>
+          </a:lnRef>
+          <a:fillRef idx="0">
+            <a:schemeClr val="accent1"/>
+          </a:fillRef>
+          <a:effectRef idx="1">
+            <a:schemeClr val="accent1"/>
+          </a:effectRef>
+          <a:fontRef idx="minor">
+            <a:schemeClr val="tx1"/>
+          </a:fontRef>
+        </p:style>
+      </p:cxnSp>
+      <p:cxnSp>
+        <p:nvCxnSpPr>
+          <p:cNvPr id="207" name="直接箭头连接符 206">
+            <a:extLst>
+              <a:ext uri="{FF2B5EF4-FFF2-40B4-BE49-F238E27FC236}">
+                <a16:creationId xmlns:a16="http://schemas.microsoft.com/office/drawing/2014/main" id="{A1561F02-860D-E243-DAEB-540F37906C5B}"/>
+              </a:ext>
+            </a:extLst>
+          </p:cNvPr>
+          <p:cNvCxnSpPr>
+            <a:cxnSpLocks/>
+            <a:stCxn id="40" idx="2"/>
+            <a:endCxn id="41" idx="0"/>
+          </p:cNvCxnSpPr>
+          <p:nvPr/>
+        </p:nvCxnSpPr>
+        <p:spPr>
+          <a:xfrm flipH="1">
+            <a:off x="10256786" y="3313676"/>
+            <a:ext cx="1" cy="392945"/>
+          </a:xfrm>
+          <a:prstGeom prst="straightConnector1">
+            <a:avLst/>
+          </a:prstGeom>
+          <a:ln>
+            <a:solidFill>
+              <a:schemeClr val="tx1"/>
+            </a:solidFill>
+            <a:tailEnd type="triangle"/>
+          </a:ln>
+        </p:spPr>
+        <p:style>
+          <a:lnRef idx="2">
+            <a:schemeClr val="accent1"/>
+          </a:lnRef>
+          <a:fillRef idx="0">
+            <a:schemeClr val="accent1"/>
+          </a:fillRef>
+          <a:effectRef idx="1">
+            <a:schemeClr val="accent1"/>
+          </a:effectRef>
+          <a:fontRef idx="minor">
+            <a:schemeClr val="tx1"/>
+          </a:fontRef>
+        </p:style>
+      </p:cxnSp>
+      <p:cxnSp>
+        <p:nvCxnSpPr>
+          <p:cNvPr id="210" name="直接箭头连接符 209">
+            <a:extLst>
+              <a:ext uri="{FF2B5EF4-FFF2-40B4-BE49-F238E27FC236}">
+                <a16:creationId xmlns:a16="http://schemas.microsoft.com/office/drawing/2014/main" id="{8AA5B53A-ABC9-8611-7FF3-6E6B098325B3}"/>
+              </a:ext>
+            </a:extLst>
+          </p:cNvPr>
+          <p:cNvCxnSpPr>
+            <a:cxnSpLocks/>
+            <a:stCxn id="41" idx="2"/>
+          </p:cNvCxnSpPr>
+          <p:nvPr/>
+        </p:nvCxnSpPr>
+        <p:spPr>
+          <a:xfrm flipH="1">
+            <a:off x="10256370" y="4225051"/>
+            <a:ext cx="416" cy="598737"/>
+          </a:xfrm>
+          <a:prstGeom prst="straightConnector1">
+            <a:avLst/>
+          </a:prstGeom>
+          <a:ln>
+            <a:solidFill>
+              <a:schemeClr val="tx1"/>
+            </a:solidFill>
+            <a:tailEnd type="triangle"/>
+          </a:ln>
+        </p:spPr>
+        <p:style>
+          <a:lnRef idx="2">
+            <a:schemeClr val="accent1"/>
+          </a:lnRef>
+          <a:fillRef idx="0">
+            <a:schemeClr val="accent1"/>
+          </a:fillRef>
+          <a:effectRef idx="1">
+            <a:schemeClr val="accent1"/>
+          </a:effectRef>
+          <a:fontRef idx="minor">
+            <a:schemeClr val="tx1"/>
+          </a:fontRef>
+        </p:style>
+      </p:cxnSp>
+      <p:cxnSp>
+        <p:nvCxnSpPr>
+          <p:cNvPr id="212" name="直接箭头连接符 211">
+            <a:extLst>
+              <a:ext uri="{FF2B5EF4-FFF2-40B4-BE49-F238E27FC236}">
+                <a16:creationId xmlns:a16="http://schemas.microsoft.com/office/drawing/2014/main" id="{8533A188-A0B6-C96D-2A0E-86FC1F251721}"/>
+              </a:ext>
+            </a:extLst>
+          </p:cNvPr>
+          <p:cNvCxnSpPr>
+            <a:cxnSpLocks/>
+            <a:stCxn id="42" idx="2"/>
+            <a:endCxn id="43" idx="0"/>
+          </p:cNvCxnSpPr>
+          <p:nvPr/>
+        </p:nvCxnSpPr>
+        <p:spPr>
+          <a:xfrm flipH="1">
+            <a:off x="10256371" y="5315118"/>
+            <a:ext cx="415" cy="620961"/>
+          </a:xfrm>
+          <a:prstGeom prst="straightConnector1">
+            <a:avLst/>
+          </a:prstGeom>
+          <a:ln>
+            <a:solidFill>
+              <a:schemeClr val="tx1"/>
+            </a:solidFill>
+            <a:tailEnd type="triangle"/>
+          </a:ln>
+        </p:spPr>
+        <p:style>
+          <a:lnRef idx="2">
+            <a:schemeClr val="accent1"/>
+          </a:lnRef>
+          <a:fillRef idx="0">
+            <a:schemeClr val="accent1"/>
+          </a:fillRef>
+          <a:effectRef idx="1">
+            <a:schemeClr val="accent1"/>
+          </a:effectRef>
+          <a:fontRef idx="minor">
+            <a:schemeClr val="tx1"/>
+          </a:fontRef>
+        </p:style>
+      </p:cxnSp>
+      <p:cxnSp>
+        <p:nvCxnSpPr>
+          <p:cNvPr id="216" name="直接箭头连接符 215">
+            <a:extLst>
+              <a:ext uri="{FF2B5EF4-FFF2-40B4-BE49-F238E27FC236}">
+                <a16:creationId xmlns:a16="http://schemas.microsoft.com/office/drawing/2014/main" id="{E72A02BE-C22A-C6A4-A578-C3D2FA6CB36E}"/>
+              </a:ext>
+            </a:extLst>
+          </p:cNvPr>
+          <p:cNvCxnSpPr>
+            <a:cxnSpLocks/>
+            <a:stCxn id="43" idx="1"/>
+            <a:endCxn id="37" idx="3"/>
+          </p:cNvCxnSpPr>
+          <p:nvPr/>
+        </p:nvCxnSpPr>
+        <p:spPr>
+          <a:xfrm flipH="1">
+            <a:off x="8324581" y="6195294"/>
+            <a:ext cx="699182" cy="2663"/>
+          </a:xfrm>
+          <a:prstGeom prst="straightConnector1">
+            <a:avLst/>
+          </a:prstGeom>
+          <a:ln>
+            <a:solidFill>
+              <a:schemeClr val="tx1"/>
+            </a:solidFill>
+            <a:tailEnd type="triangle"/>
+          </a:ln>
+        </p:spPr>
+        <p:style>
+          <a:lnRef idx="2">
+            <a:schemeClr val="accent1"/>
+          </a:lnRef>
+          <a:fillRef idx="0">
+            <a:schemeClr val="accent1"/>
+          </a:fillRef>
+          <a:effectRef idx="1">
+            <a:schemeClr val="accent1"/>
+          </a:effectRef>
+          <a:fontRef idx="minor">
+            <a:schemeClr val="tx1"/>
+          </a:fontRef>
+        </p:style>
+      </p:cxnSp>
+      <p:cxnSp>
+        <p:nvCxnSpPr>
+          <p:cNvPr id="219" name="直接箭头连接符 218">
+            <a:extLst>
+              <a:ext uri="{FF2B5EF4-FFF2-40B4-BE49-F238E27FC236}">
+                <a16:creationId xmlns:a16="http://schemas.microsoft.com/office/drawing/2014/main" id="{EF8167D8-6E0C-3C34-398A-24C5F69A2CA7}"/>
+              </a:ext>
+            </a:extLst>
+          </p:cNvPr>
+          <p:cNvCxnSpPr>
+            <a:cxnSpLocks/>
+            <a:stCxn id="37" idx="1"/>
+            <a:endCxn id="36" idx="3"/>
+          </p:cNvCxnSpPr>
+          <p:nvPr/>
+        </p:nvCxnSpPr>
+        <p:spPr>
+          <a:xfrm flipH="1">
+            <a:off x="5463824" y="6197957"/>
+            <a:ext cx="708109" cy="7638"/>
+          </a:xfrm>
+          <a:prstGeom prst="straightConnector1">
+            <a:avLst/>
+          </a:prstGeom>
+          <a:ln>
+            <a:solidFill>
+              <a:schemeClr val="tx1"/>
+            </a:solidFill>
+            <a:tailEnd type="triangle"/>
+          </a:ln>
+        </p:spPr>
+        <p:style>
+          <a:lnRef idx="2">
+            <a:schemeClr val="accent1"/>
+          </a:lnRef>
+          <a:fillRef idx="0">
+            <a:schemeClr val="accent1"/>
+          </a:fillRef>
+          <a:effectRef idx="1">
+            <a:schemeClr val="accent1"/>
+          </a:effectRef>
+          <a:fontRef idx="minor">
+            <a:schemeClr val="tx1"/>
+          </a:fontRef>
+        </p:style>
+      </p:cxnSp>
     </p:spTree>
     <p:extLst>
       <p:ext uri="{BB962C8B-B14F-4D97-AF65-F5344CB8AC3E}">
@@ -5042,4 +11395,319 @@
     </a:ext>
   </a:extLst>
 </a:theme>
+</file>
+
+<file path=ppt/theme/theme2.xml><?xml version="1.0" encoding="utf-8"?>
+<a:theme xmlns:a="http://schemas.openxmlformats.org/drawingml/2006/main" name="Office 主题​​">
+  <a:themeElements>
+    <a:clrScheme name="Office">
+      <a:dk1>
+        <a:sysClr val="windowText" lastClr="000000"/>
+      </a:dk1>
+      <a:lt1>
+        <a:sysClr val="window" lastClr="FFFFFF"/>
+      </a:lt1>
+      <a:dk2>
+        <a:srgbClr val="0E2841"/>
+      </a:dk2>
+      <a:lt2>
+        <a:srgbClr val="E8E8E8"/>
+      </a:lt2>
+      <a:accent1>
+        <a:srgbClr val="156082"/>
+      </a:accent1>
+      <a:accent2>
+        <a:srgbClr val="E97132"/>
+      </a:accent2>
+      <a:accent3>
+        <a:srgbClr val="196B24"/>
+      </a:accent3>
+      <a:accent4>
+        <a:srgbClr val="0F9ED5"/>
+      </a:accent4>
+      <a:accent5>
+        <a:srgbClr val="A02B93"/>
+      </a:accent5>
+      <a:accent6>
+        <a:srgbClr val="4EA72E"/>
+      </a:accent6>
+      <a:hlink>
+        <a:srgbClr val="467886"/>
+      </a:hlink>
+      <a:folHlink>
+        <a:srgbClr val="96607D"/>
+      </a:folHlink>
+    </a:clrScheme>
+    <a:fontScheme name="Office">
+      <a:majorFont>
+        <a:latin typeface="等线 Light" panose="02110004020202020204"/>
+        <a:ea typeface=""/>
+        <a:cs typeface=""/>
+        <a:font script="Jpan" typeface="游ゴシック Light"/>
+        <a:font script="Hang" typeface="맑은 고딕"/>
+        <a:font script="Hans" typeface="等线 Light"/>
+        <a:font script="Hant" typeface="新細明體"/>
+        <a:font script="Arab" typeface="Times New Roman"/>
+        <a:font script="Hebr" typeface="Times New Roman"/>
+        <a:font script="Thai" typeface="Angsana New"/>
+        <a:font script="Ethi" typeface="Nyala"/>
+        <a:font script="Beng" typeface="Vrinda"/>
+        <a:font script="Gujr" typeface="Shruti"/>
+        <a:font script="Khmr" typeface="MoolBoran"/>
+        <a:font script="Knda" typeface="Tunga"/>
+        <a:font script="Guru" typeface="Raavi"/>
+        <a:font script="Cans" typeface="Euphemia"/>
+        <a:font script="Cher" typeface="Plantagenet Cherokee"/>
+        <a:font script="Yiii" typeface="Microsoft Yi Baiti"/>
+        <a:font script="Tibt" typeface="Microsoft Himalaya"/>
+        <a:font script="Thaa" typeface="MV Boli"/>
+        <a:font script="Deva" typeface="Mangal"/>
+        <a:font script="Telu" typeface="Gautami"/>
+        <a:font script="Taml" typeface="Latha"/>
+        <a:font script="Syrc" typeface="Estrangelo Edessa"/>
+        <a:font script="Orya" typeface="Kalinga"/>
+        <a:font script="Mlym" typeface="Kartika"/>
+        <a:font script="Laoo" typeface="DokChampa"/>
+        <a:font script="Sinh" typeface="Iskoola Pota"/>
+        <a:font script="Mong" typeface="Mongolian Baiti"/>
+        <a:font script="Viet" typeface="Times New Roman"/>
+        <a:font script="Uigh" typeface="Microsoft Uighur"/>
+        <a:font script="Geor" typeface="Sylfaen"/>
+        <a:font script="Armn" typeface="Arial"/>
+        <a:font script="Bugi" typeface="Leelawadee UI"/>
+        <a:font script="Bopo" typeface="Microsoft JhengHei"/>
+        <a:font script="Java" typeface="Javanese Text"/>
+        <a:font script="Lisu" typeface="Segoe UI"/>
+        <a:font script="Mymr" typeface="Myanmar Text"/>
+        <a:font script="Nkoo" typeface="Ebrima"/>
+        <a:font script="Olck" typeface="Nirmala UI"/>
+        <a:font script="Osma" typeface="Ebrima"/>
+        <a:font script="Phag" typeface="Phagspa"/>
+        <a:font script="Syrn" typeface="Estrangelo Edessa"/>
+        <a:font script="Syrj" typeface="Estrangelo Edessa"/>
+        <a:font script="Syre" typeface="Estrangelo Edessa"/>
+        <a:font script="Sora" typeface="Nirmala UI"/>
+        <a:font script="Tale" typeface="Microsoft Tai Le"/>
+        <a:font script="Talu" typeface="Microsoft New Tai Lue"/>
+        <a:font script="Tfng" typeface="Ebrima"/>
+      </a:majorFont>
+      <a:minorFont>
+        <a:latin typeface="等线" panose="02110004020202020204"/>
+        <a:ea typeface=""/>
+        <a:cs typeface=""/>
+        <a:font script="Jpan" typeface="游ゴシック"/>
+        <a:font script="Hang" typeface="맑은 고딕"/>
+        <a:font script="Hans" typeface="等线"/>
+        <a:font script="Hant" typeface="新細明體"/>
+        <a:font script="Arab" typeface="Arial"/>
+        <a:font script="Hebr" typeface="Arial"/>
+        <a:font script="Thai" typeface="Cordia New"/>
+        <a:font script="Ethi" typeface="Nyala"/>
+        <a:font script="Beng" typeface="Vrinda"/>
+        <a:font script="Gujr" typeface="Shruti"/>
+        <a:font script="Khmr" typeface="DaunPenh"/>
+        <a:font script="Knda" typeface="Tunga"/>
+        <a:font script="Guru" typeface="Raavi"/>
+        <a:font script="Cans" typeface="Euphemia"/>
+        <a:font script="Cher" typeface="Plantagenet Cherokee"/>
+        <a:font script="Yiii" typeface="Microsoft Yi Baiti"/>
+        <a:font script="Tibt" typeface="Microsoft Himalaya"/>
+        <a:font script="Thaa" typeface="MV Boli"/>
+        <a:font script="Deva" typeface="Mangal"/>
+        <a:font script="Telu" typeface="Gautami"/>
+        <a:font script="Taml" typeface="Latha"/>
+        <a:font script="Syrc" typeface="Estrangelo Edessa"/>
+        <a:font script="Orya" typeface="Kalinga"/>
+        <a:font script="Mlym" typeface="Kartika"/>
+        <a:font script="Laoo" typeface="DokChampa"/>
+        <a:font script="Sinh" typeface="Iskoola Pota"/>
+        <a:font script="Mong" typeface="Mongolian Baiti"/>
+        <a:font script="Viet" typeface="Arial"/>
+        <a:font script="Uigh" typeface="Microsoft Uighur"/>
+        <a:font script="Geor" typeface="Sylfaen"/>
+        <a:font script="Armn" typeface="Arial"/>
+        <a:font script="Bugi" typeface="Leelawadee UI"/>
+        <a:font script="Bopo" typeface="Microsoft JhengHei"/>
+        <a:font script="Java" typeface="Javanese Text"/>
+        <a:font script="Lisu" typeface="Segoe UI"/>
+        <a:font script="Mymr" typeface="Myanmar Text"/>
+        <a:font script="Nkoo" typeface="Ebrima"/>
+        <a:font script="Olck" typeface="Nirmala UI"/>
+        <a:font script="Osma" typeface="Ebrima"/>
+        <a:font script="Phag" typeface="Phagspa"/>
+        <a:font script="Syrn" typeface="Estrangelo Edessa"/>
+        <a:font script="Syrj" typeface="Estrangelo Edessa"/>
+        <a:font script="Syre" typeface="Estrangelo Edessa"/>
+        <a:font script="Sora" typeface="Nirmala UI"/>
+        <a:font script="Tale" typeface="Microsoft Tai Le"/>
+        <a:font script="Talu" typeface="Microsoft New Tai Lue"/>
+        <a:font script="Tfng" typeface="Ebrima"/>
+      </a:minorFont>
+    </a:fontScheme>
+    <a:fmtScheme name="Office">
+      <a:fillStyleLst>
+        <a:solidFill>
+          <a:schemeClr val="phClr"/>
+        </a:solidFill>
+        <a:gradFill rotWithShape="1">
+          <a:gsLst>
+            <a:gs pos="0">
+              <a:schemeClr val="phClr">
+                <a:lumMod val="110000"/>
+                <a:satMod val="105000"/>
+                <a:tint val="67000"/>
+              </a:schemeClr>
+            </a:gs>
+            <a:gs pos="50000">
+              <a:schemeClr val="phClr">
+                <a:lumMod val="105000"/>
+                <a:satMod val="103000"/>
+                <a:tint val="73000"/>
+              </a:schemeClr>
+            </a:gs>
+            <a:gs pos="100000">
+              <a:schemeClr val="phClr">
+                <a:lumMod val="105000"/>
+                <a:satMod val="109000"/>
+                <a:tint val="81000"/>
+              </a:schemeClr>
+            </a:gs>
+          </a:gsLst>
+          <a:lin ang="5400000" scaled="0"/>
+        </a:gradFill>
+        <a:gradFill rotWithShape="1">
+          <a:gsLst>
+            <a:gs pos="0">
+              <a:schemeClr val="phClr">
+                <a:satMod val="103000"/>
+                <a:lumMod val="102000"/>
+                <a:tint val="94000"/>
+              </a:schemeClr>
+            </a:gs>
+            <a:gs pos="50000">
+              <a:schemeClr val="phClr">
+                <a:satMod val="110000"/>
+                <a:lumMod val="100000"/>
+                <a:shade val="100000"/>
+              </a:schemeClr>
+            </a:gs>
+            <a:gs pos="100000">
+              <a:schemeClr val="phClr">
+                <a:lumMod val="99000"/>
+                <a:satMod val="120000"/>
+                <a:shade val="78000"/>
+              </a:schemeClr>
+            </a:gs>
+          </a:gsLst>
+          <a:lin ang="5400000" scaled="0"/>
+        </a:gradFill>
+      </a:fillStyleLst>
+      <a:lnStyleLst>
+        <a:ln w="12700" cap="flat" cmpd="sng" algn="ctr">
+          <a:solidFill>
+            <a:schemeClr val="phClr"/>
+          </a:solidFill>
+          <a:prstDash val="solid"/>
+          <a:miter lim="800000"/>
+        </a:ln>
+        <a:ln w="19050" cap="flat" cmpd="sng" algn="ctr">
+          <a:solidFill>
+            <a:schemeClr val="phClr"/>
+          </a:solidFill>
+          <a:prstDash val="solid"/>
+          <a:miter lim="800000"/>
+        </a:ln>
+        <a:ln w="25400" cap="flat" cmpd="sng" algn="ctr">
+          <a:solidFill>
+            <a:schemeClr val="phClr"/>
+          </a:solidFill>
+          <a:prstDash val="solid"/>
+          <a:miter lim="800000"/>
+        </a:ln>
+      </a:lnStyleLst>
+      <a:effectStyleLst>
+        <a:effectStyle>
+          <a:effectLst/>
+        </a:effectStyle>
+        <a:effectStyle>
+          <a:effectLst/>
+        </a:effectStyle>
+        <a:effectStyle>
+          <a:effectLst>
+            <a:outerShdw blurRad="57150" dist="19050" dir="5400000" algn="ctr" rotWithShape="0">
+              <a:srgbClr val="000000">
+                <a:alpha val="63000"/>
+              </a:srgbClr>
+            </a:outerShdw>
+          </a:effectLst>
+        </a:effectStyle>
+      </a:effectStyleLst>
+      <a:bgFillStyleLst>
+        <a:solidFill>
+          <a:schemeClr val="phClr"/>
+        </a:solidFill>
+        <a:solidFill>
+          <a:schemeClr val="phClr">
+            <a:tint val="95000"/>
+            <a:satMod val="170000"/>
+          </a:schemeClr>
+        </a:solidFill>
+        <a:gradFill rotWithShape="1">
+          <a:gsLst>
+            <a:gs pos="0">
+              <a:schemeClr val="phClr">
+                <a:tint val="93000"/>
+                <a:satMod val="150000"/>
+                <a:shade val="98000"/>
+                <a:lumMod val="102000"/>
+              </a:schemeClr>
+            </a:gs>
+            <a:gs pos="50000">
+              <a:schemeClr val="phClr">
+                <a:tint val="98000"/>
+                <a:satMod val="130000"/>
+                <a:shade val="90000"/>
+                <a:lumMod val="103000"/>
+              </a:schemeClr>
+            </a:gs>
+            <a:gs pos="100000">
+              <a:schemeClr val="phClr">
+                <a:shade val="63000"/>
+                <a:satMod val="120000"/>
+              </a:schemeClr>
+            </a:gs>
+          </a:gsLst>
+          <a:lin ang="5400000" scaled="0"/>
+        </a:gradFill>
+      </a:bgFillStyleLst>
+    </a:fmtScheme>
+  </a:themeElements>
+  <a:objectDefaults>
+    <a:lnDef>
+      <a:spPr/>
+      <a:bodyPr/>
+      <a:lstStyle/>
+      <a:style>
+        <a:lnRef idx="2">
+          <a:schemeClr val="accent1"/>
+        </a:lnRef>
+        <a:fillRef idx="0">
+          <a:schemeClr val="accent1"/>
+        </a:fillRef>
+        <a:effectRef idx="1">
+          <a:schemeClr val="accent1"/>
+        </a:effectRef>
+        <a:fontRef idx="minor">
+          <a:schemeClr val="tx1"/>
+        </a:fontRef>
+      </a:style>
+    </a:lnDef>
+  </a:objectDefaults>
+  <a:extraClrSchemeLst/>
+  <a:extLst>
+    <a:ext uri="{05A4C25C-085E-4340-85A3-A5531E510DB2}">
+      <thm15:themeFamily xmlns:thm15="http://schemas.microsoft.com/office/thememl/2012/main" name="Office Theme" id="{2E142A2C-CD16-42D6-873A-C26D2A0506FA}" vid="{1BDDFF52-6CD6-40A5-AB3C-68EB2F1E4D0A}"/>
+    </a:ext>
+  </a:extLst>
+</a:theme>
 </file>
--- a/开题提交/答辩ppt.pptx
+++ b/开题提交/答辩ppt.pptx
@@ -5,7 +5,7 @@
     <p:sldMasterId id="2147483648" r:id="rId1"/>
   </p:sldMasterIdLst>
   <p:notesMasterIdLst>
-    <p:notesMasterId r:id="rId13"/>
+    <p:notesMasterId r:id="rId15"/>
   </p:notesMasterIdLst>
   <p:sldIdLst>
     <p:sldId id="256" r:id="rId2"/>
@@ -16,9 +16,11 @@
     <p:sldId id="265" r:id="rId7"/>
     <p:sldId id="266" r:id="rId8"/>
     <p:sldId id="260" r:id="rId9"/>
-    <p:sldId id="261" r:id="rId10"/>
-    <p:sldId id="262" r:id="rId11"/>
-    <p:sldId id="263" r:id="rId12"/>
+    <p:sldId id="267" r:id="rId10"/>
+    <p:sldId id="268" r:id="rId11"/>
+    <p:sldId id="261" r:id="rId12"/>
+    <p:sldId id="262" r:id="rId13"/>
+    <p:sldId id="263" r:id="rId14"/>
   </p:sldIdLst>
   <p:sldSz cx="12192000" cy="6858000"/>
   <p:notesSz cx="6858000" cy="9144000"/>
@@ -218,7 +220,7 @@
           <a:p>
             <a:fld id="{E6965D32-5B74-4B1A-932F-5518DF156731}" type="datetimeFigureOut">
               <a:rPr lang="zh-CN" altLang="en-US" smtClean="0"/>
-              <a:t>2025/3/26</a:t>
+              <a:t>2025/3/27</a:t>
             </a:fld>
             <a:endParaRPr lang="zh-CN" altLang="en-US"/>
           </a:p>
@@ -585,6 +587,254 @@
 </p:notes>
 </file>
 
+<file path=ppt/notesSlides/notesSlide2.xml><?xml version="1.0" encoding="utf-8"?>
+<p:notes xmlns:a="http://schemas.openxmlformats.org/drawingml/2006/main" xmlns:r="http://schemas.openxmlformats.org/officeDocument/2006/relationships" xmlns:p="http://schemas.openxmlformats.org/presentationml/2006/main">
+  <p:cSld>
+    <p:spTree>
+      <p:nvGrpSpPr>
+        <p:cNvPr id="1" name="">
+          <a:extLst>
+            <a:ext uri="{FF2B5EF4-FFF2-40B4-BE49-F238E27FC236}">
+              <a16:creationId xmlns:a16="http://schemas.microsoft.com/office/drawing/2014/main" id="{9D5D18EA-8F84-B28F-EF18-BB468DA533E1}"/>
+            </a:ext>
+          </a:extLst>
+        </p:cNvPr>
+        <p:cNvGrpSpPr/>
+        <p:nvPr/>
+      </p:nvGrpSpPr>
+      <p:grpSpPr>
+        <a:xfrm>
+          <a:off x="0" y="0"/>
+          <a:ext cx="0" cy="0"/>
+          <a:chOff x="0" y="0"/>
+          <a:chExt cx="0" cy="0"/>
+        </a:xfrm>
+      </p:grpSpPr>
+      <p:sp>
+        <p:nvSpPr>
+          <p:cNvPr id="2" name="幻灯片图像占位符 1">
+            <a:extLst>
+              <a:ext uri="{FF2B5EF4-FFF2-40B4-BE49-F238E27FC236}">
+                <a16:creationId xmlns:a16="http://schemas.microsoft.com/office/drawing/2014/main" id="{08EFF4FA-717D-8C86-C37A-FD8B96F71FBE}"/>
+              </a:ext>
+            </a:extLst>
+          </p:cNvPr>
+          <p:cNvSpPr>
+            <a:spLocks noGrp="1" noRot="1" noChangeAspect="1"/>
+          </p:cNvSpPr>
+          <p:nvPr>
+            <p:ph type="sldImg"/>
+          </p:nvPr>
+        </p:nvSpPr>
+        <p:spPr/>
+      </p:sp>
+      <p:sp>
+        <p:nvSpPr>
+          <p:cNvPr id="3" name="备注占位符 2">
+            <a:extLst>
+              <a:ext uri="{FF2B5EF4-FFF2-40B4-BE49-F238E27FC236}">
+                <a16:creationId xmlns:a16="http://schemas.microsoft.com/office/drawing/2014/main" id="{9184C538-9D81-7B01-0100-641FC339EB72}"/>
+              </a:ext>
+            </a:extLst>
+          </p:cNvPr>
+          <p:cNvSpPr>
+            <a:spLocks noGrp="1"/>
+          </p:cNvSpPr>
+          <p:nvPr>
+            <p:ph type="body" idx="1"/>
+          </p:nvPr>
+        </p:nvSpPr>
+        <p:spPr/>
+        <p:txBody>
+          <a:bodyPr/>
+          <a:lstStyle/>
+          <a:p>
+            <a:r>
+              <a:rPr lang="zh-CN" altLang="en-US" dirty="0"/>
+              <a:t>药物</a:t>
+            </a:r>
+            <a:r>
+              <a:rPr lang="en-US" altLang="zh-CN" dirty="0"/>
+              <a:t>-</a:t>
+            </a:r>
+            <a:r>
+              <a:rPr lang="zh-CN" altLang="en-US" dirty="0"/>
+              <a:t>蛋白质相互作用集合</a:t>
+            </a:r>
+            <a:r>
+              <a:rPr lang="en-US" altLang="zh-CN" dirty="0"/>
+              <a:t>K</a:t>
+            </a:r>
+            <a:endParaRPr lang="zh-CN" altLang="en-US" dirty="0"/>
+          </a:p>
+        </p:txBody>
+      </p:sp>
+      <p:sp>
+        <p:nvSpPr>
+          <p:cNvPr id="4" name="灯片编号占位符 3">
+            <a:extLst>
+              <a:ext uri="{FF2B5EF4-FFF2-40B4-BE49-F238E27FC236}">
+                <a16:creationId xmlns:a16="http://schemas.microsoft.com/office/drawing/2014/main" id="{309E8EB8-8EEE-20A6-8AA8-DF0C8B2763A4}"/>
+              </a:ext>
+            </a:extLst>
+          </p:cNvPr>
+          <p:cNvSpPr>
+            <a:spLocks noGrp="1"/>
+          </p:cNvSpPr>
+          <p:nvPr>
+            <p:ph type="sldNum" sz="quarter" idx="5"/>
+          </p:nvPr>
+        </p:nvSpPr>
+        <p:spPr/>
+        <p:txBody>
+          <a:bodyPr/>
+          <a:lstStyle/>
+          <a:p>
+            <a:fld id="{55ED98B2-4531-4090-B022-1A0C526112B3}" type="slidenum">
+              <a:rPr lang="zh-CN" altLang="en-US" smtClean="0"/>
+              <a:t>9</a:t>
+            </a:fld>
+            <a:endParaRPr lang="zh-CN" altLang="en-US"/>
+          </a:p>
+        </p:txBody>
+      </p:sp>
+    </p:spTree>
+    <p:extLst>
+      <p:ext uri="{BB962C8B-B14F-4D97-AF65-F5344CB8AC3E}">
+        <p14:creationId xmlns:p14="http://schemas.microsoft.com/office/powerpoint/2010/main" val="4284250238"/>
+      </p:ext>
+    </p:extLst>
+  </p:cSld>
+  <p:clrMapOvr>
+    <a:masterClrMapping/>
+  </p:clrMapOvr>
+</p:notes>
+</file>
+
+<file path=ppt/notesSlides/notesSlide3.xml><?xml version="1.0" encoding="utf-8"?>
+<p:notes xmlns:a="http://schemas.openxmlformats.org/drawingml/2006/main" xmlns:r="http://schemas.openxmlformats.org/officeDocument/2006/relationships" xmlns:p="http://schemas.openxmlformats.org/presentationml/2006/main">
+  <p:cSld>
+    <p:spTree>
+      <p:nvGrpSpPr>
+        <p:cNvPr id="1" name="">
+          <a:extLst>
+            <a:ext uri="{FF2B5EF4-FFF2-40B4-BE49-F238E27FC236}">
+              <a16:creationId xmlns:a16="http://schemas.microsoft.com/office/drawing/2014/main" id="{12E53C91-0A95-584A-39F1-AD0B56454470}"/>
+            </a:ext>
+          </a:extLst>
+        </p:cNvPr>
+        <p:cNvGrpSpPr/>
+        <p:nvPr/>
+      </p:nvGrpSpPr>
+      <p:grpSpPr>
+        <a:xfrm>
+          <a:off x="0" y="0"/>
+          <a:ext cx="0" cy="0"/>
+          <a:chOff x="0" y="0"/>
+          <a:chExt cx="0" cy="0"/>
+        </a:xfrm>
+      </p:grpSpPr>
+      <p:sp>
+        <p:nvSpPr>
+          <p:cNvPr id="2" name="幻灯片图像占位符 1">
+            <a:extLst>
+              <a:ext uri="{FF2B5EF4-FFF2-40B4-BE49-F238E27FC236}">
+                <a16:creationId xmlns:a16="http://schemas.microsoft.com/office/drawing/2014/main" id="{9D41E812-AB46-B756-559C-5F2763834BC1}"/>
+              </a:ext>
+            </a:extLst>
+          </p:cNvPr>
+          <p:cNvSpPr>
+            <a:spLocks noGrp="1" noRot="1" noChangeAspect="1"/>
+          </p:cNvSpPr>
+          <p:nvPr>
+            <p:ph type="sldImg"/>
+          </p:nvPr>
+        </p:nvSpPr>
+        <p:spPr/>
+      </p:sp>
+      <p:sp>
+        <p:nvSpPr>
+          <p:cNvPr id="3" name="备注占位符 2">
+            <a:extLst>
+              <a:ext uri="{FF2B5EF4-FFF2-40B4-BE49-F238E27FC236}">
+                <a16:creationId xmlns:a16="http://schemas.microsoft.com/office/drawing/2014/main" id="{E9465FA5-BE20-CB83-A09C-EAFD457521B3}"/>
+              </a:ext>
+            </a:extLst>
+          </p:cNvPr>
+          <p:cNvSpPr>
+            <a:spLocks noGrp="1"/>
+          </p:cNvSpPr>
+          <p:nvPr>
+            <p:ph type="body" idx="1"/>
+          </p:nvPr>
+        </p:nvSpPr>
+        <p:spPr/>
+        <p:txBody>
+          <a:bodyPr/>
+          <a:lstStyle/>
+          <a:p>
+            <a:r>
+              <a:rPr lang="zh-CN" altLang="en-US" dirty="0"/>
+              <a:t>药物</a:t>
+            </a:r>
+            <a:r>
+              <a:rPr lang="en-US" altLang="zh-CN" dirty="0"/>
+              <a:t>-</a:t>
+            </a:r>
+            <a:r>
+              <a:rPr lang="zh-CN" altLang="en-US" dirty="0"/>
+              <a:t>蛋白质相互作用集合</a:t>
+            </a:r>
+            <a:r>
+              <a:rPr lang="en-US" altLang="zh-CN" dirty="0"/>
+              <a:t>K</a:t>
+            </a:r>
+            <a:endParaRPr lang="zh-CN" altLang="en-US" dirty="0"/>
+          </a:p>
+        </p:txBody>
+      </p:sp>
+      <p:sp>
+        <p:nvSpPr>
+          <p:cNvPr id="4" name="灯片编号占位符 3">
+            <a:extLst>
+              <a:ext uri="{FF2B5EF4-FFF2-40B4-BE49-F238E27FC236}">
+                <a16:creationId xmlns:a16="http://schemas.microsoft.com/office/drawing/2014/main" id="{A4C54EC2-44CE-57C1-A1CC-33DAB792CD3D}"/>
+              </a:ext>
+            </a:extLst>
+          </p:cNvPr>
+          <p:cNvSpPr>
+            <a:spLocks noGrp="1"/>
+          </p:cNvSpPr>
+          <p:nvPr>
+            <p:ph type="sldNum" sz="quarter" idx="5"/>
+          </p:nvPr>
+        </p:nvSpPr>
+        <p:spPr/>
+        <p:txBody>
+          <a:bodyPr/>
+          <a:lstStyle/>
+          <a:p>
+            <a:fld id="{55ED98B2-4531-4090-B022-1A0C526112B3}" type="slidenum">
+              <a:rPr lang="zh-CN" altLang="en-US" smtClean="0"/>
+              <a:t>10</a:t>
+            </a:fld>
+            <a:endParaRPr lang="zh-CN" altLang="en-US"/>
+          </a:p>
+        </p:txBody>
+      </p:sp>
+    </p:spTree>
+    <p:extLst>
+      <p:ext uri="{BB962C8B-B14F-4D97-AF65-F5344CB8AC3E}">
+        <p14:creationId xmlns:p14="http://schemas.microsoft.com/office/powerpoint/2010/main" val="1913768086"/>
+      </p:ext>
+    </p:extLst>
+  </p:cSld>
+  <p:clrMapOvr>
+    <a:masterClrMapping/>
+  </p:clrMapOvr>
+</p:notes>
+</file>
+
 <file path=ppt/slideLayouts/slideLayout1.xml><?xml version="1.0" encoding="utf-8"?>
 <p:sldLayout xmlns:a="http://schemas.openxmlformats.org/drawingml/2006/main" xmlns:r="http://schemas.openxmlformats.org/officeDocument/2006/relationships" xmlns:p="http://schemas.openxmlformats.org/presentationml/2006/main" type="title" preserve="1">
   <p:cSld name="标题幻灯片">
@@ -732,7 +982,7 @@
           <a:p>
             <a:fld id="{F70356BD-5833-427C-A982-3EFD493748C6}" type="datetimeFigureOut">
               <a:rPr lang="zh-CN" altLang="en-US" smtClean="0"/>
-              <a:t>2025/3/26</a:t>
+              <a:t>2025/3/27</a:t>
             </a:fld>
             <a:endParaRPr lang="zh-CN" altLang="en-US"/>
           </a:p>
@@ -930,7 +1180,7 @@
           <a:p>
             <a:fld id="{F70356BD-5833-427C-A982-3EFD493748C6}" type="datetimeFigureOut">
               <a:rPr lang="zh-CN" altLang="en-US" smtClean="0"/>
-              <a:t>2025/3/26</a:t>
+              <a:t>2025/3/27</a:t>
             </a:fld>
             <a:endParaRPr lang="zh-CN" altLang="en-US"/>
           </a:p>
@@ -1138,7 +1388,7 @@
           <a:p>
             <a:fld id="{F70356BD-5833-427C-A982-3EFD493748C6}" type="datetimeFigureOut">
               <a:rPr lang="zh-CN" altLang="en-US" smtClean="0"/>
-              <a:t>2025/3/26</a:t>
+              <a:t>2025/3/27</a:t>
             </a:fld>
             <a:endParaRPr lang="zh-CN" altLang="en-US"/>
           </a:p>
@@ -1336,7 +1586,7 @@
           <a:p>
             <a:fld id="{F70356BD-5833-427C-A982-3EFD493748C6}" type="datetimeFigureOut">
               <a:rPr lang="zh-CN" altLang="en-US" smtClean="0"/>
-              <a:t>2025/3/26</a:t>
+              <a:t>2025/3/27</a:t>
             </a:fld>
             <a:endParaRPr lang="zh-CN" altLang="en-US"/>
           </a:p>
@@ -1611,7 +1861,7 @@
           <a:p>
             <a:fld id="{F70356BD-5833-427C-A982-3EFD493748C6}" type="datetimeFigureOut">
               <a:rPr lang="zh-CN" altLang="en-US" smtClean="0"/>
-              <a:t>2025/3/26</a:t>
+              <a:t>2025/3/27</a:t>
             </a:fld>
             <a:endParaRPr lang="zh-CN" altLang="en-US"/>
           </a:p>
@@ -1876,7 +2126,7 @@
           <a:p>
             <a:fld id="{F70356BD-5833-427C-A982-3EFD493748C6}" type="datetimeFigureOut">
               <a:rPr lang="zh-CN" altLang="en-US" smtClean="0"/>
-              <a:t>2025/3/26</a:t>
+              <a:t>2025/3/27</a:t>
             </a:fld>
             <a:endParaRPr lang="zh-CN" altLang="en-US"/>
           </a:p>
@@ -2288,7 +2538,7 @@
           <a:p>
             <a:fld id="{F70356BD-5833-427C-A982-3EFD493748C6}" type="datetimeFigureOut">
               <a:rPr lang="zh-CN" altLang="en-US" smtClean="0"/>
-              <a:t>2025/3/26</a:t>
+              <a:t>2025/3/27</a:t>
             </a:fld>
             <a:endParaRPr lang="zh-CN" altLang="en-US"/>
           </a:p>
@@ -2429,7 +2679,7 @@
           <a:p>
             <a:fld id="{F70356BD-5833-427C-A982-3EFD493748C6}" type="datetimeFigureOut">
               <a:rPr lang="zh-CN" altLang="en-US" smtClean="0"/>
-              <a:t>2025/3/26</a:t>
+              <a:t>2025/3/27</a:t>
             </a:fld>
             <a:endParaRPr lang="zh-CN" altLang="en-US"/>
           </a:p>
@@ -2542,7 +2792,7 @@
           <a:p>
             <a:fld id="{F70356BD-5833-427C-A982-3EFD493748C6}" type="datetimeFigureOut">
               <a:rPr lang="zh-CN" altLang="en-US" smtClean="0"/>
-              <a:t>2025/3/26</a:t>
+              <a:t>2025/3/27</a:t>
             </a:fld>
             <a:endParaRPr lang="zh-CN" altLang="en-US"/>
           </a:p>
@@ -2853,7 +3103,7 @@
           <a:p>
             <a:fld id="{F70356BD-5833-427C-A982-3EFD493748C6}" type="datetimeFigureOut">
               <a:rPr lang="zh-CN" altLang="en-US" smtClean="0"/>
-              <a:t>2025/3/26</a:t>
+              <a:t>2025/3/27</a:t>
             </a:fld>
             <a:endParaRPr lang="zh-CN" altLang="en-US"/>
           </a:p>
@@ -3141,7 +3391,7 @@
           <a:p>
             <a:fld id="{F70356BD-5833-427C-A982-3EFD493748C6}" type="datetimeFigureOut">
               <a:rPr lang="zh-CN" altLang="en-US" smtClean="0"/>
-              <a:t>2025/3/26</a:t>
+              <a:t>2025/3/27</a:t>
             </a:fld>
             <a:endParaRPr lang="zh-CN" altLang="en-US"/>
           </a:p>
@@ -3382,7 +3632,7 @@
           <a:p>
             <a:fld id="{F70356BD-5833-427C-A982-3EFD493748C6}" type="datetimeFigureOut">
               <a:rPr lang="zh-CN" altLang="en-US" smtClean="0"/>
-              <a:t>2025/3/26</a:t>
+              <a:t>2025/3/27</a:t>
             </a:fld>
             <a:endParaRPr lang="zh-CN" altLang="en-US"/>
           </a:p>
@@ -3894,6 +4144,953 @@
         <p:cNvPr id="1" name="">
           <a:extLst>
             <a:ext uri="{FF2B5EF4-FFF2-40B4-BE49-F238E27FC236}">
+              <a16:creationId xmlns:a16="http://schemas.microsoft.com/office/drawing/2014/main" id="{4360AE02-3289-8E0C-8777-AFABC42BB8B4}"/>
+            </a:ext>
+          </a:extLst>
+        </p:cNvPr>
+        <p:cNvGrpSpPr/>
+        <p:nvPr/>
+      </p:nvGrpSpPr>
+      <p:grpSpPr>
+        <a:xfrm>
+          <a:off x="0" y="0"/>
+          <a:ext cx="0" cy="0"/>
+          <a:chOff x="0" y="0"/>
+          <a:chExt cx="0" cy="0"/>
+        </a:xfrm>
+      </p:grpSpPr>
+      <p:sp>
+        <p:nvSpPr>
+          <p:cNvPr id="2" name="标题 1">
+            <a:extLst>
+              <a:ext uri="{FF2B5EF4-FFF2-40B4-BE49-F238E27FC236}">
+                <a16:creationId xmlns:a16="http://schemas.microsoft.com/office/drawing/2014/main" id="{3DA15064-9DD4-E211-3A6E-5C74B3CC9FA7}"/>
+              </a:ext>
+            </a:extLst>
+          </p:cNvPr>
+          <p:cNvSpPr>
+            <a:spLocks noGrp="1"/>
+          </p:cNvSpPr>
+          <p:nvPr>
+            <p:ph type="ctrTitle"/>
+          </p:nvPr>
+        </p:nvSpPr>
+        <p:spPr>
+          <a:xfrm>
+            <a:off x="-143471" y="-53608"/>
+            <a:ext cx="1641231" cy="425083"/>
+          </a:xfrm>
+        </p:spPr>
+        <p:txBody>
+          <a:bodyPr>
+            <a:noAutofit/>
+          </a:bodyPr>
+          <a:lstStyle/>
+          <a:p>
+            <a:r>
+              <a:rPr lang="zh-CN" altLang="en-US" sz="2000" b="1" dirty="0">
+                <a:highlight>
+                  <a:srgbClr val="FFFF00"/>
+                </a:highlight>
+                <a:latin typeface="宋体" panose="02010600030101010101" pitchFamily="2" charset="-122"/>
+                <a:ea typeface="宋体" panose="02010600030101010101" pitchFamily="2" charset="-122"/>
+              </a:rPr>
+              <a:t>技术路线</a:t>
+            </a:r>
+          </a:p>
+        </p:txBody>
+      </p:sp>
+      <p:sp>
+        <p:nvSpPr>
+          <p:cNvPr id="3" name="副标题 2">
+            <a:extLst>
+              <a:ext uri="{FF2B5EF4-FFF2-40B4-BE49-F238E27FC236}">
+                <a16:creationId xmlns:a16="http://schemas.microsoft.com/office/drawing/2014/main" id="{FEA0BA11-D6FA-0256-FF01-37F521CF1158}"/>
+              </a:ext>
+            </a:extLst>
+          </p:cNvPr>
+          <p:cNvSpPr>
+            <a:spLocks noGrp="1"/>
+          </p:cNvSpPr>
+          <p:nvPr>
+            <p:ph type="subTitle" idx="1"/>
+          </p:nvPr>
+        </p:nvSpPr>
+        <p:spPr>
+          <a:xfrm>
+            <a:off x="152400" y="371475"/>
+            <a:ext cx="11887200" cy="295009"/>
+          </a:xfrm>
+        </p:spPr>
+        <p:txBody>
+          <a:bodyPr>
+            <a:normAutofit fontScale="85000" lnSpcReduction="20000"/>
+          </a:bodyPr>
+          <a:lstStyle/>
+          <a:p>
+            <a:pPr algn="just"/>
+            <a:r>
+              <a:rPr lang="zh-CN" altLang="en-US" sz="2000" dirty="0"/>
+              <a:t>网络模型</a:t>
+            </a:r>
+          </a:p>
+        </p:txBody>
+      </p:sp>
+      <p:sp>
+        <p:nvSpPr>
+          <p:cNvPr id="4" name="文本框 3">
+            <a:extLst>
+              <a:ext uri="{FF2B5EF4-FFF2-40B4-BE49-F238E27FC236}">
+                <a16:creationId xmlns:a16="http://schemas.microsoft.com/office/drawing/2014/main" id="{FA6523F5-2FD0-4C29-5A42-8C23DEDD9068}"/>
+              </a:ext>
+            </a:extLst>
+          </p:cNvPr>
+          <p:cNvSpPr txBox="1"/>
+          <p:nvPr/>
+        </p:nvSpPr>
+        <p:spPr>
+          <a:xfrm>
+            <a:off x="518787" y="766348"/>
+            <a:ext cx="646331" cy="369332"/>
+          </a:xfrm>
+          <a:prstGeom prst="rect">
+            <a:avLst/>
+          </a:prstGeom>
+          <a:noFill/>
+        </p:spPr>
+        <p:txBody>
+          <a:bodyPr wrap="none" rtlCol="0">
+            <a:spAutoFit/>
+          </a:bodyPr>
+          <a:lstStyle/>
+          <a:p>
+            <a:r>
+              <a:rPr lang="zh-CN" altLang="en-US" dirty="0"/>
+              <a:t>输入</a:t>
+            </a:r>
+          </a:p>
+        </p:txBody>
+      </p:sp>
+      <p:sp>
+        <p:nvSpPr>
+          <p:cNvPr id="6" name="文本框 5">
+            <a:extLst>
+              <a:ext uri="{FF2B5EF4-FFF2-40B4-BE49-F238E27FC236}">
+                <a16:creationId xmlns:a16="http://schemas.microsoft.com/office/drawing/2014/main" id="{FB508ED7-4F50-24A0-0F3B-8FFB5733851C}"/>
+              </a:ext>
+            </a:extLst>
+          </p:cNvPr>
+          <p:cNvSpPr txBox="1"/>
+          <p:nvPr/>
+        </p:nvSpPr>
+        <p:spPr>
+          <a:xfrm>
+            <a:off x="158059" y="4847771"/>
+            <a:ext cx="1489510" cy="369332"/>
+          </a:xfrm>
+          <a:prstGeom prst="rect">
+            <a:avLst/>
+          </a:prstGeom>
+          <a:noFill/>
+        </p:spPr>
+        <p:txBody>
+          <a:bodyPr wrap="none" rtlCol="0">
+            <a:spAutoFit/>
+          </a:bodyPr>
+          <a:lstStyle/>
+          <a:p>
+            <a:r>
+              <a:rPr lang="en-US" altLang="zh-CN" dirty="0"/>
+              <a:t>CC</a:t>
+            </a:r>
+            <a:r>
+              <a:rPr lang="en-US" altLang="zh-CN" b="1" dirty="0"/>
+              <a:t>…</a:t>
+            </a:r>
+            <a:r>
+              <a:rPr lang="en-US" altLang="zh-CN" dirty="0"/>
+              <a:t> C)OC)O</a:t>
+            </a:r>
+            <a:endParaRPr lang="zh-CN" altLang="en-US" dirty="0"/>
+          </a:p>
+        </p:txBody>
+      </p:sp>
+      <p:sp>
+        <p:nvSpPr>
+          <p:cNvPr id="9" name="文本框 8">
+            <a:extLst>
+              <a:ext uri="{FF2B5EF4-FFF2-40B4-BE49-F238E27FC236}">
+                <a16:creationId xmlns:a16="http://schemas.microsoft.com/office/drawing/2014/main" id="{D292B6DD-71CE-7B06-6FED-9C2BEFF6C809}"/>
+              </a:ext>
+            </a:extLst>
+          </p:cNvPr>
+          <p:cNvSpPr txBox="1"/>
+          <p:nvPr/>
+        </p:nvSpPr>
+        <p:spPr>
+          <a:xfrm>
+            <a:off x="70741" y="1640897"/>
+            <a:ext cx="1515158" cy="369332"/>
+          </a:xfrm>
+          <a:prstGeom prst="rect">
+            <a:avLst/>
+          </a:prstGeom>
+          <a:noFill/>
+        </p:spPr>
+        <p:txBody>
+          <a:bodyPr wrap="none" rtlCol="0">
+            <a:spAutoFit/>
+          </a:bodyPr>
+          <a:lstStyle/>
+          <a:p>
+            <a:r>
+              <a:rPr lang="en-US" altLang="zh-CN" dirty="0"/>
+              <a:t>MSPL</a:t>
+            </a:r>
+            <a:r>
+              <a:rPr lang="en-US" altLang="zh-CN" b="1" dirty="0"/>
+              <a:t>…</a:t>
+            </a:r>
+            <a:r>
+              <a:rPr lang="en-US" altLang="zh-CN" dirty="0"/>
+              <a:t> RKAS</a:t>
+            </a:r>
+            <a:endParaRPr lang="zh-CN" altLang="en-US" dirty="0"/>
+          </a:p>
+        </p:txBody>
+      </p:sp>
+      <p:sp>
+        <p:nvSpPr>
+          <p:cNvPr id="10" name="文本框 9">
+            <a:extLst>
+              <a:ext uri="{FF2B5EF4-FFF2-40B4-BE49-F238E27FC236}">
+                <a16:creationId xmlns:a16="http://schemas.microsoft.com/office/drawing/2014/main" id="{C7489074-18F1-BD52-A368-40499F71A939}"/>
+              </a:ext>
+            </a:extLst>
+          </p:cNvPr>
+          <p:cNvSpPr txBox="1"/>
+          <p:nvPr/>
+        </p:nvSpPr>
+        <p:spPr>
+          <a:xfrm>
+            <a:off x="383173" y="1237599"/>
+            <a:ext cx="893193" cy="369332"/>
+          </a:xfrm>
+          <a:prstGeom prst="rect">
+            <a:avLst/>
+          </a:prstGeom>
+          <a:noFill/>
+        </p:spPr>
+        <p:txBody>
+          <a:bodyPr wrap="none" rtlCol="0">
+            <a:spAutoFit/>
+          </a:bodyPr>
+          <a:lstStyle/>
+          <a:p>
+            <a:r>
+              <a:rPr lang="zh-CN" altLang="en-US" b="1" dirty="0"/>
+              <a:t>蛋白质</a:t>
+            </a:r>
+          </a:p>
+        </p:txBody>
+      </p:sp>
+      <p:sp>
+        <p:nvSpPr>
+          <p:cNvPr id="11" name="文本框 10">
+            <a:extLst>
+              <a:ext uri="{FF2B5EF4-FFF2-40B4-BE49-F238E27FC236}">
+                <a16:creationId xmlns:a16="http://schemas.microsoft.com/office/drawing/2014/main" id="{59614FFC-9401-BB61-5123-12E2F99D5CE9}"/>
+              </a:ext>
+            </a:extLst>
+          </p:cNvPr>
+          <p:cNvSpPr txBox="1"/>
+          <p:nvPr/>
+        </p:nvSpPr>
+        <p:spPr>
+          <a:xfrm>
+            <a:off x="518787" y="5242644"/>
+            <a:ext cx="646331" cy="369332"/>
+          </a:xfrm>
+          <a:prstGeom prst="rect">
+            <a:avLst/>
+          </a:prstGeom>
+          <a:noFill/>
+        </p:spPr>
+        <p:txBody>
+          <a:bodyPr wrap="none" rtlCol="0">
+            <a:spAutoFit/>
+          </a:bodyPr>
+          <a:lstStyle/>
+          <a:p>
+            <a:r>
+              <a:rPr lang="zh-CN" altLang="en-US" b="1" dirty="0"/>
+              <a:t>药物</a:t>
+            </a:r>
+          </a:p>
+        </p:txBody>
+      </p:sp>
+      <p:sp>
+        <p:nvSpPr>
+          <p:cNvPr id="14" name="文本框 13">
+            <a:extLst>
+              <a:ext uri="{FF2B5EF4-FFF2-40B4-BE49-F238E27FC236}">
+                <a16:creationId xmlns:a16="http://schemas.microsoft.com/office/drawing/2014/main" id="{0FA730AC-64C3-82C4-4E7B-5453F6E7ED30}"/>
+              </a:ext>
+            </a:extLst>
+          </p:cNvPr>
+          <p:cNvSpPr txBox="1"/>
+          <p:nvPr/>
+        </p:nvSpPr>
+        <p:spPr>
+          <a:xfrm>
+            <a:off x="1776387" y="1396298"/>
+            <a:ext cx="646331" cy="369332"/>
+          </a:xfrm>
+          <a:prstGeom prst="rect">
+            <a:avLst/>
+          </a:prstGeom>
+          <a:noFill/>
+        </p:spPr>
+        <p:txBody>
+          <a:bodyPr wrap="none" rtlCol="0">
+            <a:spAutoFit/>
+          </a:bodyPr>
+          <a:lstStyle/>
+          <a:p>
+            <a:r>
+              <a:rPr lang="zh-CN" altLang="en-US" b="1" dirty="0"/>
+              <a:t>编码</a:t>
+            </a:r>
+          </a:p>
+        </p:txBody>
+      </p:sp>
+      <p:sp>
+        <p:nvSpPr>
+          <p:cNvPr id="17" name="文本框 16">
+            <a:extLst>
+              <a:ext uri="{FF2B5EF4-FFF2-40B4-BE49-F238E27FC236}">
+                <a16:creationId xmlns:a16="http://schemas.microsoft.com/office/drawing/2014/main" id="{14C0C6DA-C9FB-D428-D4B3-BA4915BA48DB}"/>
+              </a:ext>
+            </a:extLst>
+          </p:cNvPr>
+          <p:cNvSpPr txBox="1"/>
+          <p:nvPr/>
+        </p:nvSpPr>
+        <p:spPr>
+          <a:xfrm>
+            <a:off x="1670671" y="5187808"/>
+            <a:ext cx="646331" cy="369332"/>
+          </a:xfrm>
+          <a:prstGeom prst="rect">
+            <a:avLst/>
+          </a:prstGeom>
+          <a:noFill/>
+        </p:spPr>
+        <p:txBody>
+          <a:bodyPr wrap="none" rtlCol="0">
+            <a:spAutoFit/>
+          </a:bodyPr>
+          <a:lstStyle/>
+          <a:p>
+            <a:r>
+              <a:rPr lang="zh-CN" altLang="en-US" b="1" dirty="0"/>
+              <a:t>编码</a:t>
+            </a:r>
+          </a:p>
+        </p:txBody>
+      </p:sp>
+      <p:sp>
+        <p:nvSpPr>
+          <p:cNvPr id="18" name="文本框 17">
+            <a:extLst>
+              <a:ext uri="{FF2B5EF4-FFF2-40B4-BE49-F238E27FC236}">
+                <a16:creationId xmlns:a16="http://schemas.microsoft.com/office/drawing/2014/main" id="{52D51CD4-BBCD-6251-AAE7-94493FD98CCA}"/>
+              </a:ext>
+            </a:extLst>
+          </p:cNvPr>
+          <p:cNvSpPr txBox="1"/>
+          <p:nvPr/>
+        </p:nvSpPr>
+        <p:spPr>
+          <a:xfrm>
+            <a:off x="2605200" y="807428"/>
+            <a:ext cx="1107996" cy="276999"/>
+          </a:xfrm>
+          <a:prstGeom prst="rect">
+            <a:avLst/>
+          </a:prstGeom>
+          <a:noFill/>
+        </p:spPr>
+        <p:txBody>
+          <a:bodyPr wrap="none" rtlCol="0">
+            <a:spAutoFit/>
+          </a:bodyPr>
+          <a:lstStyle/>
+          <a:p>
+            <a:r>
+              <a:rPr lang="zh-CN" altLang="en-US" sz="1200" dirty="0"/>
+              <a:t>局部特征编码</a:t>
+            </a:r>
+          </a:p>
+        </p:txBody>
+      </p:sp>
+      <p:sp>
+        <p:nvSpPr>
+          <p:cNvPr id="21" name="文本框 20">
+            <a:extLst>
+              <a:ext uri="{FF2B5EF4-FFF2-40B4-BE49-F238E27FC236}">
+                <a16:creationId xmlns:a16="http://schemas.microsoft.com/office/drawing/2014/main" id="{02FE4B23-818F-2148-4409-71057F23B2F3}"/>
+              </a:ext>
+            </a:extLst>
+          </p:cNvPr>
+          <p:cNvSpPr txBox="1"/>
+          <p:nvPr/>
+        </p:nvSpPr>
+        <p:spPr>
+          <a:xfrm>
+            <a:off x="2756142" y="1114488"/>
+            <a:ext cx="902811" cy="307777"/>
+          </a:xfrm>
+          <a:prstGeom prst="rect">
+            <a:avLst/>
+          </a:prstGeom>
+          <a:noFill/>
+        </p:spPr>
+        <p:txBody>
+          <a:bodyPr wrap="none" rtlCol="0">
+            <a:spAutoFit/>
+          </a:bodyPr>
+          <a:lstStyle/>
+          <a:p>
+            <a:r>
+              <a:rPr lang="zh-CN" altLang="en-US" sz="1400" dirty="0"/>
+              <a:t>跳跃模块</a:t>
+            </a:r>
+          </a:p>
+        </p:txBody>
+      </p:sp>
+      <p:sp>
+        <p:nvSpPr>
+          <p:cNvPr id="22" name="文本框 21">
+            <a:extLst>
+              <a:ext uri="{FF2B5EF4-FFF2-40B4-BE49-F238E27FC236}">
+                <a16:creationId xmlns:a16="http://schemas.microsoft.com/office/drawing/2014/main" id="{E4D0119A-81C6-930B-2500-F513807FE0AC}"/>
+              </a:ext>
+            </a:extLst>
+          </p:cNvPr>
+          <p:cNvSpPr txBox="1"/>
+          <p:nvPr/>
+        </p:nvSpPr>
+        <p:spPr>
+          <a:xfrm>
+            <a:off x="2538827" y="1400515"/>
+            <a:ext cx="1441420" cy="307777"/>
+          </a:xfrm>
+          <a:prstGeom prst="rect">
+            <a:avLst/>
+          </a:prstGeom>
+          <a:noFill/>
+        </p:spPr>
+        <p:txBody>
+          <a:bodyPr wrap="none" rtlCol="0">
+            <a:spAutoFit/>
+          </a:bodyPr>
+          <a:lstStyle/>
+          <a:p>
+            <a:r>
+              <a:rPr lang="zh-CN" altLang="en-US" sz="1400" dirty="0"/>
+              <a:t>蛋白质特征编码</a:t>
+            </a:r>
+          </a:p>
+        </p:txBody>
+      </p:sp>
+      <p:sp>
+        <p:nvSpPr>
+          <p:cNvPr id="23" name="文本框 22">
+            <a:extLst>
+              <a:ext uri="{FF2B5EF4-FFF2-40B4-BE49-F238E27FC236}">
+                <a16:creationId xmlns:a16="http://schemas.microsoft.com/office/drawing/2014/main" id="{5032AF18-36FF-9B8D-AA09-29452AE6414B}"/>
+              </a:ext>
+            </a:extLst>
+          </p:cNvPr>
+          <p:cNvSpPr txBox="1"/>
+          <p:nvPr/>
+        </p:nvSpPr>
+        <p:spPr>
+          <a:xfrm>
+            <a:off x="2628595" y="5149708"/>
+            <a:ext cx="1261884" cy="307777"/>
+          </a:xfrm>
+          <a:prstGeom prst="rect">
+            <a:avLst/>
+          </a:prstGeom>
+          <a:noFill/>
+        </p:spPr>
+        <p:txBody>
+          <a:bodyPr wrap="none" rtlCol="0">
+            <a:spAutoFit/>
+          </a:bodyPr>
+          <a:lstStyle/>
+          <a:p>
+            <a:r>
+              <a:rPr lang="zh-CN" altLang="en-US" sz="1400" dirty="0"/>
+              <a:t>药物特征编码</a:t>
+            </a:r>
+          </a:p>
+        </p:txBody>
+      </p:sp>
+      <p:sp>
+        <p:nvSpPr>
+          <p:cNvPr id="24" name="文本框 23">
+            <a:extLst>
+              <a:ext uri="{FF2B5EF4-FFF2-40B4-BE49-F238E27FC236}">
+                <a16:creationId xmlns:a16="http://schemas.microsoft.com/office/drawing/2014/main" id="{B436EB53-B9C2-B1A0-FFF5-8C9B8620436B}"/>
+              </a:ext>
+            </a:extLst>
+          </p:cNvPr>
+          <p:cNvSpPr txBox="1"/>
+          <p:nvPr/>
+        </p:nvSpPr>
+        <p:spPr>
+          <a:xfrm>
+            <a:off x="2683204" y="5489628"/>
+            <a:ext cx="1048685" cy="276999"/>
+          </a:xfrm>
+          <a:prstGeom prst="rect">
+            <a:avLst/>
+          </a:prstGeom>
+          <a:noFill/>
+        </p:spPr>
+        <p:txBody>
+          <a:bodyPr wrap="none" rtlCol="0">
+            <a:spAutoFit/>
+          </a:bodyPr>
+          <a:lstStyle/>
+          <a:p>
+            <a:r>
+              <a:rPr lang="zh-CN" altLang="en-US" sz="1200" dirty="0"/>
+              <a:t>图卷积</a:t>
+            </a:r>
+            <a:r>
+              <a:rPr lang="en-US" altLang="zh-CN" sz="1200" dirty="0"/>
+              <a:t>(GCN)</a:t>
+            </a:r>
+            <a:endParaRPr lang="zh-CN" altLang="en-US" sz="1200" dirty="0"/>
+          </a:p>
+        </p:txBody>
+      </p:sp>
+      <p:sp>
+        <p:nvSpPr>
+          <p:cNvPr id="85" name="文本框 84">
+            <a:extLst>
+              <a:ext uri="{FF2B5EF4-FFF2-40B4-BE49-F238E27FC236}">
+                <a16:creationId xmlns:a16="http://schemas.microsoft.com/office/drawing/2014/main" id="{9EAD1A4D-4C61-78E1-0FEF-E2A743A78FF9}"/>
+              </a:ext>
+            </a:extLst>
+          </p:cNvPr>
+          <p:cNvSpPr txBox="1"/>
+          <p:nvPr/>
+        </p:nvSpPr>
+        <p:spPr>
+          <a:xfrm>
+            <a:off x="3995379" y="1380162"/>
+            <a:ext cx="1082348" cy="307777"/>
+          </a:xfrm>
+          <a:prstGeom prst="rect">
+            <a:avLst/>
+          </a:prstGeom>
+          <a:noFill/>
+        </p:spPr>
+        <p:txBody>
+          <a:bodyPr wrap="none" rtlCol="0">
+            <a:spAutoFit/>
+          </a:bodyPr>
+          <a:lstStyle/>
+          <a:p>
+            <a:r>
+              <a:rPr lang="zh-CN" altLang="en-US" sz="1400" dirty="0"/>
+              <a:t>蛋白质表示</a:t>
+            </a:r>
+          </a:p>
+        </p:txBody>
+      </p:sp>
+      <p:sp>
+        <p:nvSpPr>
+          <p:cNvPr id="86" name="文本框 85">
+            <a:extLst>
+              <a:ext uri="{FF2B5EF4-FFF2-40B4-BE49-F238E27FC236}">
+                <a16:creationId xmlns:a16="http://schemas.microsoft.com/office/drawing/2014/main" id="{49673FAA-F0A4-4B47-F646-3168940D6256}"/>
+              </a:ext>
+            </a:extLst>
+          </p:cNvPr>
+          <p:cNvSpPr txBox="1"/>
+          <p:nvPr/>
+        </p:nvSpPr>
+        <p:spPr>
+          <a:xfrm>
+            <a:off x="3995379" y="5122850"/>
+            <a:ext cx="902811" cy="307777"/>
+          </a:xfrm>
+          <a:prstGeom prst="rect">
+            <a:avLst/>
+          </a:prstGeom>
+          <a:noFill/>
+        </p:spPr>
+        <p:txBody>
+          <a:bodyPr wrap="none" rtlCol="0">
+            <a:spAutoFit/>
+          </a:bodyPr>
+          <a:lstStyle/>
+          <a:p>
+            <a:r>
+              <a:rPr lang="zh-CN" altLang="en-US" sz="1400" dirty="0"/>
+              <a:t>药物表示</a:t>
+            </a:r>
+          </a:p>
+        </p:txBody>
+      </p:sp>
+      <p:sp>
+        <p:nvSpPr>
+          <p:cNvPr id="87" name="文本框 86">
+            <a:extLst>
+              <a:ext uri="{FF2B5EF4-FFF2-40B4-BE49-F238E27FC236}">
+                <a16:creationId xmlns:a16="http://schemas.microsoft.com/office/drawing/2014/main" id="{86542F6A-34CD-E84D-6A02-865999BD9B03}"/>
+              </a:ext>
+            </a:extLst>
+          </p:cNvPr>
+          <p:cNvSpPr txBox="1"/>
+          <p:nvPr/>
+        </p:nvSpPr>
+        <p:spPr>
+          <a:xfrm>
+            <a:off x="4988004" y="807428"/>
+            <a:ext cx="1107996" cy="276999"/>
+          </a:xfrm>
+          <a:prstGeom prst="rect">
+            <a:avLst/>
+          </a:prstGeom>
+          <a:noFill/>
+        </p:spPr>
+        <p:txBody>
+          <a:bodyPr wrap="none" rtlCol="0">
+            <a:spAutoFit/>
+          </a:bodyPr>
+          <a:lstStyle/>
+          <a:p>
+            <a:r>
+              <a:rPr lang="zh-CN" altLang="en-US" sz="1200" dirty="0"/>
+              <a:t>全局交互学习</a:t>
+            </a:r>
+          </a:p>
+        </p:txBody>
+      </p:sp>
+      <p:sp>
+        <p:nvSpPr>
+          <p:cNvPr id="89" name="文本框 88">
+            <a:extLst>
+              <a:ext uri="{FF2B5EF4-FFF2-40B4-BE49-F238E27FC236}">
+                <a16:creationId xmlns:a16="http://schemas.microsoft.com/office/drawing/2014/main" id="{E525BE6B-F5F4-9808-F391-1194CC448402}"/>
+              </a:ext>
+            </a:extLst>
+          </p:cNvPr>
+          <p:cNvSpPr txBox="1"/>
+          <p:nvPr/>
+        </p:nvSpPr>
+        <p:spPr>
+          <a:xfrm>
+            <a:off x="6302454" y="803443"/>
+            <a:ext cx="800219" cy="276999"/>
+          </a:xfrm>
+          <a:prstGeom prst="rect">
+            <a:avLst/>
+          </a:prstGeom>
+          <a:noFill/>
+        </p:spPr>
+        <p:txBody>
+          <a:bodyPr wrap="none" rtlCol="0">
+            <a:spAutoFit/>
+          </a:bodyPr>
+          <a:lstStyle/>
+          <a:p>
+            <a:r>
+              <a:rPr lang="zh-CN" altLang="en-US" sz="1200" dirty="0"/>
+              <a:t>联合表示</a:t>
+            </a:r>
+          </a:p>
+        </p:txBody>
+      </p:sp>
+      <p:sp>
+        <p:nvSpPr>
+          <p:cNvPr id="90" name="文本框 89">
+            <a:extLst>
+              <a:ext uri="{FF2B5EF4-FFF2-40B4-BE49-F238E27FC236}">
+                <a16:creationId xmlns:a16="http://schemas.microsoft.com/office/drawing/2014/main" id="{FBA382D2-7936-F192-6E54-B1252D1171A8}"/>
+              </a:ext>
+            </a:extLst>
+          </p:cNvPr>
+          <p:cNvSpPr txBox="1"/>
+          <p:nvPr/>
+        </p:nvSpPr>
+        <p:spPr>
+          <a:xfrm>
+            <a:off x="7731151" y="1015191"/>
+            <a:ext cx="954107" cy="276999"/>
+          </a:xfrm>
+          <a:prstGeom prst="rect">
+            <a:avLst/>
+          </a:prstGeom>
+          <a:noFill/>
+        </p:spPr>
+        <p:txBody>
+          <a:bodyPr wrap="none" rtlCol="0">
+            <a:spAutoFit/>
+          </a:bodyPr>
+          <a:lstStyle/>
+          <a:p>
+            <a:r>
+              <a:rPr lang="zh-CN" altLang="en-US" sz="1200" dirty="0"/>
+              <a:t>多层感知机</a:t>
+            </a:r>
+          </a:p>
+        </p:txBody>
+      </p:sp>
+      <p:sp>
+        <p:nvSpPr>
+          <p:cNvPr id="91" name="文本框 90">
+            <a:extLst>
+              <a:ext uri="{FF2B5EF4-FFF2-40B4-BE49-F238E27FC236}">
+                <a16:creationId xmlns:a16="http://schemas.microsoft.com/office/drawing/2014/main" id="{F095C24F-8407-F8BD-30CD-65D84F356066}"/>
+              </a:ext>
+            </a:extLst>
+          </p:cNvPr>
+          <p:cNvSpPr txBox="1"/>
+          <p:nvPr/>
+        </p:nvSpPr>
+        <p:spPr>
+          <a:xfrm>
+            <a:off x="7678586" y="4936296"/>
+            <a:ext cx="800219" cy="276999"/>
+          </a:xfrm>
+          <a:prstGeom prst="rect">
+            <a:avLst/>
+          </a:prstGeom>
+          <a:noFill/>
+        </p:spPr>
+        <p:txBody>
+          <a:bodyPr wrap="none" rtlCol="0">
+            <a:spAutoFit/>
+          </a:bodyPr>
+          <a:lstStyle/>
+          <a:p>
+            <a:r>
+              <a:rPr lang="zh-CN" altLang="en-US" sz="1200" dirty="0"/>
+              <a:t>可解释性</a:t>
+            </a:r>
+          </a:p>
+        </p:txBody>
+      </p:sp>
+      <p:sp>
+        <p:nvSpPr>
+          <p:cNvPr id="94" name="文本框 93">
+            <a:extLst>
+              <a:ext uri="{FF2B5EF4-FFF2-40B4-BE49-F238E27FC236}">
+                <a16:creationId xmlns:a16="http://schemas.microsoft.com/office/drawing/2014/main" id="{B51AEABA-0CCC-CACA-67B9-C43E400372BB}"/>
+              </a:ext>
+            </a:extLst>
+          </p:cNvPr>
+          <p:cNvSpPr txBox="1"/>
+          <p:nvPr/>
+        </p:nvSpPr>
+        <p:spPr>
+          <a:xfrm>
+            <a:off x="7755529" y="541113"/>
+            <a:ext cx="646331" cy="369332"/>
+          </a:xfrm>
+          <a:prstGeom prst="rect">
+            <a:avLst/>
+          </a:prstGeom>
+          <a:noFill/>
+        </p:spPr>
+        <p:txBody>
+          <a:bodyPr wrap="none" rtlCol="0">
+            <a:spAutoFit/>
+          </a:bodyPr>
+          <a:lstStyle/>
+          <a:p>
+            <a:r>
+              <a:rPr lang="zh-CN" altLang="en-US" b="1" dirty="0"/>
+              <a:t>解码</a:t>
+            </a:r>
+          </a:p>
+        </p:txBody>
+      </p:sp>
+      <p:pic>
+        <p:nvPicPr>
+          <p:cNvPr id="98" name="图片 97" descr="图片包含 游戏机, 灯光&#10;&#10;AI 生成的内容可能不正确。">
+            <a:extLst>
+              <a:ext uri="{FF2B5EF4-FFF2-40B4-BE49-F238E27FC236}">
+                <a16:creationId xmlns:a16="http://schemas.microsoft.com/office/drawing/2014/main" id="{64631FF4-B0B9-8AFB-C2B6-2F8B2433CCA7}"/>
+              </a:ext>
+            </a:extLst>
+          </p:cNvPr>
+          <p:cNvPicPr>
+            <a:picLocks noChangeAspect="1"/>
+          </p:cNvPicPr>
+          <p:nvPr/>
+        </p:nvPicPr>
+        <p:blipFill>
+          <a:blip r:embed="rId3">
+            <a:extLst>
+              <a:ext uri="{28A0092B-C50C-407E-A947-70E740481C1C}">
+                <a14:useLocalDpi xmlns:a14="http://schemas.microsoft.com/office/drawing/2010/main" val="0"/>
+              </a:ext>
+            </a:extLst>
+          </a:blip>
+          <a:stretch>
+            <a:fillRect/>
+          </a:stretch>
+        </p:blipFill>
+        <p:spPr>
+          <a:xfrm>
+            <a:off x="-133493" y="1865494"/>
+            <a:ext cx="1950889" cy="1463167"/>
+          </a:xfrm>
+          <a:prstGeom prst="rect">
+            <a:avLst/>
+          </a:prstGeom>
+        </p:spPr>
+      </p:pic>
+    </p:spTree>
+    <p:extLst>
+      <p:ext uri="{BB962C8B-B14F-4D97-AF65-F5344CB8AC3E}">
+        <p14:creationId xmlns:p14="http://schemas.microsoft.com/office/powerpoint/2010/main" val="796201145"/>
+      </p:ext>
+    </p:extLst>
+  </p:cSld>
+  <p:clrMapOvr>
+    <a:masterClrMapping/>
+  </p:clrMapOvr>
+</p:sld>
+</file>
+
+<file path=ppt/slides/slide11.xml><?xml version="1.0" encoding="utf-8"?>
+<p:sld xmlns:a="http://schemas.openxmlformats.org/drawingml/2006/main" xmlns:r="http://schemas.openxmlformats.org/officeDocument/2006/relationships" xmlns:p="http://schemas.openxmlformats.org/presentationml/2006/main">
+  <p:cSld>
+    <p:spTree>
+      <p:nvGrpSpPr>
+        <p:cNvPr id="1" name="">
+          <a:extLst>
+            <a:ext uri="{FF2B5EF4-FFF2-40B4-BE49-F238E27FC236}">
+              <a16:creationId xmlns:a16="http://schemas.microsoft.com/office/drawing/2014/main" id="{07FEDB41-99DA-1242-5EC8-574C18584976}"/>
+            </a:ext>
+          </a:extLst>
+        </p:cNvPr>
+        <p:cNvGrpSpPr/>
+        <p:nvPr/>
+      </p:nvGrpSpPr>
+      <p:grpSpPr>
+        <a:xfrm>
+          <a:off x="0" y="0"/>
+          <a:ext cx="0" cy="0"/>
+          <a:chOff x="0" y="0"/>
+          <a:chExt cx="0" cy="0"/>
+        </a:xfrm>
+      </p:grpSpPr>
+      <p:sp>
+        <p:nvSpPr>
+          <p:cNvPr id="2" name="标题 1">
+            <a:extLst>
+              <a:ext uri="{FF2B5EF4-FFF2-40B4-BE49-F238E27FC236}">
+                <a16:creationId xmlns:a16="http://schemas.microsoft.com/office/drawing/2014/main" id="{BA508105-9BBE-DA15-D06C-2014A19952F7}"/>
+              </a:ext>
+            </a:extLst>
+          </p:cNvPr>
+          <p:cNvSpPr>
+            <a:spLocks noGrp="1"/>
+          </p:cNvSpPr>
+          <p:nvPr>
+            <p:ph type="ctrTitle"/>
+          </p:nvPr>
+        </p:nvSpPr>
+        <p:spPr>
+          <a:xfrm>
+            <a:off x="145366" y="137625"/>
+            <a:ext cx="2794782" cy="425083"/>
+          </a:xfrm>
+        </p:spPr>
+        <p:txBody>
+          <a:bodyPr>
+            <a:noAutofit/>
+          </a:bodyPr>
+          <a:lstStyle/>
+          <a:p>
+            <a:r>
+              <a:rPr lang="zh-CN" altLang="en-US" sz="2000" b="1" dirty="0">
+                <a:highlight>
+                  <a:srgbClr val="FFFF00"/>
+                </a:highlight>
+                <a:latin typeface="宋体" panose="02010600030101010101" pitchFamily="2" charset="-122"/>
+                <a:ea typeface="宋体" panose="02010600030101010101" pitchFamily="2" charset="-122"/>
+              </a:rPr>
+              <a:t>数据集与仿真实验环境</a:t>
+            </a:r>
+          </a:p>
+        </p:txBody>
+      </p:sp>
+      <p:sp>
+        <p:nvSpPr>
+          <p:cNvPr id="3" name="副标题 2">
+            <a:extLst>
+              <a:ext uri="{FF2B5EF4-FFF2-40B4-BE49-F238E27FC236}">
+                <a16:creationId xmlns:a16="http://schemas.microsoft.com/office/drawing/2014/main" id="{3143D0FD-7FFA-B1B3-9C0F-6419A7F9F2EE}"/>
+              </a:ext>
+            </a:extLst>
+          </p:cNvPr>
+          <p:cNvSpPr>
+            <a:spLocks noGrp="1"/>
+          </p:cNvSpPr>
+          <p:nvPr>
+            <p:ph type="subTitle" idx="1"/>
+          </p:nvPr>
+        </p:nvSpPr>
+        <p:spPr>
+          <a:xfrm>
+            <a:off x="464234" y="815926"/>
+            <a:ext cx="11422966" cy="5767754"/>
+          </a:xfrm>
+        </p:spPr>
+        <p:txBody>
+          <a:bodyPr>
+            <a:normAutofit/>
+          </a:bodyPr>
+          <a:lstStyle/>
+          <a:p>
+            <a:pPr algn="just"/>
+            <a:endParaRPr lang="zh-CN" altLang="en-US" sz="2000" dirty="0"/>
+          </a:p>
+        </p:txBody>
+      </p:sp>
+    </p:spTree>
+    <p:extLst>
+      <p:ext uri="{BB962C8B-B14F-4D97-AF65-F5344CB8AC3E}">
+        <p14:creationId xmlns:p14="http://schemas.microsoft.com/office/powerpoint/2010/main" val="2935897104"/>
+      </p:ext>
+    </p:extLst>
+  </p:cSld>
+  <p:clrMapOvr>
+    <a:masterClrMapping/>
+  </p:clrMapOvr>
+</p:sld>
+</file>
+
+<file path=ppt/slides/slide12.xml><?xml version="1.0" encoding="utf-8"?>
+<p:sld xmlns:a="http://schemas.openxmlformats.org/drawingml/2006/main" xmlns:r="http://schemas.openxmlformats.org/officeDocument/2006/relationships" xmlns:p="http://schemas.openxmlformats.org/presentationml/2006/main">
+  <p:cSld>
+    <p:spTree>
+      <p:nvGrpSpPr>
+        <p:cNvPr id="1" name="">
+          <a:extLst>
+            <a:ext uri="{FF2B5EF4-FFF2-40B4-BE49-F238E27FC236}">
               <a16:creationId xmlns:a16="http://schemas.microsoft.com/office/drawing/2014/main" id="{6A757811-722D-8301-E7AB-E9C8A24D4738}"/>
             </a:ext>
           </a:extLst>
@@ -3996,7 +5193,7 @@
 </p:sld>
 </file>
 
-<file path=ppt/slides/slide11.xml><?xml version="1.0" encoding="utf-8"?>
+<file path=ppt/slides/slide13.xml><?xml version="1.0" encoding="utf-8"?>
 <p:sld xmlns:a="http://schemas.openxmlformats.org/drawingml/2006/main" xmlns:r="http://schemas.openxmlformats.org/officeDocument/2006/relationships" xmlns:p="http://schemas.openxmlformats.org/presentationml/2006/main">
   <p:cSld>
     <p:spTree>
@@ -6423,8 +7620,8 @@
           </a:p>
         </p:txBody>
       </p:sp>
-      <mc:AlternateContent xmlns:mc="http://schemas.openxmlformats.org/markup-compatibility/2006">
-        <mc:Choice xmlns:a14="http://schemas.microsoft.com/office/drawing/2010/main" Requires="a14">
+      <mc:AlternateContent xmlns:mc="http://schemas.openxmlformats.org/markup-compatibility/2006" xmlns:a14="http://schemas.microsoft.com/office/drawing/2010/main">
+        <mc:Choice Requires="a14">
           <p:sp>
             <p:nvSpPr>
               <p:cNvPr id="32" name="流程图: 过程 31">
@@ -6499,7 +7696,7 @@
                       <m:d>
                         <m:dPr>
                           <m:ctrlPr>
-                            <a:rPr lang="en-US" altLang="zh-CN" sz="1100" b="0" i="0" smtClean="0">
+                            <a:rPr lang="en-US" altLang="zh-CN" sz="1100" b="0" i="1" smtClean="0">
                               <a:latin typeface="Cambria Math" panose="02040503050406030204" pitchFamily="18" charset="0"/>
                             </a:rPr>
                           </m:ctrlPr>
@@ -6715,7 +7912,7 @@
             </p:txBody>
           </p:sp>
         </mc:Choice>
-        <mc:Fallback>
+        <mc:Fallback xmlns="">
           <p:sp>
             <p:nvSpPr>
               <p:cNvPr id="32" name="流程图: 过程 31">
@@ -6809,8 +8006,8 @@
           </a:p>
         </p:txBody>
       </p:sp>
-      <mc:AlternateContent xmlns:mc="http://schemas.openxmlformats.org/markup-compatibility/2006">
-        <mc:Choice xmlns:a14="http://schemas.microsoft.com/office/drawing/2010/main" Requires="a14">
+      <mc:AlternateContent xmlns:mc="http://schemas.openxmlformats.org/markup-compatibility/2006" xmlns:a14="http://schemas.microsoft.com/office/drawing/2010/main">
+        <mc:Choice Requires="a14">
           <p:sp>
             <p:nvSpPr>
               <p:cNvPr id="34" name="流程图: 过程 33">
@@ -6862,7 +8059,7 @@
                     <m:d>
                       <m:dPr>
                         <m:ctrlPr>
-                          <a:rPr lang="en-US" altLang="zh-CN" sz="1100" b="0" i="0" smtClean="0">
+                          <a:rPr lang="en-US" altLang="zh-CN" sz="1100" b="0" i="1" smtClean="0">
                             <a:latin typeface="Cambria Math" panose="02040503050406030204" pitchFamily="18" charset="0"/>
                           </a:rPr>
                         </m:ctrlPr>
@@ -7132,7 +8329,7 @@
             </p:txBody>
           </p:sp>
         </mc:Choice>
-        <mc:Fallback>
+        <mc:Fallback xmlns="">
           <p:sp>
             <p:nvSpPr>
               <p:cNvPr id="34" name="流程图: 过程 33">
@@ -7177,8 +8374,8 @@
           </p:sp>
         </mc:Fallback>
       </mc:AlternateContent>
-      <mc:AlternateContent xmlns:mc="http://schemas.openxmlformats.org/markup-compatibility/2006">
-        <mc:Choice xmlns:a14="http://schemas.microsoft.com/office/drawing/2010/main" Requires="a14">
+      <mc:AlternateContent xmlns:mc="http://schemas.openxmlformats.org/markup-compatibility/2006" xmlns:a14="http://schemas.microsoft.com/office/drawing/2010/main">
+        <mc:Choice Requires="a14">
           <p:sp>
             <p:nvSpPr>
               <p:cNvPr id="35" name="流程图: 过程 34">
@@ -7230,7 +8427,7 @@
                     <m:d>
                       <m:dPr>
                         <m:ctrlPr>
-                          <a:rPr lang="en-US" altLang="zh-CN" sz="1100" b="0" i="0" smtClean="0">
+                          <a:rPr lang="en-US" altLang="zh-CN" sz="1100" b="0" i="1" smtClean="0">
                             <a:latin typeface="Cambria Math" panose="02040503050406030204" pitchFamily="18" charset="0"/>
                           </a:rPr>
                         </m:ctrlPr>
@@ -7500,7 +8697,7 @@
             </p:txBody>
           </p:sp>
         </mc:Choice>
-        <mc:Fallback>
+        <mc:Fallback xmlns="">
           <p:sp>
             <p:nvSpPr>
               <p:cNvPr id="35" name="流程图: 过程 34">
@@ -7651,8 +8848,8 @@
           </a:p>
         </p:txBody>
       </p:sp>
-      <mc:AlternateContent xmlns:mc="http://schemas.openxmlformats.org/markup-compatibility/2006">
-        <mc:Choice xmlns:a14="http://schemas.microsoft.com/office/drawing/2010/main" Requires="a14">
+      <mc:AlternateContent xmlns:mc="http://schemas.openxmlformats.org/markup-compatibility/2006" xmlns:a14="http://schemas.microsoft.com/office/drawing/2010/main">
+        <mc:Choice Requires="a14">
           <p:sp>
             <p:nvSpPr>
               <p:cNvPr id="38" name="流程图: 过程 37">
@@ -7863,7 +9060,7 @@
             </p:txBody>
           </p:sp>
         </mc:Choice>
-        <mc:Fallback>
+        <mc:Fallback xmlns="">
           <p:sp>
             <p:nvSpPr>
               <p:cNvPr id="38" name="流程图: 过程 37">
@@ -7908,8 +9105,8 @@
           </p:sp>
         </mc:Fallback>
       </mc:AlternateContent>
-      <mc:AlternateContent xmlns:mc="http://schemas.openxmlformats.org/markup-compatibility/2006">
-        <mc:Choice xmlns:a14="http://schemas.microsoft.com/office/drawing/2010/main" Requires="a14">
+      <mc:AlternateContent xmlns:mc="http://schemas.openxmlformats.org/markup-compatibility/2006" xmlns:a14="http://schemas.microsoft.com/office/drawing/2010/main">
+        <mc:Choice Requires="a14">
           <p:sp>
             <p:nvSpPr>
               <p:cNvPr id="39" name="流程图: 过程 38">
@@ -8119,7 +9316,7 @@
             </p:txBody>
           </p:sp>
         </mc:Choice>
-        <mc:Fallback>
+        <mc:Fallback xmlns="">
           <p:sp>
             <p:nvSpPr>
               <p:cNvPr id="39" name="流程图: 过程 38">
@@ -8164,8 +9361,8 @@
           </p:sp>
         </mc:Fallback>
       </mc:AlternateContent>
-      <mc:AlternateContent xmlns:mc="http://schemas.openxmlformats.org/markup-compatibility/2006">
-        <mc:Choice xmlns:a14="http://schemas.microsoft.com/office/drawing/2010/main" Requires="a14">
+      <mc:AlternateContent xmlns:mc="http://schemas.openxmlformats.org/markup-compatibility/2006" xmlns:a14="http://schemas.microsoft.com/office/drawing/2010/main">
+        <mc:Choice Requires="a14">
           <p:sp>
             <p:nvSpPr>
               <p:cNvPr id="40" name="流程图: 过程 39">
@@ -8403,7 +9600,7 @@
             </p:txBody>
           </p:sp>
         </mc:Choice>
-        <mc:Fallback>
+        <mc:Fallback xmlns="">
           <p:sp>
             <p:nvSpPr>
               <p:cNvPr id="40" name="流程图: 过程 39">
@@ -8448,8 +9645,8 @@
           </p:sp>
         </mc:Fallback>
       </mc:AlternateContent>
-      <mc:AlternateContent xmlns:mc="http://schemas.openxmlformats.org/markup-compatibility/2006">
-        <mc:Choice xmlns:a14="http://schemas.microsoft.com/office/drawing/2010/main" Requires="a14">
+      <mc:AlternateContent xmlns:mc="http://schemas.openxmlformats.org/markup-compatibility/2006" xmlns:a14="http://schemas.microsoft.com/office/drawing/2010/main">
+        <mc:Choice Requires="a14">
           <p:sp>
             <p:nvSpPr>
               <p:cNvPr id="41" name="流程图: 过程 40">
@@ -8533,7 +9730,7 @@
             </p:txBody>
           </p:sp>
         </mc:Choice>
-        <mc:Fallback>
+        <mc:Fallback xmlns="">
           <p:sp>
             <p:nvSpPr>
               <p:cNvPr id="41" name="流程图: 过程 40">
@@ -9566,8 +10763,8 @@
           </a:fontRef>
         </p:style>
       </p:cxnSp>
-      <mc:AlternateContent xmlns:mc="http://schemas.openxmlformats.org/markup-compatibility/2006">
-        <mc:Choice xmlns:a14="http://schemas.microsoft.com/office/drawing/2010/main" Requires="a14">
+      <mc:AlternateContent xmlns:mc="http://schemas.openxmlformats.org/markup-compatibility/2006" xmlns:a14="http://schemas.microsoft.com/office/drawing/2010/main">
+        <mc:Choice Requires="a14">
           <p:sp>
             <p:nvSpPr>
               <p:cNvPr id="84" name="文本框 83">
@@ -9636,7 +10833,7 @@
             </p:txBody>
           </p:sp>
         </mc:Choice>
-        <mc:Fallback>
+        <mc:Fallback xmlns="">
           <p:sp>
             <p:nvSpPr>
               <p:cNvPr id="84" name="文本框 83">
@@ -10099,8 +11296,8 @@
           </a:fontRef>
         </p:style>
       </p:cxnSp>
-      <mc:AlternateContent xmlns:mc="http://schemas.openxmlformats.org/markup-compatibility/2006">
-        <mc:Choice xmlns:a14="http://schemas.microsoft.com/office/drawing/2010/main" Requires="a14">
+      <mc:AlternateContent xmlns:mc="http://schemas.openxmlformats.org/markup-compatibility/2006" xmlns:a14="http://schemas.microsoft.com/office/drawing/2010/main">
+        <mc:Choice Requires="a14">
           <p:sp>
             <p:nvSpPr>
               <p:cNvPr id="114" name="文本框 113">
@@ -10169,7 +11366,7 @@
             </p:txBody>
           </p:sp>
         </mc:Choice>
-        <mc:Fallback>
+        <mc:Fallback xmlns="">
           <p:sp>
             <p:nvSpPr>
               <p:cNvPr id="114" name="文本框 113">
@@ -10980,7 +12177,7 @@
         <p:cNvPr id="1" name="">
           <a:extLst>
             <a:ext uri="{FF2B5EF4-FFF2-40B4-BE49-F238E27FC236}">
-              <a16:creationId xmlns:a16="http://schemas.microsoft.com/office/drawing/2014/main" id="{07FEDB41-99DA-1242-5EC8-574C18584976}"/>
+              <a16:creationId xmlns:a16="http://schemas.microsoft.com/office/drawing/2014/main" id="{8B948E1A-B348-B838-E8AD-66337B84DF13}"/>
             </a:ext>
           </a:extLst>
         </p:cNvPr>
@@ -11000,7 +12197,7 @@
           <p:cNvPr id="2" name="标题 1">
             <a:extLst>
               <a:ext uri="{FF2B5EF4-FFF2-40B4-BE49-F238E27FC236}">
-                <a16:creationId xmlns:a16="http://schemas.microsoft.com/office/drawing/2014/main" id="{BA508105-9BBE-DA15-D06C-2014A19952F7}"/>
+                <a16:creationId xmlns:a16="http://schemas.microsoft.com/office/drawing/2014/main" id="{39E26EDD-2EA7-6CC5-CF38-0693BD74F16F}"/>
               </a:ext>
             </a:extLst>
           </p:cNvPr>
@@ -11013,8 +12210,8 @@
         </p:nvSpPr>
         <p:spPr>
           <a:xfrm>
-            <a:off x="145366" y="137625"/>
-            <a:ext cx="2794782" cy="425083"/>
+            <a:off x="-143471" y="-53608"/>
+            <a:ext cx="1641231" cy="425083"/>
           </a:xfrm>
         </p:spPr>
         <p:txBody>
@@ -11031,7 +12228,7 @@
                 <a:latin typeface="宋体" panose="02010600030101010101" pitchFamily="2" charset="-122"/>
                 <a:ea typeface="宋体" panose="02010600030101010101" pitchFamily="2" charset="-122"/>
               </a:rPr>
-              <a:t>数据集与仿真实验环境</a:t>
+              <a:t>技术路线</a:t>
             </a:r>
           </a:p>
         </p:txBody>
@@ -11041,7 +12238,7 @@
           <p:cNvPr id="3" name="副标题 2">
             <a:extLst>
               <a:ext uri="{FF2B5EF4-FFF2-40B4-BE49-F238E27FC236}">
-                <a16:creationId xmlns:a16="http://schemas.microsoft.com/office/drawing/2014/main" id="{3143D0FD-7FFA-B1B3-9C0F-6419A7F9F2EE}"/>
+                <a16:creationId xmlns:a16="http://schemas.microsoft.com/office/drawing/2014/main" id="{8DE2A1B0-5FD6-C92B-755F-31D312B72FD8}"/>
               </a:ext>
             </a:extLst>
           </p:cNvPr>
@@ -11054,25 +12251,4418 @@
         </p:nvSpPr>
         <p:spPr>
           <a:xfrm>
-            <a:off x="464234" y="815926"/>
-            <a:ext cx="11422966" cy="5767754"/>
+            <a:off x="0" y="371475"/>
+            <a:ext cx="11887200" cy="295009"/>
           </a:xfrm>
         </p:spPr>
         <p:txBody>
           <a:bodyPr>
-            <a:normAutofit/>
+            <a:normAutofit fontScale="85000" lnSpcReduction="20000"/>
           </a:bodyPr>
           <a:lstStyle/>
           <a:p>
             <a:pPr algn="just"/>
-            <a:endParaRPr lang="zh-CN" altLang="en-US" sz="2000" dirty="0"/>
+            <a:r>
+              <a:rPr lang="zh-CN" altLang="en-US" sz="2000" dirty="0"/>
+              <a:t>负样本筛选</a:t>
+            </a:r>
           </a:p>
         </p:txBody>
       </p:sp>
+      <mc:AlternateContent xmlns:mc="http://schemas.openxmlformats.org/markup-compatibility/2006">
+        <mc:Choice xmlns:a14="http://schemas.microsoft.com/office/drawing/2010/main" Requires="a14">
+          <p:sp>
+            <p:nvSpPr>
+              <p:cNvPr id="29" name="六边形 28">
+                <a:extLst>
+                  <a:ext uri="{FF2B5EF4-FFF2-40B4-BE49-F238E27FC236}">
+                    <a16:creationId xmlns:a16="http://schemas.microsoft.com/office/drawing/2014/main" id="{578E3C10-1B94-2439-4C3A-D9ABDEFC2BB4}"/>
+                  </a:ext>
+                </a:extLst>
+              </p:cNvPr>
+              <p:cNvSpPr/>
+              <p:nvPr/>
+            </p:nvSpPr>
+            <p:spPr>
+              <a:xfrm>
+                <a:off x="2496068" y="1112108"/>
+                <a:ext cx="864973" cy="568411"/>
+              </a:xfrm>
+              <a:prstGeom prst="hexagon">
+                <a:avLst/>
+              </a:prstGeom>
+              <a:noFill/>
+            </p:spPr>
+            <p:style>
+              <a:lnRef idx="2">
+                <a:schemeClr val="accent1">
+                  <a:shade val="15000"/>
+                </a:schemeClr>
+              </a:lnRef>
+              <a:fillRef idx="1">
+                <a:schemeClr val="accent1"/>
+              </a:fillRef>
+              <a:effectRef idx="0">
+                <a:schemeClr val="accent1"/>
+              </a:effectRef>
+              <a:fontRef idx="minor">
+                <a:schemeClr val="lt1"/>
+              </a:fontRef>
+            </p:style>
+            <p:txBody>
+              <a:bodyPr rtlCol="0" anchor="ctr"/>
+              <a:lstStyle/>
+              <a:p>
+                <a:pPr algn="ctr"/>
+                <a14:m>
+                  <m:oMathPara xmlns:m="http://schemas.openxmlformats.org/officeDocument/2006/math">
+                    <m:oMathParaPr>
+                      <m:jc m:val="centerGroup"/>
+                    </m:oMathParaPr>
+                    <m:oMath xmlns:m="http://schemas.openxmlformats.org/officeDocument/2006/math">
+                      <m:sSub>
+                        <m:sSubPr>
+                          <m:ctrlPr>
+                            <a:rPr lang="en-US" altLang="zh-CN" i="1" smtClean="0">
+                              <a:solidFill>
+                                <a:schemeClr val="tx1"/>
+                              </a:solidFill>
+                              <a:latin typeface="Cambria Math" panose="02040503050406030204" pitchFamily="18" charset="0"/>
+                            </a:rPr>
+                          </m:ctrlPr>
+                        </m:sSubPr>
+                        <m:e>
+                          <m:r>
+                            <a:rPr lang="en-US" altLang="zh-CN" b="0" i="1" smtClean="0">
+                              <a:solidFill>
+                                <a:schemeClr val="tx1"/>
+                              </a:solidFill>
+                              <a:latin typeface="Cambria Math" panose="02040503050406030204" pitchFamily="18" charset="0"/>
+                            </a:rPr>
+                            <m:t>𝑐</m:t>
+                          </m:r>
+                        </m:e>
+                        <m:sub>
+                          <m:r>
+                            <a:rPr lang="en-US" altLang="zh-CN" b="0" i="1" smtClean="0">
+                              <a:solidFill>
+                                <a:schemeClr val="tx1"/>
+                              </a:solidFill>
+                              <a:latin typeface="Cambria Math" panose="02040503050406030204" pitchFamily="18" charset="0"/>
+                            </a:rPr>
+                            <m:t>1</m:t>
+                          </m:r>
+                        </m:sub>
+                      </m:sSub>
+                    </m:oMath>
+                  </m:oMathPara>
+                </a14:m>
+                <a:endParaRPr lang="zh-CN" altLang="en-US" dirty="0">
+                  <a:solidFill>
+                    <a:schemeClr val="tx1"/>
+                  </a:solidFill>
+                </a:endParaRPr>
+              </a:p>
+            </p:txBody>
+          </p:sp>
+        </mc:Choice>
+        <mc:Fallback>
+          <p:sp>
+            <p:nvSpPr>
+              <p:cNvPr id="29" name="六边形 28">
+                <a:extLst>
+                  <a:ext uri="{FF2B5EF4-FFF2-40B4-BE49-F238E27FC236}">
+                    <a16:creationId xmlns:a16="http://schemas.microsoft.com/office/drawing/2014/main" id="{578E3C10-1B94-2439-4C3A-D9ABDEFC2BB4}"/>
+                  </a:ext>
+                </a:extLst>
+              </p:cNvPr>
+              <p:cNvSpPr>
+                <a:spLocks noRot="1" noChangeAspect="1" noMove="1" noResize="1" noEditPoints="1" noAdjustHandles="1" noChangeArrowheads="1" noChangeShapeType="1" noTextEdit="1"/>
+              </p:cNvSpPr>
+              <p:nvPr/>
+            </p:nvSpPr>
+            <p:spPr>
+              <a:xfrm>
+                <a:off x="2496068" y="1112108"/>
+                <a:ext cx="864973" cy="568411"/>
+              </a:xfrm>
+              <a:prstGeom prst="hexagon">
+                <a:avLst/>
+              </a:prstGeom>
+              <a:blipFill>
+                <a:blip r:embed="rId3"/>
+                <a:stretch>
+                  <a:fillRect/>
+                </a:stretch>
+              </a:blipFill>
+            </p:spPr>
+            <p:txBody>
+              <a:bodyPr/>
+              <a:lstStyle/>
+              <a:p>
+                <a:r>
+                  <a:rPr lang="zh-CN" altLang="en-US">
+                    <a:noFill/>
+                  </a:rPr>
+                  <a:t> </a:t>
+                </a:r>
+              </a:p>
+            </p:txBody>
+          </p:sp>
+        </mc:Fallback>
+      </mc:AlternateContent>
+      <mc:AlternateContent xmlns:mc="http://schemas.openxmlformats.org/markup-compatibility/2006">
+        <mc:Choice xmlns:a14="http://schemas.microsoft.com/office/drawing/2010/main" Requires="a14">
+          <p:sp>
+            <p:nvSpPr>
+              <p:cNvPr id="30" name="六边形 29">
+                <a:extLst>
+                  <a:ext uri="{FF2B5EF4-FFF2-40B4-BE49-F238E27FC236}">
+                    <a16:creationId xmlns:a16="http://schemas.microsoft.com/office/drawing/2014/main" id="{E16E667A-5204-4F99-3D2D-EC87F83943EC}"/>
+                  </a:ext>
+                </a:extLst>
+              </p:cNvPr>
+              <p:cNvSpPr/>
+              <p:nvPr/>
+            </p:nvSpPr>
+            <p:spPr>
+              <a:xfrm>
+                <a:off x="2496068" y="2397211"/>
+                <a:ext cx="864973" cy="568411"/>
+              </a:xfrm>
+              <a:prstGeom prst="hexagon">
+                <a:avLst/>
+              </a:prstGeom>
+              <a:noFill/>
+            </p:spPr>
+            <p:style>
+              <a:lnRef idx="2">
+                <a:schemeClr val="accent1">
+                  <a:shade val="15000"/>
+                </a:schemeClr>
+              </a:lnRef>
+              <a:fillRef idx="1">
+                <a:schemeClr val="accent1"/>
+              </a:fillRef>
+              <a:effectRef idx="0">
+                <a:schemeClr val="accent1"/>
+              </a:effectRef>
+              <a:fontRef idx="minor">
+                <a:schemeClr val="lt1"/>
+              </a:fontRef>
+            </p:style>
+            <p:txBody>
+              <a:bodyPr rtlCol="0" anchor="ctr"/>
+              <a:lstStyle/>
+              <a:p>
+                <a:pPr algn="ctr"/>
+                <a14:m>
+                  <m:oMathPara xmlns:m="http://schemas.openxmlformats.org/officeDocument/2006/math">
+                    <m:oMathParaPr>
+                      <m:jc m:val="centerGroup"/>
+                    </m:oMathParaPr>
+                    <m:oMath xmlns:m="http://schemas.openxmlformats.org/officeDocument/2006/math">
+                      <m:sSub>
+                        <m:sSubPr>
+                          <m:ctrlPr>
+                            <a:rPr lang="en-US" altLang="zh-CN" i="1" smtClean="0">
+                              <a:solidFill>
+                                <a:schemeClr val="tx1"/>
+                              </a:solidFill>
+                              <a:latin typeface="Cambria Math" panose="02040503050406030204" pitchFamily="18" charset="0"/>
+                            </a:rPr>
+                          </m:ctrlPr>
+                        </m:sSubPr>
+                        <m:e>
+                          <m:r>
+                            <a:rPr lang="en-US" altLang="zh-CN" b="0" i="1" smtClean="0">
+                              <a:solidFill>
+                                <a:schemeClr val="tx1"/>
+                              </a:solidFill>
+                              <a:latin typeface="Cambria Math" panose="02040503050406030204" pitchFamily="18" charset="0"/>
+                            </a:rPr>
+                            <m:t>𝑐</m:t>
+                          </m:r>
+                        </m:e>
+                        <m:sub>
+                          <m:r>
+                            <a:rPr lang="en-US" altLang="zh-CN" b="0" i="1" smtClean="0">
+                              <a:solidFill>
+                                <a:schemeClr val="tx1"/>
+                              </a:solidFill>
+                              <a:latin typeface="Cambria Math" panose="02040503050406030204" pitchFamily="18" charset="0"/>
+                            </a:rPr>
+                            <m:t>𝑖</m:t>
+                          </m:r>
+                        </m:sub>
+                      </m:sSub>
+                    </m:oMath>
+                  </m:oMathPara>
+                </a14:m>
+                <a:endParaRPr lang="zh-CN" altLang="en-US" dirty="0">
+                  <a:solidFill>
+                    <a:schemeClr val="tx1"/>
+                  </a:solidFill>
+                </a:endParaRPr>
+              </a:p>
+            </p:txBody>
+          </p:sp>
+        </mc:Choice>
+        <mc:Fallback>
+          <p:sp>
+            <p:nvSpPr>
+              <p:cNvPr id="30" name="六边形 29">
+                <a:extLst>
+                  <a:ext uri="{FF2B5EF4-FFF2-40B4-BE49-F238E27FC236}">
+                    <a16:creationId xmlns:a16="http://schemas.microsoft.com/office/drawing/2014/main" id="{E16E667A-5204-4F99-3D2D-EC87F83943EC}"/>
+                  </a:ext>
+                </a:extLst>
+              </p:cNvPr>
+              <p:cNvSpPr>
+                <a:spLocks noRot="1" noChangeAspect="1" noMove="1" noResize="1" noEditPoints="1" noAdjustHandles="1" noChangeArrowheads="1" noChangeShapeType="1" noTextEdit="1"/>
+              </p:cNvSpPr>
+              <p:nvPr/>
+            </p:nvSpPr>
+            <p:spPr>
+              <a:xfrm>
+                <a:off x="2496068" y="2397211"/>
+                <a:ext cx="864973" cy="568411"/>
+              </a:xfrm>
+              <a:prstGeom prst="hexagon">
+                <a:avLst/>
+              </a:prstGeom>
+              <a:blipFill>
+                <a:blip r:embed="rId4"/>
+                <a:stretch>
+                  <a:fillRect/>
+                </a:stretch>
+              </a:blipFill>
+            </p:spPr>
+            <p:txBody>
+              <a:bodyPr/>
+              <a:lstStyle/>
+              <a:p>
+                <a:r>
+                  <a:rPr lang="zh-CN" altLang="en-US">
+                    <a:noFill/>
+                  </a:rPr>
+                  <a:t> </a:t>
+                </a:r>
+              </a:p>
+            </p:txBody>
+          </p:sp>
+        </mc:Fallback>
+      </mc:AlternateContent>
+      <mc:AlternateContent xmlns:mc="http://schemas.openxmlformats.org/markup-compatibility/2006">
+        <mc:Choice xmlns:a14="http://schemas.microsoft.com/office/drawing/2010/main" Requires="a14">
+          <p:sp>
+            <p:nvSpPr>
+              <p:cNvPr id="47" name="六边形 46">
+                <a:extLst>
+                  <a:ext uri="{FF2B5EF4-FFF2-40B4-BE49-F238E27FC236}">
+                    <a16:creationId xmlns:a16="http://schemas.microsoft.com/office/drawing/2014/main" id="{D35A55D4-D45E-F840-ECC6-DB16D23EAA5C}"/>
+                  </a:ext>
+                </a:extLst>
+              </p:cNvPr>
+              <p:cNvSpPr/>
+              <p:nvPr/>
+            </p:nvSpPr>
+            <p:spPr>
+              <a:xfrm>
+                <a:off x="2496068" y="3793524"/>
+                <a:ext cx="864973" cy="568411"/>
+              </a:xfrm>
+              <a:prstGeom prst="hexagon">
+                <a:avLst/>
+              </a:prstGeom>
+              <a:noFill/>
+            </p:spPr>
+            <p:style>
+              <a:lnRef idx="2">
+                <a:schemeClr val="accent1">
+                  <a:shade val="15000"/>
+                </a:schemeClr>
+              </a:lnRef>
+              <a:fillRef idx="1">
+                <a:schemeClr val="accent1"/>
+              </a:fillRef>
+              <a:effectRef idx="0">
+                <a:schemeClr val="accent1"/>
+              </a:effectRef>
+              <a:fontRef idx="minor">
+                <a:schemeClr val="lt1"/>
+              </a:fontRef>
+            </p:style>
+            <p:txBody>
+              <a:bodyPr rtlCol="0" anchor="ctr"/>
+              <a:lstStyle/>
+              <a:p>
+                <a:pPr algn="ctr"/>
+                <a14:m>
+                  <m:oMathPara xmlns:m="http://schemas.openxmlformats.org/officeDocument/2006/math">
+                    <m:oMathParaPr>
+                      <m:jc m:val="centerGroup"/>
+                    </m:oMathParaPr>
+                    <m:oMath xmlns:m="http://schemas.openxmlformats.org/officeDocument/2006/math">
+                      <m:sSub>
+                        <m:sSubPr>
+                          <m:ctrlPr>
+                            <a:rPr lang="en-US" altLang="zh-CN" i="1" smtClean="0">
+                              <a:solidFill>
+                                <a:schemeClr val="tx1"/>
+                              </a:solidFill>
+                              <a:latin typeface="Cambria Math" panose="02040503050406030204" pitchFamily="18" charset="0"/>
+                            </a:rPr>
+                          </m:ctrlPr>
+                        </m:sSubPr>
+                        <m:e>
+                          <m:r>
+                            <a:rPr lang="en-US" altLang="zh-CN" b="0" i="1" smtClean="0">
+                              <a:solidFill>
+                                <a:schemeClr val="tx1"/>
+                              </a:solidFill>
+                              <a:latin typeface="Cambria Math" panose="02040503050406030204" pitchFamily="18" charset="0"/>
+                            </a:rPr>
+                            <m:t>𝑐</m:t>
+                          </m:r>
+                        </m:e>
+                        <m:sub>
+                          <m:r>
+                            <a:rPr lang="en-US" altLang="zh-CN" b="0" i="1" smtClean="0">
+                              <a:solidFill>
+                                <a:schemeClr val="tx1"/>
+                              </a:solidFill>
+                              <a:latin typeface="Cambria Math" panose="02040503050406030204" pitchFamily="18" charset="0"/>
+                            </a:rPr>
+                            <m:t>𝑘</m:t>
+                          </m:r>
+                        </m:sub>
+                      </m:sSub>
+                    </m:oMath>
+                  </m:oMathPara>
+                </a14:m>
+                <a:endParaRPr lang="zh-CN" altLang="en-US" dirty="0">
+                  <a:solidFill>
+                    <a:schemeClr val="tx1"/>
+                  </a:solidFill>
+                </a:endParaRPr>
+              </a:p>
+            </p:txBody>
+          </p:sp>
+        </mc:Choice>
+        <mc:Fallback>
+          <p:sp>
+            <p:nvSpPr>
+              <p:cNvPr id="47" name="六边形 46">
+                <a:extLst>
+                  <a:ext uri="{FF2B5EF4-FFF2-40B4-BE49-F238E27FC236}">
+                    <a16:creationId xmlns:a16="http://schemas.microsoft.com/office/drawing/2014/main" id="{D35A55D4-D45E-F840-ECC6-DB16D23EAA5C}"/>
+                  </a:ext>
+                </a:extLst>
+              </p:cNvPr>
+              <p:cNvSpPr>
+                <a:spLocks noRot="1" noChangeAspect="1" noMove="1" noResize="1" noEditPoints="1" noAdjustHandles="1" noChangeArrowheads="1" noChangeShapeType="1" noTextEdit="1"/>
+              </p:cNvSpPr>
+              <p:nvPr/>
+            </p:nvSpPr>
+            <p:spPr>
+              <a:xfrm>
+                <a:off x="2496068" y="3793524"/>
+                <a:ext cx="864973" cy="568411"/>
+              </a:xfrm>
+              <a:prstGeom prst="hexagon">
+                <a:avLst/>
+              </a:prstGeom>
+              <a:blipFill>
+                <a:blip r:embed="rId5"/>
+                <a:stretch>
+                  <a:fillRect/>
+                </a:stretch>
+              </a:blipFill>
+            </p:spPr>
+            <p:txBody>
+              <a:bodyPr/>
+              <a:lstStyle/>
+              <a:p>
+                <a:r>
+                  <a:rPr lang="zh-CN" altLang="en-US">
+                    <a:noFill/>
+                  </a:rPr>
+                  <a:t> </a:t>
+                </a:r>
+              </a:p>
+            </p:txBody>
+          </p:sp>
+        </mc:Fallback>
+      </mc:AlternateContent>
+      <mc:AlternateContent xmlns:mc="http://schemas.openxmlformats.org/markup-compatibility/2006">
+        <mc:Choice xmlns:a14="http://schemas.microsoft.com/office/drawing/2010/main" Requires="a14">
+          <p:sp>
+            <p:nvSpPr>
+              <p:cNvPr id="49" name="六边形 48">
+                <a:extLst>
+                  <a:ext uri="{FF2B5EF4-FFF2-40B4-BE49-F238E27FC236}">
+                    <a16:creationId xmlns:a16="http://schemas.microsoft.com/office/drawing/2014/main" id="{7ABCFBBB-E770-F960-3467-A3CDEDB1CD90}"/>
+                  </a:ext>
+                </a:extLst>
+              </p:cNvPr>
+              <p:cNvSpPr/>
+              <p:nvPr/>
+            </p:nvSpPr>
+            <p:spPr>
+              <a:xfrm>
+                <a:off x="2496068" y="5090984"/>
+                <a:ext cx="864973" cy="568411"/>
+              </a:xfrm>
+              <a:prstGeom prst="hexagon">
+                <a:avLst/>
+              </a:prstGeom>
+              <a:noFill/>
+            </p:spPr>
+            <p:style>
+              <a:lnRef idx="2">
+                <a:schemeClr val="accent1">
+                  <a:shade val="15000"/>
+                </a:schemeClr>
+              </a:lnRef>
+              <a:fillRef idx="1">
+                <a:schemeClr val="accent1"/>
+              </a:fillRef>
+              <a:effectRef idx="0">
+                <a:schemeClr val="accent1"/>
+              </a:effectRef>
+              <a:fontRef idx="minor">
+                <a:schemeClr val="lt1"/>
+              </a:fontRef>
+            </p:style>
+            <p:txBody>
+              <a:bodyPr rtlCol="0" anchor="ctr"/>
+              <a:lstStyle/>
+              <a:p>
+                <a:pPr algn="ctr"/>
+                <a14:m>
+                  <m:oMathPara xmlns:m="http://schemas.openxmlformats.org/officeDocument/2006/math">
+                    <m:oMathParaPr>
+                      <m:jc m:val="centerGroup"/>
+                    </m:oMathParaPr>
+                    <m:oMath xmlns:m="http://schemas.openxmlformats.org/officeDocument/2006/math">
+                      <m:sSub>
+                        <m:sSubPr>
+                          <m:ctrlPr>
+                            <a:rPr lang="en-US" altLang="zh-CN" i="1" smtClean="0">
+                              <a:solidFill>
+                                <a:schemeClr val="tx1"/>
+                              </a:solidFill>
+                              <a:latin typeface="Cambria Math" panose="02040503050406030204" pitchFamily="18" charset="0"/>
+                            </a:rPr>
+                          </m:ctrlPr>
+                        </m:sSubPr>
+                        <m:e>
+                          <m:r>
+                            <a:rPr lang="en-US" altLang="zh-CN" b="0" i="1" smtClean="0">
+                              <a:solidFill>
+                                <a:schemeClr val="tx1"/>
+                              </a:solidFill>
+                              <a:latin typeface="Cambria Math" panose="02040503050406030204" pitchFamily="18" charset="0"/>
+                            </a:rPr>
+                            <m:t>𝑐</m:t>
+                          </m:r>
+                        </m:e>
+                        <m:sub>
+                          <m:r>
+                            <a:rPr lang="en-US" altLang="zh-CN" b="0" i="1" smtClean="0">
+                              <a:solidFill>
+                                <a:schemeClr val="tx1"/>
+                              </a:solidFill>
+                              <a:latin typeface="Cambria Math" panose="02040503050406030204" pitchFamily="18" charset="0"/>
+                            </a:rPr>
+                            <m:t>𝑁</m:t>
+                          </m:r>
+                        </m:sub>
+                      </m:sSub>
+                    </m:oMath>
+                  </m:oMathPara>
+                </a14:m>
+                <a:endParaRPr lang="zh-CN" altLang="en-US" dirty="0">
+                  <a:solidFill>
+                    <a:schemeClr val="tx1"/>
+                  </a:solidFill>
+                </a:endParaRPr>
+              </a:p>
+            </p:txBody>
+          </p:sp>
+        </mc:Choice>
+        <mc:Fallback>
+          <p:sp>
+            <p:nvSpPr>
+              <p:cNvPr id="49" name="六边形 48">
+                <a:extLst>
+                  <a:ext uri="{FF2B5EF4-FFF2-40B4-BE49-F238E27FC236}">
+                    <a16:creationId xmlns:a16="http://schemas.microsoft.com/office/drawing/2014/main" id="{7ABCFBBB-E770-F960-3467-A3CDEDB1CD90}"/>
+                  </a:ext>
+                </a:extLst>
+              </p:cNvPr>
+              <p:cNvSpPr>
+                <a:spLocks noRot="1" noChangeAspect="1" noMove="1" noResize="1" noEditPoints="1" noAdjustHandles="1" noChangeArrowheads="1" noChangeShapeType="1" noTextEdit="1"/>
+              </p:cNvSpPr>
+              <p:nvPr/>
+            </p:nvSpPr>
+            <p:spPr>
+              <a:xfrm>
+                <a:off x="2496068" y="5090984"/>
+                <a:ext cx="864973" cy="568411"/>
+              </a:xfrm>
+              <a:prstGeom prst="hexagon">
+                <a:avLst/>
+              </a:prstGeom>
+              <a:blipFill>
+                <a:blip r:embed="rId6"/>
+                <a:stretch>
+                  <a:fillRect/>
+                </a:stretch>
+              </a:blipFill>
+            </p:spPr>
+            <p:txBody>
+              <a:bodyPr/>
+              <a:lstStyle/>
+              <a:p>
+                <a:r>
+                  <a:rPr lang="zh-CN" altLang="en-US">
+                    <a:noFill/>
+                  </a:rPr>
+                  <a:t> </a:t>
+                </a:r>
+              </a:p>
+            </p:txBody>
+          </p:sp>
+        </mc:Fallback>
+      </mc:AlternateContent>
+      <mc:AlternateContent xmlns:mc="http://schemas.openxmlformats.org/markup-compatibility/2006">
+        <mc:Choice xmlns:a14="http://schemas.microsoft.com/office/drawing/2010/main" Requires="a14">
+          <p:sp>
+            <p:nvSpPr>
+              <p:cNvPr id="50" name="矩形: 圆角 49">
+                <a:extLst>
+                  <a:ext uri="{FF2B5EF4-FFF2-40B4-BE49-F238E27FC236}">
+                    <a16:creationId xmlns:a16="http://schemas.microsoft.com/office/drawing/2014/main" id="{33ED1691-CEE9-8926-6B7C-39257629335F}"/>
+                  </a:ext>
+                </a:extLst>
+              </p:cNvPr>
+              <p:cNvSpPr/>
+              <p:nvPr/>
+            </p:nvSpPr>
+            <p:spPr>
+              <a:xfrm>
+                <a:off x="8019539" y="963436"/>
+                <a:ext cx="864973" cy="568411"/>
+              </a:xfrm>
+              <a:prstGeom prst="roundRect">
+                <a:avLst/>
+              </a:prstGeom>
+              <a:noFill/>
+            </p:spPr>
+            <p:style>
+              <a:lnRef idx="2">
+                <a:schemeClr val="accent1">
+                  <a:shade val="15000"/>
+                </a:schemeClr>
+              </a:lnRef>
+              <a:fillRef idx="1">
+                <a:schemeClr val="accent1"/>
+              </a:fillRef>
+              <a:effectRef idx="0">
+                <a:schemeClr val="accent1"/>
+              </a:effectRef>
+              <a:fontRef idx="minor">
+                <a:schemeClr val="lt1"/>
+              </a:fontRef>
+            </p:style>
+            <p:txBody>
+              <a:bodyPr rtlCol="0" anchor="ctr"/>
+              <a:lstStyle/>
+              <a:p>
+                <a:pPr algn="ctr"/>
+                <a14:m>
+                  <m:oMathPara xmlns:m="http://schemas.openxmlformats.org/officeDocument/2006/math">
+                    <m:oMathParaPr>
+                      <m:jc m:val="centerGroup"/>
+                    </m:oMathParaPr>
+                    <m:oMath xmlns:m="http://schemas.openxmlformats.org/officeDocument/2006/math">
+                      <m:sSub>
+                        <m:sSubPr>
+                          <m:ctrlPr>
+                            <a:rPr lang="en-US" altLang="zh-CN" i="1" smtClean="0">
+                              <a:solidFill>
+                                <a:schemeClr val="tx1"/>
+                              </a:solidFill>
+                              <a:latin typeface="Cambria Math" panose="02040503050406030204" pitchFamily="18" charset="0"/>
+                            </a:rPr>
+                          </m:ctrlPr>
+                        </m:sSubPr>
+                        <m:e>
+                          <m:r>
+                            <a:rPr lang="en-US" altLang="zh-CN" b="0" i="1" smtClean="0">
+                              <a:solidFill>
+                                <a:schemeClr val="tx1"/>
+                              </a:solidFill>
+                              <a:latin typeface="Cambria Math" panose="02040503050406030204" pitchFamily="18" charset="0"/>
+                            </a:rPr>
+                            <m:t>𝑝</m:t>
+                          </m:r>
+                        </m:e>
+                        <m:sub>
+                          <m:r>
+                            <a:rPr lang="en-US" altLang="zh-CN" b="0" i="1" smtClean="0">
+                              <a:solidFill>
+                                <a:schemeClr val="tx1"/>
+                              </a:solidFill>
+                              <a:latin typeface="Cambria Math" panose="02040503050406030204" pitchFamily="18" charset="0"/>
+                            </a:rPr>
+                            <m:t>1</m:t>
+                          </m:r>
+                        </m:sub>
+                      </m:sSub>
+                    </m:oMath>
+                  </m:oMathPara>
+                </a14:m>
+                <a:endParaRPr lang="zh-CN" altLang="en-US" dirty="0">
+                  <a:solidFill>
+                    <a:schemeClr val="tx1"/>
+                  </a:solidFill>
+                </a:endParaRPr>
+              </a:p>
+            </p:txBody>
+          </p:sp>
+        </mc:Choice>
+        <mc:Fallback>
+          <p:sp>
+            <p:nvSpPr>
+              <p:cNvPr id="50" name="矩形: 圆角 49">
+                <a:extLst>
+                  <a:ext uri="{FF2B5EF4-FFF2-40B4-BE49-F238E27FC236}">
+                    <a16:creationId xmlns:a16="http://schemas.microsoft.com/office/drawing/2014/main" id="{33ED1691-CEE9-8926-6B7C-39257629335F}"/>
+                  </a:ext>
+                </a:extLst>
+              </p:cNvPr>
+              <p:cNvSpPr>
+                <a:spLocks noRot="1" noChangeAspect="1" noMove="1" noResize="1" noEditPoints="1" noAdjustHandles="1" noChangeArrowheads="1" noChangeShapeType="1" noTextEdit="1"/>
+              </p:cNvSpPr>
+              <p:nvPr/>
+            </p:nvSpPr>
+            <p:spPr>
+              <a:xfrm>
+                <a:off x="8019539" y="963436"/>
+                <a:ext cx="864973" cy="568411"/>
+              </a:xfrm>
+              <a:prstGeom prst="roundRect">
+                <a:avLst/>
+              </a:prstGeom>
+              <a:blipFill>
+                <a:blip r:embed="rId7"/>
+                <a:stretch>
+                  <a:fillRect/>
+                </a:stretch>
+              </a:blipFill>
+            </p:spPr>
+            <p:txBody>
+              <a:bodyPr/>
+              <a:lstStyle/>
+              <a:p>
+                <a:r>
+                  <a:rPr lang="zh-CN" altLang="en-US">
+                    <a:noFill/>
+                  </a:rPr>
+                  <a:t> </a:t>
+                </a:r>
+              </a:p>
+            </p:txBody>
+          </p:sp>
+        </mc:Fallback>
+      </mc:AlternateContent>
+      <mc:AlternateContent xmlns:mc="http://schemas.openxmlformats.org/markup-compatibility/2006">
+        <mc:Choice xmlns:a14="http://schemas.microsoft.com/office/drawing/2010/main" Requires="a14">
+          <p:sp>
+            <p:nvSpPr>
+              <p:cNvPr id="52" name="矩形: 圆角 51">
+                <a:extLst>
+                  <a:ext uri="{FF2B5EF4-FFF2-40B4-BE49-F238E27FC236}">
+                    <a16:creationId xmlns:a16="http://schemas.microsoft.com/office/drawing/2014/main" id="{FC0840B2-6325-BAC8-7B64-B683E54EFF6F}"/>
+                  </a:ext>
+                </a:extLst>
+              </p:cNvPr>
+              <p:cNvSpPr/>
+              <p:nvPr/>
+            </p:nvSpPr>
+            <p:spPr>
+              <a:xfrm>
+                <a:off x="8019539" y="2397210"/>
+                <a:ext cx="864973" cy="568411"/>
+              </a:xfrm>
+              <a:prstGeom prst="roundRect">
+                <a:avLst/>
+              </a:prstGeom>
+              <a:noFill/>
+            </p:spPr>
+            <p:style>
+              <a:lnRef idx="2">
+                <a:schemeClr val="accent1">
+                  <a:shade val="15000"/>
+                </a:schemeClr>
+              </a:lnRef>
+              <a:fillRef idx="1">
+                <a:schemeClr val="accent1"/>
+              </a:fillRef>
+              <a:effectRef idx="0">
+                <a:schemeClr val="accent1"/>
+              </a:effectRef>
+              <a:fontRef idx="minor">
+                <a:schemeClr val="lt1"/>
+              </a:fontRef>
+            </p:style>
+            <p:txBody>
+              <a:bodyPr rtlCol="0" anchor="ctr"/>
+              <a:lstStyle/>
+              <a:p>
+                <a:pPr algn="ctr"/>
+                <a14:m>
+                  <m:oMathPara xmlns:m="http://schemas.openxmlformats.org/officeDocument/2006/math">
+                    <m:oMathParaPr>
+                      <m:jc m:val="centerGroup"/>
+                    </m:oMathParaPr>
+                    <m:oMath xmlns:m="http://schemas.openxmlformats.org/officeDocument/2006/math">
+                      <m:sSub>
+                        <m:sSubPr>
+                          <m:ctrlPr>
+                            <a:rPr lang="en-US" altLang="zh-CN" i="1" smtClean="0">
+                              <a:solidFill>
+                                <a:schemeClr val="tx1"/>
+                              </a:solidFill>
+                              <a:latin typeface="Cambria Math" panose="02040503050406030204" pitchFamily="18" charset="0"/>
+                            </a:rPr>
+                          </m:ctrlPr>
+                        </m:sSubPr>
+                        <m:e>
+                          <m:r>
+                            <a:rPr lang="en-US" altLang="zh-CN" b="0" i="1" smtClean="0">
+                              <a:solidFill>
+                                <a:schemeClr val="tx1"/>
+                              </a:solidFill>
+                              <a:latin typeface="Cambria Math" panose="02040503050406030204" pitchFamily="18" charset="0"/>
+                            </a:rPr>
+                            <m:t>𝑝</m:t>
+                          </m:r>
+                        </m:e>
+                        <m:sub>
+                          <m:r>
+                            <a:rPr lang="en-US" altLang="zh-CN" b="0" i="1" smtClean="0">
+                              <a:solidFill>
+                                <a:schemeClr val="tx1"/>
+                              </a:solidFill>
+                              <a:latin typeface="Cambria Math" panose="02040503050406030204" pitchFamily="18" charset="0"/>
+                            </a:rPr>
+                            <m:t>𝑗</m:t>
+                          </m:r>
+                        </m:sub>
+                      </m:sSub>
+                    </m:oMath>
+                  </m:oMathPara>
+                </a14:m>
+                <a:endParaRPr lang="zh-CN" altLang="en-US" dirty="0">
+                  <a:solidFill>
+                    <a:schemeClr val="tx1"/>
+                  </a:solidFill>
+                </a:endParaRPr>
+              </a:p>
+            </p:txBody>
+          </p:sp>
+        </mc:Choice>
+        <mc:Fallback>
+          <p:sp>
+            <p:nvSpPr>
+              <p:cNvPr id="52" name="矩形: 圆角 51">
+                <a:extLst>
+                  <a:ext uri="{FF2B5EF4-FFF2-40B4-BE49-F238E27FC236}">
+                    <a16:creationId xmlns:a16="http://schemas.microsoft.com/office/drawing/2014/main" id="{FC0840B2-6325-BAC8-7B64-B683E54EFF6F}"/>
+                  </a:ext>
+                </a:extLst>
+              </p:cNvPr>
+              <p:cNvSpPr>
+                <a:spLocks noRot="1" noChangeAspect="1" noMove="1" noResize="1" noEditPoints="1" noAdjustHandles="1" noChangeArrowheads="1" noChangeShapeType="1" noTextEdit="1"/>
+              </p:cNvSpPr>
+              <p:nvPr/>
+            </p:nvSpPr>
+            <p:spPr>
+              <a:xfrm>
+                <a:off x="8019539" y="2397210"/>
+                <a:ext cx="864973" cy="568411"/>
+              </a:xfrm>
+              <a:prstGeom prst="roundRect">
+                <a:avLst/>
+              </a:prstGeom>
+              <a:blipFill>
+                <a:blip r:embed="rId8"/>
+                <a:stretch>
+                  <a:fillRect/>
+                </a:stretch>
+              </a:blipFill>
+            </p:spPr>
+            <p:txBody>
+              <a:bodyPr/>
+              <a:lstStyle/>
+              <a:p>
+                <a:r>
+                  <a:rPr lang="zh-CN" altLang="en-US">
+                    <a:noFill/>
+                  </a:rPr>
+                  <a:t> </a:t>
+                </a:r>
+              </a:p>
+            </p:txBody>
+          </p:sp>
+        </mc:Fallback>
+      </mc:AlternateContent>
+      <mc:AlternateContent xmlns:mc="http://schemas.openxmlformats.org/markup-compatibility/2006">
+        <mc:Choice xmlns:a14="http://schemas.microsoft.com/office/drawing/2010/main" Requires="a14">
+          <p:sp>
+            <p:nvSpPr>
+              <p:cNvPr id="54" name="矩形: 圆角 53">
+                <a:extLst>
+                  <a:ext uri="{FF2B5EF4-FFF2-40B4-BE49-F238E27FC236}">
+                    <a16:creationId xmlns:a16="http://schemas.microsoft.com/office/drawing/2014/main" id="{FC60A4A5-4A39-1D33-BC96-D16B71DB967D}"/>
+                  </a:ext>
+                </a:extLst>
+              </p:cNvPr>
+              <p:cNvSpPr/>
+              <p:nvPr/>
+            </p:nvSpPr>
+            <p:spPr>
+              <a:xfrm>
+                <a:off x="8019538" y="3793523"/>
+                <a:ext cx="864973" cy="568411"/>
+              </a:xfrm>
+              <a:prstGeom prst="roundRect">
+                <a:avLst/>
+              </a:prstGeom>
+              <a:noFill/>
+            </p:spPr>
+            <p:style>
+              <a:lnRef idx="2">
+                <a:schemeClr val="accent1">
+                  <a:shade val="15000"/>
+                </a:schemeClr>
+              </a:lnRef>
+              <a:fillRef idx="1">
+                <a:schemeClr val="accent1"/>
+              </a:fillRef>
+              <a:effectRef idx="0">
+                <a:schemeClr val="accent1"/>
+              </a:effectRef>
+              <a:fontRef idx="minor">
+                <a:schemeClr val="lt1"/>
+              </a:fontRef>
+            </p:style>
+            <p:txBody>
+              <a:bodyPr rtlCol="0" anchor="ctr"/>
+              <a:lstStyle/>
+              <a:p>
+                <a:pPr algn="ctr"/>
+                <a14:m>
+                  <m:oMathPara xmlns:m="http://schemas.openxmlformats.org/officeDocument/2006/math">
+                    <m:oMathParaPr>
+                      <m:jc m:val="centerGroup"/>
+                    </m:oMathParaPr>
+                    <m:oMath xmlns:m="http://schemas.openxmlformats.org/officeDocument/2006/math">
+                      <m:sSub>
+                        <m:sSubPr>
+                          <m:ctrlPr>
+                            <a:rPr lang="en-US" altLang="zh-CN" i="1" smtClean="0">
+                              <a:solidFill>
+                                <a:schemeClr val="tx1"/>
+                              </a:solidFill>
+                              <a:latin typeface="Cambria Math" panose="02040503050406030204" pitchFamily="18" charset="0"/>
+                            </a:rPr>
+                          </m:ctrlPr>
+                        </m:sSubPr>
+                        <m:e>
+                          <m:r>
+                            <a:rPr lang="en-US" altLang="zh-CN" b="0" i="1" smtClean="0">
+                              <a:solidFill>
+                                <a:schemeClr val="tx1"/>
+                              </a:solidFill>
+                              <a:latin typeface="Cambria Math" panose="02040503050406030204" pitchFamily="18" charset="0"/>
+                            </a:rPr>
+                            <m:t>𝑝</m:t>
+                          </m:r>
+                        </m:e>
+                        <m:sub>
+                          <m:r>
+                            <a:rPr lang="en-US" altLang="zh-CN" b="0" i="1" smtClean="0">
+                              <a:solidFill>
+                                <a:schemeClr val="tx1"/>
+                              </a:solidFill>
+                              <a:latin typeface="Cambria Math" panose="02040503050406030204" pitchFamily="18" charset="0"/>
+                            </a:rPr>
+                            <m:t>𝑙</m:t>
+                          </m:r>
+                        </m:sub>
+                      </m:sSub>
+                    </m:oMath>
+                  </m:oMathPara>
+                </a14:m>
+                <a:endParaRPr lang="zh-CN" altLang="en-US" dirty="0">
+                  <a:solidFill>
+                    <a:schemeClr val="tx1"/>
+                  </a:solidFill>
+                </a:endParaRPr>
+              </a:p>
+            </p:txBody>
+          </p:sp>
+        </mc:Choice>
+        <mc:Fallback>
+          <p:sp>
+            <p:nvSpPr>
+              <p:cNvPr id="54" name="矩形: 圆角 53">
+                <a:extLst>
+                  <a:ext uri="{FF2B5EF4-FFF2-40B4-BE49-F238E27FC236}">
+                    <a16:creationId xmlns:a16="http://schemas.microsoft.com/office/drawing/2014/main" id="{FC60A4A5-4A39-1D33-BC96-D16B71DB967D}"/>
+                  </a:ext>
+                </a:extLst>
+              </p:cNvPr>
+              <p:cNvSpPr>
+                <a:spLocks noRot="1" noChangeAspect="1" noMove="1" noResize="1" noEditPoints="1" noAdjustHandles="1" noChangeArrowheads="1" noChangeShapeType="1" noTextEdit="1"/>
+              </p:cNvSpPr>
+              <p:nvPr/>
+            </p:nvSpPr>
+            <p:spPr>
+              <a:xfrm>
+                <a:off x="8019538" y="3793523"/>
+                <a:ext cx="864973" cy="568411"/>
+              </a:xfrm>
+              <a:prstGeom prst="roundRect">
+                <a:avLst/>
+              </a:prstGeom>
+              <a:blipFill>
+                <a:blip r:embed="rId9"/>
+                <a:stretch>
+                  <a:fillRect/>
+                </a:stretch>
+              </a:blipFill>
+            </p:spPr>
+            <p:txBody>
+              <a:bodyPr/>
+              <a:lstStyle/>
+              <a:p>
+                <a:r>
+                  <a:rPr lang="zh-CN" altLang="en-US">
+                    <a:noFill/>
+                  </a:rPr>
+                  <a:t> </a:t>
+                </a:r>
+              </a:p>
+            </p:txBody>
+          </p:sp>
+        </mc:Fallback>
+      </mc:AlternateContent>
+      <mc:AlternateContent xmlns:mc="http://schemas.openxmlformats.org/markup-compatibility/2006">
+        <mc:Choice xmlns:a14="http://schemas.microsoft.com/office/drawing/2010/main" Requires="a14">
+          <p:sp>
+            <p:nvSpPr>
+              <p:cNvPr id="55" name="矩形: 圆角 54">
+                <a:extLst>
+                  <a:ext uri="{FF2B5EF4-FFF2-40B4-BE49-F238E27FC236}">
+                    <a16:creationId xmlns:a16="http://schemas.microsoft.com/office/drawing/2014/main" id="{7D3FEF05-0A18-7FE5-3B32-35BDC7B4A1CF}"/>
+                  </a:ext>
+                </a:extLst>
+              </p:cNvPr>
+              <p:cNvSpPr/>
+              <p:nvPr/>
+            </p:nvSpPr>
+            <p:spPr>
+              <a:xfrm>
+                <a:off x="8019538" y="5090983"/>
+                <a:ext cx="864973" cy="568411"/>
+              </a:xfrm>
+              <a:prstGeom prst="roundRect">
+                <a:avLst/>
+              </a:prstGeom>
+              <a:noFill/>
+            </p:spPr>
+            <p:style>
+              <a:lnRef idx="2">
+                <a:schemeClr val="accent1">
+                  <a:shade val="15000"/>
+                </a:schemeClr>
+              </a:lnRef>
+              <a:fillRef idx="1">
+                <a:schemeClr val="accent1"/>
+              </a:fillRef>
+              <a:effectRef idx="0">
+                <a:schemeClr val="accent1"/>
+              </a:effectRef>
+              <a:fontRef idx="minor">
+                <a:schemeClr val="lt1"/>
+              </a:fontRef>
+            </p:style>
+            <p:txBody>
+              <a:bodyPr rtlCol="0" anchor="ctr"/>
+              <a:lstStyle/>
+              <a:p>
+                <a:pPr algn="ctr"/>
+                <a14:m>
+                  <m:oMathPara xmlns:m="http://schemas.openxmlformats.org/officeDocument/2006/math">
+                    <m:oMathParaPr>
+                      <m:jc m:val="centerGroup"/>
+                    </m:oMathParaPr>
+                    <m:oMath xmlns:m="http://schemas.openxmlformats.org/officeDocument/2006/math">
+                      <m:sSub>
+                        <m:sSubPr>
+                          <m:ctrlPr>
+                            <a:rPr lang="en-US" altLang="zh-CN" i="1" smtClean="0">
+                              <a:solidFill>
+                                <a:schemeClr val="tx1"/>
+                              </a:solidFill>
+                              <a:latin typeface="Cambria Math" panose="02040503050406030204" pitchFamily="18" charset="0"/>
+                            </a:rPr>
+                          </m:ctrlPr>
+                        </m:sSubPr>
+                        <m:e>
+                          <m:r>
+                            <a:rPr lang="en-US" altLang="zh-CN" b="0" i="1" smtClean="0">
+                              <a:solidFill>
+                                <a:schemeClr val="tx1"/>
+                              </a:solidFill>
+                              <a:latin typeface="Cambria Math" panose="02040503050406030204" pitchFamily="18" charset="0"/>
+                            </a:rPr>
+                            <m:t>𝑝</m:t>
+                          </m:r>
+                        </m:e>
+                        <m:sub>
+                          <m:r>
+                            <a:rPr lang="en-US" altLang="zh-CN" b="0" i="1" smtClean="0">
+                              <a:solidFill>
+                                <a:schemeClr val="tx1"/>
+                              </a:solidFill>
+                              <a:latin typeface="Cambria Math" panose="02040503050406030204" pitchFamily="18" charset="0"/>
+                            </a:rPr>
+                            <m:t>𝑀</m:t>
+                          </m:r>
+                        </m:sub>
+                      </m:sSub>
+                    </m:oMath>
+                  </m:oMathPara>
+                </a14:m>
+                <a:endParaRPr lang="zh-CN" altLang="en-US" dirty="0">
+                  <a:solidFill>
+                    <a:schemeClr val="tx1"/>
+                  </a:solidFill>
+                </a:endParaRPr>
+              </a:p>
+            </p:txBody>
+          </p:sp>
+        </mc:Choice>
+        <mc:Fallback>
+          <p:sp>
+            <p:nvSpPr>
+              <p:cNvPr id="55" name="矩形: 圆角 54">
+                <a:extLst>
+                  <a:ext uri="{FF2B5EF4-FFF2-40B4-BE49-F238E27FC236}">
+                    <a16:creationId xmlns:a16="http://schemas.microsoft.com/office/drawing/2014/main" id="{7D3FEF05-0A18-7FE5-3B32-35BDC7B4A1CF}"/>
+                  </a:ext>
+                </a:extLst>
+              </p:cNvPr>
+              <p:cNvSpPr>
+                <a:spLocks noRot="1" noChangeAspect="1" noMove="1" noResize="1" noEditPoints="1" noAdjustHandles="1" noChangeArrowheads="1" noChangeShapeType="1" noTextEdit="1"/>
+              </p:cNvSpPr>
+              <p:nvPr/>
+            </p:nvSpPr>
+            <p:spPr>
+              <a:xfrm>
+                <a:off x="8019538" y="5090983"/>
+                <a:ext cx="864973" cy="568411"/>
+              </a:xfrm>
+              <a:prstGeom prst="roundRect">
+                <a:avLst/>
+              </a:prstGeom>
+              <a:blipFill>
+                <a:blip r:embed="rId10"/>
+                <a:stretch>
+                  <a:fillRect/>
+                </a:stretch>
+              </a:blipFill>
+            </p:spPr>
+            <p:txBody>
+              <a:bodyPr/>
+              <a:lstStyle/>
+              <a:p>
+                <a:r>
+                  <a:rPr lang="zh-CN" altLang="en-US">
+                    <a:noFill/>
+                  </a:rPr>
+                  <a:t> </a:t>
+                </a:r>
+              </a:p>
+            </p:txBody>
+          </p:sp>
+        </mc:Fallback>
+      </mc:AlternateContent>
+      <p:cxnSp>
+        <p:nvCxnSpPr>
+          <p:cNvPr id="59" name="直接连接符 58">
+            <a:extLst>
+              <a:ext uri="{FF2B5EF4-FFF2-40B4-BE49-F238E27FC236}">
+                <a16:creationId xmlns:a16="http://schemas.microsoft.com/office/drawing/2014/main" id="{7BE4D1C0-C2D7-B567-B839-1E57BDB5BBDC}"/>
+              </a:ext>
+            </a:extLst>
+          </p:cNvPr>
+          <p:cNvCxnSpPr>
+            <a:stCxn id="29" idx="0"/>
+            <a:endCxn id="52" idx="1"/>
+          </p:cNvCxnSpPr>
+          <p:nvPr/>
+        </p:nvCxnSpPr>
+        <p:spPr>
+          <a:xfrm>
+            <a:off x="3361041" y="1396314"/>
+            <a:ext cx="4658498" cy="1285102"/>
+          </a:xfrm>
+          <a:prstGeom prst="line">
+            <a:avLst/>
+          </a:prstGeom>
+          <a:ln>
+            <a:solidFill>
+              <a:srgbClr val="FF0000"/>
+            </a:solidFill>
+          </a:ln>
+        </p:spPr>
+        <p:style>
+          <a:lnRef idx="2">
+            <a:schemeClr val="accent1"/>
+          </a:lnRef>
+          <a:fillRef idx="0">
+            <a:schemeClr val="accent1"/>
+          </a:fillRef>
+          <a:effectRef idx="1">
+            <a:schemeClr val="accent1"/>
+          </a:effectRef>
+          <a:fontRef idx="minor">
+            <a:schemeClr val="tx1"/>
+          </a:fontRef>
+        </p:style>
+      </p:cxnSp>
+      <p:cxnSp>
+        <p:nvCxnSpPr>
+          <p:cNvPr id="60" name="直接连接符 59">
+            <a:extLst>
+              <a:ext uri="{FF2B5EF4-FFF2-40B4-BE49-F238E27FC236}">
+                <a16:creationId xmlns:a16="http://schemas.microsoft.com/office/drawing/2014/main" id="{E1258B7A-6BDB-4929-AB71-7BBE3FE10A4C}"/>
+              </a:ext>
+            </a:extLst>
+          </p:cNvPr>
+          <p:cNvCxnSpPr>
+            <a:cxnSpLocks/>
+            <a:stCxn id="30" idx="0"/>
+            <a:endCxn id="52" idx="1"/>
+          </p:cNvCxnSpPr>
+          <p:nvPr/>
+        </p:nvCxnSpPr>
+        <p:spPr>
+          <a:xfrm flipV="1">
+            <a:off x="3361041" y="2681416"/>
+            <a:ext cx="4658498" cy="1"/>
+          </a:xfrm>
+          <a:prstGeom prst="line">
+            <a:avLst/>
+          </a:prstGeom>
+          <a:ln>
+            <a:solidFill>
+              <a:srgbClr val="FF0000"/>
+            </a:solidFill>
+          </a:ln>
+        </p:spPr>
+        <p:style>
+          <a:lnRef idx="2">
+            <a:schemeClr val="accent1"/>
+          </a:lnRef>
+          <a:fillRef idx="0">
+            <a:schemeClr val="accent1"/>
+          </a:fillRef>
+          <a:effectRef idx="1">
+            <a:schemeClr val="accent1"/>
+          </a:effectRef>
+          <a:fontRef idx="minor">
+            <a:schemeClr val="tx1"/>
+          </a:fontRef>
+        </p:style>
+      </p:cxnSp>
+      <p:cxnSp>
+        <p:nvCxnSpPr>
+          <p:cNvPr id="75" name="直接连接符 74">
+            <a:extLst>
+              <a:ext uri="{FF2B5EF4-FFF2-40B4-BE49-F238E27FC236}">
+                <a16:creationId xmlns:a16="http://schemas.microsoft.com/office/drawing/2014/main" id="{9A51BB67-D531-9671-C266-BB54A1EA1774}"/>
+              </a:ext>
+            </a:extLst>
+          </p:cNvPr>
+          <p:cNvCxnSpPr>
+            <a:cxnSpLocks/>
+            <a:stCxn id="49" idx="0"/>
+            <a:endCxn id="52" idx="1"/>
+          </p:cNvCxnSpPr>
+          <p:nvPr/>
+        </p:nvCxnSpPr>
+        <p:spPr>
+          <a:xfrm flipV="1">
+            <a:off x="3361041" y="2681416"/>
+            <a:ext cx="4658498" cy="2693774"/>
+          </a:xfrm>
+          <a:prstGeom prst="line">
+            <a:avLst/>
+          </a:prstGeom>
+          <a:ln>
+            <a:solidFill>
+              <a:srgbClr val="FF0000"/>
+            </a:solidFill>
+          </a:ln>
+        </p:spPr>
+        <p:style>
+          <a:lnRef idx="2">
+            <a:schemeClr val="accent1"/>
+          </a:lnRef>
+          <a:fillRef idx="0">
+            <a:schemeClr val="accent1"/>
+          </a:fillRef>
+          <a:effectRef idx="1">
+            <a:schemeClr val="accent1"/>
+          </a:effectRef>
+          <a:fontRef idx="minor">
+            <a:schemeClr val="tx1"/>
+          </a:fontRef>
+        </p:style>
+      </p:cxnSp>
+      <p:cxnSp>
+        <p:nvCxnSpPr>
+          <p:cNvPr id="79" name="直接连接符 78">
+            <a:extLst>
+              <a:ext uri="{FF2B5EF4-FFF2-40B4-BE49-F238E27FC236}">
+                <a16:creationId xmlns:a16="http://schemas.microsoft.com/office/drawing/2014/main" id="{97135C30-C71D-21CF-FF3C-5435A578EF85}"/>
+              </a:ext>
+            </a:extLst>
+          </p:cNvPr>
+          <p:cNvCxnSpPr>
+            <a:cxnSpLocks/>
+            <a:stCxn id="47" idx="0"/>
+            <a:endCxn id="50" idx="1"/>
+          </p:cNvCxnSpPr>
+          <p:nvPr/>
+        </p:nvCxnSpPr>
+        <p:spPr>
+          <a:xfrm flipV="1">
+            <a:off x="3361041" y="1247642"/>
+            <a:ext cx="4658498" cy="2830088"/>
+          </a:xfrm>
+          <a:prstGeom prst="line">
+            <a:avLst/>
+          </a:prstGeom>
+          <a:ln>
+            <a:solidFill>
+              <a:srgbClr val="0070C0"/>
+            </a:solidFill>
+          </a:ln>
+        </p:spPr>
+        <p:style>
+          <a:lnRef idx="2">
+            <a:schemeClr val="accent1"/>
+          </a:lnRef>
+          <a:fillRef idx="0">
+            <a:schemeClr val="accent1"/>
+          </a:fillRef>
+          <a:effectRef idx="1">
+            <a:schemeClr val="accent1"/>
+          </a:effectRef>
+          <a:fontRef idx="minor">
+            <a:schemeClr val="tx1"/>
+          </a:fontRef>
+        </p:style>
+      </p:cxnSp>
+      <p:cxnSp>
+        <p:nvCxnSpPr>
+          <p:cNvPr id="82" name="直接连接符 81">
+            <a:extLst>
+              <a:ext uri="{FF2B5EF4-FFF2-40B4-BE49-F238E27FC236}">
+                <a16:creationId xmlns:a16="http://schemas.microsoft.com/office/drawing/2014/main" id="{F1CF7C71-54AD-3C0E-2730-33E2CBB71A7A}"/>
+              </a:ext>
+            </a:extLst>
+          </p:cNvPr>
+          <p:cNvCxnSpPr>
+            <a:cxnSpLocks/>
+            <a:stCxn id="47" idx="0"/>
+            <a:endCxn id="54" idx="1"/>
+          </p:cNvCxnSpPr>
+          <p:nvPr/>
+        </p:nvCxnSpPr>
+        <p:spPr>
+          <a:xfrm flipV="1">
+            <a:off x="3361041" y="4077729"/>
+            <a:ext cx="4658497" cy="1"/>
+          </a:xfrm>
+          <a:prstGeom prst="line">
+            <a:avLst/>
+          </a:prstGeom>
+          <a:ln>
+            <a:solidFill>
+              <a:srgbClr val="0070C0"/>
+            </a:solidFill>
+          </a:ln>
+        </p:spPr>
+        <p:style>
+          <a:lnRef idx="2">
+            <a:schemeClr val="accent1"/>
+          </a:lnRef>
+          <a:fillRef idx="0">
+            <a:schemeClr val="accent1"/>
+          </a:fillRef>
+          <a:effectRef idx="1">
+            <a:schemeClr val="accent1"/>
+          </a:effectRef>
+          <a:fontRef idx="minor">
+            <a:schemeClr val="tx1"/>
+          </a:fontRef>
+        </p:style>
+      </p:cxnSp>
+      <p:cxnSp>
+        <p:nvCxnSpPr>
+          <p:cNvPr id="88" name="直接连接符 87">
+            <a:extLst>
+              <a:ext uri="{FF2B5EF4-FFF2-40B4-BE49-F238E27FC236}">
+                <a16:creationId xmlns:a16="http://schemas.microsoft.com/office/drawing/2014/main" id="{73DDA9A5-F54B-DDF2-56DD-5609466082DE}"/>
+              </a:ext>
+            </a:extLst>
+          </p:cNvPr>
+          <p:cNvCxnSpPr>
+            <a:cxnSpLocks/>
+            <a:stCxn id="47" idx="0"/>
+            <a:endCxn id="55" idx="1"/>
+          </p:cNvCxnSpPr>
+          <p:nvPr/>
+        </p:nvCxnSpPr>
+        <p:spPr>
+          <a:xfrm>
+            <a:off x="3361041" y="4077730"/>
+            <a:ext cx="4658497" cy="1297459"/>
+          </a:xfrm>
+          <a:prstGeom prst="line">
+            <a:avLst/>
+          </a:prstGeom>
+          <a:ln>
+            <a:solidFill>
+              <a:srgbClr val="0070C0"/>
+            </a:solidFill>
+          </a:ln>
+        </p:spPr>
+        <p:style>
+          <a:lnRef idx="2">
+            <a:schemeClr val="accent1"/>
+          </a:lnRef>
+          <a:fillRef idx="0">
+            <a:schemeClr val="accent1"/>
+          </a:fillRef>
+          <a:effectRef idx="1">
+            <a:schemeClr val="accent1"/>
+          </a:effectRef>
+          <a:fontRef idx="minor">
+            <a:schemeClr val="tx1"/>
+          </a:fontRef>
+        </p:style>
+      </p:cxnSp>
+      <mc:AlternateContent xmlns:mc="http://schemas.openxmlformats.org/markup-compatibility/2006">
+        <mc:Choice xmlns:a14="http://schemas.microsoft.com/office/drawing/2010/main" Requires="a14">
+          <p:sp>
+            <p:nvSpPr>
+              <p:cNvPr id="92" name="文本框 91">
+                <a:extLst>
+                  <a:ext uri="{FF2B5EF4-FFF2-40B4-BE49-F238E27FC236}">
+                    <a16:creationId xmlns:a16="http://schemas.microsoft.com/office/drawing/2014/main" id="{EEEAE71D-DC2D-8FE8-A488-CD348549AA46}"/>
+                  </a:ext>
+                </a:extLst>
+              </p:cNvPr>
+              <p:cNvSpPr txBox="1"/>
+              <p:nvPr/>
+            </p:nvSpPr>
+            <p:spPr>
+              <a:xfrm>
+                <a:off x="3361041" y="1013256"/>
+                <a:ext cx="595741" cy="391646"/>
+              </a:xfrm>
+              <a:prstGeom prst="rect">
+                <a:avLst/>
+              </a:prstGeom>
+              <a:noFill/>
+            </p:spPr>
+            <p:txBody>
+              <a:bodyPr wrap="none" rtlCol="0">
+                <a:spAutoFit/>
+              </a:bodyPr>
+              <a:lstStyle/>
+              <a:p>
+                <a14:m>
+                  <m:oMathPara xmlns:m="http://schemas.openxmlformats.org/officeDocument/2006/math">
+                    <m:oMathParaPr>
+                      <m:jc m:val="centerGroup"/>
+                    </m:oMathParaPr>
+                    <m:oMath xmlns:m="http://schemas.openxmlformats.org/officeDocument/2006/math">
+                      <m:sSub>
+                        <m:sSubPr>
+                          <m:ctrlPr>
+                            <a:rPr lang="en-US" altLang="zh-CN" i="1" smtClean="0">
+                              <a:solidFill>
+                                <a:srgbClr val="FF0000"/>
+                              </a:solidFill>
+                              <a:latin typeface="Cambria Math" panose="02040503050406030204" pitchFamily="18" charset="0"/>
+                            </a:rPr>
+                          </m:ctrlPr>
+                        </m:sSubPr>
+                        <m:e>
+                          <m:r>
+                            <a:rPr lang="en-US" altLang="zh-CN" b="0" i="1" smtClean="0">
+                              <a:solidFill>
+                                <a:srgbClr val="FF0000"/>
+                              </a:solidFill>
+                              <a:latin typeface="Cambria Math" panose="02040503050406030204" pitchFamily="18" charset="0"/>
+                            </a:rPr>
+                            <m:t>𝑤</m:t>
+                          </m:r>
+                        </m:e>
+                        <m:sub>
+                          <m:r>
+                            <a:rPr lang="en-US" altLang="zh-CN" b="0" i="1" smtClean="0">
+                              <a:solidFill>
+                                <a:srgbClr val="FF0000"/>
+                              </a:solidFill>
+                              <a:latin typeface="Cambria Math" panose="02040503050406030204" pitchFamily="18" charset="0"/>
+                            </a:rPr>
+                            <m:t>1</m:t>
+                          </m:r>
+                          <m:r>
+                            <a:rPr lang="en-US" altLang="zh-CN" b="0" i="1" smtClean="0">
+                              <a:solidFill>
+                                <a:srgbClr val="FF0000"/>
+                              </a:solidFill>
+                              <a:latin typeface="Cambria Math" panose="02040503050406030204" pitchFamily="18" charset="0"/>
+                            </a:rPr>
+                            <m:t>𝑗</m:t>
+                          </m:r>
+                        </m:sub>
+                      </m:sSub>
+                    </m:oMath>
+                  </m:oMathPara>
+                </a14:m>
+                <a:endParaRPr lang="zh-CN" altLang="en-US" dirty="0"/>
+              </a:p>
+            </p:txBody>
+          </p:sp>
+        </mc:Choice>
+        <mc:Fallback>
+          <p:sp>
+            <p:nvSpPr>
+              <p:cNvPr id="92" name="文本框 91">
+                <a:extLst>
+                  <a:ext uri="{FF2B5EF4-FFF2-40B4-BE49-F238E27FC236}">
+                    <a16:creationId xmlns:a16="http://schemas.microsoft.com/office/drawing/2014/main" id="{EEEAE71D-DC2D-8FE8-A488-CD348549AA46}"/>
+                  </a:ext>
+                </a:extLst>
+              </p:cNvPr>
+              <p:cNvSpPr txBox="1">
+                <a:spLocks noRot="1" noChangeAspect="1" noMove="1" noResize="1" noEditPoints="1" noAdjustHandles="1" noChangeArrowheads="1" noChangeShapeType="1" noTextEdit="1"/>
+              </p:cNvSpPr>
+              <p:nvPr/>
+            </p:nvSpPr>
+            <p:spPr>
+              <a:xfrm>
+                <a:off x="3361041" y="1013256"/>
+                <a:ext cx="595741" cy="391646"/>
+              </a:xfrm>
+              <a:prstGeom prst="rect">
+                <a:avLst/>
+              </a:prstGeom>
+              <a:blipFill>
+                <a:blip r:embed="rId11"/>
+                <a:stretch>
+                  <a:fillRect b="-9375"/>
+                </a:stretch>
+              </a:blipFill>
+            </p:spPr>
+            <p:txBody>
+              <a:bodyPr/>
+              <a:lstStyle/>
+              <a:p>
+                <a:r>
+                  <a:rPr lang="zh-CN" altLang="en-US">
+                    <a:noFill/>
+                  </a:rPr>
+                  <a:t> </a:t>
+                </a:r>
+              </a:p>
+            </p:txBody>
+          </p:sp>
+        </mc:Fallback>
+      </mc:AlternateContent>
+      <mc:AlternateContent xmlns:mc="http://schemas.openxmlformats.org/markup-compatibility/2006">
+        <mc:Choice xmlns:a14="http://schemas.microsoft.com/office/drawing/2010/main" Requires="a14">
+          <p:sp>
+            <p:nvSpPr>
+              <p:cNvPr id="93" name="文本框 92">
+                <a:extLst>
+                  <a:ext uri="{FF2B5EF4-FFF2-40B4-BE49-F238E27FC236}">
+                    <a16:creationId xmlns:a16="http://schemas.microsoft.com/office/drawing/2014/main" id="{6A0892C0-9550-59C4-29DB-820D8AA455A3}"/>
+                  </a:ext>
+                </a:extLst>
+              </p:cNvPr>
+              <p:cNvSpPr txBox="1"/>
+              <p:nvPr/>
+            </p:nvSpPr>
+            <p:spPr>
+              <a:xfrm>
+                <a:off x="3361041" y="2271040"/>
+                <a:ext cx="562590" cy="391646"/>
+              </a:xfrm>
+              <a:prstGeom prst="rect">
+                <a:avLst/>
+              </a:prstGeom>
+              <a:noFill/>
+            </p:spPr>
+            <p:txBody>
+              <a:bodyPr wrap="none" rtlCol="0">
+                <a:spAutoFit/>
+              </a:bodyPr>
+              <a:lstStyle/>
+              <a:p>
+                <a14:m>
+                  <m:oMathPara xmlns:m="http://schemas.openxmlformats.org/officeDocument/2006/math">
+                    <m:oMathParaPr>
+                      <m:jc m:val="centerGroup"/>
+                    </m:oMathParaPr>
+                    <m:oMath xmlns:m="http://schemas.openxmlformats.org/officeDocument/2006/math">
+                      <m:sSub>
+                        <m:sSubPr>
+                          <m:ctrlPr>
+                            <a:rPr lang="en-US" altLang="zh-CN" i="1" smtClean="0">
+                              <a:solidFill>
+                                <a:srgbClr val="FF0000"/>
+                              </a:solidFill>
+                              <a:latin typeface="Cambria Math" panose="02040503050406030204" pitchFamily="18" charset="0"/>
+                            </a:rPr>
+                          </m:ctrlPr>
+                        </m:sSubPr>
+                        <m:e>
+                          <m:r>
+                            <a:rPr lang="en-US" altLang="zh-CN" b="0" i="1" smtClean="0">
+                              <a:solidFill>
+                                <a:srgbClr val="FF0000"/>
+                              </a:solidFill>
+                              <a:latin typeface="Cambria Math" panose="02040503050406030204" pitchFamily="18" charset="0"/>
+                            </a:rPr>
+                            <m:t>𝑤</m:t>
+                          </m:r>
+                        </m:e>
+                        <m:sub>
+                          <m:r>
+                            <a:rPr lang="en-US" altLang="zh-CN" b="0" i="1" smtClean="0">
+                              <a:solidFill>
+                                <a:srgbClr val="FF0000"/>
+                              </a:solidFill>
+                              <a:latin typeface="Cambria Math" panose="02040503050406030204" pitchFamily="18" charset="0"/>
+                            </a:rPr>
+                            <m:t>𝑖𝑗</m:t>
+                          </m:r>
+                        </m:sub>
+                      </m:sSub>
+                    </m:oMath>
+                  </m:oMathPara>
+                </a14:m>
+                <a:endParaRPr lang="zh-CN" altLang="en-US" dirty="0"/>
+              </a:p>
+            </p:txBody>
+          </p:sp>
+        </mc:Choice>
+        <mc:Fallback>
+          <p:sp>
+            <p:nvSpPr>
+              <p:cNvPr id="93" name="文本框 92">
+                <a:extLst>
+                  <a:ext uri="{FF2B5EF4-FFF2-40B4-BE49-F238E27FC236}">
+                    <a16:creationId xmlns:a16="http://schemas.microsoft.com/office/drawing/2014/main" id="{6A0892C0-9550-59C4-29DB-820D8AA455A3}"/>
+                  </a:ext>
+                </a:extLst>
+              </p:cNvPr>
+              <p:cNvSpPr txBox="1">
+                <a:spLocks noRot="1" noChangeAspect="1" noMove="1" noResize="1" noEditPoints="1" noAdjustHandles="1" noChangeArrowheads="1" noChangeShapeType="1" noTextEdit="1"/>
+              </p:cNvSpPr>
+              <p:nvPr/>
+            </p:nvSpPr>
+            <p:spPr>
+              <a:xfrm>
+                <a:off x="3361041" y="2271040"/>
+                <a:ext cx="562590" cy="391646"/>
+              </a:xfrm>
+              <a:prstGeom prst="rect">
+                <a:avLst/>
+              </a:prstGeom>
+              <a:blipFill>
+                <a:blip r:embed="rId12"/>
+                <a:stretch>
+                  <a:fillRect b="-7813"/>
+                </a:stretch>
+              </a:blipFill>
+            </p:spPr>
+            <p:txBody>
+              <a:bodyPr/>
+              <a:lstStyle/>
+              <a:p>
+                <a:r>
+                  <a:rPr lang="zh-CN" altLang="en-US">
+                    <a:noFill/>
+                  </a:rPr>
+                  <a:t> </a:t>
+                </a:r>
+              </a:p>
+            </p:txBody>
+          </p:sp>
+        </mc:Fallback>
+      </mc:AlternateContent>
+      <mc:AlternateContent xmlns:mc="http://schemas.openxmlformats.org/markup-compatibility/2006">
+        <mc:Choice xmlns:a14="http://schemas.microsoft.com/office/drawing/2010/main" Requires="a14">
+          <p:sp>
+            <p:nvSpPr>
+              <p:cNvPr id="95" name="文本框 94">
+                <a:extLst>
+                  <a:ext uri="{FF2B5EF4-FFF2-40B4-BE49-F238E27FC236}">
+                    <a16:creationId xmlns:a16="http://schemas.microsoft.com/office/drawing/2014/main" id="{27D253D7-E81D-DA24-1261-A8339D42A804}"/>
+                  </a:ext>
+                </a:extLst>
+              </p:cNvPr>
+              <p:cNvSpPr txBox="1"/>
+              <p:nvPr/>
+            </p:nvSpPr>
+            <p:spPr>
+              <a:xfrm>
+                <a:off x="3361040" y="5189836"/>
+                <a:ext cx="629916" cy="391646"/>
+              </a:xfrm>
+              <a:prstGeom prst="rect">
+                <a:avLst/>
+              </a:prstGeom>
+              <a:noFill/>
+            </p:spPr>
+            <p:txBody>
+              <a:bodyPr wrap="none" rtlCol="0">
+                <a:spAutoFit/>
+              </a:bodyPr>
+              <a:lstStyle/>
+              <a:p>
+                <a14:m>
+                  <m:oMathPara xmlns:m="http://schemas.openxmlformats.org/officeDocument/2006/math">
+                    <m:oMathParaPr>
+                      <m:jc m:val="centerGroup"/>
+                    </m:oMathParaPr>
+                    <m:oMath xmlns:m="http://schemas.openxmlformats.org/officeDocument/2006/math">
+                      <m:sSub>
+                        <m:sSubPr>
+                          <m:ctrlPr>
+                            <a:rPr lang="en-US" altLang="zh-CN" i="1" smtClean="0">
+                              <a:solidFill>
+                                <a:srgbClr val="FF0000"/>
+                              </a:solidFill>
+                              <a:latin typeface="Cambria Math" panose="02040503050406030204" pitchFamily="18" charset="0"/>
+                            </a:rPr>
+                          </m:ctrlPr>
+                        </m:sSubPr>
+                        <m:e>
+                          <m:r>
+                            <a:rPr lang="en-US" altLang="zh-CN" b="0" i="1" smtClean="0">
+                              <a:solidFill>
+                                <a:srgbClr val="FF0000"/>
+                              </a:solidFill>
+                              <a:latin typeface="Cambria Math" panose="02040503050406030204" pitchFamily="18" charset="0"/>
+                            </a:rPr>
+                            <m:t>𝑤</m:t>
+                          </m:r>
+                        </m:e>
+                        <m:sub>
+                          <m:r>
+                            <a:rPr lang="en-US" altLang="zh-CN" b="0" i="1" smtClean="0">
+                              <a:solidFill>
+                                <a:srgbClr val="FF0000"/>
+                              </a:solidFill>
+                              <a:latin typeface="Cambria Math" panose="02040503050406030204" pitchFamily="18" charset="0"/>
+                            </a:rPr>
+                            <m:t>𝑁𝑗</m:t>
+                          </m:r>
+                        </m:sub>
+                      </m:sSub>
+                    </m:oMath>
+                  </m:oMathPara>
+                </a14:m>
+                <a:endParaRPr lang="zh-CN" altLang="en-US" dirty="0"/>
+              </a:p>
+            </p:txBody>
+          </p:sp>
+        </mc:Choice>
+        <mc:Fallback>
+          <p:sp>
+            <p:nvSpPr>
+              <p:cNvPr id="95" name="文本框 94">
+                <a:extLst>
+                  <a:ext uri="{FF2B5EF4-FFF2-40B4-BE49-F238E27FC236}">
+                    <a16:creationId xmlns:a16="http://schemas.microsoft.com/office/drawing/2014/main" id="{27D253D7-E81D-DA24-1261-A8339D42A804}"/>
+                  </a:ext>
+                </a:extLst>
+              </p:cNvPr>
+              <p:cNvSpPr txBox="1">
+                <a:spLocks noRot="1" noChangeAspect="1" noMove="1" noResize="1" noEditPoints="1" noAdjustHandles="1" noChangeArrowheads="1" noChangeShapeType="1" noTextEdit="1"/>
+              </p:cNvSpPr>
+              <p:nvPr/>
+            </p:nvSpPr>
+            <p:spPr>
+              <a:xfrm>
+                <a:off x="3361040" y="5189836"/>
+                <a:ext cx="629916" cy="391646"/>
+              </a:xfrm>
+              <a:prstGeom prst="rect">
+                <a:avLst/>
+              </a:prstGeom>
+              <a:blipFill>
+                <a:blip r:embed="rId13"/>
+                <a:stretch>
+                  <a:fillRect b="-7692"/>
+                </a:stretch>
+              </a:blipFill>
+            </p:spPr>
+            <p:txBody>
+              <a:bodyPr/>
+              <a:lstStyle/>
+              <a:p>
+                <a:r>
+                  <a:rPr lang="zh-CN" altLang="en-US">
+                    <a:noFill/>
+                  </a:rPr>
+                  <a:t> </a:t>
+                </a:r>
+              </a:p>
+            </p:txBody>
+          </p:sp>
+        </mc:Fallback>
+      </mc:AlternateContent>
+      <mc:AlternateContent xmlns:mc="http://schemas.openxmlformats.org/markup-compatibility/2006">
+        <mc:Choice xmlns:a14="http://schemas.microsoft.com/office/drawing/2010/main" Requires="a14">
+          <p:sp>
+            <p:nvSpPr>
+              <p:cNvPr id="96" name="文本框 95">
+                <a:extLst>
+                  <a:ext uri="{FF2B5EF4-FFF2-40B4-BE49-F238E27FC236}">
+                    <a16:creationId xmlns:a16="http://schemas.microsoft.com/office/drawing/2014/main" id="{B6125809-8E1F-3D02-9429-53A91FE8C6C2}"/>
+                  </a:ext>
+                </a:extLst>
+              </p:cNvPr>
+              <p:cNvSpPr txBox="1"/>
+              <p:nvPr/>
+            </p:nvSpPr>
+            <p:spPr>
+              <a:xfrm>
+                <a:off x="7289182" y="963437"/>
+                <a:ext cx="619337" cy="369332"/>
+              </a:xfrm>
+              <a:prstGeom prst="rect">
+                <a:avLst/>
+              </a:prstGeom>
+              <a:noFill/>
+            </p:spPr>
+            <p:txBody>
+              <a:bodyPr wrap="none" rtlCol="0">
+                <a:spAutoFit/>
+              </a:bodyPr>
+              <a:lstStyle/>
+              <a:p>
+                <a14:m>
+                  <m:oMathPara xmlns:m="http://schemas.openxmlformats.org/officeDocument/2006/math">
+                    <m:oMathParaPr>
+                      <m:jc m:val="centerGroup"/>
+                    </m:oMathParaPr>
+                    <m:oMath xmlns:m="http://schemas.openxmlformats.org/officeDocument/2006/math">
+                      <m:sSub>
+                        <m:sSubPr>
+                          <m:ctrlPr>
+                            <a:rPr lang="en-US" altLang="zh-CN" i="1" smtClean="0">
+                              <a:solidFill>
+                                <a:schemeClr val="tx2">
+                                  <a:lumMod val="75000"/>
+                                  <a:lumOff val="25000"/>
+                                </a:schemeClr>
+                              </a:solidFill>
+                              <a:latin typeface="Cambria Math" panose="02040503050406030204" pitchFamily="18" charset="0"/>
+                            </a:rPr>
+                          </m:ctrlPr>
+                        </m:sSubPr>
+                        <m:e>
+                          <m:r>
+                            <a:rPr lang="en-US" altLang="zh-CN" b="0" i="1" smtClean="0">
+                              <a:solidFill>
+                                <a:schemeClr val="tx2">
+                                  <a:lumMod val="75000"/>
+                                  <a:lumOff val="25000"/>
+                                </a:schemeClr>
+                              </a:solidFill>
+                              <a:latin typeface="Cambria Math" panose="02040503050406030204" pitchFamily="18" charset="0"/>
+                            </a:rPr>
+                            <m:t>𝑤</m:t>
+                          </m:r>
+                        </m:e>
+                        <m:sub>
+                          <m:r>
+                            <a:rPr lang="en-US" altLang="zh-CN" b="0" i="1" smtClean="0">
+                              <a:solidFill>
+                                <a:schemeClr val="tx2">
+                                  <a:lumMod val="75000"/>
+                                  <a:lumOff val="25000"/>
+                                </a:schemeClr>
+                              </a:solidFill>
+                              <a:latin typeface="Cambria Math" panose="02040503050406030204" pitchFamily="18" charset="0"/>
+                            </a:rPr>
+                            <m:t>𝑘</m:t>
+                          </m:r>
+                          <m:r>
+                            <a:rPr lang="en-US" altLang="zh-CN" b="0" i="1" smtClean="0">
+                              <a:solidFill>
+                                <a:schemeClr val="tx2">
+                                  <a:lumMod val="75000"/>
+                                  <a:lumOff val="25000"/>
+                                </a:schemeClr>
+                              </a:solidFill>
+                              <a:latin typeface="Cambria Math" panose="02040503050406030204" pitchFamily="18" charset="0"/>
+                            </a:rPr>
+                            <m:t>1</m:t>
+                          </m:r>
+                        </m:sub>
+                      </m:sSub>
+                    </m:oMath>
+                  </m:oMathPara>
+                </a14:m>
+                <a:endParaRPr lang="zh-CN" altLang="en-US" dirty="0"/>
+              </a:p>
+            </p:txBody>
+          </p:sp>
+        </mc:Choice>
+        <mc:Fallback>
+          <p:sp>
+            <p:nvSpPr>
+              <p:cNvPr id="96" name="文本框 95">
+                <a:extLst>
+                  <a:ext uri="{FF2B5EF4-FFF2-40B4-BE49-F238E27FC236}">
+                    <a16:creationId xmlns:a16="http://schemas.microsoft.com/office/drawing/2014/main" id="{B6125809-8E1F-3D02-9429-53A91FE8C6C2}"/>
+                  </a:ext>
+                </a:extLst>
+              </p:cNvPr>
+              <p:cNvSpPr txBox="1">
+                <a:spLocks noRot="1" noChangeAspect="1" noMove="1" noResize="1" noEditPoints="1" noAdjustHandles="1" noChangeArrowheads="1" noChangeShapeType="1" noTextEdit="1"/>
+              </p:cNvSpPr>
+              <p:nvPr/>
+            </p:nvSpPr>
+            <p:spPr>
+              <a:xfrm>
+                <a:off x="7289182" y="963437"/>
+                <a:ext cx="619337" cy="369332"/>
+              </a:xfrm>
+              <a:prstGeom prst="rect">
+                <a:avLst/>
+              </a:prstGeom>
+              <a:blipFill>
+                <a:blip r:embed="rId14"/>
+                <a:stretch>
+                  <a:fillRect/>
+                </a:stretch>
+              </a:blipFill>
+            </p:spPr>
+            <p:txBody>
+              <a:bodyPr/>
+              <a:lstStyle/>
+              <a:p>
+                <a:r>
+                  <a:rPr lang="zh-CN" altLang="en-US">
+                    <a:noFill/>
+                  </a:rPr>
+                  <a:t> </a:t>
+                </a:r>
+              </a:p>
+            </p:txBody>
+          </p:sp>
+        </mc:Fallback>
+      </mc:AlternateContent>
+      <mc:AlternateContent xmlns:mc="http://schemas.openxmlformats.org/markup-compatibility/2006">
+        <mc:Choice xmlns:a14="http://schemas.microsoft.com/office/drawing/2010/main" Requires="a14">
+          <p:sp>
+            <p:nvSpPr>
+              <p:cNvPr id="101" name="文本框 100">
+                <a:extLst>
+                  <a:ext uri="{FF2B5EF4-FFF2-40B4-BE49-F238E27FC236}">
+                    <a16:creationId xmlns:a16="http://schemas.microsoft.com/office/drawing/2014/main" id="{91DBCC30-1BD2-3859-B9A9-8740D25838C0}"/>
+                  </a:ext>
+                </a:extLst>
+              </p:cNvPr>
+              <p:cNvSpPr txBox="1"/>
+              <p:nvPr/>
+            </p:nvSpPr>
+            <p:spPr>
+              <a:xfrm>
+                <a:off x="7409944" y="3672013"/>
+                <a:ext cx="586634" cy="369332"/>
+              </a:xfrm>
+              <a:prstGeom prst="rect">
+                <a:avLst/>
+              </a:prstGeom>
+              <a:noFill/>
+            </p:spPr>
+            <p:txBody>
+              <a:bodyPr wrap="none" rtlCol="0">
+                <a:spAutoFit/>
+              </a:bodyPr>
+              <a:lstStyle/>
+              <a:p>
+                <a14:m>
+                  <m:oMathPara xmlns:m="http://schemas.openxmlformats.org/officeDocument/2006/math">
+                    <m:oMathParaPr>
+                      <m:jc m:val="centerGroup"/>
+                    </m:oMathParaPr>
+                    <m:oMath xmlns:m="http://schemas.openxmlformats.org/officeDocument/2006/math">
+                      <m:sSub>
+                        <m:sSubPr>
+                          <m:ctrlPr>
+                            <a:rPr lang="en-US" altLang="zh-CN" i="1" smtClean="0">
+                              <a:solidFill>
+                                <a:schemeClr val="tx2">
+                                  <a:lumMod val="75000"/>
+                                  <a:lumOff val="25000"/>
+                                </a:schemeClr>
+                              </a:solidFill>
+                              <a:latin typeface="Cambria Math" panose="02040503050406030204" pitchFamily="18" charset="0"/>
+                            </a:rPr>
+                          </m:ctrlPr>
+                        </m:sSubPr>
+                        <m:e>
+                          <m:r>
+                            <a:rPr lang="en-US" altLang="zh-CN" b="0" i="1" smtClean="0">
+                              <a:solidFill>
+                                <a:schemeClr val="tx2">
+                                  <a:lumMod val="75000"/>
+                                  <a:lumOff val="25000"/>
+                                </a:schemeClr>
+                              </a:solidFill>
+                              <a:latin typeface="Cambria Math" panose="02040503050406030204" pitchFamily="18" charset="0"/>
+                            </a:rPr>
+                            <m:t>𝑤</m:t>
+                          </m:r>
+                        </m:e>
+                        <m:sub>
+                          <m:r>
+                            <a:rPr lang="en-US" altLang="zh-CN" b="0" i="1" smtClean="0">
+                              <a:solidFill>
+                                <a:schemeClr val="tx2">
+                                  <a:lumMod val="75000"/>
+                                  <a:lumOff val="25000"/>
+                                </a:schemeClr>
+                              </a:solidFill>
+                              <a:latin typeface="Cambria Math" panose="02040503050406030204" pitchFamily="18" charset="0"/>
+                            </a:rPr>
+                            <m:t>𝑘𝑙</m:t>
+                          </m:r>
+                        </m:sub>
+                      </m:sSub>
+                    </m:oMath>
+                  </m:oMathPara>
+                </a14:m>
+                <a:endParaRPr lang="zh-CN" altLang="en-US" dirty="0"/>
+              </a:p>
+            </p:txBody>
+          </p:sp>
+        </mc:Choice>
+        <mc:Fallback>
+          <p:sp>
+            <p:nvSpPr>
+              <p:cNvPr id="101" name="文本框 100">
+                <a:extLst>
+                  <a:ext uri="{FF2B5EF4-FFF2-40B4-BE49-F238E27FC236}">
+                    <a16:creationId xmlns:a16="http://schemas.microsoft.com/office/drawing/2014/main" id="{91DBCC30-1BD2-3859-B9A9-8740D25838C0}"/>
+                  </a:ext>
+                </a:extLst>
+              </p:cNvPr>
+              <p:cNvSpPr txBox="1">
+                <a:spLocks noRot="1" noChangeAspect="1" noMove="1" noResize="1" noEditPoints="1" noAdjustHandles="1" noChangeArrowheads="1" noChangeShapeType="1" noTextEdit="1"/>
+              </p:cNvSpPr>
+              <p:nvPr/>
+            </p:nvSpPr>
+            <p:spPr>
+              <a:xfrm>
+                <a:off x="7409944" y="3672013"/>
+                <a:ext cx="586634" cy="369332"/>
+              </a:xfrm>
+              <a:prstGeom prst="rect">
+                <a:avLst/>
+              </a:prstGeom>
+              <a:blipFill>
+                <a:blip r:embed="rId15"/>
+                <a:stretch>
+                  <a:fillRect/>
+                </a:stretch>
+              </a:blipFill>
+            </p:spPr>
+            <p:txBody>
+              <a:bodyPr/>
+              <a:lstStyle/>
+              <a:p>
+                <a:r>
+                  <a:rPr lang="zh-CN" altLang="en-US">
+                    <a:noFill/>
+                  </a:rPr>
+                  <a:t> </a:t>
+                </a:r>
+              </a:p>
+            </p:txBody>
+          </p:sp>
+        </mc:Fallback>
+      </mc:AlternateContent>
+      <mc:AlternateContent xmlns:mc="http://schemas.openxmlformats.org/markup-compatibility/2006">
+        <mc:Choice xmlns:a14="http://schemas.microsoft.com/office/drawing/2010/main" Requires="a14">
+          <p:sp>
+            <p:nvSpPr>
+              <p:cNvPr id="102" name="文本框 101">
+                <a:extLst>
+                  <a:ext uri="{FF2B5EF4-FFF2-40B4-BE49-F238E27FC236}">
+                    <a16:creationId xmlns:a16="http://schemas.microsoft.com/office/drawing/2014/main" id="{7E250647-D5C5-E911-5570-474AF2DBB4E8}"/>
+                  </a:ext>
+                </a:extLst>
+              </p:cNvPr>
+              <p:cNvSpPr txBox="1"/>
+              <p:nvPr/>
+            </p:nvSpPr>
+            <p:spPr>
+              <a:xfrm>
+                <a:off x="7462618" y="5227299"/>
+                <a:ext cx="673133" cy="369332"/>
+              </a:xfrm>
+              <a:prstGeom prst="rect">
+                <a:avLst/>
+              </a:prstGeom>
+              <a:noFill/>
+            </p:spPr>
+            <p:txBody>
+              <a:bodyPr wrap="none" rtlCol="0">
+                <a:spAutoFit/>
+              </a:bodyPr>
+              <a:lstStyle/>
+              <a:p>
+                <a14:m>
+                  <m:oMathPara xmlns:m="http://schemas.openxmlformats.org/officeDocument/2006/math">
+                    <m:oMathParaPr>
+                      <m:jc m:val="centerGroup"/>
+                    </m:oMathParaPr>
+                    <m:oMath xmlns:m="http://schemas.openxmlformats.org/officeDocument/2006/math">
+                      <m:sSub>
+                        <m:sSubPr>
+                          <m:ctrlPr>
+                            <a:rPr lang="en-US" altLang="zh-CN" i="1" smtClean="0">
+                              <a:solidFill>
+                                <a:schemeClr val="tx2">
+                                  <a:lumMod val="75000"/>
+                                  <a:lumOff val="25000"/>
+                                </a:schemeClr>
+                              </a:solidFill>
+                              <a:latin typeface="Cambria Math" panose="02040503050406030204" pitchFamily="18" charset="0"/>
+                            </a:rPr>
+                          </m:ctrlPr>
+                        </m:sSubPr>
+                        <m:e>
+                          <m:r>
+                            <a:rPr lang="en-US" altLang="zh-CN" b="0" i="1" smtClean="0">
+                              <a:solidFill>
+                                <a:schemeClr val="tx2">
+                                  <a:lumMod val="75000"/>
+                                  <a:lumOff val="25000"/>
+                                </a:schemeClr>
+                              </a:solidFill>
+                              <a:latin typeface="Cambria Math" panose="02040503050406030204" pitchFamily="18" charset="0"/>
+                            </a:rPr>
+                            <m:t>𝑤</m:t>
+                          </m:r>
+                        </m:e>
+                        <m:sub>
+                          <m:r>
+                            <a:rPr lang="en-US" altLang="zh-CN" b="0" i="1" smtClean="0">
+                              <a:solidFill>
+                                <a:schemeClr val="tx2">
+                                  <a:lumMod val="75000"/>
+                                  <a:lumOff val="25000"/>
+                                </a:schemeClr>
+                              </a:solidFill>
+                              <a:latin typeface="Cambria Math" panose="02040503050406030204" pitchFamily="18" charset="0"/>
+                            </a:rPr>
+                            <m:t>𝑘𝑀</m:t>
+                          </m:r>
+                        </m:sub>
+                      </m:sSub>
+                    </m:oMath>
+                  </m:oMathPara>
+                </a14:m>
+                <a:endParaRPr lang="zh-CN" altLang="en-US" dirty="0"/>
+              </a:p>
+            </p:txBody>
+          </p:sp>
+        </mc:Choice>
+        <mc:Fallback>
+          <p:sp>
+            <p:nvSpPr>
+              <p:cNvPr id="102" name="文本框 101">
+                <a:extLst>
+                  <a:ext uri="{FF2B5EF4-FFF2-40B4-BE49-F238E27FC236}">
+                    <a16:creationId xmlns:a16="http://schemas.microsoft.com/office/drawing/2014/main" id="{7E250647-D5C5-E911-5570-474AF2DBB4E8}"/>
+                  </a:ext>
+                </a:extLst>
+              </p:cNvPr>
+              <p:cNvSpPr txBox="1">
+                <a:spLocks noRot="1" noChangeAspect="1" noMove="1" noResize="1" noEditPoints="1" noAdjustHandles="1" noChangeArrowheads="1" noChangeShapeType="1" noTextEdit="1"/>
+              </p:cNvSpPr>
+              <p:nvPr/>
+            </p:nvSpPr>
+            <p:spPr>
+              <a:xfrm>
+                <a:off x="7462618" y="5227299"/>
+                <a:ext cx="673133" cy="369332"/>
+              </a:xfrm>
+              <a:prstGeom prst="rect">
+                <a:avLst/>
+              </a:prstGeom>
+              <a:blipFill>
+                <a:blip r:embed="rId16"/>
+                <a:stretch>
+                  <a:fillRect/>
+                </a:stretch>
+              </a:blipFill>
+            </p:spPr>
+            <p:txBody>
+              <a:bodyPr/>
+              <a:lstStyle/>
+              <a:p>
+                <a:r>
+                  <a:rPr lang="zh-CN" altLang="en-US">
+                    <a:noFill/>
+                  </a:rPr>
+                  <a:t> </a:t>
+                </a:r>
+              </a:p>
+            </p:txBody>
+          </p:sp>
+        </mc:Fallback>
+      </mc:AlternateContent>
+      <p:cxnSp>
+        <p:nvCxnSpPr>
+          <p:cNvPr id="106" name="连接符: 曲线 105">
+            <a:extLst>
+              <a:ext uri="{FF2B5EF4-FFF2-40B4-BE49-F238E27FC236}">
+                <a16:creationId xmlns:a16="http://schemas.microsoft.com/office/drawing/2014/main" id="{91DCC33A-27B9-1867-7A1E-B1EC880003E4}"/>
+              </a:ext>
+            </a:extLst>
+          </p:cNvPr>
+          <p:cNvCxnSpPr>
+            <a:cxnSpLocks/>
+          </p:cNvCxnSpPr>
+          <p:nvPr/>
+        </p:nvCxnSpPr>
+        <p:spPr>
+          <a:xfrm>
+            <a:off x="2490503" y="1387274"/>
+            <a:ext cx="22198" cy="2703983"/>
+          </a:xfrm>
+          <a:prstGeom prst="curvedConnector3">
+            <a:avLst>
+              <a:gd name="adj1" fmla="val -3921642"/>
+            </a:avLst>
+          </a:prstGeom>
+          <a:ln>
+            <a:solidFill>
+              <a:srgbClr val="FF0000"/>
+            </a:solidFill>
+          </a:ln>
+        </p:spPr>
+        <p:style>
+          <a:lnRef idx="2">
+            <a:schemeClr val="accent1"/>
+          </a:lnRef>
+          <a:fillRef idx="0">
+            <a:schemeClr val="accent1"/>
+          </a:fillRef>
+          <a:effectRef idx="1">
+            <a:schemeClr val="accent1"/>
+          </a:effectRef>
+          <a:fontRef idx="minor">
+            <a:schemeClr val="tx1"/>
+          </a:fontRef>
+        </p:style>
+      </p:cxnSp>
+      <mc:AlternateContent xmlns:mc="http://schemas.openxmlformats.org/markup-compatibility/2006">
+        <mc:Choice xmlns:a14="http://schemas.microsoft.com/office/drawing/2010/main" Requires="a14">
+          <p:sp>
+            <p:nvSpPr>
+              <p:cNvPr id="116" name="文本框 115">
+                <a:extLst>
+                  <a:ext uri="{FF2B5EF4-FFF2-40B4-BE49-F238E27FC236}">
+                    <a16:creationId xmlns:a16="http://schemas.microsoft.com/office/drawing/2014/main" id="{3D16B128-1C9F-5AAC-80F4-B8E94FDCA99E}"/>
+                  </a:ext>
+                </a:extLst>
+              </p:cNvPr>
+              <p:cNvSpPr txBox="1"/>
+              <p:nvPr/>
+            </p:nvSpPr>
+            <p:spPr>
+              <a:xfrm>
+                <a:off x="1642163" y="1248774"/>
+                <a:ext cx="522002" cy="276999"/>
+              </a:xfrm>
+              <a:prstGeom prst="rect">
+                <a:avLst/>
+              </a:prstGeom>
+              <a:noFill/>
+            </p:spPr>
+            <p:txBody>
+              <a:bodyPr wrap="none" lIns="0" tIns="0" rIns="0" bIns="0" rtlCol="0">
+                <a:spAutoFit/>
+              </a:bodyPr>
+              <a:lstStyle/>
+              <a:p>
+                <a14:m>
+                  <m:oMathPara xmlns:m="http://schemas.openxmlformats.org/officeDocument/2006/math">
+                    <m:oMathParaPr>
+                      <m:jc m:val="centerGroup"/>
+                    </m:oMathParaPr>
+                    <m:oMath xmlns:m="http://schemas.openxmlformats.org/officeDocument/2006/math">
+                      <m:sSub>
+                        <m:sSubPr>
+                          <m:ctrlPr>
+                            <a:rPr lang="en-US" altLang="zh-CN" i="1" smtClean="0">
+                              <a:solidFill>
+                                <a:srgbClr val="FF0000"/>
+                              </a:solidFill>
+                              <a:latin typeface="Cambria Math" panose="02040503050406030204" pitchFamily="18" charset="0"/>
+                            </a:rPr>
+                          </m:ctrlPr>
+                        </m:sSubPr>
+                        <m:e>
+                          <m:r>
+                            <a:rPr lang="en-US" altLang="zh-CN" b="0" i="1" smtClean="0">
+                              <a:solidFill>
+                                <a:srgbClr val="FF0000"/>
+                              </a:solidFill>
+                              <a:latin typeface="Cambria Math" panose="02040503050406030204" pitchFamily="18" charset="0"/>
+                            </a:rPr>
+                            <m:t>𝐶𝑆</m:t>
+                          </m:r>
+                        </m:e>
+                        <m:sub>
+                          <m:r>
+                            <a:rPr lang="en-US" altLang="zh-CN" b="0" i="1" smtClean="0">
+                              <a:solidFill>
+                                <a:srgbClr val="FF0000"/>
+                              </a:solidFill>
+                              <a:latin typeface="Cambria Math" panose="02040503050406030204" pitchFamily="18" charset="0"/>
+                            </a:rPr>
+                            <m:t>𝑘</m:t>
+                          </m:r>
+                          <m:r>
+                            <a:rPr lang="en-US" altLang="zh-CN" b="0" i="1" smtClean="0">
+                              <a:solidFill>
+                                <a:srgbClr val="FF0000"/>
+                              </a:solidFill>
+                              <a:latin typeface="Cambria Math" panose="02040503050406030204" pitchFamily="18" charset="0"/>
+                            </a:rPr>
+                            <m:t>1</m:t>
+                          </m:r>
+                        </m:sub>
+                      </m:sSub>
+                    </m:oMath>
+                  </m:oMathPara>
+                </a14:m>
+                <a:endParaRPr lang="zh-CN" altLang="en-US" dirty="0"/>
+              </a:p>
+            </p:txBody>
+          </p:sp>
+        </mc:Choice>
+        <mc:Fallback>
+          <p:sp>
+            <p:nvSpPr>
+              <p:cNvPr id="116" name="文本框 115">
+                <a:extLst>
+                  <a:ext uri="{FF2B5EF4-FFF2-40B4-BE49-F238E27FC236}">
+                    <a16:creationId xmlns:a16="http://schemas.microsoft.com/office/drawing/2014/main" id="{3D16B128-1C9F-5AAC-80F4-B8E94FDCA99E}"/>
+                  </a:ext>
+                </a:extLst>
+              </p:cNvPr>
+              <p:cNvSpPr txBox="1">
+                <a:spLocks noRot="1" noChangeAspect="1" noMove="1" noResize="1" noEditPoints="1" noAdjustHandles="1" noChangeArrowheads="1" noChangeShapeType="1" noTextEdit="1"/>
+              </p:cNvSpPr>
+              <p:nvPr/>
+            </p:nvSpPr>
+            <p:spPr>
+              <a:xfrm>
+                <a:off x="1642163" y="1248774"/>
+                <a:ext cx="522002" cy="276999"/>
+              </a:xfrm>
+              <a:prstGeom prst="rect">
+                <a:avLst/>
+              </a:prstGeom>
+              <a:blipFill>
+                <a:blip r:embed="rId17"/>
+                <a:stretch>
+                  <a:fillRect l="-9302" r="-3488" b="-17778"/>
+                </a:stretch>
+              </a:blipFill>
+            </p:spPr>
+            <p:txBody>
+              <a:bodyPr/>
+              <a:lstStyle/>
+              <a:p>
+                <a:r>
+                  <a:rPr lang="zh-CN" altLang="en-US">
+                    <a:noFill/>
+                  </a:rPr>
+                  <a:t> </a:t>
+                </a:r>
+              </a:p>
+            </p:txBody>
+          </p:sp>
+        </mc:Fallback>
+      </mc:AlternateContent>
+      <p:cxnSp>
+        <p:nvCxnSpPr>
+          <p:cNvPr id="117" name="连接符: 曲线 116">
+            <a:extLst>
+              <a:ext uri="{FF2B5EF4-FFF2-40B4-BE49-F238E27FC236}">
+                <a16:creationId xmlns:a16="http://schemas.microsoft.com/office/drawing/2014/main" id="{3D5280D3-51B4-EA3E-3301-F3CA78D31BB3}"/>
+              </a:ext>
+            </a:extLst>
+          </p:cNvPr>
+          <p:cNvCxnSpPr>
+            <a:cxnSpLocks/>
+            <a:stCxn id="30" idx="3"/>
+            <a:endCxn id="47" idx="3"/>
+          </p:cNvCxnSpPr>
+          <p:nvPr/>
+        </p:nvCxnSpPr>
+        <p:spPr>
+          <a:xfrm rot="10800000" flipV="1">
+            <a:off x="2496068" y="2681416"/>
+            <a:ext cx="12700" cy="1396313"/>
+          </a:xfrm>
+          <a:prstGeom prst="curvedConnector3">
+            <a:avLst>
+              <a:gd name="adj1" fmla="val 1800000"/>
+            </a:avLst>
+          </a:prstGeom>
+          <a:ln>
+            <a:solidFill>
+              <a:srgbClr val="FF0000"/>
+            </a:solidFill>
+          </a:ln>
+        </p:spPr>
+        <p:style>
+          <a:lnRef idx="2">
+            <a:schemeClr val="accent1"/>
+          </a:lnRef>
+          <a:fillRef idx="0">
+            <a:schemeClr val="accent1"/>
+          </a:fillRef>
+          <a:effectRef idx="1">
+            <a:schemeClr val="accent1"/>
+          </a:effectRef>
+          <a:fontRef idx="minor">
+            <a:schemeClr val="tx1"/>
+          </a:fontRef>
+        </p:style>
+      </p:cxnSp>
+      <mc:AlternateContent xmlns:mc="http://schemas.openxmlformats.org/markup-compatibility/2006">
+        <mc:Choice xmlns:a14="http://schemas.microsoft.com/office/drawing/2010/main" Requires="a14">
+          <p:sp>
+            <p:nvSpPr>
+              <p:cNvPr id="121" name="文本框 120">
+                <a:extLst>
+                  <a:ext uri="{FF2B5EF4-FFF2-40B4-BE49-F238E27FC236}">
+                    <a16:creationId xmlns:a16="http://schemas.microsoft.com/office/drawing/2014/main" id="{7CEBC56D-C209-D731-45F2-D3AFF3CB7E41}"/>
+                  </a:ext>
+                </a:extLst>
+              </p:cNvPr>
+              <p:cNvSpPr txBox="1"/>
+              <p:nvPr/>
+            </p:nvSpPr>
+            <p:spPr>
+              <a:xfrm>
+                <a:off x="1884991" y="2566467"/>
+                <a:ext cx="489300" cy="276999"/>
+              </a:xfrm>
+              <a:prstGeom prst="rect">
+                <a:avLst/>
+              </a:prstGeom>
+              <a:noFill/>
+            </p:spPr>
+            <p:txBody>
+              <a:bodyPr wrap="none" lIns="0" tIns="0" rIns="0" bIns="0" rtlCol="0">
+                <a:spAutoFit/>
+              </a:bodyPr>
+              <a:lstStyle/>
+              <a:p>
+                <a14:m>
+                  <m:oMathPara xmlns:m="http://schemas.openxmlformats.org/officeDocument/2006/math">
+                    <m:oMathParaPr>
+                      <m:jc m:val="centerGroup"/>
+                    </m:oMathParaPr>
+                    <m:oMath xmlns:m="http://schemas.openxmlformats.org/officeDocument/2006/math">
+                      <m:sSub>
+                        <m:sSubPr>
+                          <m:ctrlPr>
+                            <a:rPr lang="en-US" altLang="zh-CN" i="1" smtClean="0">
+                              <a:solidFill>
+                                <a:srgbClr val="FF0000"/>
+                              </a:solidFill>
+                              <a:latin typeface="Cambria Math" panose="02040503050406030204" pitchFamily="18" charset="0"/>
+                            </a:rPr>
+                          </m:ctrlPr>
+                        </m:sSubPr>
+                        <m:e>
+                          <m:r>
+                            <a:rPr lang="en-US" altLang="zh-CN" b="0" i="1" smtClean="0">
+                              <a:solidFill>
+                                <a:srgbClr val="FF0000"/>
+                              </a:solidFill>
+                              <a:latin typeface="Cambria Math" panose="02040503050406030204" pitchFamily="18" charset="0"/>
+                            </a:rPr>
+                            <m:t>𝐶𝑆</m:t>
+                          </m:r>
+                        </m:e>
+                        <m:sub>
+                          <m:r>
+                            <a:rPr lang="en-US" altLang="zh-CN" b="0" i="1" smtClean="0">
+                              <a:solidFill>
+                                <a:srgbClr val="FF0000"/>
+                              </a:solidFill>
+                              <a:latin typeface="Cambria Math" panose="02040503050406030204" pitchFamily="18" charset="0"/>
+                            </a:rPr>
+                            <m:t>𝑘𝑖</m:t>
+                          </m:r>
+                        </m:sub>
+                      </m:sSub>
+                    </m:oMath>
+                  </m:oMathPara>
+                </a14:m>
+                <a:endParaRPr lang="zh-CN" altLang="en-US" dirty="0"/>
+              </a:p>
+            </p:txBody>
+          </p:sp>
+        </mc:Choice>
+        <mc:Fallback>
+          <p:sp>
+            <p:nvSpPr>
+              <p:cNvPr id="121" name="文本框 120">
+                <a:extLst>
+                  <a:ext uri="{FF2B5EF4-FFF2-40B4-BE49-F238E27FC236}">
+                    <a16:creationId xmlns:a16="http://schemas.microsoft.com/office/drawing/2014/main" id="{7CEBC56D-C209-D731-45F2-D3AFF3CB7E41}"/>
+                  </a:ext>
+                </a:extLst>
+              </p:cNvPr>
+              <p:cNvSpPr txBox="1">
+                <a:spLocks noRot="1" noChangeAspect="1" noMove="1" noResize="1" noEditPoints="1" noAdjustHandles="1" noChangeArrowheads="1" noChangeShapeType="1" noTextEdit="1"/>
+              </p:cNvSpPr>
+              <p:nvPr/>
+            </p:nvSpPr>
+            <p:spPr>
+              <a:xfrm>
+                <a:off x="1884991" y="2566467"/>
+                <a:ext cx="489300" cy="276999"/>
+              </a:xfrm>
+              <a:prstGeom prst="rect">
+                <a:avLst/>
+              </a:prstGeom>
+              <a:blipFill>
+                <a:blip r:embed="rId18"/>
+                <a:stretch>
+                  <a:fillRect l="-10000" r="-5000" b="-20000"/>
+                </a:stretch>
+              </a:blipFill>
+            </p:spPr>
+            <p:txBody>
+              <a:bodyPr/>
+              <a:lstStyle/>
+              <a:p>
+                <a:r>
+                  <a:rPr lang="zh-CN" altLang="en-US">
+                    <a:noFill/>
+                  </a:rPr>
+                  <a:t> </a:t>
+                </a:r>
+              </a:p>
+            </p:txBody>
+          </p:sp>
+        </mc:Fallback>
+      </mc:AlternateContent>
+      <p:cxnSp>
+        <p:nvCxnSpPr>
+          <p:cNvPr id="123" name="连接符: 曲线 122">
+            <a:extLst>
+              <a:ext uri="{FF2B5EF4-FFF2-40B4-BE49-F238E27FC236}">
+                <a16:creationId xmlns:a16="http://schemas.microsoft.com/office/drawing/2014/main" id="{5DB4C358-F863-C9CC-A879-EF7F66FD8B8E}"/>
+              </a:ext>
+            </a:extLst>
+          </p:cNvPr>
+          <p:cNvCxnSpPr>
+            <a:cxnSpLocks/>
+            <a:stCxn id="47" idx="3"/>
+            <a:endCxn id="49" idx="3"/>
+          </p:cNvCxnSpPr>
+          <p:nvPr/>
+        </p:nvCxnSpPr>
+        <p:spPr>
+          <a:xfrm rot="10800000" flipV="1">
+            <a:off x="2496068" y="4077730"/>
+            <a:ext cx="12700" cy="1297460"/>
+          </a:xfrm>
+          <a:prstGeom prst="curvedConnector3">
+            <a:avLst>
+              <a:gd name="adj1" fmla="val 1800000"/>
+            </a:avLst>
+          </a:prstGeom>
+          <a:ln>
+            <a:solidFill>
+              <a:srgbClr val="FF0000"/>
+            </a:solidFill>
+          </a:ln>
+        </p:spPr>
+        <p:style>
+          <a:lnRef idx="2">
+            <a:schemeClr val="accent1"/>
+          </a:lnRef>
+          <a:fillRef idx="0">
+            <a:schemeClr val="accent1"/>
+          </a:fillRef>
+          <a:effectRef idx="1">
+            <a:schemeClr val="accent1"/>
+          </a:effectRef>
+          <a:fontRef idx="minor">
+            <a:schemeClr val="tx1"/>
+          </a:fontRef>
+        </p:style>
+      </p:cxnSp>
+      <mc:AlternateContent xmlns:mc="http://schemas.openxmlformats.org/markup-compatibility/2006">
+        <mc:Choice xmlns:a14="http://schemas.microsoft.com/office/drawing/2010/main" Requires="a14">
+          <p:sp>
+            <p:nvSpPr>
+              <p:cNvPr id="127" name="文本框 126">
+                <a:extLst>
+                  <a:ext uri="{FF2B5EF4-FFF2-40B4-BE49-F238E27FC236}">
+                    <a16:creationId xmlns:a16="http://schemas.microsoft.com/office/drawing/2014/main" id="{D494BEBE-78CE-6D23-D93D-225AB14E95C8}"/>
+                  </a:ext>
+                </a:extLst>
+              </p:cNvPr>
+              <p:cNvSpPr txBox="1"/>
+              <p:nvPr/>
+            </p:nvSpPr>
+            <p:spPr>
+              <a:xfrm>
+                <a:off x="1734724" y="4912837"/>
+                <a:ext cx="554767" cy="276999"/>
+              </a:xfrm>
+              <a:prstGeom prst="rect">
+                <a:avLst/>
+              </a:prstGeom>
+              <a:noFill/>
+            </p:spPr>
+            <p:txBody>
+              <a:bodyPr wrap="none" lIns="0" tIns="0" rIns="0" bIns="0" rtlCol="0">
+                <a:spAutoFit/>
+              </a:bodyPr>
+              <a:lstStyle/>
+              <a:p>
+                <a14:m>
+                  <m:oMathPara xmlns:m="http://schemas.openxmlformats.org/officeDocument/2006/math">
+                    <m:oMathParaPr>
+                      <m:jc m:val="centerGroup"/>
+                    </m:oMathParaPr>
+                    <m:oMath xmlns:m="http://schemas.openxmlformats.org/officeDocument/2006/math">
+                      <m:sSub>
+                        <m:sSubPr>
+                          <m:ctrlPr>
+                            <a:rPr lang="en-US" altLang="zh-CN" i="1" smtClean="0">
+                              <a:solidFill>
+                                <a:srgbClr val="FF0000"/>
+                              </a:solidFill>
+                              <a:latin typeface="Cambria Math" panose="02040503050406030204" pitchFamily="18" charset="0"/>
+                            </a:rPr>
+                          </m:ctrlPr>
+                        </m:sSubPr>
+                        <m:e>
+                          <m:r>
+                            <a:rPr lang="en-US" altLang="zh-CN" b="0" i="1" smtClean="0">
+                              <a:solidFill>
+                                <a:srgbClr val="FF0000"/>
+                              </a:solidFill>
+                              <a:latin typeface="Cambria Math" panose="02040503050406030204" pitchFamily="18" charset="0"/>
+                            </a:rPr>
+                            <m:t>𝐶𝑆</m:t>
+                          </m:r>
+                        </m:e>
+                        <m:sub>
+                          <m:r>
+                            <a:rPr lang="en-US" altLang="zh-CN" b="0" i="1" smtClean="0">
+                              <a:solidFill>
+                                <a:srgbClr val="FF0000"/>
+                              </a:solidFill>
+                              <a:latin typeface="Cambria Math" panose="02040503050406030204" pitchFamily="18" charset="0"/>
+                            </a:rPr>
+                            <m:t>𝑘𝑁</m:t>
+                          </m:r>
+                        </m:sub>
+                      </m:sSub>
+                    </m:oMath>
+                  </m:oMathPara>
+                </a14:m>
+                <a:endParaRPr lang="zh-CN" altLang="en-US" dirty="0"/>
+              </a:p>
+            </p:txBody>
+          </p:sp>
+        </mc:Choice>
+        <mc:Fallback>
+          <p:sp>
+            <p:nvSpPr>
+              <p:cNvPr id="127" name="文本框 126">
+                <a:extLst>
+                  <a:ext uri="{FF2B5EF4-FFF2-40B4-BE49-F238E27FC236}">
+                    <a16:creationId xmlns:a16="http://schemas.microsoft.com/office/drawing/2014/main" id="{D494BEBE-78CE-6D23-D93D-225AB14E95C8}"/>
+                  </a:ext>
+                </a:extLst>
+              </p:cNvPr>
+              <p:cNvSpPr txBox="1">
+                <a:spLocks noRot="1" noChangeAspect="1" noMove="1" noResize="1" noEditPoints="1" noAdjustHandles="1" noChangeArrowheads="1" noChangeShapeType="1" noTextEdit="1"/>
+              </p:cNvSpPr>
+              <p:nvPr/>
+            </p:nvSpPr>
+            <p:spPr>
+              <a:xfrm>
+                <a:off x="1734724" y="4912837"/>
+                <a:ext cx="554767" cy="276999"/>
+              </a:xfrm>
+              <a:prstGeom prst="rect">
+                <a:avLst/>
+              </a:prstGeom>
+              <a:blipFill>
+                <a:blip r:embed="rId19"/>
+                <a:stretch>
+                  <a:fillRect l="-9890" r="-3297" b="-17778"/>
+                </a:stretch>
+              </a:blipFill>
+            </p:spPr>
+            <p:txBody>
+              <a:bodyPr/>
+              <a:lstStyle/>
+              <a:p>
+                <a:r>
+                  <a:rPr lang="zh-CN" altLang="en-US">
+                    <a:noFill/>
+                  </a:rPr>
+                  <a:t> </a:t>
+                </a:r>
+              </a:p>
+            </p:txBody>
+          </p:sp>
+        </mc:Fallback>
+      </mc:AlternateContent>
+      <p:cxnSp>
+        <p:nvCxnSpPr>
+          <p:cNvPr id="130" name="连接符: 曲线 129">
+            <a:extLst>
+              <a:ext uri="{FF2B5EF4-FFF2-40B4-BE49-F238E27FC236}">
+                <a16:creationId xmlns:a16="http://schemas.microsoft.com/office/drawing/2014/main" id="{65442EEC-07A8-8984-E16B-D07E63F79D50}"/>
+              </a:ext>
+            </a:extLst>
+          </p:cNvPr>
+          <p:cNvCxnSpPr>
+            <a:cxnSpLocks/>
+            <a:stCxn id="50" idx="3"/>
+            <a:endCxn id="52" idx="3"/>
+          </p:cNvCxnSpPr>
+          <p:nvPr/>
+        </p:nvCxnSpPr>
+        <p:spPr>
+          <a:xfrm>
+            <a:off x="8884512" y="1247642"/>
+            <a:ext cx="12700" cy="1433774"/>
+          </a:xfrm>
+          <a:prstGeom prst="curvedConnector3">
+            <a:avLst>
+              <a:gd name="adj1" fmla="val 1800000"/>
+            </a:avLst>
+          </a:prstGeom>
+        </p:spPr>
+        <p:style>
+          <a:lnRef idx="2">
+            <a:schemeClr val="accent1"/>
+          </a:lnRef>
+          <a:fillRef idx="0">
+            <a:schemeClr val="accent1"/>
+          </a:fillRef>
+          <a:effectRef idx="1">
+            <a:schemeClr val="accent1"/>
+          </a:effectRef>
+          <a:fontRef idx="minor">
+            <a:schemeClr val="tx1"/>
+          </a:fontRef>
+        </p:style>
+      </p:cxnSp>
+      <mc:AlternateContent xmlns:mc="http://schemas.openxmlformats.org/markup-compatibility/2006">
+        <mc:Choice xmlns:a14="http://schemas.microsoft.com/office/drawing/2010/main" Requires="a14">
+          <p:sp>
+            <p:nvSpPr>
+              <p:cNvPr id="131" name="文本框 130">
+                <a:extLst>
+                  <a:ext uri="{FF2B5EF4-FFF2-40B4-BE49-F238E27FC236}">
+                    <a16:creationId xmlns:a16="http://schemas.microsoft.com/office/drawing/2014/main" id="{9A6F11BD-59E3-5BB1-3FCD-9809FB5D355D}"/>
+                  </a:ext>
+                </a:extLst>
+              </p:cNvPr>
+              <p:cNvSpPr txBox="1"/>
+              <p:nvPr/>
+            </p:nvSpPr>
+            <p:spPr>
+              <a:xfrm>
+                <a:off x="9045037" y="1093365"/>
+                <a:ext cx="482248" cy="299313"/>
+              </a:xfrm>
+              <a:prstGeom prst="rect">
+                <a:avLst/>
+              </a:prstGeom>
+              <a:noFill/>
+            </p:spPr>
+            <p:txBody>
+              <a:bodyPr wrap="none" lIns="0" tIns="0" rIns="0" bIns="0" rtlCol="0">
+                <a:spAutoFit/>
+              </a:bodyPr>
+              <a:lstStyle/>
+              <a:p>
+                <a14:m>
+                  <m:oMathPara xmlns:m="http://schemas.openxmlformats.org/officeDocument/2006/math">
+                    <m:oMathParaPr>
+                      <m:jc m:val="centerGroup"/>
+                    </m:oMathParaPr>
+                    <m:oMath xmlns:m="http://schemas.openxmlformats.org/officeDocument/2006/math">
+                      <m:sSub>
+                        <m:sSubPr>
+                          <m:ctrlPr>
+                            <a:rPr lang="en-US" altLang="zh-CN" i="1" smtClean="0">
+                              <a:solidFill>
+                                <a:schemeClr val="accent1">
+                                  <a:lumMod val="75000"/>
+                                </a:schemeClr>
+                              </a:solidFill>
+                              <a:latin typeface="Cambria Math" panose="02040503050406030204" pitchFamily="18" charset="0"/>
+                            </a:rPr>
+                          </m:ctrlPr>
+                        </m:sSubPr>
+                        <m:e>
+                          <m:r>
+                            <a:rPr lang="en-US" altLang="zh-CN" b="0" i="1" smtClean="0">
+                              <a:solidFill>
+                                <a:schemeClr val="accent1">
+                                  <a:lumMod val="75000"/>
+                                </a:schemeClr>
+                              </a:solidFill>
+                              <a:latin typeface="Cambria Math" panose="02040503050406030204" pitchFamily="18" charset="0"/>
+                            </a:rPr>
+                            <m:t>𝑃𝑆</m:t>
+                          </m:r>
+                        </m:e>
+                        <m:sub>
+                          <m:r>
+                            <a:rPr lang="en-US" altLang="zh-CN" b="0" i="1" smtClean="0">
+                              <a:solidFill>
+                                <a:schemeClr val="accent1">
+                                  <a:lumMod val="75000"/>
+                                </a:schemeClr>
+                              </a:solidFill>
+                              <a:latin typeface="Cambria Math" panose="02040503050406030204" pitchFamily="18" charset="0"/>
+                            </a:rPr>
+                            <m:t>𝑗</m:t>
+                          </m:r>
+                          <m:r>
+                            <a:rPr lang="en-US" altLang="zh-CN" b="0" i="1" smtClean="0">
+                              <a:solidFill>
+                                <a:schemeClr val="accent1">
+                                  <a:lumMod val="75000"/>
+                                </a:schemeClr>
+                              </a:solidFill>
+                              <a:latin typeface="Cambria Math" panose="02040503050406030204" pitchFamily="18" charset="0"/>
+                            </a:rPr>
+                            <m:t>1</m:t>
+                          </m:r>
+                        </m:sub>
+                      </m:sSub>
+                    </m:oMath>
+                  </m:oMathPara>
+                </a14:m>
+                <a:endParaRPr lang="zh-CN" altLang="en-US" dirty="0"/>
+              </a:p>
+            </p:txBody>
+          </p:sp>
+        </mc:Choice>
+        <mc:Fallback>
+          <p:sp>
+            <p:nvSpPr>
+              <p:cNvPr id="131" name="文本框 130">
+                <a:extLst>
+                  <a:ext uri="{FF2B5EF4-FFF2-40B4-BE49-F238E27FC236}">
+                    <a16:creationId xmlns:a16="http://schemas.microsoft.com/office/drawing/2014/main" id="{9A6F11BD-59E3-5BB1-3FCD-9809FB5D355D}"/>
+                  </a:ext>
+                </a:extLst>
+              </p:cNvPr>
+              <p:cNvSpPr txBox="1">
+                <a:spLocks noRot="1" noChangeAspect="1" noMove="1" noResize="1" noEditPoints="1" noAdjustHandles="1" noChangeArrowheads="1" noChangeShapeType="1" noTextEdit="1"/>
+              </p:cNvSpPr>
+              <p:nvPr/>
+            </p:nvSpPr>
+            <p:spPr>
+              <a:xfrm>
+                <a:off x="9045037" y="1093365"/>
+                <a:ext cx="482248" cy="299313"/>
+              </a:xfrm>
+              <a:prstGeom prst="rect">
+                <a:avLst/>
+              </a:prstGeom>
+              <a:blipFill>
+                <a:blip r:embed="rId20"/>
+                <a:stretch>
+                  <a:fillRect l="-11392" r="-8861" b="-26531"/>
+                </a:stretch>
+              </a:blipFill>
+            </p:spPr>
+            <p:txBody>
+              <a:bodyPr/>
+              <a:lstStyle/>
+              <a:p>
+                <a:r>
+                  <a:rPr lang="zh-CN" altLang="en-US">
+                    <a:noFill/>
+                  </a:rPr>
+                  <a:t> </a:t>
+                </a:r>
+              </a:p>
+            </p:txBody>
+          </p:sp>
+        </mc:Fallback>
+      </mc:AlternateContent>
+      <p:cxnSp>
+        <p:nvCxnSpPr>
+          <p:cNvPr id="132" name="连接符: 曲线 131">
+            <a:extLst>
+              <a:ext uri="{FF2B5EF4-FFF2-40B4-BE49-F238E27FC236}">
+                <a16:creationId xmlns:a16="http://schemas.microsoft.com/office/drawing/2014/main" id="{515F39F6-7197-5A88-C9DF-08258D11BB8A}"/>
+              </a:ext>
+            </a:extLst>
+          </p:cNvPr>
+          <p:cNvCxnSpPr>
+            <a:cxnSpLocks/>
+            <a:stCxn id="52" idx="3"/>
+            <a:endCxn id="54" idx="3"/>
+          </p:cNvCxnSpPr>
+          <p:nvPr/>
+        </p:nvCxnSpPr>
+        <p:spPr>
+          <a:xfrm flipH="1">
+            <a:off x="8884511" y="2681416"/>
+            <a:ext cx="1" cy="1396313"/>
+          </a:xfrm>
+          <a:prstGeom prst="curvedConnector3">
+            <a:avLst>
+              <a:gd name="adj1" fmla="val -22860000000"/>
+            </a:avLst>
+          </a:prstGeom>
+        </p:spPr>
+        <p:style>
+          <a:lnRef idx="2">
+            <a:schemeClr val="accent1"/>
+          </a:lnRef>
+          <a:fillRef idx="0">
+            <a:schemeClr val="accent1"/>
+          </a:fillRef>
+          <a:effectRef idx="1">
+            <a:schemeClr val="accent1"/>
+          </a:effectRef>
+          <a:fontRef idx="minor">
+            <a:schemeClr val="tx1"/>
+          </a:fontRef>
+        </p:style>
+      </p:cxnSp>
+      <mc:AlternateContent xmlns:mc="http://schemas.openxmlformats.org/markup-compatibility/2006">
+        <mc:Choice xmlns:a14="http://schemas.microsoft.com/office/drawing/2010/main" Requires="a14">
+          <p:sp>
+            <p:nvSpPr>
+              <p:cNvPr id="135" name="文本框 134">
+                <a:extLst>
+                  <a:ext uri="{FF2B5EF4-FFF2-40B4-BE49-F238E27FC236}">
+                    <a16:creationId xmlns:a16="http://schemas.microsoft.com/office/drawing/2014/main" id="{8CA3114A-B457-BCB6-02DC-AE91E6FE1DD7}"/>
+                  </a:ext>
+                </a:extLst>
+              </p:cNvPr>
+              <p:cNvSpPr txBox="1"/>
+              <p:nvPr/>
+            </p:nvSpPr>
+            <p:spPr>
+              <a:xfrm>
+                <a:off x="9100751" y="3643866"/>
+                <a:ext cx="449547" cy="299313"/>
+              </a:xfrm>
+              <a:prstGeom prst="rect">
+                <a:avLst/>
+              </a:prstGeom>
+              <a:noFill/>
+            </p:spPr>
+            <p:txBody>
+              <a:bodyPr wrap="none" lIns="0" tIns="0" rIns="0" bIns="0" rtlCol="0">
+                <a:spAutoFit/>
+              </a:bodyPr>
+              <a:lstStyle/>
+              <a:p>
+                <a14:m>
+                  <m:oMathPara xmlns:m="http://schemas.openxmlformats.org/officeDocument/2006/math">
+                    <m:oMathParaPr>
+                      <m:jc m:val="centerGroup"/>
+                    </m:oMathParaPr>
+                    <m:oMath xmlns:m="http://schemas.openxmlformats.org/officeDocument/2006/math">
+                      <m:sSub>
+                        <m:sSubPr>
+                          <m:ctrlPr>
+                            <a:rPr lang="en-US" altLang="zh-CN" i="1" smtClean="0">
+                              <a:solidFill>
+                                <a:schemeClr val="accent1">
+                                  <a:lumMod val="75000"/>
+                                </a:schemeClr>
+                              </a:solidFill>
+                              <a:latin typeface="Cambria Math" panose="02040503050406030204" pitchFamily="18" charset="0"/>
+                            </a:rPr>
+                          </m:ctrlPr>
+                        </m:sSubPr>
+                        <m:e>
+                          <m:r>
+                            <a:rPr lang="en-US" altLang="zh-CN" b="0" i="1" smtClean="0">
+                              <a:solidFill>
+                                <a:schemeClr val="accent1">
+                                  <a:lumMod val="75000"/>
+                                </a:schemeClr>
+                              </a:solidFill>
+                              <a:latin typeface="Cambria Math" panose="02040503050406030204" pitchFamily="18" charset="0"/>
+                            </a:rPr>
+                            <m:t>𝑃𝑆</m:t>
+                          </m:r>
+                        </m:e>
+                        <m:sub>
+                          <m:r>
+                            <a:rPr lang="en-US" altLang="zh-CN" b="0" i="1" smtClean="0">
+                              <a:solidFill>
+                                <a:schemeClr val="accent1">
+                                  <a:lumMod val="75000"/>
+                                </a:schemeClr>
+                              </a:solidFill>
+                              <a:latin typeface="Cambria Math" panose="02040503050406030204" pitchFamily="18" charset="0"/>
+                            </a:rPr>
+                            <m:t>𝑗𝑙</m:t>
+                          </m:r>
+                        </m:sub>
+                      </m:sSub>
+                    </m:oMath>
+                  </m:oMathPara>
+                </a14:m>
+                <a:endParaRPr lang="zh-CN" altLang="en-US" dirty="0"/>
+              </a:p>
+            </p:txBody>
+          </p:sp>
+        </mc:Choice>
+        <mc:Fallback>
+          <p:sp>
+            <p:nvSpPr>
+              <p:cNvPr id="135" name="文本框 134">
+                <a:extLst>
+                  <a:ext uri="{FF2B5EF4-FFF2-40B4-BE49-F238E27FC236}">
+                    <a16:creationId xmlns:a16="http://schemas.microsoft.com/office/drawing/2014/main" id="{8CA3114A-B457-BCB6-02DC-AE91E6FE1DD7}"/>
+                  </a:ext>
+                </a:extLst>
+              </p:cNvPr>
+              <p:cNvSpPr txBox="1">
+                <a:spLocks noRot="1" noChangeAspect="1" noMove="1" noResize="1" noEditPoints="1" noAdjustHandles="1" noChangeArrowheads="1" noChangeShapeType="1" noTextEdit="1"/>
+              </p:cNvSpPr>
+              <p:nvPr/>
+            </p:nvSpPr>
+            <p:spPr>
+              <a:xfrm>
+                <a:off x="9100751" y="3643866"/>
+                <a:ext cx="449547" cy="299313"/>
+              </a:xfrm>
+              <a:prstGeom prst="rect">
+                <a:avLst/>
+              </a:prstGeom>
+              <a:blipFill>
+                <a:blip r:embed="rId21"/>
+                <a:stretch>
+                  <a:fillRect l="-12162" r="-8108" b="-26531"/>
+                </a:stretch>
+              </a:blipFill>
+            </p:spPr>
+            <p:txBody>
+              <a:bodyPr/>
+              <a:lstStyle/>
+              <a:p>
+                <a:r>
+                  <a:rPr lang="zh-CN" altLang="en-US">
+                    <a:noFill/>
+                  </a:rPr>
+                  <a:t> </a:t>
+                </a:r>
+              </a:p>
+            </p:txBody>
+          </p:sp>
+        </mc:Fallback>
+      </mc:AlternateContent>
+      <p:grpSp>
+        <p:nvGrpSpPr>
+          <p:cNvPr id="162" name="组合 161">
+            <a:extLst>
+              <a:ext uri="{FF2B5EF4-FFF2-40B4-BE49-F238E27FC236}">
+                <a16:creationId xmlns:a16="http://schemas.microsoft.com/office/drawing/2014/main" id="{5EF99E53-AC3F-E99C-B5DF-48AB86C1594F}"/>
+              </a:ext>
+            </a:extLst>
+          </p:cNvPr>
+          <p:cNvGrpSpPr/>
+          <p:nvPr/>
+        </p:nvGrpSpPr>
+        <p:grpSpPr>
+          <a:xfrm>
+            <a:off x="8884512" y="2681416"/>
+            <a:ext cx="988538" cy="2693772"/>
+            <a:chOff x="8884512" y="2681416"/>
+            <a:chExt cx="988538" cy="2693772"/>
+          </a:xfrm>
+        </p:grpSpPr>
+        <p:cxnSp>
+          <p:nvCxnSpPr>
+            <p:cNvPr id="136" name="连接符: 曲线 135">
+              <a:extLst>
+                <a:ext uri="{FF2B5EF4-FFF2-40B4-BE49-F238E27FC236}">
+                  <a16:creationId xmlns:a16="http://schemas.microsoft.com/office/drawing/2014/main" id="{FAD7286B-E3BF-6B29-3D9A-F874E13DD7A2}"/>
+                </a:ext>
+              </a:extLst>
+            </p:cNvPr>
+            <p:cNvCxnSpPr>
+              <a:cxnSpLocks/>
+              <a:endCxn id="55" idx="3"/>
+            </p:cNvCxnSpPr>
+            <p:nvPr/>
+          </p:nvCxnSpPr>
+          <p:spPr>
+            <a:xfrm rot="5400000">
+              <a:off x="8781295" y="4283434"/>
+              <a:ext cx="1194971" cy="988538"/>
+            </a:xfrm>
+            <a:prstGeom prst="curvedConnector2">
+              <a:avLst/>
+            </a:prstGeom>
+          </p:spPr>
+          <p:style>
+            <a:lnRef idx="2">
+              <a:schemeClr val="accent1"/>
+            </a:lnRef>
+            <a:fillRef idx="0">
+              <a:schemeClr val="accent1"/>
+            </a:fillRef>
+            <a:effectRef idx="1">
+              <a:schemeClr val="accent1"/>
+            </a:effectRef>
+            <a:fontRef idx="minor">
+              <a:schemeClr val="tx1"/>
+            </a:fontRef>
+          </p:style>
+        </p:cxnSp>
+        <p:cxnSp>
+          <p:nvCxnSpPr>
+            <p:cNvPr id="150" name="连接符: 曲线 149">
+              <a:extLst>
+                <a:ext uri="{FF2B5EF4-FFF2-40B4-BE49-F238E27FC236}">
+                  <a16:creationId xmlns:a16="http://schemas.microsoft.com/office/drawing/2014/main" id="{24ECE132-87DA-9F4C-A3B9-C8A7DEE8362F}"/>
+                </a:ext>
+              </a:extLst>
+            </p:cNvPr>
+            <p:cNvCxnSpPr>
+              <a:cxnSpLocks/>
+              <a:stCxn id="52" idx="3"/>
+            </p:cNvCxnSpPr>
+            <p:nvPr/>
+          </p:nvCxnSpPr>
+          <p:spPr>
+            <a:xfrm>
+              <a:off x="8884512" y="2681416"/>
+              <a:ext cx="988538" cy="1543465"/>
+            </a:xfrm>
+            <a:prstGeom prst="curvedConnector2">
+              <a:avLst/>
+            </a:prstGeom>
+          </p:spPr>
+          <p:style>
+            <a:lnRef idx="2">
+              <a:schemeClr val="accent1"/>
+            </a:lnRef>
+            <a:fillRef idx="0">
+              <a:schemeClr val="accent1"/>
+            </a:fillRef>
+            <a:effectRef idx="1">
+              <a:schemeClr val="accent1"/>
+            </a:effectRef>
+            <a:fontRef idx="minor">
+              <a:schemeClr val="tx1"/>
+            </a:fontRef>
+          </p:style>
+        </p:cxnSp>
+      </p:grpSp>
+      <mc:AlternateContent xmlns:mc="http://schemas.openxmlformats.org/markup-compatibility/2006">
+        <mc:Choice xmlns:a14="http://schemas.microsoft.com/office/drawing/2010/main" Requires="a14">
+          <p:sp>
+            <p:nvSpPr>
+              <p:cNvPr id="161" name="文本框 160">
+                <a:extLst>
+                  <a:ext uri="{FF2B5EF4-FFF2-40B4-BE49-F238E27FC236}">
+                    <a16:creationId xmlns:a16="http://schemas.microsoft.com/office/drawing/2014/main" id="{1F8DA320-37D2-AAAB-03CE-6A26ED08038A}"/>
+                  </a:ext>
+                </a:extLst>
+              </p:cNvPr>
+              <p:cNvSpPr txBox="1"/>
+              <p:nvPr/>
+            </p:nvSpPr>
+            <p:spPr>
+              <a:xfrm>
+                <a:off x="9561781" y="5037674"/>
+                <a:ext cx="536044" cy="299313"/>
+              </a:xfrm>
+              <a:prstGeom prst="rect">
+                <a:avLst/>
+              </a:prstGeom>
+              <a:noFill/>
+            </p:spPr>
+            <p:txBody>
+              <a:bodyPr wrap="none" lIns="0" tIns="0" rIns="0" bIns="0" rtlCol="0">
+                <a:spAutoFit/>
+              </a:bodyPr>
+              <a:lstStyle/>
+              <a:p>
+                <a14:m>
+                  <m:oMathPara xmlns:m="http://schemas.openxmlformats.org/officeDocument/2006/math">
+                    <m:oMathParaPr>
+                      <m:jc m:val="centerGroup"/>
+                    </m:oMathParaPr>
+                    <m:oMath xmlns:m="http://schemas.openxmlformats.org/officeDocument/2006/math">
+                      <m:sSub>
+                        <m:sSubPr>
+                          <m:ctrlPr>
+                            <a:rPr lang="en-US" altLang="zh-CN" i="1" smtClean="0">
+                              <a:solidFill>
+                                <a:schemeClr val="accent1">
+                                  <a:lumMod val="75000"/>
+                                </a:schemeClr>
+                              </a:solidFill>
+                              <a:latin typeface="Cambria Math" panose="02040503050406030204" pitchFamily="18" charset="0"/>
+                            </a:rPr>
+                          </m:ctrlPr>
+                        </m:sSubPr>
+                        <m:e>
+                          <m:r>
+                            <a:rPr lang="en-US" altLang="zh-CN" b="0" i="1" smtClean="0">
+                              <a:solidFill>
+                                <a:schemeClr val="accent1">
+                                  <a:lumMod val="75000"/>
+                                </a:schemeClr>
+                              </a:solidFill>
+                              <a:latin typeface="Cambria Math" panose="02040503050406030204" pitchFamily="18" charset="0"/>
+                            </a:rPr>
+                            <m:t>𝑃𝑆</m:t>
+                          </m:r>
+                        </m:e>
+                        <m:sub>
+                          <m:r>
+                            <a:rPr lang="en-US" altLang="zh-CN" b="0" i="1" smtClean="0">
+                              <a:solidFill>
+                                <a:schemeClr val="accent1">
+                                  <a:lumMod val="75000"/>
+                                </a:schemeClr>
+                              </a:solidFill>
+                              <a:latin typeface="Cambria Math" panose="02040503050406030204" pitchFamily="18" charset="0"/>
+                            </a:rPr>
+                            <m:t>𝑗𝑀</m:t>
+                          </m:r>
+                        </m:sub>
+                      </m:sSub>
+                    </m:oMath>
+                  </m:oMathPara>
+                </a14:m>
+                <a:endParaRPr lang="zh-CN" altLang="en-US" dirty="0"/>
+              </a:p>
+            </p:txBody>
+          </p:sp>
+        </mc:Choice>
+        <mc:Fallback>
+          <p:sp>
+            <p:nvSpPr>
+              <p:cNvPr id="161" name="文本框 160">
+                <a:extLst>
+                  <a:ext uri="{FF2B5EF4-FFF2-40B4-BE49-F238E27FC236}">
+                    <a16:creationId xmlns:a16="http://schemas.microsoft.com/office/drawing/2014/main" id="{1F8DA320-37D2-AAAB-03CE-6A26ED08038A}"/>
+                  </a:ext>
+                </a:extLst>
+              </p:cNvPr>
+              <p:cNvSpPr txBox="1">
+                <a:spLocks noRot="1" noChangeAspect="1" noMove="1" noResize="1" noEditPoints="1" noAdjustHandles="1" noChangeArrowheads="1" noChangeShapeType="1" noTextEdit="1"/>
+              </p:cNvSpPr>
+              <p:nvPr/>
+            </p:nvSpPr>
+            <p:spPr>
+              <a:xfrm>
+                <a:off x="9561781" y="5037674"/>
+                <a:ext cx="536044" cy="299313"/>
+              </a:xfrm>
+              <a:prstGeom prst="rect">
+                <a:avLst/>
+              </a:prstGeom>
+              <a:blipFill>
+                <a:blip r:embed="rId22"/>
+                <a:stretch>
+                  <a:fillRect l="-10345" r="-8046" b="-26531"/>
+                </a:stretch>
+              </a:blipFill>
+            </p:spPr>
+            <p:txBody>
+              <a:bodyPr/>
+              <a:lstStyle/>
+              <a:p>
+                <a:r>
+                  <a:rPr lang="zh-CN" altLang="en-US">
+                    <a:noFill/>
+                  </a:rPr>
+                  <a:t> </a:t>
+                </a:r>
+              </a:p>
+            </p:txBody>
+          </p:sp>
+        </mc:Fallback>
+      </mc:AlternateContent>
+      <p:cxnSp>
+        <p:nvCxnSpPr>
+          <p:cNvPr id="163" name="直接连接符 162">
+            <a:extLst>
+              <a:ext uri="{FF2B5EF4-FFF2-40B4-BE49-F238E27FC236}">
+                <a16:creationId xmlns:a16="http://schemas.microsoft.com/office/drawing/2014/main" id="{9468FD6C-E0BD-F21E-EBA2-0159BE681E60}"/>
+              </a:ext>
+            </a:extLst>
+          </p:cNvPr>
+          <p:cNvCxnSpPr>
+            <a:cxnSpLocks/>
+            <a:stCxn id="47" idx="0"/>
+            <a:endCxn id="52" idx="1"/>
+          </p:cNvCxnSpPr>
+          <p:nvPr/>
+        </p:nvCxnSpPr>
+        <p:spPr>
+          <a:xfrm flipV="1">
+            <a:off x="3361041" y="2681416"/>
+            <a:ext cx="4658498" cy="1396314"/>
+          </a:xfrm>
+          <a:prstGeom prst="line">
+            <a:avLst/>
+          </a:prstGeom>
+          <a:ln>
+            <a:solidFill>
+              <a:schemeClr val="tx1"/>
+            </a:solidFill>
+            <a:prstDash val="dash"/>
+          </a:ln>
+        </p:spPr>
+        <p:style>
+          <a:lnRef idx="2">
+            <a:schemeClr val="accent1"/>
+          </a:lnRef>
+          <a:fillRef idx="0">
+            <a:schemeClr val="accent1"/>
+          </a:fillRef>
+          <a:effectRef idx="1">
+            <a:schemeClr val="accent1"/>
+          </a:effectRef>
+          <a:fontRef idx="minor">
+            <a:schemeClr val="tx1"/>
+          </a:fontRef>
+        </p:style>
+      </p:cxnSp>
+      <mc:AlternateContent xmlns:mc="http://schemas.openxmlformats.org/markup-compatibility/2006">
+        <mc:Choice xmlns:a14="http://schemas.microsoft.com/office/drawing/2010/main" Requires="a14">
+          <p:sp>
+            <p:nvSpPr>
+              <p:cNvPr id="166" name="文本框 165">
+                <a:extLst>
+                  <a:ext uri="{FF2B5EF4-FFF2-40B4-BE49-F238E27FC236}">
+                    <a16:creationId xmlns:a16="http://schemas.microsoft.com/office/drawing/2014/main" id="{1A4410A9-1F95-C773-BB1C-31BE9900B181}"/>
+                  </a:ext>
+                </a:extLst>
+              </p:cNvPr>
+              <p:cNvSpPr txBox="1"/>
+              <p:nvPr/>
+            </p:nvSpPr>
+            <p:spPr>
+              <a:xfrm>
+                <a:off x="6306805" y="2627695"/>
+                <a:ext cx="840423" cy="391646"/>
+              </a:xfrm>
+              <a:prstGeom prst="rect">
+                <a:avLst/>
+              </a:prstGeom>
+              <a:noFill/>
+            </p:spPr>
+            <p:txBody>
+              <a:bodyPr wrap="none" rtlCol="0">
+                <a:spAutoFit/>
+              </a:bodyPr>
+              <a:lstStyle/>
+              <a:p>
+                <a14:m>
+                  <m:oMathPara xmlns:m="http://schemas.openxmlformats.org/officeDocument/2006/math">
+                    <m:oMathParaPr>
+                      <m:jc m:val="centerGroup"/>
+                    </m:oMathParaPr>
+                    <m:oMath xmlns:m="http://schemas.openxmlformats.org/officeDocument/2006/math">
+                      <m:sSub>
+                        <m:sSubPr>
+                          <m:ctrlPr>
+                            <a:rPr lang="en-US" altLang="zh-CN" i="1" smtClean="0">
+                              <a:solidFill>
+                                <a:schemeClr val="tx1"/>
+                              </a:solidFill>
+                              <a:latin typeface="Cambria Math" panose="02040503050406030204" pitchFamily="18" charset="0"/>
+                            </a:rPr>
+                          </m:ctrlPr>
+                        </m:sSubPr>
+                        <m:e>
+                          <m:r>
+                            <a:rPr lang="en-US" altLang="zh-CN" b="0" i="1" smtClean="0">
+                              <a:solidFill>
+                                <a:schemeClr val="tx1"/>
+                              </a:solidFill>
+                              <a:latin typeface="Cambria Math" panose="02040503050406030204" pitchFamily="18" charset="0"/>
+                            </a:rPr>
+                            <m:t>𝑆𝐶𝑃</m:t>
+                          </m:r>
+                        </m:e>
+                        <m:sub>
+                          <m:r>
+                            <a:rPr lang="en-US" altLang="zh-CN" b="0" i="1" smtClean="0">
+                              <a:solidFill>
+                                <a:schemeClr val="tx1"/>
+                              </a:solidFill>
+                              <a:latin typeface="Cambria Math" panose="02040503050406030204" pitchFamily="18" charset="0"/>
+                            </a:rPr>
+                            <m:t>𝐾𝑗</m:t>
+                          </m:r>
+                        </m:sub>
+                      </m:sSub>
+                    </m:oMath>
+                  </m:oMathPara>
+                </a14:m>
+                <a:endParaRPr lang="zh-CN" altLang="en-US" dirty="0"/>
+              </a:p>
+            </p:txBody>
+          </p:sp>
+        </mc:Choice>
+        <mc:Fallback>
+          <p:sp>
+            <p:nvSpPr>
+              <p:cNvPr id="166" name="文本框 165">
+                <a:extLst>
+                  <a:ext uri="{FF2B5EF4-FFF2-40B4-BE49-F238E27FC236}">
+                    <a16:creationId xmlns:a16="http://schemas.microsoft.com/office/drawing/2014/main" id="{1A4410A9-1F95-C773-BB1C-31BE9900B181}"/>
+                  </a:ext>
+                </a:extLst>
+              </p:cNvPr>
+              <p:cNvSpPr txBox="1">
+                <a:spLocks noRot="1" noChangeAspect="1" noMove="1" noResize="1" noEditPoints="1" noAdjustHandles="1" noChangeArrowheads="1" noChangeShapeType="1" noTextEdit="1"/>
+              </p:cNvSpPr>
+              <p:nvPr/>
+            </p:nvSpPr>
+            <p:spPr>
+              <a:xfrm>
+                <a:off x="6306805" y="2627695"/>
+                <a:ext cx="840423" cy="391646"/>
+              </a:xfrm>
+              <a:prstGeom prst="rect">
+                <a:avLst/>
+              </a:prstGeom>
+              <a:blipFill>
+                <a:blip r:embed="rId23"/>
+                <a:stretch>
+                  <a:fillRect b="-9375"/>
+                </a:stretch>
+              </a:blipFill>
+            </p:spPr>
+            <p:txBody>
+              <a:bodyPr/>
+              <a:lstStyle/>
+              <a:p>
+                <a:r>
+                  <a:rPr lang="zh-CN" altLang="en-US">
+                    <a:noFill/>
+                  </a:rPr>
+                  <a:t> </a:t>
+                </a:r>
+              </a:p>
+            </p:txBody>
+          </p:sp>
+        </mc:Fallback>
+      </mc:AlternateContent>
+      <mc:AlternateContent xmlns:mc="http://schemas.openxmlformats.org/markup-compatibility/2006">
+        <mc:Choice xmlns:a14="http://schemas.microsoft.com/office/drawing/2010/main" Requires="a14">
+          <p:sp>
+            <p:nvSpPr>
+              <p:cNvPr id="167" name="文本框 166">
+                <a:extLst>
+                  <a:ext uri="{FF2B5EF4-FFF2-40B4-BE49-F238E27FC236}">
+                    <a16:creationId xmlns:a16="http://schemas.microsoft.com/office/drawing/2014/main" id="{70371114-19FD-DC1E-541B-E7A9A72842AA}"/>
+                  </a:ext>
+                </a:extLst>
+              </p:cNvPr>
+              <p:cNvSpPr txBox="1"/>
+              <p:nvPr/>
+            </p:nvSpPr>
+            <p:spPr>
+              <a:xfrm>
+                <a:off x="4124858" y="3716459"/>
+                <a:ext cx="830484" cy="391646"/>
+              </a:xfrm>
+              <a:prstGeom prst="rect">
+                <a:avLst/>
+              </a:prstGeom>
+              <a:noFill/>
+            </p:spPr>
+            <p:txBody>
+              <a:bodyPr wrap="none" rtlCol="0">
+                <a:spAutoFit/>
+              </a:bodyPr>
+              <a:lstStyle/>
+              <a:p>
+                <a14:m>
+                  <m:oMathPara xmlns:m="http://schemas.openxmlformats.org/officeDocument/2006/math">
+                    <m:oMathParaPr>
+                      <m:jc m:val="centerGroup"/>
+                    </m:oMathParaPr>
+                    <m:oMath xmlns:m="http://schemas.openxmlformats.org/officeDocument/2006/math">
+                      <m:sSub>
+                        <m:sSubPr>
+                          <m:ctrlPr>
+                            <a:rPr lang="en-US" altLang="zh-CN" i="1" smtClean="0">
+                              <a:solidFill>
+                                <a:schemeClr val="tx1"/>
+                              </a:solidFill>
+                              <a:latin typeface="Cambria Math" panose="02040503050406030204" pitchFamily="18" charset="0"/>
+                            </a:rPr>
+                          </m:ctrlPr>
+                        </m:sSubPr>
+                        <m:e>
+                          <m:r>
+                            <a:rPr lang="en-US" altLang="zh-CN" b="0" i="1" smtClean="0">
+                              <a:solidFill>
+                                <a:schemeClr val="tx1"/>
+                              </a:solidFill>
+                              <a:latin typeface="Cambria Math" panose="02040503050406030204" pitchFamily="18" charset="0"/>
+                            </a:rPr>
+                            <m:t>𝑆𝑃𝐶</m:t>
+                          </m:r>
+                        </m:e>
+                        <m:sub>
+                          <m:r>
+                            <a:rPr lang="en-US" altLang="zh-CN" b="0" i="1" smtClean="0">
+                              <a:solidFill>
+                                <a:schemeClr val="tx1"/>
+                              </a:solidFill>
+                              <a:latin typeface="Cambria Math" panose="02040503050406030204" pitchFamily="18" charset="0"/>
+                            </a:rPr>
+                            <m:t>𝑗𝐾</m:t>
+                          </m:r>
+                        </m:sub>
+                      </m:sSub>
+                    </m:oMath>
+                  </m:oMathPara>
+                </a14:m>
+                <a:endParaRPr lang="zh-CN" altLang="en-US" dirty="0"/>
+              </a:p>
+            </p:txBody>
+          </p:sp>
+        </mc:Choice>
+        <mc:Fallback>
+          <p:sp>
+            <p:nvSpPr>
+              <p:cNvPr id="167" name="文本框 166">
+                <a:extLst>
+                  <a:ext uri="{FF2B5EF4-FFF2-40B4-BE49-F238E27FC236}">
+                    <a16:creationId xmlns:a16="http://schemas.microsoft.com/office/drawing/2014/main" id="{70371114-19FD-DC1E-541B-E7A9A72842AA}"/>
+                  </a:ext>
+                </a:extLst>
+              </p:cNvPr>
+              <p:cNvSpPr txBox="1">
+                <a:spLocks noRot="1" noChangeAspect="1" noMove="1" noResize="1" noEditPoints="1" noAdjustHandles="1" noChangeArrowheads="1" noChangeShapeType="1" noTextEdit="1"/>
+              </p:cNvSpPr>
+              <p:nvPr/>
+            </p:nvSpPr>
+            <p:spPr>
+              <a:xfrm>
+                <a:off x="4124858" y="3716459"/>
+                <a:ext cx="830484" cy="391646"/>
+              </a:xfrm>
+              <a:prstGeom prst="rect">
+                <a:avLst/>
+              </a:prstGeom>
+              <a:blipFill>
+                <a:blip r:embed="rId24"/>
+                <a:stretch>
+                  <a:fillRect b="-7813"/>
+                </a:stretch>
+              </a:blipFill>
+            </p:spPr>
+            <p:txBody>
+              <a:bodyPr/>
+              <a:lstStyle/>
+              <a:p>
+                <a:r>
+                  <a:rPr lang="zh-CN" altLang="en-US">
+                    <a:noFill/>
+                  </a:rPr>
+                  <a:t> </a:t>
+                </a:r>
+              </a:p>
+            </p:txBody>
+          </p:sp>
+        </mc:Fallback>
+      </mc:AlternateContent>
+      <mc:AlternateContent xmlns:mc="http://schemas.openxmlformats.org/markup-compatibility/2006">
+        <mc:Choice xmlns:a14="http://schemas.microsoft.com/office/drawing/2010/main" Requires="a14">
+          <p:sp>
+            <p:nvSpPr>
+              <p:cNvPr id="168" name="文本框 167">
+                <a:extLst>
+                  <a:ext uri="{FF2B5EF4-FFF2-40B4-BE49-F238E27FC236}">
+                    <a16:creationId xmlns:a16="http://schemas.microsoft.com/office/drawing/2014/main" id="{5D180190-827C-E6A2-0AE5-EE3135DE4D88}"/>
+                  </a:ext>
+                </a:extLst>
+              </p:cNvPr>
+              <p:cNvSpPr txBox="1"/>
+              <p:nvPr/>
+            </p:nvSpPr>
+            <p:spPr>
+              <a:xfrm>
+                <a:off x="2768895" y="1838532"/>
+                <a:ext cx="319318" cy="369332"/>
+              </a:xfrm>
+              <a:prstGeom prst="rect">
+                <a:avLst/>
+              </a:prstGeom>
+              <a:noFill/>
+            </p:spPr>
+            <p:txBody>
+              <a:bodyPr wrap="none" rtlCol="0">
+                <a:spAutoFit/>
+              </a:bodyPr>
+              <a:lstStyle/>
+              <a:p>
+                <a14:m>
+                  <m:oMathPara xmlns:m="http://schemas.openxmlformats.org/officeDocument/2006/math">
+                    <m:oMathParaPr>
+                      <m:jc m:val="centerGroup"/>
+                    </m:oMathParaPr>
+                    <m:oMath xmlns:m="http://schemas.openxmlformats.org/officeDocument/2006/math">
+                      <m:r>
+                        <a:rPr lang="zh-CN" altLang="en-US" i="1" smtClean="0">
+                          <a:latin typeface="Cambria Math" panose="02040503050406030204" pitchFamily="18" charset="0"/>
+                        </a:rPr>
+                        <m:t>⋮</m:t>
+                      </m:r>
+                    </m:oMath>
+                  </m:oMathPara>
+                </a14:m>
+                <a:endParaRPr lang="zh-CN" altLang="en-US" dirty="0"/>
+              </a:p>
+            </p:txBody>
+          </p:sp>
+        </mc:Choice>
+        <mc:Fallback>
+          <p:sp>
+            <p:nvSpPr>
+              <p:cNvPr id="168" name="文本框 167">
+                <a:extLst>
+                  <a:ext uri="{FF2B5EF4-FFF2-40B4-BE49-F238E27FC236}">
+                    <a16:creationId xmlns:a16="http://schemas.microsoft.com/office/drawing/2014/main" id="{5D180190-827C-E6A2-0AE5-EE3135DE4D88}"/>
+                  </a:ext>
+                </a:extLst>
+              </p:cNvPr>
+              <p:cNvSpPr txBox="1">
+                <a:spLocks noRot="1" noChangeAspect="1" noMove="1" noResize="1" noEditPoints="1" noAdjustHandles="1" noChangeArrowheads="1" noChangeShapeType="1" noTextEdit="1"/>
+              </p:cNvSpPr>
+              <p:nvPr/>
+            </p:nvSpPr>
+            <p:spPr>
+              <a:xfrm>
+                <a:off x="2768895" y="1838532"/>
+                <a:ext cx="319318" cy="369332"/>
+              </a:xfrm>
+              <a:prstGeom prst="rect">
+                <a:avLst/>
+              </a:prstGeom>
+              <a:blipFill>
+                <a:blip r:embed="rId25"/>
+                <a:stretch>
+                  <a:fillRect/>
+                </a:stretch>
+              </a:blipFill>
+            </p:spPr>
+            <p:txBody>
+              <a:bodyPr/>
+              <a:lstStyle/>
+              <a:p>
+                <a:r>
+                  <a:rPr lang="zh-CN" altLang="en-US">
+                    <a:noFill/>
+                  </a:rPr>
+                  <a:t> </a:t>
+                </a:r>
+              </a:p>
+            </p:txBody>
+          </p:sp>
+        </mc:Fallback>
+      </mc:AlternateContent>
+      <mc:AlternateContent xmlns:mc="http://schemas.openxmlformats.org/markup-compatibility/2006">
+        <mc:Choice xmlns:a14="http://schemas.microsoft.com/office/drawing/2010/main" Requires="a14">
+          <p:sp>
+            <p:nvSpPr>
+              <p:cNvPr id="169" name="文本框 168">
+                <a:extLst>
+                  <a:ext uri="{FF2B5EF4-FFF2-40B4-BE49-F238E27FC236}">
+                    <a16:creationId xmlns:a16="http://schemas.microsoft.com/office/drawing/2014/main" id="{147F07A8-E779-0855-9FD6-865F32D6523E}"/>
+                  </a:ext>
+                </a:extLst>
+              </p:cNvPr>
+              <p:cNvSpPr txBox="1"/>
+              <p:nvPr/>
+            </p:nvSpPr>
+            <p:spPr>
+              <a:xfrm>
+                <a:off x="2760463" y="3194907"/>
+                <a:ext cx="319318" cy="369332"/>
+              </a:xfrm>
+              <a:prstGeom prst="rect">
+                <a:avLst/>
+              </a:prstGeom>
+              <a:noFill/>
+            </p:spPr>
+            <p:txBody>
+              <a:bodyPr wrap="none" rtlCol="0">
+                <a:spAutoFit/>
+              </a:bodyPr>
+              <a:lstStyle/>
+              <a:p>
+                <a14:m>
+                  <m:oMathPara xmlns:m="http://schemas.openxmlformats.org/officeDocument/2006/math">
+                    <m:oMathParaPr>
+                      <m:jc m:val="centerGroup"/>
+                    </m:oMathParaPr>
+                    <m:oMath xmlns:m="http://schemas.openxmlformats.org/officeDocument/2006/math">
+                      <m:r>
+                        <a:rPr lang="zh-CN" altLang="en-US" i="1" smtClean="0">
+                          <a:latin typeface="Cambria Math" panose="02040503050406030204" pitchFamily="18" charset="0"/>
+                        </a:rPr>
+                        <m:t>⋮</m:t>
+                      </m:r>
+                    </m:oMath>
+                  </m:oMathPara>
+                </a14:m>
+                <a:endParaRPr lang="zh-CN" altLang="en-US" dirty="0"/>
+              </a:p>
+            </p:txBody>
+          </p:sp>
+        </mc:Choice>
+        <mc:Fallback>
+          <p:sp>
+            <p:nvSpPr>
+              <p:cNvPr id="169" name="文本框 168">
+                <a:extLst>
+                  <a:ext uri="{FF2B5EF4-FFF2-40B4-BE49-F238E27FC236}">
+                    <a16:creationId xmlns:a16="http://schemas.microsoft.com/office/drawing/2014/main" id="{147F07A8-E779-0855-9FD6-865F32D6523E}"/>
+                  </a:ext>
+                </a:extLst>
+              </p:cNvPr>
+              <p:cNvSpPr txBox="1">
+                <a:spLocks noRot="1" noChangeAspect="1" noMove="1" noResize="1" noEditPoints="1" noAdjustHandles="1" noChangeArrowheads="1" noChangeShapeType="1" noTextEdit="1"/>
+              </p:cNvSpPr>
+              <p:nvPr/>
+            </p:nvSpPr>
+            <p:spPr>
+              <a:xfrm>
+                <a:off x="2760463" y="3194907"/>
+                <a:ext cx="319318" cy="369332"/>
+              </a:xfrm>
+              <a:prstGeom prst="rect">
+                <a:avLst/>
+              </a:prstGeom>
+              <a:blipFill>
+                <a:blip r:embed="rId26"/>
+                <a:stretch>
+                  <a:fillRect/>
+                </a:stretch>
+              </a:blipFill>
+            </p:spPr>
+            <p:txBody>
+              <a:bodyPr/>
+              <a:lstStyle/>
+              <a:p>
+                <a:r>
+                  <a:rPr lang="zh-CN" altLang="en-US">
+                    <a:noFill/>
+                  </a:rPr>
+                  <a:t> </a:t>
+                </a:r>
+              </a:p>
+            </p:txBody>
+          </p:sp>
+        </mc:Fallback>
+      </mc:AlternateContent>
+      <mc:AlternateContent xmlns:mc="http://schemas.openxmlformats.org/markup-compatibility/2006">
+        <mc:Choice xmlns:a14="http://schemas.microsoft.com/office/drawing/2010/main" Requires="a14">
+          <p:sp>
+            <p:nvSpPr>
+              <p:cNvPr id="170" name="文本框 169">
+                <a:extLst>
+                  <a:ext uri="{FF2B5EF4-FFF2-40B4-BE49-F238E27FC236}">
+                    <a16:creationId xmlns:a16="http://schemas.microsoft.com/office/drawing/2014/main" id="{1B9ABEA2-6F8F-5F15-3FA9-DB65B5E0BA5C}"/>
+                  </a:ext>
+                </a:extLst>
+              </p:cNvPr>
+              <p:cNvSpPr txBox="1"/>
+              <p:nvPr/>
+            </p:nvSpPr>
+            <p:spPr>
+              <a:xfrm>
+                <a:off x="2775245" y="4541793"/>
+                <a:ext cx="319318" cy="369332"/>
+              </a:xfrm>
+              <a:prstGeom prst="rect">
+                <a:avLst/>
+              </a:prstGeom>
+              <a:noFill/>
+            </p:spPr>
+            <p:txBody>
+              <a:bodyPr wrap="none" rtlCol="0">
+                <a:spAutoFit/>
+              </a:bodyPr>
+              <a:lstStyle/>
+              <a:p>
+                <a14:m>
+                  <m:oMathPara xmlns:m="http://schemas.openxmlformats.org/officeDocument/2006/math">
+                    <m:oMathParaPr>
+                      <m:jc m:val="centerGroup"/>
+                    </m:oMathParaPr>
+                    <m:oMath xmlns:m="http://schemas.openxmlformats.org/officeDocument/2006/math">
+                      <m:r>
+                        <a:rPr lang="zh-CN" altLang="en-US" i="1" smtClean="0">
+                          <a:latin typeface="Cambria Math" panose="02040503050406030204" pitchFamily="18" charset="0"/>
+                        </a:rPr>
+                        <m:t>⋮</m:t>
+                      </m:r>
+                    </m:oMath>
+                  </m:oMathPara>
+                </a14:m>
+                <a:endParaRPr lang="zh-CN" altLang="en-US" dirty="0"/>
+              </a:p>
+            </p:txBody>
+          </p:sp>
+        </mc:Choice>
+        <mc:Fallback>
+          <p:sp>
+            <p:nvSpPr>
+              <p:cNvPr id="170" name="文本框 169">
+                <a:extLst>
+                  <a:ext uri="{FF2B5EF4-FFF2-40B4-BE49-F238E27FC236}">
+                    <a16:creationId xmlns:a16="http://schemas.microsoft.com/office/drawing/2014/main" id="{1B9ABEA2-6F8F-5F15-3FA9-DB65B5E0BA5C}"/>
+                  </a:ext>
+                </a:extLst>
+              </p:cNvPr>
+              <p:cNvSpPr txBox="1">
+                <a:spLocks noRot="1" noChangeAspect="1" noMove="1" noResize="1" noEditPoints="1" noAdjustHandles="1" noChangeArrowheads="1" noChangeShapeType="1" noTextEdit="1"/>
+              </p:cNvSpPr>
+              <p:nvPr/>
+            </p:nvSpPr>
+            <p:spPr>
+              <a:xfrm>
+                <a:off x="2775245" y="4541793"/>
+                <a:ext cx="319318" cy="369332"/>
+              </a:xfrm>
+              <a:prstGeom prst="rect">
+                <a:avLst/>
+              </a:prstGeom>
+              <a:blipFill>
+                <a:blip r:embed="rId27"/>
+                <a:stretch>
+                  <a:fillRect/>
+                </a:stretch>
+              </a:blipFill>
+            </p:spPr>
+            <p:txBody>
+              <a:bodyPr/>
+              <a:lstStyle/>
+              <a:p>
+                <a:r>
+                  <a:rPr lang="zh-CN" altLang="en-US">
+                    <a:noFill/>
+                  </a:rPr>
+                  <a:t> </a:t>
+                </a:r>
+              </a:p>
+            </p:txBody>
+          </p:sp>
+        </mc:Fallback>
+      </mc:AlternateContent>
+      <mc:AlternateContent xmlns:mc="http://schemas.openxmlformats.org/markup-compatibility/2006">
+        <mc:Choice xmlns:a14="http://schemas.microsoft.com/office/drawing/2010/main" Requires="a14">
+          <p:sp>
+            <p:nvSpPr>
+              <p:cNvPr id="171" name="文本框 170">
+                <a:extLst>
+                  <a:ext uri="{FF2B5EF4-FFF2-40B4-BE49-F238E27FC236}">
+                    <a16:creationId xmlns:a16="http://schemas.microsoft.com/office/drawing/2014/main" id="{793E4655-CF41-30C4-DE0E-2400D40FB244}"/>
+                  </a:ext>
+                </a:extLst>
+              </p:cNvPr>
+              <p:cNvSpPr txBox="1"/>
+              <p:nvPr/>
+            </p:nvSpPr>
+            <p:spPr>
+              <a:xfrm>
+                <a:off x="8300799" y="4541793"/>
+                <a:ext cx="319318" cy="369332"/>
+              </a:xfrm>
+              <a:prstGeom prst="rect">
+                <a:avLst/>
+              </a:prstGeom>
+              <a:noFill/>
+            </p:spPr>
+            <p:txBody>
+              <a:bodyPr wrap="none" rtlCol="0">
+                <a:spAutoFit/>
+              </a:bodyPr>
+              <a:lstStyle/>
+              <a:p>
+                <a14:m>
+                  <m:oMathPara xmlns:m="http://schemas.openxmlformats.org/officeDocument/2006/math">
+                    <m:oMathParaPr>
+                      <m:jc m:val="centerGroup"/>
+                    </m:oMathParaPr>
+                    <m:oMath xmlns:m="http://schemas.openxmlformats.org/officeDocument/2006/math">
+                      <m:r>
+                        <a:rPr lang="zh-CN" altLang="en-US" i="1" smtClean="0">
+                          <a:latin typeface="Cambria Math" panose="02040503050406030204" pitchFamily="18" charset="0"/>
+                        </a:rPr>
+                        <m:t>⋮</m:t>
+                      </m:r>
+                    </m:oMath>
+                  </m:oMathPara>
+                </a14:m>
+                <a:endParaRPr lang="zh-CN" altLang="en-US" dirty="0"/>
+              </a:p>
+            </p:txBody>
+          </p:sp>
+        </mc:Choice>
+        <mc:Fallback>
+          <p:sp>
+            <p:nvSpPr>
+              <p:cNvPr id="171" name="文本框 170">
+                <a:extLst>
+                  <a:ext uri="{FF2B5EF4-FFF2-40B4-BE49-F238E27FC236}">
+                    <a16:creationId xmlns:a16="http://schemas.microsoft.com/office/drawing/2014/main" id="{793E4655-CF41-30C4-DE0E-2400D40FB244}"/>
+                  </a:ext>
+                </a:extLst>
+              </p:cNvPr>
+              <p:cNvSpPr txBox="1">
+                <a:spLocks noRot="1" noChangeAspect="1" noMove="1" noResize="1" noEditPoints="1" noAdjustHandles="1" noChangeArrowheads="1" noChangeShapeType="1" noTextEdit="1"/>
+              </p:cNvSpPr>
+              <p:nvPr/>
+            </p:nvSpPr>
+            <p:spPr>
+              <a:xfrm>
+                <a:off x="8300799" y="4541793"/>
+                <a:ext cx="319318" cy="369332"/>
+              </a:xfrm>
+              <a:prstGeom prst="rect">
+                <a:avLst/>
+              </a:prstGeom>
+              <a:blipFill>
+                <a:blip r:embed="rId28"/>
+                <a:stretch>
+                  <a:fillRect/>
+                </a:stretch>
+              </a:blipFill>
+            </p:spPr>
+            <p:txBody>
+              <a:bodyPr/>
+              <a:lstStyle/>
+              <a:p>
+                <a:r>
+                  <a:rPr lang="zh-CN" altLang="en-US">
+                    <a:noFill/>
+                  </a:rPr>
+                  <a:t> </a:t>
+                </a:r>
+              </a:p>
+            </p:txBody>
+          </p:sp>
+        </mc:Fallback>
+      </mc:AlternateContent>
+      <mc:AlternateContent xmlns:mc="http://schemas.openxmlformats.org/markup-compatibility/2006">
+        <mc:Choice xmlns:a14="http://schemas.microsoft.com/office/drawing/2010/main" Requires="a14">
+          <p:sp>
+            <p:nvSpPr>
+              <p:cNvPr id="172" name="文本框 171">
+                <a:extLst>
+                  <a:ext uri="{FF2B5EF4-FFF2-40B4-BE49-F238E27FC236}">
+                    <a16:creationId xmlns:a16="http://schemas.microsoft.com/office/drawing/2014/main" id="{AEF3F3AC-883F-E13A-B8AE-F02F1BAD3538}"/>
+                  </a:ext>
+                </a:extLst>
+              </p:cNvPr>
+              <p:cNvSpPr txBox="1"/>
+              <p:nvPr/>
+            </p:nvSpPr>
+            <p:spPr>
+              <a:xfrm>
+                <a:off x="8286017" y="3152684"/>
+                <a:ext cx="319318" cy="369332"/>
+              </a:xfrm>
+              <a:prstGeom prst="rect">
+                <a:avLst/>
+              </a:prstGeom>
+              <a:noFill/>
+            </p:spPr>
+            <p:txBody>
+              <a:bodyPr wrap="none" rtlCol="0">
+                <a:spAutoFit/>
+              </a:bodyPr>
+              <a:lstStyle/>
+              <a:p>
+                <a14:m>
+                  <m:oMathPara xmlns:m="http://schemas.openxmlformats.org/officeDocument/2006/math">
+                    <m:oMathParaPr>
+                      <m:jc m:val="centerGroup"/>
+                    </m:oMathParaPr>
+                    <m:oMath xmlns:m="http://schemas.openxmlformats.org/officeDocument/2006/math">
+                      <m:r>
+                        <a:rPr lang="zh-CN" altLang="en-US" i="1" smtClean="0">
+                          <a:latin typeface="Cambria Math" panose="02040503050406030204" pitchFamily="18" charset="0"/>
+                        </a:rPr>
+                        <m:t>⋮</m:t>
+                      </m:r>
+                    </m:oMath>
+                  </m:oMathPara>
+                </a14:m>
+                <a:endParaRPr lang="zh-CN" altLang="en-US" dirty="0"/>
+              </a:p>
+            </p:txBody>
+          </p:sp>
+        </mc:Choice>
+        <mc:Fallback>
+          <p:sp>
+            <p:nvSpPr>
+              <p:cNvPr id="172" name="文本框 171">
+                <a:extLst>
+                  <a:ext uri="{FF2B5EF4-FFF2-40B4-BE49-F238E27FC236}">
+                    <a16:creationId xmlns:a16="http://schemas.microsoft.com/office/drawing/2014/main" id="{AEF3F3AC-883F-E13A-B8AE-F02F1BAD3538}"/>
+                  </a:ext>
+                </a:extLst>
+              </p:cNvPr>
+              <p:cNvSpPr txBox="1">
+                <a:spLocks noRot="1" noChangeAspect="1" noMove="1" noResize="1" noEditPoints="1" noAdjustHandles="1" noChangeArrowheads="1" noChangeShapeType="1" noTextEdit="1"/>
+              </p:cNvSpPr>
+              <p:nvPr/>
+            </p:nvSpPr>
+            <p:spPr>
+              <a:xfrm>
+                <a:off x="8286017" y="3152684"/>
+                <a:ext cx="319318" cy="369332"/>
+              </a:xfrm>
+              <a:prstGeom prst="rect">
+                <a:avLst/>
+              </a:prstGeom>
+              <a:blipFill>
+                <a:blip r:embed="rId29"/>
+                <a:stretch>
+                  <a:fillRect/>
+                </a:stretch>
+              </a:blipFill>
+            </p:spPr>
+            <p:txBody>
+              <a:bodyPr/>
+              <a:lstStyle/>
+              <a:p>
+                <a:r>
+                  <a:rPr lang="zh-CN" altLang="en-US">
+                    <a:noFill/>
+                  </a:rPr>
+                  <a:t> </a:t>
+                </a:r>
+              </a:p>
+            </p:txBody>
+          </p:sp>
+        </mc:Fallback>
+      </mc:AlternateContent>
+      <mc:AlternateContent xmlns:mc="http://schemas.openxmlformats.org/markup-compatibility/2006">
+        <mc:Choice xmlns:a14="http://schemas.microsoft.com/office/drawing/2010/main" Requires="a14">
+          <p:sp>
+            <p:nvSpPr>
+              <p:cNvPr id="173" name="文本框 172">
+                <a:extLst>
+                  <a:ext uri="{FF2B5EF4-FFF2-40B4-BE49-F238E27FC236}">
+                    <a16:creationId xmlns:a16="http://schemas.microsoft.com/office/drawing/2014/main" id="{A766BD53-6F36-2F8D-5188-36511DF80909}"/>
+                  </a:ext>
+                </a:extLst>
+              </p:cNvPr>
+              <p:cNvSpPr txBox="1"/>
+              <p:nvPr/>
+            </p:nvSpPr>
+            <p:spPr>
+              <a:xfrm>
+                <a:off x="8286017" y="1779863"/>
+                <a:ext cx="319318" cy="369332"/>
+              </a:xfrm>
+              <a:prstGeom prst="rect">
+                <a:avLst/>
+              </a:prstGeom>
+              <a:noFill/>
+            </p:spPr>
+            <p:txBody>
+              <a:bodyPr wrap="none" rtlCol="0">
+                <a:spAutoFit/>
+              </a:bodyPr>
+              <a:lstStyle/>
+              <a:p>
+                <a14:m>
+                  <m:oMathPara xmlns:m="http://schemas.openxmlformats.org/officeDocument/2006/math">
+                    <m:oMathParaPr>
+                      <m:jc m:val="centerGroup"/>
+                    </m:oMathParaPr>
+                    <m:oMath xmlns:m="http://schemas.openxmlformats.org/officeDocument/2006/math">
+                      <m:r>
+                        <a:rPr lang="zh-CN" altLang="en-US" i="1" smtClean="0">
+                          <a:latin typeface="Cambria Math" panose="02040503050406030204" pitchFamily="18" charset="0"/>
+                        </a:rPr>
+                        <m:t>⋮</m:t>
+                      </m:r>
+                    </m:oMath>
+                  </m:oMathPara>
+                </a14:m>
+                <a:endParaRPr lang="zh-CN" altLang="en-US" dirty="0"/>
+              </a:p>
+            </p:txBody>
+          </p:sp>
+        </mc:Choice>
+        <mc:Fallback>
+          <p:sp>
+            <p:nvSpPr>
+              <p:cNvPr id="173" name="文本框 172">
+                <a:extLst>
+                  <a:ext uri="{FF2B5EF4-FFF2-40B4-BE49-F238E27FC236}">
+                    <a16:creationId xmlns:a16="http://schemas.microsoft.com/office/drawing/2014/main" id="{A766BD53-6F36-2F8D-5188-36511DF80909}"/>
+                  </a:ext>
+                </a:extLst>
+              </p:cNvPr>
+              <p:cNvSpPr txBox="1">
+                <a:spLocks noRot="1" noChangeAspect="1" noMove="1" noResize="1" noEditPoints="1" noAdjustHandles="1" noChangeArrowheads="1" noChangeShapeType="1" noTextEdit="1"/>
+              </p:cNvSpPr>
+              <p:nvPr/>
+            </p:nvSpPr>
+            <p:spPr>
+              <a:xfrm>
+                <a:off x="8286017" y="1779863"/>
+                <a:ext cx="319318" cy="369332"/>
+              </a:xfrm>
+              <a:prstGeom prst="rect">
+                <a:avLst/>
+              </a:prstGeom>
+              <a:blipFill>
+                <a:blip r:embed="rId30"/>
+                <a:stretch>
+                  <a:fillRect/>
+                </a:stretch>
+              </a:blipFill>
+            </p:spPr>
+            <p:txBody>
+              <a:bodyPr/>
+              <a:lstStyle/>
+              <a:p>
+                <a:r>
+                  <a:rPr lang="zh-CN" altLang="en-US">
+                    <a:noFill/>
+                  </a:rPr>
+                  <a:t> </a:t>
+                </a:r>
+              </a:p>
+            </p:txBody>
+          </p:sp>
+        </mc:Fallback>
+      </mc:AlternateContent>
+      <mc:AlternateContent xmlns:mc="http://schemas.openxmlformats.org/markup-compatibility/2006">
+        <mc:Choice xmlns:a14="http://schemas.microsoft.com/office/drawing/2010/main" Requires="a14">
+          <p:sp>
+            <p:nvSpPr>
+              <p:cNvPr id="174" name="文本框 173">
+                <a:extLst>
+                  <a:ext uri="{FF2B5EF4-FFF2-40B4-BE49-F238E27FC236}">
+                    <a16:creationId xmlns:a16="http://schemas.microsoft.com/office/drawing/2014/main" id="{937E6AB8-2A6D-A7AF-4D1D-07D49A3728FA}"/>
+                  </a:ext>
+                </a:extLst>
+              </p:cNvPr>
+              <p:cNvSpPr txBox="1"/>
+              <p:nvPr/>
+            </p:nvSpPr>
+            <p:spPr>
+              <a:xfrm>
+                <a:off x="4355704" y="5763201"/>
+                <a:ext cx="3163558" cy="391646"/>
+              </a:xfrm>
+              <a:prstGeom prst="rect">
+                <a:avLst/>
+              </a:prstGeom>
+              <a:noFill/>
+            </p:spPr>
+            <p:txBody>
+              <a:bodyPr wrap="none" rtlCol="0">
+                <a:spAutoFit/>
+              </a:bodyPr>
+              <a:lstStyle/>
+              <a:p>
+                <a14:m>
+                  <m:oMathPara xmlns:m="http://schemas.openxmlformats.org/officeDocument/2006/math">
+                    <m:oMathParaPr>
+                      <m:jc m:val="centerGroup"/>
+                    </m:oMathParaPr>
+                    <m:oMath xmlns:m="http://schemas.openxmlformats.org/officeDocument/2006/math">
+                      <m:sSub>
+                        <m:sSubPr>
+                          <m:ctrlPr>
+                            <a:rPr lang="en-US" altLang="zh-CN" i="1" smtClean="0">
+                              <a:solidFill>
+                                <a:schemeClr val="tx1"/>
+                              </a:solidFill>
+                              <a:latin typeface="Cambria Math" panose="02040503050406030204" pitchFamily="18" charset="0"/>
+                            </a:rPr>
+                          </m:ctrlPr>
+                        </m:sSubPr>
+                        <m:e>
+                          <m:r>
+                            <a:rPr lang="en-US" altLang="zh-CN" b="0" i="1" smtClean="0">
+                              <a:solidFill>
+                                <a:schemeClr val="tx1"/>
+                              </a:solidFill>
+                              <a:latin typeface="Cambria Math" panose="02040503050406030204" pitchFamily="18" charset="0"/>
+                            </a:rPr>
+                            <m:t>𝑑</m:t>
+                          </m:r>
+                        </m:e>
+                        <m:sub>
+                          <m:r>
+                            <a:rPr lang="en-US" altLang="zh-CN" b="0" i="1" smtClean="0">
+                              <a:solidFill>
+                                <a:schemeClr val="tx1"/>
+                              </a:solidFill>
+                              <a:latin typeface="Cambria Math" panose="02040503050406030204" pitchFamily="18" charset="0"/>
+                            </a:rPr>
+                            <m:t>𝑘𝑗</m:t>
+                          </m:r>
+                        </m:sub>
+                      </m:sSub>
+                      <m:r>
+                        <a:rPr lang="en-US" altLang="zh-CN" b="0" i="1" smtClean="0">
+                          <a:solidFill>
+                            <a:schemeClr val="tx1"/>
+                          </a:solidFill>
+                          <a:latin typeface="Cambria Math" panose="02040503050406030204" pitchFamily="18" charset="0"/>
+                        </a:rPr>
+                        <m:t>=</m:t>
+                      </m:r>
+                      <m:r>
+                        <m:rPr>
+                          <m:sty m:val="p"/>
+                        </m:rPr>
+                        <a:rPr lang="en-US" altLang="zh-CN" b="0" i="0" smtClean="0">
+                          <a:solidFill>
+                            <a:schemeClr val="tx1"/>
+                          </a:solidFill>
+                          <a:latin typeface="Cambria Math" panose="02040503050406030204" pitchFamily="18" charset="0"/>
+                        </a:rPr>
+                        <m:t>exp</m:t>
+                      </m:r>
+                      <m:r>
+                        <a:rPr lang="en-US" altLang="zh-CN" b="0" i="0" smtClean="0">
+                          <a:solidFill>
+                            <a:schemeClr val="tx1"/>
+                          </a:solidFill>
+                          <a:latin typeface="Cambria Math" panose="02040503050406030204" pitchFamily="18" charset="0"/>
+                        </a:rPr>
+                        <m:t>[−(</m:t>
+                      </m:r>
+                      <m:sSub>
+                        <m:sSubPr>
+                          <m:ctrlPr>
+                            <a:rPr lang="en-US" altLang="zh-CN" b="0" i="1" smtClean="0">
+                              <a:solidFill>
+                                <a:schemeClr val="tx1"/>
+                              </a:solidFill>
+                              <a:latin typeface="Cambria Math" panose="02040503050406030204" pitchFamily="18" charset="0"/>
+                            </a:rPr>
+                          </m:ctrlPr>
+                        </m:sSubPr>
+                        <m:e>
+                          <m:r>
+                            <a:rPr lang="en-US" altLang="zh-CN" b="0" i="1" smtClean="0">
+                              <a:solidFill>
+                                <a:schemeClr val="tx1"/>
+                              </a:solidFill>
+                              <a:latin typeface="Cambria Math" panose="02040503050406030204" pitchFamily="18" charset="0"/>
+                            </a:rPr>
+                            <m:t>𝑆𝑃𝐶</m:t>
+                          </m:r>
+                        </m:e>
+                        <m:sub>
+                          <m:r>
+                            <a:rPr lang="en-US" altLang="zh-CN" b="0" i="1" smtClean="0">
+                              <a:solidFill>
+                                <a:schemeClr val="tx1"/>
+                              </a:solidFill>
+                              <a:latin typeface="Cambria Math" panose="02040503050406030204" pitchFamily="18" charset="0"/>
+                            </a:rPr>
+                            <m:t>𝑗𝑘</m:t>
+                          </m:r>
+                        </m:sub>
+                      </m:sSub>
+                      <m:r>
+                        <a:rPr lang="en-US" altLang="zh-CN" b="0" i="1" smtClean="0">
+                          <a:solidFill>
+                            <a:schemeClr val="tx1"/>
+                          </a:solidFill>
+                          <a:latin typeface="Cambria Math" panose="02040503050406030204" pitchFamily="18" charset="0"/>
+                        </a:rPr>
+                        <m:t>+</m:t>
+                      </m:r>
+                      <m:sSub>
+                        <m:sSubPr>
+                          <m:ctrlPr>
+                            <a:rPr lang="en-US" altLang="zh-CN" b="0" i="1" smtClean="0">
+                              <a:solidFill>
+                                <a:schemeClr val="tx1"/>
+                              </a:solidFill>
+                              <a:latin typeface="Cambria Math" panose="02040503050406030204" pitchFamily="18" charset="0"/>
+                            </a:rPr>
+                          </m:ctrlPr>
+                        </m:sSubPr>
+                        <m:e>
+                          <m:r>
+                            <a:rPr lang="en-US" altLang="zh-CN" b="0" i="1" smtClean="0">
+                              <a:solidFill>
+                                <a:schemeClr val="tx1"/>
+                              </a:solidFill>
+                              <a:latin typeface="Cambria Math" panose="02040503050406030204" pitchFamily="18" charset="0"/>
+                            </a:rPr>
+                            <m:t>𝑆𝐶𝑃</m:t>
+                          </m:r>
+                        </m:e>
+                        <m:sub>
+                          <m:r>
+                            <a:rPr lang="en-US" altLang="zh-CN" b="0" i="1" smtClean="0">
+                              <a:solidFill>
+                                <a:schemeClr val="tx1"/>
+                              </a:solidFill>
+                              <a:latin typeface="Cambria Math" panose="02040503050406030204" pitchFamily="18" charset="0"/>
+                            </a:rPr>
+                            <m:t>𝑘𝑗</m:t>
+                          </m:r>
+                        </m:sub>
+                      </m:sSub>
+                      <m:r>
+                        <a:rPr lang="en-US" altLang="zh-CN" b="0" i="0" smtClean="0">
+                          <a:solidFill>
+                            <a:schemeClr val="tx1"/>
+                          </a:solidFill>
+                          <a:latin typeface="Cambria Math" panose="02040503050406030204" pitchFamily="18" charset="0"/>
+                        </a:rPr>
+                        <m:t>)]</m:t>
+                      </m:r>
+                    </m:oMath>
+                  </m:oMathPara>
+                </a14:m>
+                <a:endParaRPr lang="zh-CN" altLang="en-US" dirty="0"/>
+              </a:p>
+            </p:txBody>
+          </p:sp>
+        </mc:Choice>
+        <mc:Fallback>
+          <p:sp>
+            <p:nvSpPr>
+              <p:cNvPr id="174" name="文本框 173">
+                <a:extLst>
+                  <a:ext uri="{FF2B5EF4-FFF2-40B4-BE49-F238E27FC236}">
+                    <a16:creationId xmlns:a16="http://schemas.microsoft.com/office/drawing/2014/main" id="{937E6AB8-2A6D-A7AF-4D1D-07D49A3728FA}"/>
+                  </a:ext>
+                </a:extLst>
+              </p:cNvPr>
+              <p:cNvSpPr txBox="1">
+                <a:spLocks noRot="1" noChangeAspect="1" noMove="1" noResize="1" noEditPoints="1" noAdjustHandles="1" noChangeArrowheads="1" noChangeShapeType="1" noTextEdit="1"/>
+              </p:cNvSpPr>
+              <p:nvPr/>
+            </p:nvSpPr>
+            <p:spPr>
+              <a:xfrm>
+                <a:off x="4355704" y="5763201"/>
+                <a:ext cx="3163558" cy="391646"/>
+              </a:xfrm>
+              <a:prstGeom prst="rect">
+                <a:avLst/>
+              </a:prstGeom>
+              <a:blipFill>
+                <a:blip r:embed="rId31"/>
+                <a:stretch>
+                  <a:fillRect b="-9231"/>
+                </a:stretch>
+              </a:blipFill>
+            </p:spPr>
+            <p:txBody>
+              <a:bodyPr/>
+              <a:lstStyle/>
+              <a:p>
+                <a:r>
+                  <a:rPr lang="zh-CN" altLang="en-US">
+                    <a:noFill/>
+                  </a:rPr>
+                  <a:t> </a:t>
+                </a:r>
+              </a:p>
+            </p:txBody>
+          </p:sp>
+        </mc:Fallback>
+      </mc:AlternateContent>
     </p:spTree>
     <p:extLst>
       <p:ext uri="{BB962C8B-B14F-4D97-AF65-F5344CB8AC3E}">
-        <p14:creationId xmlns:p14="http://schemas.microsoft.com/office/powerpoint/2010/main" val="2935897104"/>
+        <p14:creationId xmlns:p14="http://schemas.microsoft.com/office/powerpoint/2010/main" val="3163730430"/>
       </p:ext>
     </p:extLst>
   </p:cSld>
